--- a/decks/Molecular_02_Variant-Interpretation-and-Reporting.pptx
+++ b/decks/Molecular_02_Variant-Interpretation-and-Reporting.pptx
@@ -26,9 +26,13 @@
     <p:sldId id="274" r:id="rId20"/>
     <p:sldId id="275" r:id="rId21"/>
     <p:sldId id="276" r:id="rId22"/>
+    <p:sldId id="277" r:id="rId23"/>
+    <p:sldId id="278" r:id="rId24"/>
+    <p:sldId id="279" r:id="rId25"/>
+    <p:sldId id="280" r:id="rId26"/>
   </p:sldIdLst>
   <p:notesMasterIdLst>
-    <p:notesMasterId r:id="rId23"/>
+    <p:notesMasterId r:id="rId27"/>
   </p:notesMasterIdLst>
   <p:sldSz cx="12191695" cy="6858000"/>
   <p:notesSz cx="6858000" cy="12191695"/>
@@ -1690,6 +1694,358 @@
             <a:fld id="{F7021451-1387-4CA6-816F-3879F97B5CBC}" type="slidenum">
               <a:rPr lang="en-US"/>
               <a:t>21</a:t>
+            </a:fld>
+            <a:endParaRPr lang="en-US"/>
+          </a:p>
+        </p:txBody>
+      </p:sp>
+    </p:spTree>
+    <p:extLst>
+      <p:ext uri="{BB962C8B-B14F-4D97-AF65-F5344CB8AC3E}">
+        <p14:creationId xmlns:p14="http://schemas.microsoft.com/office/powerpoint/2010/main" val="1024086991"/>
+      </p:ext>
+    </p:extLst>
+  </p:cSld>
+  <p:clrMapOvr>
+    <a:masterClrMapping/>
+  </p:clrMapOvr>
+</p:notes>
+</file>
+
+<file path=ppt/notesSlides/notesSlide22.xml><?xml version="1.0" encoding="utf-8"?>
+<p:notes xmlns:a="http://schemas.openxmlformats.org/drawingml/2006/main" xmlns:r="http://schemas.openxmlformats.org/officeDocument/2006/relationships" xmlns:p="http://schemas.openxmlformats.org/presentationml/2006/main">
+  <p:cSld>
+    <p:spTree>
+      <p:nvGrpSpPr>
+        <p:cNvPr id="1" name=""/>
+        <p:cNvGrpSpPr/>
+        <p:nvPr/>
+      </p:nvGrpSpPr>
+      <p:grpSpPr>
+        <a:xfrm>
+          <a:off x="0" y="0"/>
+          <a:ext cx="0" cy="0"/>
+          <a:chOff x="0" y="0"/>
+          <a:chExt cx="0" cy="0"/>
+        </a:xfrm>
+      </p:grpSpPr>
+      <p:sp>
+        <p:nvSpPr>
+          <p:cNvPr id="2" name="Slide Image Placeholder 1"/>
+          <p:cNvSpPr>
+            <a:spLocks noGrp="1" noRot="1" noChangeAspect="1"/>
+          </p:cNvSpPr>
+          <p:nvPr>
+            <p:ph type="sldImg"/>
+          </p:nvPr>
+        </p:nvSpPr>
+        <p:spPr/>
+      </p:sp>
+      <p:sp>
+        <p:nvSpPr>
+          <p:cNvPr id="3" name="Notes Placeholder 2"/>
+          <p:cNvSpPr>
+            <a:spLocks noGrp="1"/>
+          </p:cNvSpPr>
+          <p:nvPr>
+            <p:ph type="body" idx="1"/>
+          </p:nvPr>
+        </p:nvSpPr>
+        <p:spPr/>
+        <p:txBody>
+          <a:bodyPr/>
+          <a:lstStyle/>
+          <a:p>
+            <a:r>
+              <a:rPr lang="en-US" dirty="0"/>
+              <a:t/>
+            </a:r>
+            <a:endParaRPr lang="en-US" dirty="0"/>
+          </a:p>
+        </p:txBody>
+      </p:sp>
+      <p:sp>
+        <p:nvSpPr>
+          <p:cNvPr id="4" name="Slide Number Placeholder 3"/>
+          <p:cNvSpPr>
+            <a:spLocks noGrp="1"/>
+          </p:cNvSpPr>
+          <p:nvPr>
+            <p:ph type="sldNum" sz="quarter" idx="10"/>
+          </p:nvPr>
+        </p:nvSpPr>
+        <p:spPr/>
+        <p:txBody>
+          <a:bodyPr/>
+          <a:lstStyle/>
+          <a:p>
+            <a:fld id="{F7021451-1387-4CA6-816F-3879F97B5CBC}" type="slidenum">
+              <a:rPr lang="en-US"/>
+              <a:t>22</a:t>
+            </a:fld>
+            <a:endParaRPr lang="en-US"/>
+          </a:p>
+        </p:txBody>
+      </p:sp>
+    </p:spTree>
+    <p:extLst>
+      <p:ext uri="{BB962C8B-B14F-4D97-AF65-F5344CB8AC3E}">
+        <p14:creationId xmlns:p14="http://schemas.microsoft.com/office/powerpoint/2010/main" val="1024086991"/>
+      </p:ext>
+    </p:extLst>
+  </p:cSld>
+  <p:clrMapOvr>
+    <a:masterClrMapping/>
+  </p:clrMapOvr>
+</p:notes>
+</file>
+
+<file path=ppt/notesSlides/notesSlide23.xml><?xml version="1.0" encoding="utf-8"?>
+<p:notes xmlns:a="http://schemas.openxmlformats.org/drawingml/2006/main" xmlns:r="http://schemas.openxmlformats.org/officeDocument/2006/relationships" xmlns:p="http://schemas.openxmlformats.org/presentationml/2006/main">
+  <p:cSld>
+    <p:spTree>
+      <p:nvGrpSpPr>
+        <p:cNvPr id="1" name=""/>
+        <p:cNvGrpSpPr/>
+        <p:nvPr/>
+      </p:nvGrpSpPr>
+      <p:grpSpPr>
+        <a:xfrm>
+          <a:off x="0" y="0"/>
+          <a:ext cx="0" cy="0"/>
+          <a:chOff x="0" y="0"/>
+          <a:chExt cx="0" cy="0"/>
+        </a:xfrm>
+      </p:grpSpPr>
+      <p:sp>
+        <p:nvSpPr>
+          <p:cNvPr id="2" name="Slide Image Placeholder 1"/>
+          <p:cNvSpPr>
+            <a:spLocks noGrp="1" noRot="1" noChangeAspect="1"/>
+          </p:cNvSpPr>
+          <p:nvPr>
+            <p:ph type="sldImg"/>
+          </p:nvPr>
+        </p:nvSpPr>
+        <p:spPr/>
+      </p:sp>
+      <p:sp>
+        <p:nvSpPr>
+          <p:cNvPr id="3" name="Notes Placeholder 2"/>
+          <p:cNvSpPr>
+            <a:spLocks noGrp="1"/>
+          </p:cNvSpPr>
+          <p:nvPr>
+            <p:ph type="body" idx="1"/>
+          </p:nvPr>
+        </p:nvSpPr>
+        <p:spPr/>
+        <p:txBody>
+          <a:bodyPr/>
+          <a:lstStyle/>
+          <a:p>
+            <a:r>
+              <a:rPr lang="en-US" dirty="0"/>
+              <a:t/>
+            </a:r>
+            <a:endParaRPr lang="en-US" dirty="0"/>
+          </a:p>
+        </p:txBody>
+      </p:sp>
+      <p:sp>
+        <p:nvSpPr>
+          <p:cNvPr id="4" name="Slide Number Placeholder 3"/>
+          <p:cNvSpPr>
+            <a:spLocks noGrp="1"/>
+          </p:cNvSpPr>
+          <p:nvPr>
+            <p:ph type="sldNum" sz="quarter" idx="10"/>
+          </p:nvPr>
+        </p:nvSpPr>
+        <p:spPr/>
+        <p:txBody>
+          <a:bodyPr/>
+          <a:lstStyle/>
+          <a:p>
+            <a:fld id="{F7021451-1387-4CA6-816F-3879F97B5CBC}" type="slidenum">
+              <a:rPr lang="en-US"/>
+              <a:t>23</a:t>
+            </a:fld>
+            <a:endParaRPr lang="en-US"/>
+          </a:p>
+        </p:txBody>
+      </p:sp>
+    </p:spTree>
+    <p:extLst>
+      <p:ext uri="{BB962C8B-B14F-4D97-AF65-F5344CB8AC3E}">
+        <p14:creationId xmlns:p14="http://schemas.microsoft.com/office/powerpoint/2010/main" val="1024086991"/>
+      </p:ext>
+    </p:extLst>
+  </p:cSld>
+  <p:clrMapOvr>
+    <a:masterClrMapping/>
+  </p:clrMapOvr>
+</p:notes>
+</file>
+
+<file path=ppt/notesSlides/notesSlide24.xml><?xml version="1.0" encoding="utf-8"?>
+<p:notes xmlns:a="http://schemas.openxmlformats.org/drawingml/2006/main" xmlns:r="http://schemas.openxmlformats.org/officeDocument/2006/relationships" xmlns:p="http://schemas.openxmlformats.org/presentationml/2006/main">
+  <p:cSld>
+    <p:spTree>
+      <p:nvGrpSpPr>
+        <p:cNvPr id="1" name=""/>
+        <p:cNvGrpSpPr/>
+        <p:nvPr/>
+      </p:nvGrpSpPr>
+      <p:grpSpPr>
+        <a:xfrm>
+          <a:off x="0" y="0"/>
+          <a:ext cx="0" cy="0"/>
+          <a:chOff x="0" y="0"/>
+          <a:chExt cx="0" cy="0"/>
+        </a:xfrm>
+      </p:grpSpPr>
+      <p:sp>
+        <p:nvSpPr>
+          <p:cNvPr id="2" name="Slide Image Placeholder 1"/>
+          <p:cNvSpPr>
+            <a:spLocks noGrp="1" noRot="1" noChangeAspect="1"/>
+          </p:cNvSpPr>
+          <p:nvPr>
+            <p:ph type="sldImg"/>
+          </p:nvPr>
+        </p:nvSpPr>
+        <p:spPr/>
+      </p:sp>
+      <p:sp>
+        <p:nvSpPr>
+          <p:cNvPr id="3" name="Notes Placeholder 2"/>
+          <p:cNvSpPr>
+            <a:spLocks noGrp="1"/>
+          </p:cNvSpPr>
+          <p:nvPr>
+            <p:ph type="body" idx="1"/>
+          </p:nvPr>
+        </p:nvSpPr>
+        <p:spPr/>
+        <p:txBody>
+          <a:bodyPr/>
+          <a:lstStyle/>
+          <a:p>
+            <a:r>
+              <a:rPr lang="en-US" dirty="0"/>
+              <a:t/>
+            </a:r>
+            <a:endParaRPr lang="en-US" dirty="0"/>
+          </a:p>
+        </p:txBody>
+      </p:sp>
+      <p:sp>
+        <p:nvSpPr>
+          <p:cNvPr id="4" name="Slide Number Placeholder 3"/>
+          <p:cNvSpPr>
+            <a:spLocks noGrp="1"/>
+          </p:cNvSpPr>
+          <p:nvPr>
+            <p:ph type="sldNum" sz="quarter" idx="10"/>
+          </p:nvPr>
+        </p:nvSpPr>
+        <p:spPr/>
+        <p:txBody>
+          <a:bodyPr/>
+          <a:lstStyle/>
+          <a:p>
+            <a:fld id="{F7021451-1387-4CA6-816F-3879F97B5CBC}" type="slidenum">
+              <a:rPr lang="en-US"/>
+              <a:t>24</a:t>
+            </a:fld>
+            <a:endParaRPr lang="en-US"/>
+          </a:p>
+        </p:txBody>
+      </p:sp>
+    </p:spTree>
+    <p:extLst>
+      <p:ext uri="{BB962C8B-B14F-4D97-AF65-F5344CB8AC3E}">
+        <p14:creationId xmlns:p14="http://schemas.microsoft.com/office/powerpoint/2010/main" val="1024086991"/>
+      </p:ext>
+    </p:extLst>
+  </p:cSld>
+  <p:clrMapOvr>
+    <a:masterClrMapping/>
+  </p:clrMapOvr>
+</p:notes>
+</file>
+
+<file path=ppt/notesSlides/notesSlide25.xml><?xml version="1.0" encoding="utf-8"?>
+<p:notes xmlns:a="http://schemas.openxmlformats.org/drawingml/2006/main" xmlns:r="http://schemas.openxmlformats.org/officeDocument/2006/relationships" xmlns:p="http://schemas.openxmlformats.org/presentationml/2006/main">
+  <p:cSld>
+    <p:spTree>
+      <p:nvGrpSpPr>
+        <p:cNvPr id="1" name=""/>
+        <p:cNvGrpSpPr/>
+        <p:nvPr/>
+      </p:nvGrpSpPr>
+      <p:grpSpPr>
+        <a:xfrm>
+          <a:off x="0" y="0"/>
+          <a:ext cx="0" cy="0"/>
+          <a:chOff x="0" y="0"/>
+          <a:chExt cx="0" cy="0"/>
+        </a:xfrm>
+      </p:grpSpPr>
+      <p:sp>
+        <p:nvSpPr>
+          <p:cNvPr id="2" name="Slide Image Placeholder 1"/>
+          <p:cNvSpPr>
+            <a:spLocks noGrp="1" noRot="1" noChangeAspect="1"/>
+          </p:cNvSpPr>
+          <p:nvPr>
+            <p:ph type="sldImg"/>
+          </p:nvPr>
+        </p:nvSpPr>
+        <p:spPr/>
+      </p:sp>
+      <p:sp>
+        <p:nvSpPr>
+          <p:cNvPr id="3" name="Notes Placeholder 2"/>
+          <p:cNvSpPr>
+            <a:spLocks noGrp="1"/>
+          </p:cNvSpPr>
+          <p:nvPr>
+            <p:ph type="body" idx="1"/>
+          </p:nvPr>
+        </p:nvSpPr>
+        <p:spPr/>
+        <p:txBody>
+          <a:bodyPr/>
+          <a:lstStyle/>
+          <a:p>
+            <a:r>
+              <a:rPr lang="en-US" dirty="0"/>
+              <a:t/>
+            </a:r>
+            <a:endParaRPr lang="en-US" dirty="0"/>
+          </a:p>
+        </p:txBody>
+      </p:sp>
+      <p:sp>
+        <p:nvSpPr>
+          <p:cNvPr id="4" name="Slide Number Placeholder 3"/>
+          <p:cNvSpPr>
+            <a:spLocks noGrp="1"/>
+          </p:cNvSpPr>
+          <p:nvPr>
+            <p:ph type="sldNum" sz="quarter" idx="10"/>
+          </p:nvPr>
+        </p:nvSpPr>
+        <p:spPr/>
+        <p:txBody>
+          <a:bodyPr/>
+          <a:lstStyle/>
+          <a:p>
+            <a:fld id="{F7021451-1387-4CA6-816F-3879F97B5CBC}" type="slidenum">
+              <a:rPr lang="en-US"/>
+              <a:t>25</a:t>
             </a:fld>
             <a:endParaRPr lang="en-US"/>
           </a:p>
@@ -2893,7 +3249,7 @@
                 <a:ea typeface="Calibri" pitchFamily="34" charset="-122"/>
                 <a:cs typeface="Calibri" pitchFamily="34" charset="-120"/>
               </a:rPr>
-              <a:t>Tiering, Pathogenicity, Nomenclature, and Actionable Reports</a:t>
+              <a:t>Classification Frameworks, Evidence, and the Clinical Report</a:t>
             </a:r>
             <a:endParaRPr lang="en-US" sz="1900" dirty="0"/>
           </a:p>
@@ -3085,7 +3441,7 @@
                 <a:ea typeface="Calibri" pitchFamily="34" charset="-122"/>
                 <a:cs typeface="Calibri" pitchFamily="34" charset="-120"/>
               </a:rPr>
-              <a:t>MOLECULAR &amp; CYTOGENETICS   ·   REPORTING</a:t>
+              <a:t>MOLECULAR &amp; CYTOGENETICS   ·   VAF</a:t>
             </a:r>
             <a:endParaRPr lang="en-US" sz="1100" dirty="0"/>
           </a:p>
@@ -3124,7 +3480,7 @@
                 <a:ea typeface="Calibri" pitchFamily="34" charset="-122"/>
                 <a:cs typeface="Calibri" pitchFamily="34" charset="-120"/>
               </a:rPr>
-              <a:t>Actionable Reports and the VUS</a:t>
+              <a:t>Variant Allele Fraction &amp; Zygosity</a:t>
             </a:r>
             <a:endParaRPr lang="en-US" sz="3000" dirty="0"/>
           </a:p>
@@ -3192,7 +3548,7 @@
                 <a:ea typeface="Calibri" pitchFamily="34" charset="-122"/>
                 <a:cs typeface="Calibri" pitchFamily="34" charset="-120"/>
               </a:rPr>
-              <a:t>MAKE THE REPORT USABLE</a:t>
+              <a:t>INTERPRETING VAF</a:t>
             </a:r>
             <a:endParaRPr lang="en-US" sz="1200" dirty="0"/>
           </a:p>
@@ -3235,7 +3591,7 @@
                 <a:ea typeface="Calibri" pitchFamily="34" charset="-122"/>
                 <a:cs typeface="Calibri" pitchFamily="34" charset="-120"/>
               </a:rPr>
-              <a:t>Lead with the clinically actionable result and its implication.</a:t>
+              <a:t>Germline heterozygous variants cluster near 50%; homozygous near 100%.</a:t>
             </a:r>
             <a:endParaRPr lang="en-US" sz="1250" dirty="0"/>
           </a:p>
@@ -3256,7 +3612,7 @@
                 <a:ea typeface="Calibri" pitchFamily="34" charset="-122"/>
                 <a:cs typeface="Calibri" pitchFamily="34" charset="-120"/>
               </a:rPr>
-              <a:t>Separate strongly actionable findings from uncertain ones.</a:t>
+              <a:t>Somatic VAF varies with tumor purity and clonality.</a:t>
             </a:r>
             <a:endParaRPr lang="en-US" sz="1250" dirty="0"/>
           </a:p>
@@ -3277,7 +3633,7 @@
                 <a:ea typeface="Calibri" pitchFamily="34" charset="-122"/>
                 <a:cs typeface="Calibri" pitchFamily="34" charset="-120"/>
               </a:rPr>
-              <a:t>Include limitations (coverage gaps, regions not assessed).</a:t>
+              <a:t>A ~50% VAF in a cancer gene may signal a germline variant — confirm with normal tissue.</a:t>
             </a:r>
             <a:endParaRPr lang="en-US" sz="1250" dirty="0"/>
           </a:p>
@@ -3298,7 +3654,7 @@
                 <a:ea typeface="Calibri" pitchFamily="34" charset="-122"/>
                 <a:cs typeface="Calibri" pitchFamily="34" charset="-120"/>
               </a:rPr>
-              <a:t>Recommend confirmation or family testing where appropriate.</a:t>
+              <a:t>Very low VAF may be subclonal or artifact.</a:t>
             </a:r>
             <a:endParaRPr lang="en-US" sz="1250" dirty="0"/>
           </a:p>
@@ -3321,7 +3677,7 @@
             </a:avLst>
           </a:prstGeom>
           <a:solidFill>
-            <a:srgbClr val="E0F2F4"/>
+            <a:srgbClr val="DDF0EF"/>
           </a:solidFill>
           <a:ln/>
           <a:effectLst>
@@ -3366,7 +3722,7 @@
                 <a:ea typeface="Calibri" pitchFamily="34" charset="-122"/>
                 <a:cs typeface="Calibri" pitchFamily="34" charset="-120"/>
               </a:rPr>
-              <a:t>HANDLING VUS</a:t>
+              <a:t>QUALITY MATTERS</a:t>
             </a:r>
             <a:endParaRPr lang="en-US" sz="1200" dirty="0"/>
           </a:p>
@@ -3409,7 +3765,7 @@
                 <a:ea typeface="Calibri" pitchFamily="34" charset="-122"/>
                 <a:cs typeface="Calibri" pitchFamily="34" charset="-120"/>
               </a:rPr>
-              <a:t>A VUS is NOT a basis for clinical decisions — do not over- or under-call it.</a:t>
+              <a:t>Adequate depth and quality underlie a reliable call.</a:t>
             </a:r>
             <a:endParaRPr lang="en-US" sz="1250" dirty="0"/>
           </a:p>
@@ -3430,7 +3786,7 @@
                 <a:ea typeface="Calibri" pitchFamily="34" charset="-122"/>
                 <a:cs typeface="Calibri" pitchFamily="34" charset="-120"/>
               </a:rPr>
-              <a:t>Offer reanalysis/reclassification as evidence evolves.</a:t>
+              <a:t>Low-coverage regions may need orthogonal confirmation.</a:t>
             </a:r>
             <a:endParaRPr lang="en-US" sz="1250" dirty="0"/>
           </a:p>
@@ -3451,7 +3807,7 @@
                 <a:ea typeface="Calibri" pitchFamily="34" charset="-122"/>
                 <a:cs typeface="Calibri" pitchFamily="34" charset="-120"/>
               </a:rPr>
-              <a:t>Avoid 'VUS creep' into management.</a:t>
+              <a:t>Strand bias and artifacts must be excluded.</a:t>
             </a:r>
             <a:endParaRPr lang="en-US" sz="1250" dirty="0"/>
           </a:p>
@@ -3472,7 +3828,7 @@
                 <a:ea typeface="Calibri" pitchFamily="34" charset="-122"/>
                 <a:cs typeface="Calibri" pitchFamily="34" charset="-120"/>
               </a:rPr>
-              <a:t>Communicate uncertainty clearly to ordering clinicians.</a:t>
+              <a:t>Confirm critical findings appropriately.</a:t>
             </a:r>
             <a:endParaRPr lang="en-US" sz="1250" dirty="0"/>
           </a:p>
@@ -3649,7 +4005,7 @@
                 <a:ea typeface="Calibri" pitchFamily="34" charset="-122"/>
                 <a:cs typeface="Calibri" pitchFamily="34" charset="-120"/>
               </a:rPr>
-              <a:t>MOLECULAR &amp; CYTOGENETICS   ·   INCIDENTAL</a:t>
+              <a:t>MOLECULAR &amp; CYTOGENETICS   ·   REPORTING</a:t>
             </a:r>
             <a:endParaRPr lang="en-US" sz="1100" dirty="0"/>
           </a:p>
@@ -3688,7 +4044,7 @@
                 <a:ea typeface="Calibri" pitchFamily="34" charset="-122"/>
                 <a:cs typeface="Calibri" pitchFamily="34" charset="-120"/>
               </a:rPr>
-              <a:t>Secondary / Incidental Findings</a:t>
+              <a:t>Building the Report</a:t>
             </a:r>
             <a:endParaRPr lang="en-US" sz="3000" dirty="0"/>
           </a:p>
@@ -3756,7 +4112,7 @@
                 <a:ea typeface="Calibri" pitchFamily="34" charset="-122"/>
                 <a:cs typeface="Calibri" pitchFamily="34" charset="-120"/>
               </a:rPr>
-              <a:t>SECONDARY FINDINGS</a:t>
+              <a:t>CONTENT</a:t>
             </a:r>
             <a:endParaRPr lang="en-US" sz="1200" dirty="0"/>
           </a:p>
@@ -3799,7 +4155,7 @@
                 <a:ea typeface="Calibri" pitchFamily="34" charset="-122"/>
                 <a:cs typeface="Calibri" pitchFamily="34" charset="-120"/>
               </a:rPr>
-              <a:t>Genome/exome testing can reveal medically actionable findings unrelated to the indication (e.g., ACMG secondary-findings genes).</a:t>
+              <a:t>State the variant (HGVS nomenclature), classification, and clinical significance.</a:t>
             </a:r>
             <a:endParaRPr lang="en-US" sz="1250" dirty="0"/>
           </a:p>
@@ -3820,7 +4176,7 @@
                 <a:ea typeface="Calibri" pitchFamily="34" charset="-122"/>
                 <a:cs typeface="Calibri" pitchFamily="34" charset="-120"/>
               </a:rPr>
-              <a:t>Reporting requires consent and a defined policy.</a:t>
+              <a:t>Summarize the supporting evidence.</a:t>
             </a:r>
             <a:endParaRPr lang="en-US" sz="1250" dirty="0"/>
           </a:p>
@@ -3841,7 +4197,7 @@
                 <a:ea typeface="Calibri" pitchFamily="34" charset="-122"/>
                 <a:cs typeface="Calibri" pitchFamily="34" charset="-120"/>
               </a:rPr>
-              <a:t>Distinguish primary result from secondary findings in the report.</a:t>
+              <a:t>Give clear, actionable recommendations.</a:t>
             </a:r>
             <a:endParaRPr lang="en-US" sz="1250" dirty="0"/>
           </a:p>
@@ -3862,7 +4218,7 @@
                 <a:ea typeface="Calibri" pitchFamily="34" charset="-122"/>
                 <a:cs typeface="Calibri" pitchFamily="34" charset="-120"/>
               </a:rPr>
-              <a:t>Germline implications affect family members.</a:t>
+              <a:t>Note limitations and methodology.</a:t>
             </a:r>
             <a:endParaRPr lang="en-US" sz="1250" dirty="0"/>
           </a:p>
@@ -3885,7 +4241,7 @@
             </a:avLst>
           </a:prstGeom>
           <a:solidFill>
-            <a:srgbClr val="E0F2F4"/>
+            <a:srgbClr val="DDF0EF"/>
           </a:solidFill>
           <a:ln/>
           <a:effectLst>
@@ -3930,7 +4286,7 @@
                 <a:ea typeface="Calibri" pitchFamily="34" charset="-122"/>
                 <a:cs typeface="Calibri" pitchFamily="34" charset="-120"/>
               </a:rPr>
-              <a:t>SOMATIC VS GERMLINE ORIGIN</a:t>
+              <a:t>COMMUNICATING VUS</a:t>
             </a:r>
             <a:endParaRPr lang="en-US" sz="1200" dirty="0"/>
           </a:p>
@@ -3973,7 +4329,7 @@
                 <a:ea typeface="Calibri" pitchFamily="34" charset="-122"/>
                 <a:cs typeface="Calibri" pitchFamily="34" charset="-120"/>
               </a:rPr>
-              <a:t>A variant found in tumor testing may actually be germline — consider confirmatory germline testing for high-suspicion findings.</a:t>
+              <a:t>A VUS should not drive clinical action as if pathogenic.</a:t>
             </a:r>
             <a:endParaRPr lang="en-US" sz="1250" dirty="0"/>
           </a:p>
@@ -3994,7 +4350,7 @@
                 <a:ea typeface="Calibri" pitchFamily="34" charset="-122"/>
                 <a:cs typeface="Calibri" pitchFamily="34" charset="-120"/>
               </a:rPr>
-              <a:t>Tumor-only assays cannot definitively call germline status.</a:t>
+              <a:t>Explain uncertainty and possible reclassification.</a:t>
             </a:r>
             <a:endParaRPr lang="en-US" sz="1250" dirty="0"/>
           </a:p>
@@ -4015,7 +4371,7 @@
                 <a:ea typeface="Calibri" pitchFamily="34" charset="-122"/>
                 <a:cs typeface="Calibri" pitchFamily="34" charset="-120"/>
               </a:rPr>
-              <a:t>Recognize patterns suggesting hereditary cancer.</a:t>
+              <a:t>Avoid over- or under-calling.</a:t>
             </a:r>
             <a:endParaRPr lang="en-US" sz="1250" dirty="0"/>
           </a:p>
@@ -4036,7 +4392,7 @@
                 <a:ea typeface="Calibri" pitchFamily="34" charset="-122"/>
                 <a:cs typeface="Calibri" pitchFamily="34" charset="-120"/>
               </a:rPr>
-              <a:t>Refer for genetic counseling when germline disease is implicated.</a:t>
+              <a:t>Recommend follow-up where appropriate.</a:t>
             </a:r>
             <a:endParaRPr lang="en-US" sz="1250" dirty="0"/>
           </a:p>
@@ -4159,6 +4515,1528 @@
 <file path=ppt/slides/slide12.xml><?xml version="1.0" encoding="utf-8"?>
 <p:sld xmlns:a="http://schemas.openxmlformats.org/drawingml/2006/main" xmlns:r="http://schemas.openxmlformats.org/officeDocument/2006/relationships" xmlns:p="http://schemas.openxmlformats.org/presentationml/2006/main">
   <p:cSld name="Slide 12">
+    <p:bg>
+      <p:bgPr>
+        <a:solidFill>
+          <a:srgbClr val="FFFFFF"/>
+        </a:solidFill>
+      </p:bgPr>
+    </p:bg>
+    <p:spTree>
+      <p:nvGrpSpPr>
+        <p:cNvPr id="1" name=""/>
+        <p:cNvGrpSpPr/>
+        <p:nvPr/>
+      </p:nvGrpSpPr>
+      <p:grpSpPr>
+        <a:xfrm>
+          <a:off x="0" y="0"/>
+          <a:ext cx="0" cy="0"/>
+          <a:chOff x="0" y="0"/>
+          <a:chExt cx="0" cy="0"/>
+        </a:xfrm>
+      </p:grpSpPr>
+      <p:sp>
+        <p:nvSpPr>
+          <p:cNvPr id="2" name="Text 0"/>
+          <p:cNvSpPr/>
+          <p:nvPr/>
+        </p:nvSpPr>
+        <p:spPr>
+          <a:xfrm>
+            <a:off x="566928" y="329184"/>
+            <a:ext cx="10515600" cy="310896"/>
+          </a:xfrm>
+          <a:prstGeom prst="rect">
+            <a:avLst/>
+          </a:prstGeom>
+          <a:noFill/>
+          <a:ln/>
+        </p:spPr>
+        <p:txBody>
+          <a:bodyPr wrap="square" lIns="0" tIns="0" rIns="0" bIns="0" rtlCol="0" anchor="ctr"/>
+          <a:lstStyle/>
+          <a:p>
+            <a:pPr algn="l" indent="0" marL="0">
+              <a:buNone/>
+            </a:pPr>
+            <a:r>
+              <a:rPr lang="en-US" sz="1100" b="1" spc="150" kern="0" dirty="0">
+                <a:solidFill>
+                  <a:srgbClr val="00838F"/>
+                </a:solidFill>
+                <a:latin typeface="Calibri" pitchFamily="34" charset="0"/>
+                <a:ea typeface="Calibri" pitchFamily="34" charset="-122"/>
+                <a:cs typeface="Calibri" pitchFamily="34" charset="-120"/>
+              </a:rPr>
+              <a:t>MOLECULAR &amp; CYTOGENETICS   ·   GERMLINE TIERS</a:t>
+            </a:r>
+            <a:endParaRPr lang="en-US" sz="1100" dirty="0"/>
+          </a:p>
+        </p:txBody>
+      </p:sp>
+      <p:sp>
+        <p:nvSpPr>
+          <p:cNvPr id="3" name="Text 1"/>
+          <p:cNvSpPr/>
+          <p:nvPr/>
+        </p:nvSpPr>
+        <p:spPr>
+          <a:xfrm>
+            <a:off x="566928" y="713232"/>
+            <a:ext cx="11064240" cy="749808"/>
+          </a:xfrm>
+          <a:prstGeom prst="rect">
+            <a:avLst/>
+          </a:prstGeom>
+          <a:noFill/>
+          <a:ln/>
+        </p:spPr>
+        <p:txBody>
+          <a:bodyPr wrap="square" lIns="0" tIns="0" rIns="0" bIns="0" rtlCol="0" anchor="ctr"/>
+          <a:lstStyle/>
+          <a:p>
+            <a:pPr algn="l" indent="0" marL="0">
+              <a:buNone/>
+            </a:pPr>
+            <a:r>
+              <a:rPr lang="en-US" sz="3000" b="1" dirty="0">
+                <a:solidFill>
+                  <a:srgbClr val="0E3A5F"/>
+                </a:solidFill>
+                <a:latin typeface="Calibri" pitchFamily="34" charset="0"/>
+                <a:ea typeface="Calibri" pitchFamily="34" charset="-122"/>
+                <a:cs typeface="Calibri" pitchFamily="34" charset="-120"/>
+              </a:rPr>
+              <a:t>ACMG/AMP Classification at a Glance</a:t>
+            </a:r>
+            <a:endParaRPr lang="en-US" sz="3000" dirty="0"/>
+          </a:p>
+        </p:txBody>
+      </p:sp>
+      <p:graphicFrame>
+        <p:nvGraphicFramePr>
+          <p:cNvPr id="13" name="Table 0"/>
+          <p:cNvGraphicFramePr>
+            <a:graphicFrameLocks noGrp="1"/>
+          </p:cNvGraphicFramePr>
+          <p:nvPr>
+            <p:extLst>
+              <p:ext uri="{D42A27DB-BD31-4B8C-83A1-F6EECF244321}">
+                <p14:modId xmlns:p14="http://schemas.microsoft.com/office/powerpoint/2010/main" val="1579011935"/>
+              </p:ext>
+            </p:extLst>
+          </p:nvPr>
+        </p:nvGraphicFramePr>
+        <p:xfrm>
+          <a:off x="566928" y="1463040"/>
+          <a:ext cx="11057839" cy="914400"/>
+        </p:xfrm>
+        <a:graphic>
+          <a:graphicData uri="http://schemas.openxmlformats.org/drawingml/2006/table">
+            <a:tbl>
+              <a:tblPr/>
+              <a:tblGrid>
+                <a:gridCol w="2743200"/>
+                <a:gridCol w="3931920"/>
+                <a:gridCol w="4288536"/>
+              </a:tblGrid>
+              <a:tr h="512064">
+                <a:tc>
+                  <a:txBody>
+                    <a:bodyPr/>
+                    <a:lstStyle/>
+                    <a:p>
+                      <a:pPr algn="ctr" indent="0" marL="0">
+                        <a:buNone/>
+                      </a:pPr>
+                      <a:r>
+                        <a:rPr lang="en-US" sz="1200" b="1" dirty="0">
+                          <a:solidFill>
+                            <a:srgbClr val="FFFFFF"/>
+                          </a:solidFill>
+                          <a:latin typeface="Calibri" pitchFamily="34" charset="0"/>
+                          <a:ea typeface="Calibri" pitchFamily="34" charset="-122"/>
+                          <a:cs typeface="Calibri" pitchFamily="34" charset="-120"/>
+                        </a:rPr>
+                        <a:t>Tier</a:t>
+                      </a:r>
+                      <a:endParaRPr lang="en-US" sz="1200" dirty="0">
+                        <a:latin typeface="Calibri" charset="0"/>
+                        <a:ea typeface="Calibri" charset="0"/>
+                        <a:cs typeface="Calibri" charset="0"/>
+                      </a:endParaRPr>
+                    </a:p>
+                  </a:txBody>
+                  <a:tcPr marL="91440" marR="91440" marT="45720" marB="45720" anchor="ctr">
+                    <a:lnL w="9525" cap="flat" cmpd="sng" algn="ctr">
+                      <a:solidFill>
+                        <a:srgbClr val="DCE4EC"/>
+                      </a:solidFill>
+                      <a:prstDash val="solid"/>
+                      <a:round/>
+                      <a:headEnd type="none" w="med" len="med"/>
+                      <a:tailEnd type="none" w="med" len="med"/>
+                    </a:lnL>
+                    <a:lnR w="9525" cap="flat" cmpd="sng" algn="ctr">
+                      <a:solidFill>
+                        <a:srgbClr val="DCE4EC"/>
+                      </a:solidFill>
+                      <a:prstDash val="solid"/>
+                      <a:round/>
+                      <a:headEnd type="none" w="med" len="med"/>
+                      <a:tailEnd type="none" w="med" len="med"/>
+                    </a:lnR>
+                    <a:lnT w="9525" cap="flat" cmpd="sng" algn="ctr">
+                      <a:solidFill>
+                        <a:srgbClr val="DCE4EC"/>
+                      </a:solidFill>
+                      <a:prstDash val="solid"/>
+                      <a:round/>
+                      <a:headEnd type="none" w="med" len="med"/>
+                      <a:tailEnd type="none" w="med" len="med"/>
+                    </a:lnT>
+                    <a:lnB w="9525" cap="flat" cmpd="sng" algn="ctr">
+                      <a:solidFill>
+                        <a:srgbClr val="DCE4EC"/>
+                      </a:solidFill>
+                      <a:prstDash val="solid"/>
+                      <a:round/>
+                      <a:headEnd type="none" w="med" len="med"/>
+                      <a:tailEnd type="none" w="med" len="med"/>
+                    </a:lnB>
+                    <a:solidFill>
+                      <a:srgbClr val="00838F"/>
+                    </a:solidFill>
+                  </a:tcPr>
+                </a:tc>
+                <a:tc>
+                  <a:txBody>
+                    <a:bodyPr/>
+                    <a:lstStyle/>
+                    <a:p>
+                      <a:pPr algn="ctr" indent="0" marL="0">
+                        <a:buNone/>
+                      </a:pPr>
+                      <a:r>
+                        <a:rPr lang="en-US" sz="1200" b="1" dirty="0">
+                          <a:solidFill>
+                            <a:srgbClr val="FFFFFF"/>
+                          </a:solidFill>
+                          <a:latin typeface="Calibri" pitchFamily="34" charset="0"/>
+                          <a:ea typeface="Calibri" pitchFamily="34" charset="-122"/>
+                          <a:cs typeface="Calibri" pitchFamily="34" charset="-120"/>
+                        </a:rPr>
+                        <a:t>Meaning</a:t>
+                      </a:r>
+                      <a:endParaRPr lang="en-US" sz="1200" dirty="0">
+                        <a:latin typeface="Calibri" charset="0"/>
+                        <a:ea typeface="Calibri" charset="0"/>
+                        <a:cs typeface="Calibri" charset="0"/>
+                      </a:endParaRPr>
+                    </a:p>
+                  </a:txBody>
+                  <a:tcPr marL="91440" marR="91440" marT="45720" marB="45720" anchor="ctr">
+                    <a:lnL w="9525" cap="flat" cmpd="sng" algn="ctr">
+                      <a:solidFill>
+                        <a:srgbClr val="DCE4EC"/>
+                      </a:solidFill>
+                      <a:prstDash val="solid"/>
+                      <a:round/>
+                      <a:headEnd type="none" w="med" len="med"/>
+                      <a:tailEnd type="none" w="med" len="med"/>
+                    </a:lnL>
+                    <a:lnR w="9525" cap="flat" cmpd="sng" algn="ctr">
+                      <a:solidFill>
+                        <a:srgbClr val="DCE4EC"/>
+                      </a:solidFill>
+                      <a:prstDash val="solid"/>
+                      <a:round/>
+                      <a:headEnd type="none" w="med" len="med"/>
+                      <a:tailEnd type="none" w="med" len="med"/>
+                    </a:lnR>
+                    <a:lnT w="9525" cap="flat" cmpd="sng" algn="ctr">
+                      <a:solidFill>
+                        <a:srgbClr val="DCE4EC"/>
+                      </a:solidFill>
+                      <a:prstDash val="solid"/>
+                      <a:round/>
+                      <a:headEnd type="none" w="med" len="med"/>
+                      <a:tailEnd type="none" w="med" len="med"/>
+                    </a:lnT>
+                    <a:lnB w="9525" cap="flat" cmpd="sng" algn="ctr">
+                      <a:solidFill>
+                        <a:srgbClr val="DCE4EC"/>
+                      </a:solidFill>
+                      <a:prstDash val="solid"/>
+                      <a:round/>
+                      <a:headEnd type="none" w="med" len="med"/>
+                      <a:tailEnd type="none" w="med" len="med"/>
+                    </a:lnB>
+                    <a:solidFill>
+                      <a:srgbClr val="00838F"/>
+                    </a:solidFill>
+                  </a:tcPr>
+                </a:tc>
+                <a:tc>
+                  <a:txBody>
+                    <a:bodyPr/>
+                    <a:lstStyle/>
+                    <a:p>
+                      <a:pPr algn="ctr" indent="0" marL="0">
+                        <a:buNone/>
+                      </a:pPr>
+                      <a:r>
+                        <a:rPr lang="en-US" sz="1200" b="1" dirty="0">
+                          <a:solidFill>
+                            <a:srgbClr val="FFFFFF"/>
+                          </a:solidFill>
+                          <a:latin typeface="Calibri" pitchFamily="34" charset="0"/>
+                          <a:ea typeface="Calibri" pitchFamily="34" charset="-122"/>
+                          <a:cs typeface="Calibri" pitchFamily="34" charset="-120"/>
+                        </a:rPr>
+                        <a:t>Clinical use</a:t>
+                      </a:r>
+                      <a:endParaRPr lang="en-US" sz="1200" dirty="0">
+                        <a:latin typeface="Calibri" charset="0"/>
+                        <a:ea typeface="Calibri" charset="0"/>
+                        <a:cs typeface="Calibri" charset="0"/>
+                      </a:endParaRPr>
+                    </a:p>
+                  </a:txBody>
+                  <a:tcPr marL="91440" marR="91440" marT="45720" marB="45720" anchor="ctr">
+                    <a:lnL w="9525" cap="flat" cmpd="sng" algn="ctr">
+                      <a:solidFill>
+                        <a:srgbClr val="DCE4EC"/>
+                      </a:solidFill>
+                      <a:prstDash val="solid"/>
+                      <a:round/>
+                      <a:headEnd type="none" w="med" len="med"/>
+                      <a:tailEnd type="none" w="med" len="med"/>
+                    </a:lnL>
+                    <a:lnR w="9525" cap="flat" cmpd="sng" algn="ctr">
+                      <a:solidFill>
+                        <a:srgbClr val="DCE4EC"/>
+                      </a:solidFill>
+                      <a:prstDash val="solid"/>
+                      <a:round/>
+                      <a:headEnd type="none" w="med" len="med"/>
+                      <a:tailEnd type="none" w="med" len="med"/>
+                    </a:lnR>
+                    <a:lnT w="9525" cap="flat" cmpd="sng" algn="ctr">
+                      <a:solidFill>
+                        <a:srgbClr val="DCE4EC"/>
+                      </a:solidFill>
+                      <a:prstDash val="solid"/>
+                      <a:round/>
+                      <a:headEnd type="none" w="med" len="med"/>
+                      <a:tailEnd type="none" w="med" len="med"/>
+                    </a:lnT>
+                    <a:lnB w="9525" cap="flat" cmpd="sng" algn="ctr">
+                      <a:solidFill>
+                        <a:srgbClr val="DCE4EC"/>
+                      </a:solidFill>
+                      <a:prstDash val="solid"/>
+                      <a:round/>
+                      <a:headEnd type="none" w="med" len="med"/>
+                      <a:tailEnd type="none" w="med" len="med"/>
+                    </a:lnB>
+                    <a:solidFill>
+                      <a:srgbClr val="00838F"/>
+                    </a:solidFill>
+                  </a:tcPr>
+                </a:tc>
+              </a:tr>
+              <a:tr h="512064">
+                <a:tc>
+                  <a:txBody>
+                    <a:bodyPr/>
+                    <a:lstStyle/>
+                    <a:p>
+                      <a:pPr algn="l" indent="0" marL="0">
+                        <a:buNone/>
+                      </a:pPr>
+                      <a:r>
+                        <a:rPr lang="en-US" sz="1100" b="1" dirty="0">
+                          <a:solidFill>
+                            <a:srgbClr val="1B2A38"/>
+                          </a:solidFill>
+                          <a:latin typeface="Calibri" pitchFamily="34" charset="0"/>
+                          <a:ea typeface="Calibri" pitchFamily="34" charset="-122"/>
+                          <a:cs typeface="Calibri" pitchFamily="34" charset="-120"/>
+                        </a:rPr>
+                        <a:t>Pathogenic</a:t>
+                      </a:r>
+                      <a:endParaRPr lang="en-US" sz="1100" dirty="0">
+                        <a:latin typeface="Calibri" charset="0"/>
+                        <a:ea typeface="Calibri" charset="0"/>
+                        <a:cs typeface="Calibri" charset="0"/>
+                      </a:endParaRPr>
+                    </a:p>
+                  </a:txBody>
+                  <a:tcPr marL="91440" marR="91440" marT="45720" marB="45720" anchor="ctr">
+                    <a:lnL w="9525" cap="flat" cmpd="sng" algn="ctr">
+                      <a:solidFill>
+                        <a:srgbClr val="DCE4EC"/>
+                      </a:solidFill>
+                      <a:prstDash val="solid"/>
+                      <a:round/>
+                      <a:headEnd type="none" w="med" len="med"/>
+                      <a:tailEnd type="none" w="med" len="med"/>
+                    </a:lnL>
+                    <a:lnR w="9525" cap="flat" cmpd="sng" algn="ctr">
+                      <a:solidFill>
+                        <a:srgbClr val="DCE4EC"/>
+                      </a:solidFill>
+                      <a:prstDash val="solid"/>
+                      <a:round/>
+                      <a:headEnd type="none" w="med" len="med"/>
+                      <a:tailEnd type="none" w="med" len="med"/>
+                    </a:lnR>
+                    <a:lnT w="9525" cap="flat" cmpd="sng" algn="ctr">
+                      <a:solidFill>
+                        <a:srgbClr val="DCE4EC"/>
+                      </a:solidFill>
+                      <a:prstDash val="solid"/>
+                      <a:round/>
+                      <a:headEnd type="none" w="med" len="med"/>
+                      <a:tailEnd type="none" w="med" len="med"/>
+                    </a:lnT>
+                    <a:lnB w="9525" cap="flat" cmpd="sng" algn="ctr">
+                      <a:solidFill>
+                        <a:srgbClr val="DCE4EC"/>
+                      </a:solidFill>
+                      <a:prstDash val="solid"/>
+                      <a:round/>
+                      <a:headEnd type="none" w="med" len="med"/>
+                      <a:tailEnd type="none" w="med" len="med"/>
+                    </a:lnB>
+                    <a:solidFill>
+                      <a:srgbClr val="F3F7FA"/>
+                    </a:solidFill>
+                  </a:tcPr>
+                </a:tc>
+                <a:tc>
+                  <a:txBody>
+                    <a:bodyPr/>
+                    <a:lstStyle/>
+                    <a:p>
+                      <a:pPr algn="ctr" indent="0" marL="0">
+                        <a:buNone/>
+                      </a:pPr>
+                      <a:r>
+                        <a:rPr lang="en-US" sz="1100" dirty="0">
+                          <a:solidFill>
+                            <a:srgbClr val="33444F"/>
+                          </a:solidFill>
+                          <a:latin typeface="Calibri" pitchFamily="34" charset="0"/>
+                          <a:ea typeface="Calibri" pitchFamily="34" charset="-122"/>
+                          <a:cs typeface="Calibri" pitchFamily="34" charset="-120"/>
+                        </a:rPr>
+                        <a:t>Disease-causing</a:t>
+                      </a:r>
+                      <a:endParaRPr lang="en-US" sz="1100" dirty="0">
+                        <a:latin typeface="Calibri" charset="0"/>
+                        <a:ea typeface="Calibri" charset="0"/>
+                        <a:cs typeface="Calibri" charset="0"/>
+                      </a:endParaRPr>
+                    </a:p>
+                  </a:txBody>
+                  <a:tcPr marL="91440" marR="91440" marT="45720" marB="45720" anchor="ctr">
+                    <a:lnL w="9525" cap="flat" cmpd="sng" algn="ctr">
+                      <a:solidFill>
+                        <a:srgbClr val="DCE4EC"/>
+                      </a:solidFill>
+                      <a:prstDash val="solid"/>
+                      <a:round/>
+                      <a:headEnd type="none" w="med" len="med"/>
+                      <a:tailEnd type="none" w="med" len="med"/>
+                    </a:lnL>
+                    <a:lnR w="9525" cap="flat" cmpd="sng" algn="ctr">
+                      <a:solidFill>
+                        <a:srgbClr val="DCE4EC"/>
+                      </a:solidFill>
+                      <a:prstDash val="solid"/>
+                      <a:round/>
+                      <a:headEnd type="none" w="med" len="med"/>
+                      <a:tailEnd type="none" w="med" len="med"/>
+                    </a:lnR>
+                    <a:lnT w="9525" cap="flat" cmpd="sng" algn="ctr">
+                      <a:solidFill>
+                        <a:srgbClr val="DCE4EC"/>
+                      </a:solidFill>
+                      <a:prstDash val="solid"/>
+                      <a:round/>
+                      <a:headEnd type="none" w="med" len="med"/>
+                      <a:tailEnd type="none" w="med" len="med"/>
+                    </a:lnT>
+                    <a:lnB w="9525" cap="flat" cmpd="sng" algn="ctr">
+                      <a:solidFill>
+                        <a:srgbClr val="DCE4EC"/>
+                      </a:solidFill>
+                      <a:prstDash val="solid"/>
+                      <a:round/>
+                      <a:headEnd type="none" w="med" len="med"/>
+                      <a:tailEnd type="none" w="med" len="med"/>
+                    </a:lnB>
+                    <a:solidFill>
+                      <a:srgbClr val="F3F7FA"/>
+                    </a:solidFill>
+                  </a:tcPr>
+                </a:tc>
+                <a:tc>
+                  <a:txBody>
+                    <a:bodyPr/>
+                    <a:lstStyle/>
+                    <a:p>
+                      <a:pPr algn="ctr" indent="0" marL="0">
+                        <a:buNone/>
+                      </a:pPr>
+                      <a:r>
+                        <a:rPr lang="en-US" sz="1100" dirty="0">
+                          <a:solidFill>
+                            <a:srgbClr val="33444F"/>
+                          </a:solidFill>
+                          <a:latin typeface="Calibri" pitchFamily="34" charset="0"/>
+                          <a:ea typeface="Calibri" pitchFamily="34" charset="-122"/>
+                          <a:cs typeface="Calibri" pitchFamily="34" charset="-120"/>
+                        </a:rPr>
+                        <a:t>Actionable</a:t>
+                      </a:r>
+                      <a:endParaRPr lang="en-US" sz="1100" dirty="0">
+                        <a:latin typeface="Calibri" charset="0"/>
+                        <a:ea typeface="Calibri" charset="0"/>
+                        <a:cs typeface="Calibri" charset="0"/>
+                      </a:endParaRPr>
+                    </a:p>
+                  </a:txBody>
+                  <a:tcPr marL="91440" marR="91440" marT="45720" marB="45720" anchor="ctr">
+                    <a:lnL w="9525" cap="flat" cmpd="sng" algn="ctr">
+                      <a:solidFill>
+                        <a:srgbClr val="DCE4EC"/>
+                      </a:solidFill>
+                      <a:prstDash val="solid"/>
+                      <a:round/>
+                      <a:headEnd type="none" w="med" len="med"/>
+                      <a:tailEnd type="none" w="med" len="med"/>
+                    </a:lnL>
+                    <a:lnR w="9525" cap="flat" cmpd="sng" algn="ctr">
+                      <a:solidFill>
+                        <a:srgbClr val="DCE4EC"/>
+                      </a:solidFill>
+                      <a:prstDash val="solid"/>
+                      <a:round/>
+                      <a:headEnd type="none" w="med" len="med"/>
+                      <a:tailEnd type="none" w="med" len="med"/>
+                    </a:lnR>
+                    <a:lnT w="9525" cap="flat" cmpd="sng" algn="ctr">
+                      <a:solidFill>
+                        <a:srgbClr val="DCE4EC"/>
+                      </a:solidFill>
+                      <a:prstDash val="solid"/>
+                      <a:round/>
+                      <a:headEnd type="none" w="med" len="med"/>
+                      <a:tailEnd type="none" w="med" len="med"/>
+                    </a:lnT>
+                    <a:lnB w="9525" cap="flat" cmpd="sng" algn="ctr">
+                      <a:solidFill>
+                        <a:srgbClr val="DCE4EC"/>
+                      </a:solidFill>
+                      <a:prstDash val="solid"/>
+                      <a:round/>
+                      <a:headEnd type="none" w="med" len="med"/>
+                      <a:tailEnd type="none" w="med" len="med"/>
+                    </a:lnB>
+                    <a:solidFill>
+                      <a:srgbClr val="F3F7FA"/>
+                    </a:solidFill>
+                  </a:tcPr>
+                </a:tc>
+              </a:tr>
+              <a:tr h="512064">
+                <a:tc>
+                  <a:txBody>
+                    <a:bodyPr/>
+                    <a:lstStyle/>
+                    <a:p>
+                      <a:pPr algn="l" indent="0" marL="0">
+                        <a:buNone/>
+                      </a:pPr>
+                      <a:r>
+                        <a:rPr lang="en-US" sz="1100" b="1" dirty="0">
+                          <a:solidFill>
+                            <a:srgbClr val="1B2A38"/>
+                          </a:solidFill>
+                          <a:latin typeface="Calibri" pitchFamily="34" charset="0"/>
+                          <a:ea typeface="Calibri" pitchFamily="34" charset="-122"/>
+                          <a:cs typeface="Calibri" pitchFamily="34" charset="-120"/>
+                        </a:rPr>
+                        <a:t>Likely pathogenic</a:t>
+                      </a:r>
+                      <a:endParaRPr lang="en-US" sz="1100" dirty="0">
+                        <a:latin typeface="Calibri" charset="0"/>
+                        <a:ea typeface="Calibri" charset="0"/>
+                        <a:cs typeface="Calibri" charset="0"/>
+                      </a:endParaRPr>
+                    </a:p>
+                  </a:txBody>
+                  <a:tcPr marL="91440" marR="91440" marT="45720" marB="45720" anchor="ctr">
+                    <a:lnL w="9525" cap="flat" cmpd="sng" algn="ctr">
+                      <a:solidFill>
+                        <a:srgbClr val="DCE4EC"/>
+                      </a:solidFill>
+                      <a:prstDash val="solid"/>
+                      <a:round/>
+                      <a:headEnd type="none" w="med" len="med"/>
+                      <a:tailEnd type="none" w="med" len="med"/>
+                    </a:lnL>
+                    <a:lnR w="9525" cap="flat" cmpd="sng" algn="ctr">
+                      <a:solidFill>
+                        <a:srgbClr val="DCE4EC"/>
+                      </a:solidFill>
+                      <a:prstDash val="solid"/>
+                      <a:round/>
+                      <a:headEnd type="none" w="med" len="med"/>
+                      <a:tailEnd type="none" w="med" len="med"/>
+                    </a:lnR>
+                    <a:lnT w="9525" cap="flat" cmpd="sng" algn="ctr">
+                      <a:solidFill>
+                        <a:srgbClr val="DCE4EC"/>
+                      </a:solidFill>
+                      <a:prstDash val="solid"/>
+                      <a:round/>
+                      <a:headEnd type="none" w="med" len="med"/>
+                      <a:tailEnd type="none" w="med" len="med"/>
+                    </a:lnT>
+                    <a:lnB w="9525" cap="flat" cmpd="sng" algn="ctr">
+                      <a:solidFill>
+                        <a:srgbClr val="DCE4EC"/>
+                      </a:solidFill>
+                      <a:prstDash val="solid"/>
+                      <a:round/>
+                      <a:headEnd type="none" w="med" len="med"/>
+                      <a:tailEnd type="none" w="med" len="med"/>
+                    </a:lnB>
+                    <a:solidFill>
+                      <a:srgbClr val="FFFFFF"/>
+                    </a:solidFill>
+                  </a:tcPr>
+                </a:tc>
+                <a:tc>
+                  <a:txBody>
+                    <a:bodyPr/>
+                    <a:lstStyle/>
+                    <a:p>
+                      <a:pPr algn="ctr" indent="0" marL="0">
+                        <a:buNone/>
+                      </a:pPr>
+                      <a:r>
+                        <a:rPr lang="en-US" sz="1100" dirty="0">
+                          <a:solidFill>
+                            <a:srgbClr val="33444F"/>
+                          </a:solidFill>
+                          <a:latin typeface="Calibri" pitchFamily="34" charset="0"/>
+                          <a:ea typeface="Calibri" pitchFamily="34" charset="-122"/>
+                          <a:cs typeface="Calibri" pitchFamily="34" charset="-120"/>
+                        </a:rPr>
+                        <a:t>~≥90% certain</a:t>
+                      </a:r>
+                      <a:endParaRPr lang="en-US" sz="1100" dirty="0">
+                        <a:latin typeface="Calibri" charset="0"/>
+                        <a:ea typeface="Calibri" charset="0"/>
+                        <a:cs typeface="Calibri" charset="0"/>
+                      </a:endParaRPr>
+                    </a:p>
+                  </a:txBody>
+                  <a:tcPr marL="91440" marR="91440" marT="45720" marB="45720" anchor="ctr">
+                    <a:lnL w="9525" cap="flat" cmpd="sng" algn="ctr">
+                      <a:solidFill>
+                        <a:srgbClr val="DCE4EC"/>
+                      </a:solidFill>
+                      <a:prstDash val="solid"/>
+                      <a:round/>
+                      <a:headEnd type="none" w="med" len="med"/>
+                      <a:tailEnd type="none" w="med" len="med"/>
+                    </a:lnL>
+                    <a:lnR w="9525" cap="flat" cmpd="sng" algn="ctr">
+                      <a:solidFill>
+                        <a:srgbClr val="DCE4EC"/>
+                      </a:solidFill>
+                      <a:prstDash val="solid"/>
+                      <a:round/>
+                      <a:headEnd type="none" w="med" len="med"/>
+                      <a:tailEnd type="none" w="med" len="med"/>
+                    </a:lnR>
+                    <a:lnT w="9525" cap="flat" cmpd="sng" algn="ctr">
+                      <a:solidFill>
+                        <a:srgbClr val="DCE4EC"/>
+                      </a:solidFill>
+                      <a:prstDash val="solid"/>
+                      <a:round/>
+                      <a:headEnd type="none" w="med" len="med"/>
+                      <a:tailEnd type="none" w="med" len="med"/>
+                    </a:lnT>
+                    <a:lnB w="9525" cap="flat" cmpd="sng" algn="ctr">
+                      <a:solidFill>
+                        <a:srgbClr val="DCE4EC"/>
+                      </a:solidFill>
+                      <a:prstDash val="solid"/>
+                      <a:round/>
+                      <a:headEnd type="none" w="med" len="med"/>
+                      <a:tailEnd type="none" w="med" len="med"/>
+                    </a:lnB>
+                    <a:solidFill>
+                      <a:srgbClr val="FFFFFF"/>
+                    </a:solidFill>
+                  </a:tcPr>
+                </a:tc>
+                <a:tc>
+                  <a:txBody>
+                    <a:bodyPr/>
+                    <a:lstStyle/>
+                    <a:p>
+                      <a:pPr algn="ctr" indent="0" marL="0">
+                        <a:buNone/>
+                      </a:pPr>
+                      <a:r>
+                        <a:rPr lang="en-US" sz="1100" dirty="0">
+                          <a:solidFill>
+                            <a:srgbClr val="33444F"/>
+                          </a:solidFill>
+                          <a:latin typeface="Calibri" pitchFamily="34" charset="0"/>
+                          <a:ea typeface="Calibri" pitchFamily="34" charset="-122"/>
+                          <a:cs typeface="Calibri" pitchFamily="34" charset="-120"/>
+                        </a:rPr>
+                        <a:t>Generally actionable</a:t>
+                      </a:r>
+                      <a:endParaRPr lang="en-US" sz="1100" dirty="0">
+                        <a:latin typeface="Calibri" charset="0"/>
+                        <a:ea typeface="Calibri" charset="0"/>
+                        <a:cs typeface="Calibri" charset="0"/>
+                      </a:endParaRPr>
+                    </a:p>
+                  </a:txBody>
+                  <a:tcPr marL="91440" marR="91440" marT="45720" marB="45720" anchor="ctr">
+                    <a:lnL w="9525" cap="flat" cmpd="sng" algn="ctr">
+                      <a:solidFill>
+                        <a:srgbClr val="DCE4EC"/>
+                      </a:solidFill>
+                      <a:prstDash val="solid"/>
+                      <a:round/>
+                      <a:headEnd type="none" w="med" len="med"/>
+                      <a:tailEnd type="none" w="med" len="med"/>
+                    </a:lnL>
+                    <a:lnR w="9525" cap="flat" cmpd="sng" algn="ctr">
+                      <a:solidFill>
+                        <a:srgbClr val="DCE4EC"/>
+                      </a:solidFill>
+                      <a:prstDash val="solid"/>
+                      <a:round/>
+                      <a:headEnd type="none" w="med" len="med"/>
+                      <a:tailEnd type="none" w="med" len="med"/>
+                    </a:lnR>
+                    <a:lnT w="9525" cap="flat" cmpd="sng" algn="ctr">
+                      <a:solidFill>
+                        <a:srgbClr val="DCE4EC"/>
+                      </a:solidFill>
+                      <a:prstDash val="solid"/>
+                      <a:round/>
+                      <a:headEnd type="none" w="med" len="med"/>
+                      <a:tailEnd type="none" w="med" len="med"/>
+                    </a:lnT>
+                    <a:lnB w="9525" cap="flat" cmpd="sng" algn="ctr">
+                      <a:solidFill>
+                        <a:srgbClr val="DCE4EC"/>
+                      </a:solidFill>
+                      <a:prstDash val="solid"/>
+                      <a:round/>
+                      <a:headEnd type="none" w="med" len="med"/>
+                      <a:tailEnd type="none" w="med" len="med"/>
+                    </a:lnB>
+                    <a:solidFill>
+                      <a:srgbClr val="FFFFFF"/>
+                    </a:solidFill>
+                  </a:tcPr>
+                </a:tc>
+              </a:tr>
+              <a:tr h="512064">
+                <a:tc>
+                  <a:txBody>
+                    <a:bodyPr/>
+                    <a:lstStyle/>
+                    <a:p>
+                      <a:pPr algn="l" indent="0" marL="0">
+                        <a:buNone/>
+                      </a:pPr>
+                      <a:r>
+                        <a:rPr lang="en-US" sz="1100" b="1" dirty="0">
+                          <a:solidFill>
+                            <a:srgbClr val="1B2A38"/>
+                          </a:solidFill>
+                          <a:latin typeface="Calibri" pitchFamily="34" charset="0"/>
+                          <a:ea typeface="Calibri" pitchFamily="34" charset="-122"/>
+                          <a:cs typeface="Calibri" pitchFamily="34" charset="-120"/>
+                        </a:rPr>
+                        <a:t>VUS</a:t>
+                      </a:r>
+                      <a:endParaRPr lang="en-US" sz="1100" dirty="0">
+                        <a:latin typeface="Calibri" charset="0"/>
+                        <a:ea typeface="Calibri" charset="0"/>
+                        <a:cs typeface="Calibri" charset="0"/>
+                      </a:endParaRPr>
+                    </a:p>
+                  </a:txBody>
+                  <a:tcPr marL="91440" marR="91440" marT="45720" marB="45720" anchor="ctr">
+                    <a:lnL w="9525" cap="flat" cmpd="sng" algn="ctr">
+                      <a:solidFill>
+                        <a:srgbClr val="DCE4EC"/>
+                      </a:solidFill>
+                      <a:prstDash val="solid"/>
+                      <a:round/>
+                      <a:headEnd type="none" w="med" len="med"/>
+                      <a:tailEnd type="none" w="med" len="med"/>
+                    </a:lnL>
+                    <a:lnR w="9525" cap="flat" cmpd="sng" algn="ctr">
+                      <a:solidFill>
+                        <a:srgbClr val="DCE4EC"/>
+                      </a:solidFill>
+                      <a:prstDash val="solid"/>
+                      <a:round/>
+                      <a:headEnd type="none" w="med" len="med"/>
+                      <a:tailEnd type="none" w="med" len="med"/>
+                    </a:lnR>
+                    <a:lnT w="9525" cap="flat" cmpd="sng" algn="ctr">
+                      <a:solidFill>
+                        <a:srgbClr val="DCE4EC"/>
+                      </a:solidFill>
+                      <a:prstDash val="solid"/>
+                      <a:round/>
+                      <a:headEnd type="none" w="med" len="med"/>
+                      <a:tailEnd type="none" w="med" len="med"/>
+                    </a:lnT>
+                    <a:lnB w="9525" cap="flat" cmpd="sng" algn="ctr">
+                      <a:solidFill>
+                        <a:srgbClr val="DCE4EC"/>
+                      </a:solidFill>
+                      <a:prstDash val="solid"/>
+                      <a:round/>
+                      <a:headEnd type="none" w="med" len="med"/>
+                      <a:tailEnd type="none" w="med" len="med"/>
+                    </a:lnB>
+                    <a:solidFill>
+                      <a:srgbClr val="F3F7FA"/>
+                    </a:solidFill>
+                  </a:tcPr>
+                </a:tc>
+                <a:tc>
+                  <a:txBody>
+                    <a:bodyPr/>
+                    <a:lstStyle/>
+                    <a:p>
+                      <a:pPr algn="ctr" indent="0" marL="0">
+                        <a:buNone/>
+                      </a:pPr>
+                      <a:r>
+                        <a:rPr lang="en-US" sz="1100" dirty="0">
+                          <a:solidFill>
+                            <a:srgbClr val="33444F"/>
+                          </a:solidFill>
+                          <a:latin typeface="Calibri" pitchFamily="34" charset="0"/>
+                          <a:ea typeface="Calibri" pitchFamily="34" charset="-122"/>
+                          <a:cs typeface="Calibri" pitchFamily="34" charset="-120"/>
+                        </a:rPr>
+                        <a:t>Uncertain</a:t>
+                      </a:r>
+                      <a:endParaRPr lang="en-US" sz="1100" dirty="0">
+                        <a:latin typeface="Calibri" charset="0"/>
+                        <a:ea typeface="Calibri" charset="0"/>
+                        <a:cs typeface="Calibri" charset="0"/>
+                      </a:endParaRPr>
+                    </a:p>
+                  </a:txBody>
+                  <a:tcPr marL="91440" marR="91440" marT="45720" marB="45720" anchor="ctr">
+                    <a:lnL w="9525" cap="flat" cmpd="sng" algn="ctr">
+                      <a:solidFill>
+                        <a:srgbClr val="DCE4EC"/>
+                      </a:solidFill>
+                      <a:prstDash val="solid"/>
+                      <a:round/>
+                      <a:headEnd type="none" w="med" len="med"/>
+                      <a:tailEnd type="none" w="med" len="med"/>
+                    </a:lnL>
+                    <a:lnR w="9525" cap="flat" cmpd="sng" algn="ctr">
+                      <a:solidFill>
+                        <a:srgbClr val="DCE4EC"/>
+                      </a:solidFill>
+                      <a:prstDash val="solid"/>
+                      <a:round/>
+                      <a:headEnd type="none" w="med" len="med"/>
+                      <a:tailEnd type="none" w="med" len="med"/>
+                    </a:lnR>
+                    <a:lnT w="9525" cap="flat" cmpd="sng" algn="ctr">
+                      <a:solidFill>
+                        <a:srgbClr val="DCE4EC"/>
+                      </a:solidFill>
+                      <a:prstDash val="solid"/>
+                      <a:round/>
+                      <a:headEnd type="none" w="med" len="med"/>
+                      <a:tailEnd type="none" w="med" len="med"/>
+                    </a:lnT>
+                    <a:lnB w="9525" cap="flat" cmpd="sng" algn="ctr">
+                      <a:solidFill>
+                        <a:srgbClr val="DCE4EC"/>
+                      </a:solidFill>
+                      <a:prstDash val="solid"/>
+                      <a:round/>
+                      <a:headEnd type="none" w="med" len="med"/>
+                      <a:tailEnd type="none" w="med" len="med"/>
+                    </a:lnB>
+                    <a:solidFill>
+                      <a:srgbClr val="F3F7FA"/>
+                    </a:solidFill>
+                  </a:tcPr>
+                </a:tc>
+                <a:tc>
+                  <a:txBody>
+                    <a:bodyPr/>
+                    <a:lstStyle/>
+                    <a:p>
+                      <a:pPr algn="ctr" indent="0" marL="0">
+                        <a:buNone/>
+                      </a:pPr>
+                      <a:r>
+                        <a:rPr lang="en-US" sz="1100" dirty="0">
+                          <a:solidFill>
+                            <a:srgbClr val="33444F"/>
+                          </a:solidFill>
+                          <a:latin typeface="Calibri" pitchFamily="34" charset="0"/>
+                          <a:ea typeface="Calibri" pitchFamily="34" charset="-122"/>
+                          <a:cs typeface="Calibri" pitchFamily="34" charset="-120"/>
+                        </a:rPr>
+                        <a:t>Do not act as positive</a:t>
+                      </a:r>
+                      <a:endParaRPr lang="en-US" sz="1100" dirty="0">
+                        <a:latin typeface="Calibri" charset="0"/>
+                        <a:ea typeface="Calibri" charset="0"/>
+                        <a:cs typeface="Calibri" charset="0"/>
+                      </a:endParaRPr>
+                    </a:p>
+                  </a:txBody>
+                  <a:tcPr marL="91440" marR="91440" marT="45720" marB="45720" anchor="ctr">
+                    <a:lnL w="9525" cap="flat" cmpd="sng" algn="ctr">
+                      <a:solidFill>
+                        <a:srgbClr val="DCE4EC"/>
+                      </a:solidFill>
+                      <a:prstDash val="solid"/>
+                      <a:round/>
+                      <a:headEnd type="none" w="med" len="med"/>
+                      <a:tailEnd type="none" w="med" len="med"/>
+                    </a:lnL>
+                    <a:lnR w="9525" cap="flat" cmpd="sng" algn="ctr">
+                      <a:solidFill>
+                        <a:srgbClr val="DCE4EC"/>
+                      </a:solidFill>
+                      <a:prstDash val="solid"/>
+                      <a:round/>
+                      <a:headEnd type="none" w="med" len="med"/>
+                      <a:tailEnd type="none" w="med" len="med"/>
+                    </a:lnR>
+                    <a:lnT w="9525" cap="flat" cmpd="sng" algn="ctr">
+                      <a:solidFill>
+                        <a:srgbClr val="DCE4EC"/>
+                      </a:solidFill>
+                      <a:prstDash val="solid"/>
+                      <a:round/>
+                      <a:headEnd type="none" w="med" len="med"/>
+                      <a:tailEnd type="none" w="med" len="med"/>
+                    </a:lnT>
+                    <a:lnB w="9525" cap="flat" cmpd="sng" algn="ctr">
+                      <a:solidFill>
+                        <a:srgbClr val="DCE4EC"/>
+                      </a:solidFill>
+                      <a:prstDash val="solid"/>
+                      <a:round/>
+                      <a:headEnd type="none" w="med" len="med"/>
+                      <a:tailEnd type="none" w="med" len="med"/>
+                    </a:lnB>
+                    <a:solidFill>
+                      <a:srgbClr val="F3F7FA"/>
+                    </a:solidFill>
+                  </a:tcPr>
+                </a:tc>
+              </a:tr>
+              <a:tr h="512064">
+                <a:tc>
+                  <a:txBody>
+                    <a:bodyPr/>
+                    <a:lstStyle/>
+                    <a:p>
+                      <a:pPr algn="l" indent="0" marL="0">
+                        <a:buNone/>
+                      </a:pPr>
+                      <a:r>
+                        <a:rPr lang="en-US" sz="1100" b="1" dirty="0">
+                          <a:solidFill>
+                            <a:srgbClr val="1B2A38"/>
+                          </a:solidFill>
+                          <a:latin typeface="Calibri" pitchFamily="34" charset="0"/>
+                          <a:ea typeface="Calibri" pitchFamily="34" charset="-122"/>
+                          <a:cs typeface="Calibri" pitchFamily="34" charset="-120"/>
+                        </a:rPr>
+                        <a:t>Likely benign</a:t>
+                      </a:r>
+                      <a:endParaRPr lang="en-US" sz="1100" dirty="0">
+                        <a:latin typeface="Calibri" charset="0"/>
+                        <a:ea typeface="Calibri" charset="0"/>
+                        <a:cs typeface="Calibri" charset="0"/>
+                      </a:endParaRPr>
+                    </a:p>
+                  </a:txBody>
+                  <a:tcPr marL="91440" marR="91440" marT="45720" marB="45720" anchor="ctr">
+                    <a:lnL w="9525" cap="flat" cmpd="sng" algn="ctr">
+                      <a:solidFill>
+                        <a:srgbClr val="DCE4EC"/>
+                      </a:solidFill>
+                      <a:prstDash val="solid"/>
+                      <a:round/>
+                      <a:headEnd type="none" w="med" len="med"/>
+                      <a:tailEnd type="none" w="med" len="med"/>
+                    </a:lnL>
+                    <a:lnR w="9525" cap="flat" cmpd="sng" algn="ctr">
+                      <a:solidFill>
+                        <a:srgbClr val="DCE4EC"/>
+                      </a:solidFill>
+                      <a:prstDash val="solid"/>
+                      <a:round/>
+                      <a:headEnd type="none" w="med" len="med"/>
+                      <a:tailEnd type="none" w="med" len="med"/>
+                    </a:lnR>
+                    <a:lnT w="9525" cap="flat" cmpd="sng" algn="ctr">
+                      <a:solidFill>
+                        <a:srgbClr val="DCE4EC"/>
+                      </a:solidFill>
+                      <a:prstDash val="solid"/>
+                      <a:round/>
+                      <a:headEnd type="none" w="med" len="med"/>
+                      <a:tailEnd type="none" w="med" len="med"/>
+                    </a:lnT>
+                    <a:lnB w="9525" cap="flat" cmpd="sng" algn="ctr">
+                      <a:solidFill>
+                        <a:srgbClr val="DCE4EC"/>
+                      </a:solidFill>
+                      <a:prstDash val="solid"/>
+                      <a:round/>
+                      <a:headEnd type="none" w="med" len="med"/>
+                      <a:tailEnd type="none" w="med" len="med"/>
+                    </a:lnB>
+                    <a:solidFill>
+                      <a:srgbClr val="FFFFFF"/>
+                    </a:solidFill>
+                  </a:tcPr>
+                </a:tc>
+                <a:tc>
+                  <a:txBody>
+                    <a:bodyPr/>
+                    <a:lstStyle/>
+                    <a:p>
+                      <a:pPr algn="ctr" indent="0" marL="0">
+                        <a:buNone/>
+                      </a:pPr>
+                      <a:r>
+                        <a:rPr lang="en-US" sz="1100" dirty="0">
+                          <a:solidFill>
+                            <a:srgbClr val="33444F"/>
+                          </a:solidFill>
+                          <a:latin typeface="Calibri" pitchFamily="34" charset="0"/>
+                          <a:ea typeface="Calibri" pitchFamily="34" charset="-122"/>
+                          <a:cs typeface="Calibri" pitchFamily="34" charset="-120"/>
+                        </a:rPr>
+                        <a:t>~≥90% benign</a:t>
+                      </a:r>
+                      <a:endParaRPr lang="en-US" sz="1100" dirty="0">
+                        <a:latin typeface="Calibri" charset="0"/>
+                        <a:ea typeface="Calibri" charset="0"/>
+                        <a:cs typeface="Calibri" charset="0"/>
+                      </a:endParaRPr>
+                    </a:p>
+                  </a:txBody>
+                  <a:tcPr marL="91440" marR="91440" marT="45720" marB="45720" anchor="ctr">
+                    <a:lnL w="9525" cap="flat" cmpd="sng" algn="ctr">
+                      <a:solidFill>
+                        <a:srgbClr val="DCE4EC"/>
+                      </a:solidFill>
+                      <a:prstDash val="solid"/>
+                      <a:round/>
+                      <a:headEnd type="none" w="med" len="med"/>
+                      <a:tailEnd type="none" w="med" len="med"/>
+                    </a:lnL>
+                    <a:lnR w="9525" cap="flat" cmpd="sng" algn="ctr">
+                      <a:solidFill>
+                        <a:srgbClr val="DCE4EC"/>
+                      </a:solidFill>
+                      <a:prstDash val="solid"/>
+                      <a:round/>
+                      <a:headEnd type="none" w="med" len="med"/>
+                      <a:tailEnd type="none" w="med" len="med"/>
+                    </a:lnR>
+                    <a:lnT w="9525" cap="flat" cmpd="sng" algn="ctr">
+                      <a:solidFill>
+                        <a:srgbClr val="DCE4EC"/>
+                      </a:solidFill>
+                      <a:prstDash val="solid"/>
+                      <a:round/>
+                      <a:headEnd type="none" w="med" len="med"/>
+                      <a:tailEnd type="none" w="med" len="med"/>
+                    </a:lnT>
+                    <a:lnB w="9525" cap="flat" cmpd="sng" algn="ctr">
+                      <a:solidFill>
+                        <a:srgbClr val="DCE4EC"/>
+                      </a:solidFill>
+                      <a:prstDash val="solid"/>
+                      <a:round/>
+                      <a:headEnd type="none" w="med" len="med"/>
+                      <a:tailEnd type="none" w="med" len="med"/>
+                    </a:lnB>
+                    <a:solidFill>
+                      <a:srgbClr val="FFFFFF"/>
+                    </a:solidFill>
+                  </a:tcPr>
+                </a:tc>
+                <a:tc>
+                  <a:txBody>
+                    <a:bodyPr/>
+                    <a:lstStyle/>
+                    <a:p>
+                      <a:pPr algn="ctr" indent="0" marL="0">
+                        <a:buNone/>
+                      </a:pPr>
+                      <a:r>
+                        <a:rPr lang="en-US" sz="1100" dirty="0">
+                          <a:solidFill>
+                            <a:srgbClr val="33444F"/>
+                          </a:solidFill>
+                          <a:latin typeface="Calibri" pitchFamily="34" charset="0"/>
+                          <a:ea typeface="Calibri" pitchFamily="34" charset="-122"/>
+                          <a:cs typeface="Calibri" pitchFamily="34" charset="-120"/>
+                        </a:rPr>
+                        <a:t>Generally not actionable</a:t>
+                      </a:r>
+                      <a:endParaRPr lang="en-US" sz="1100" dirty="0">
+                        <a:latin typeface="Calibri" charset="0"/>
+                        <a:ea typeface="Calibri" charset="0"/>
+                        <a:cs typeface="Calibri" charset="0"/>
+                      </a:endParaRPr>
+                    </a:p>
+                  </a:txBody>
+                  <a:tcPr marL="91440" marR="91440" marT="45720" marB="45720" anchor="ctr">
+                    <a:lnL w="9525" cap="flat" cmpd="sng" algn="ctr">
+                      <a:solidFill>
+                        <a:srgbClr val="DCE4EC"/>
+                      </a:solidFill>
+                      <a:prstDash val="solid"/>
+                      <a:round/>
+                      <a:headEnd type="none" w="med" len="med"/>
+                      <a:tailEnd type="none" w="med" len="med"/>
+                    </a:lnL>
+                    <a:lnR w="9525" cap="flat" cmpd="sng" algn="ctr">
+                      <a:solidFill>
+                        <a:srgbClr val="DCE4EC"/>
+                      </a:solidFill>
+                      <a:prstDash val="solid"/>
+                      <a:round/>
+                      <a:headEnd type="none" w="med" len="med"/>
+                      <a:tailEnd type="none" w="med" len="med"/>
+                    </a:lnR>
+                    <a:lnT w="9525" cap="flat" cmpd="sng" algn="ctr">
+                      <a:solidFill>
+                        <a:srgbClr val="DCE4EC"/>
+                      </a:solidFill>
+                      <a:prstDash val="solid"/>
+                      <a:round/>
+                      <a:headEnd type="none" w="med" len="med"/>
+                      <a:tailEnd type="none" w="med" len="med"/>
+                    </a:lnT>
+                    <a:lnB w="9525" cap="flat" cmpd="sng" algn="ctr">
+                      <a:solidFill>
+                        <a:srgbClr val="DCE4EC"/>
+                      </a:solidFill>
+                      <a:prstDash val="solid"/>
+                      <a:round/>
+                      <a:headEnd type="none" w="med" len="med"/>
+                      <a:tailEnd type="none" w="med" len="med"/>
+                    </a:lnB>
+                    <a:solidFill>
+                      <a:srgbClr val="FFFFFF"/>
+                    </a:solidFill>
+                  </a:tcPr>
+                </a:tc>
+              </a:tr>
+              <a:tr h="512064">
+                <a:tc>
+                  <a:txBody>
+                    <a:bodyPr/>
+                    <a:lstStyle/>
+                    <a:p>
+                      <a:pPr algn="l" indent="0" marL="0">
+                        <a:buNone/>
+                      </a:pPr>
+                      <a:r>
+                        <a:rPr lang="en-US" sz="1100" b="1" dirty="0">
+                          <a:solidFill>
+                            <a:srgbClr val="1B2A38"/>
+                          </a:solidFill>
+                          <a:latin typeface="Calibri" pitchFamily="34" charset="0"/>
+                          <a:ea typeface="Calibri" pitchFamily="34" charset="-122"/>
+                          <a:cs typeface="Calibri" pitchFamily="34" charset="-120"/>
+                        </a:rPr>
+                        <a:t>Benign</a:t>
+                      </a:r>
+                      <a:endParaRPr lang="en-US" sz="1100" dirty="0">
+                        <a:latin typeface="Calibri" charset="0"/>
+                        <a:ea typeface="Calibri" charset="0"/>
+                        <a:cs typeface="Calibri" charset="0"/>
+                      </a:endParaRPr>
+                    </a:p>
+                  </a:txBody>
+                  <a:tcPr marL="91440" marR="91440" marT="45720" marB="45720" anchor="ctr">
+                    <a:lnL w="9525" cap="flat" cmpd="sng" algn="ctr">
+                      <a:solidFill>
+                        <a:srgbClr val="DCE4EC"/>
+                      </a:solidFill>
+                      <a:prstDash val="solid"/>
+                      <a:round/>
+                      <a:headEnd type="none" w="med" len="med"/>
+                      <a:tailEnd type="none" w="med" len="med"/>
+                    </a:lnL>
+                    <a:lnR w="9525" cap="flat" cmpd="sng" algn="ctr">
+                      <a:solidFill>
+                        <a:srgbClr val="DCE4EC"/>
+                      </a:solidFill>
+                      <a:prstDash val="solid"/>
+                      <a:round/>
+                      <a:headEnd type="none" w="med" len="med"/>
+                      <a:tailEnd type="none" w="med" len="med"/>
+                    </a:lnR>
+                    <a:lnT w="9525" cap="flat" cmpd="sng" algn="ctr">
+                      <a:solidFill>
+                        <a:srgbClr val="DCE4EC"/>
+                      </a:solidFill>
+                      <a:prstDash val="solid"/>
+                      <a:round/>
+                      <a:headEnd type="none" w="med" len="med"/>
+                      <a:tailEnd type="none" w="med" len="med"/>
+                    </a:lnT>
+                    <a:lnB w="9525" cap="flat" cmpd="sng" algn="ctr">
+                      <a:solidFill>
+                        <a:srgbClr val="DCE4EC"/>
+                      </a:solidFill>
+                      <a:prstDash val="solid"/>
+                      <a:round/>
+                      <a:headEnd type="none" w="med" len="med"/>
+                      <a:tailEnd type="none" w="med" len="med"/>
+                    </a:lnB>
+                    <a:solidFill>
+                      <a:srgbClr val="F3F7FA"/>
+                    </a:solidFill>
+                  </a:tcPr>
+                </a:tc>
+                <a:tc>
+                  <a:txBody>
+                    <a:bodyPr/>
+                    <a:lstStyle/>
+                    <a:p>
+                      <a:pPr algn="ctr" indent="0" marL="0">
+                        <a:buNone/>
+                      </a:pPr>
+                      <a:r>
+                        <a:rPr lang="en-US" sz="1100" dirty="0">
+                          <a:solidFill>
+                            <a:srgbClr val="33444F"/>
+                          </a:solidFill>
+                          <a:latin typeface="Calibri" pitchFamily="34" charset="0"/>
+                          <a:ea typeface="Calibri" pitchFamily="34" charset="-122"/>
+                          <a:cs typeface="Calibri" pitchFamily="34" charset="-120"/>
+                        </a:rPr>
+                        <a:t>Not disease-causing</a:t>
+                      </a:r>
+                      <a:endParaRPr lang="en-US" sz="1100" dirty="0">
+                        <a:latin typeface="Calibri" charset="0"/>
+                        <a:ea typeface="Calibri" charset="0"/>
+                        <a:cs typeface="Calibri" charset="0"/>
+                      </a:endParaRPr>
+                    </a:p>
+                  </a:txBody>
+                  <a:tcPr marL="91440" marR="91440" marT="45720" marB="45720" anchor="ctr">
+                    <a:lnL w="9525" cap="flat" cmpd="sng" algn="ctr">
+                      <a:solidFill>
+                        <a:srgbClr val="DCE4EC"/>
+                      </a:solidFill>
+                      <a:prstDash val="solid"/>
+                      <a:round/>
+                      <a:headEnd type="none" w="med" len="med"/>
+                      <a:tailEnd type="none" w="med" len="med"/>
+                    </a:lnL>
+                    <a:lnR w="9525" cap="flat" cmpd="sng" algn="ctr">
+                      <a:solidFill>
+                        <a:srgbClr val="DCE4EC"/>
+                      </a:solidFill>
+                      <a:prstDash val="solid"/>
+                      <a:round/>
+                      <a:headEnd type="none" w="med" len="med"/>
+                      <a:tailEnd type="none" w="med" len="med"/>
+                    </a:lnR>
+                    <a:lnT w="9525" cap="flat" cmpd="sng" algn="ctr">
+                      <a:solidFill>
+                        <a:srgbClr val="DCE4EC"/>
+                      </a:solidFill>
+                      <a:prstDash val="solid"/>
+                      <a:round/>
+                      <a:headEnd type="none" w="med" len="med"/>
+                      <a:tailEnd type="none" w="med" len="med"/>
+                    </a:lnT>
+                    <a:lnB w="9525" cap="flat" cmpd="sng" algn="ctr">
+                      <a:solidFill>
+                        <a:srgbClr val="DCE4EC"/>
+                      </a:solidFill>
+                      <a:prstDash val="solid"/>
+                      <a:round/>
+                      <a:headEnd type="none" w="med" len="med"/>
+                      <a:tailEnd type="none" w="med" len="med"/>
+                    </a:lnB>
+                    <a:solidFill>
+                      <a:srgbClr val="F3F7FA"/>
+                    </a:solidFill>
+                  </a:tcPr>
+                </a:tc>
+                <a:tc>
+                  <a:txBody>
+                    <a:bodyPr/>
+                    <a:lstStyle/>
+                    <a:p>
+                      <a:pPr algn="ctr" indent="0" marL="0">
+                        <a:buNone/>
+                      </a:pPr>
+                      <a:r>
+                        <a:rPr lang="en-US" sz="1100" dirty="0">
+                          <a:solidFill>
+                            <a:srgbClr val="33444F"/>
+                          </a:solidFill>
+                          <a:latin typeface="Calibri" pitchFamily="34" charset="0"/>
+                          <a:ea typeface="Calibri" pitchFamily="34" charset="-122"/>
+                          <a:cs typeface="Calibri" pitchFamily="34" charset="-120"/>
+                        </a:rPr>
+                        <a:t>Not actionable</a:t>
+                      </a:r>
+                      <a:endParaRPr lang="en-US" sz="1100" dirty="0">
+                        <a:latin typeface="Calibri" charset="0"/>
+                        <a:ea typeface="Calibri" charset="0"/>
+                        <a:cs typeface="Calibri" charset="0"/>
+                      </a:endParaRPr>
+                    </a:p>
+                  </a:txBody>
+                  <a:tcPr marL="91440" marR="91440" marT="45720" marB="45720" anchor="ctr">
+                    <a:lnL w="9525" cap="flat" cmpd="sng" algn="ctr">
+                      <a:solidFill>
+                        <a:srgbClr val="DCE4EC"/>
+                      </a:solidFill>
+                      <a:prstDash val="solid"/>
+                      <a:round/>
+                      <a:headEnd type="none" w="med" len="med"/>
+                      <a:tailEnd type="none" w="med" len="med"/>
+                    </a:lnL>
+                    <a:lnR w="9525" cap="flat" cmpd="sng" algn="ctr">
+                      <a:solidFill>
+                        <a:srgbClr val="DCE4EC"/>
+                      </a:solidFill>
+                      <a:prstDash val="solid"/>
+                      <a:round/>
+                      <a:headEnd type="none" w="med" len="med"/>
+                      <a:tailEnd type="none" w="med" len="med"/>
+                    </a:lnR>
+                    <a:lnT w="9525" cap="flat" cmpd="sng" algn="ctr">
+                      <a:solidFill>
+                        <a:srgbClr val="DCE4EC"/>
+                      </a:solidFill>
+                      <a:prstDash val="solid"/>
+                      <a:round/>
+                      <a:headEnd type="none" w="med" len="med"/>
+                      <a:tailEnd type="none" w="med" len="med"/>
+                    </a:lnT>
+                    <a:lnB w="9525" cap="flat" cmpd="sng" algn="ctr">
+                      <a:solidFill>
+                        <a:srgbClr val="DCE4EC"/>
+                      </a:solidFill>
+                      <a:prstDash val="solid"/>
+                      <a:round/>
+                      <a:headEnd type="none" w="med" len="med"/>
+                      <a:tailEnd type="none" w="med" len="med"/>
+                    </a:lnB>
+                    <a:solidFill>
+                      <a:srgbClr val="F3F7FA"/>
+                    </a:solidFill>
+                  </a:tcPr>
+                </a:tc>
+              </a:tr>
+            </a:tbl>
+          </a:graphicData>
+        </a:graphic>
+      </p:graphicFrame>
+      <p:sp>
+        <p:nvSpPr>
+          <p:cNvPr id="5" name="Text 2"/>
+          <p:cNvSpPr/>
+          <p:nvPr/>
+        </p:nvSpPr>
+        <p:spPr>
+          <a:xfrm>
+            <a:off x="566928" y="6016752"/>
+            <a:ext cx="11057839" cy="365760"/>
+          </a:xfrm>
+          <a:prstGeom prst="rect">
+            <a:avLst/>
+          </a:prstGeom>
+          <a:noFill/>
+          <a:ln/>
+        </p:spPr>
+        <p:txBody>
+          <a:bodyPr wrap="square" lIns="0" tIns="0" rIns="0" bIns="0" rtlCol="0" anchor="ctr"/>
+          <a:lstStyle/>
+          <a:p>
+            <a:pPr algn="l" indent="0" marL="0">
+              <a:buNone/>
+            </a:pPr>
+            <a:r>
+              <a:rPr lang="en-US" sz="1050" i="1" dirty="0">
+                <a:solidFill>
+                  <a:srgbClr val="6B7B8A"/>
+                </a:solidFill>
+                <a:latin typeface="Calibri" pitchFamily="34" charset="0"/>
+                <a:ea typeface="Calibri" pitchFamily="34" charset="-122"/>
+                <a:cs typeface="Calibri" pitchFamily="34" charset="-120"/>
+              </a:rPr>
+              <a:t>Likely pathogenic/likely benign imply high (not absolute) certainty; VUS requires caution and possible reanalysis.</a:t>
+            </a:r>
+            <a:endParaRPr lang="en-US" sz="1050" dirty="0"/>
+          </a:p>
+        </p:txBody>
+      </p:sp>
+      <p:sp>
+        <p:nvSpPr>
+          <p:cNvPr id="6" name="Text 3"/>
+          <p:cNvSpPr/>
+          <p:nvPr/>
+        </p:nvSpPr>
+        <p:spPr>
+          <a:xfrm>
+            <a:off x="566928" y="6473952"/>
+            <a:ext cx="7772400" cy="274320"/>
+          </a:xfrm>
+          <a:prstGeom prst="rect">
+            <a:avLst/>
+          </a:prstGeom>
+          <a:noFill/>
+          <a:ln/>
+        </p:spPr>
+        <p:txBody>
+          <a:bodyPr wrap="square" lIns="0" tIns="0" rIns="0" bIns="0" rtlCol="0" anchor="ctr"/>
+          <a:lstStyle/>
+          <a:p>
+            <a:pPr algn="l" indent="0" marL="0">
+              <a:buNone/>
+            </a:pPr>
+            <a:r>
+              <a:rPr lang="en-US" sz="850" dirty="0">
+                <a:solidFill>
+                  <a:srgbClr val="9AA8B4"/>
+                </a:solidFill>
+                <a:latin typeface="Calibri" pitchFamily="34" charset="0"/>
+                <a:ea typeface="Calibri" pitchFamily="34" charset="-122"/>
+                <a:cs typeface="Calibri" pitchFamily="34" charset="-120"/>
+              </a:rPr>
+              <a:t>Makassed General Hospital  ·  Department of Laboratory Medicine</a:t>
+            </a:r>
+            <a:endParaRPr lang="en-US" sz="850" dirty="0"/>
+          </a:p>
+        </p:txBody>
+      </p:sp>
+      <p:sp>
+        <p:nvSpPr>
+          <p:cNvPr id="7" name="Text 4"/>
+          <p:cNvSpPr/>
+          <p:nvPr/>
+        </p:nvSpPr>
+        <p:spPr>
+          <a:xfrm>
+            <a:off x="9814255" y="6473952"/>
+            <a:ext cx="1828800" cy="274320"/>
+          </a:xfrm>
+          <a:prstGeom prst="rect">
+            <a:avLst/>
+          </a:prstGeom>
+          <a:noFill/>
+          <a:ln/>
+        </p:spPr>
+        <p:txBody>
+          <a:bodyPr wrap="square" lIns="0" tIns="0" rIns="0" bIns="0" rtlCol="0" anchor="ctr"/>
+          <a:lstStyle/>
+          <a:p>
+            <a:pPr algn="r" indent="0" marL="0">
+              <a:buNone/>
+            </a:pPr>
+            <a:r>
+              <a:rPr lang="en-US" sz="850" dirty="0">
+                <a:solidFill>
+                  <a:srgbClr val="9AA8B4"/>
+                </a:solidFill>
+                <a:latin typeface="Calibri" pitchFamily="34" charset="0"/>
+                <a:ea typeface="Calibri" pitchFamily="34" charset="-122"/>
+                <a:cs typeface="Calibri" pitchFamily="34" charset="-120"/>
+              </a:rPr>
+              <a:t>CP Lecture Series</a:t>
+            </a:r>
+            <a:pPr algn="r" indent="0" marL="0">
+              <a:buNone/>
+            </a:pPr>
+            <a:r>
+              <a:rPr lang="en-US" sz="850" dirty="0">
+                <a:solidFill>
+                  <a:srgbClr val="DCE4EC"/>
+                </a:solidFill>
+                <a:latin typeface="Calibri" pitchFamily="34" charset="0"/>
+                <a:ea typeface="Calibri" pitchFamily="34" charset="-122"/>
+                <a:cs typeface="Calibri" pitchFamily="34" charset="-120"/>
+              </a:rPr>
+              <a:t>   ·   </a:t>
+            </a:r>
+            <a:pPr algn="r" indent="0" marL="0">
+              <a:buNone/>
+            </a:pPr>
+            <a:r>
+              <a:rPr lang="en-US" sz="850" b="1" dirty="0">
+                <a:solidFill>
+                  <a:srgbClr val="00838F"/>
+                </a:solidFill>
+                <a:latin typeface="Calibri" pitchFamily="34" charset="0"/>
+                <a:ea typeface="Calibri" pitchFamily="34" charset="-122"/>
+                <a:cs typeface="Calibri" pitchFamily="34" charset="-120"/>
+              </a:rPr>
+              <a:t>10</a:t>
+            </a:r>
+            <a:endParaRPr lang="en-US" sz="850" dirty="0"/>
+          </a:p>
+        </p:txBody>
+      </p:sp>
+    </p:spTree>
+  </p:cSld>
+  <p:clrMapOvr>
+    <a:masterClrMapping/>
+  </p:clrMapOvr>
+</p:sld>
+</file>
+
+<file path=ppt/slides/slide13.xml><?xml version="1.0" encoding="utf-8"?>
+<p:sld xmlns:a="http://schemas.openxmlformats.org/drawingml/2006/main" xmlns:r="http://schemas.openxmlformats.org/officeDocument/2006/relationships" xmlns:p="http://schemas.openxmlformats.org/presentationml/2006/main">
+  <p:cSld name="Slide 13">
     <p:bg>
       <p:bgPr>
         <a:solidFill>
@@ -4338,439 +6216,6 @@
               <a:t>Cases &amp; Board Review</a:t>
             </a:r>
             <a:endParaRPr lang="en-US" sz="3800" dirty="0"/>
-          </a:p>
-        </p:txBody>
-      </p:sp>
-    </p:spTree>
-  </p:cSld>
-  <p:clrMapOvr>
-    <a:masterClrMapping/>
-  </p:clrMapOvr>
-</p:sld>
-</file>
-
-<file path=ppt/slides/slide13.xml><?xml version="1.0" encoding="utf-8"?>
-<p:sld xmlns:a="http://schemas.openxmlformats.org/drawingml/2006/main" xmlns:r="http://schemas.openxmlformats.org/officeDocument/2006/relationships" xmlns:p="http://schemas.openxmlformats.org/presentationml/2006/main">
-  <p:cSld name="Slide 13">
-    <p:bg>
-      <p:bgPr>
-        <a:solidFill>
-          <a:srgbClr val="FFFFFF"/>
-        </a:solidFill>
-      </p:bgPr>
-    </p:bg>
-    <p:spTree>
-      <p:nvGrpSpPr>
-        <p:cNvPr id="1" name=""/>
-        <p:cNvGrpSpPr/>
-        <p:nvPr/>
-      </p:nvGrpSpPr>
-      <p:grpSpPr>
-        <a:xfrm>
-          <a:off x="0" y="0"/>
-          <a:ext cx="0" cy="0"/>
-          <a:chOff x="0" y="0"/>
-          <a:chExt cx="0" cy="0"/>
-        </a:xfrm>
-      </p:grpSpPr>
-      <p:sp>
-        <p:nvSpPr>
-          <p:cNvPr id="2" name="Text 0"/>
-          <p:cNvSpPr/>
-          <p:nvPr/>
-        </p:nvSpPr>
-        <p:spPr>
-          <a:xfrm>
-            <a:off x="566928" y="329184"/>
-            <a:ext cx="10515600" cy="310896"/>
-          </a:xfrm>
-          <a:prstGeom prst="rect">
-            <a:avLst/>
-          </a:prstGeom>
-          <a:noFill/>
-          <a:ln/>
-        </p:spPr>
-        <p:txBody>
-          <a:bodyPr wrap="square" lIns="0" tIns="0" rIns="0" bIns="0" rtlCol="0" anchor="ctr"/>
-          <a:lstStyle/>
-          <a:p>
-            <a:pPr algn="l" indent="0" marL="0">
-              <a:buNone/>
-            </a:pPr>
-            <a:r>
-              <a:rPr lang="en-US" sz="1100" b="1" spc="150" kern="0" dirty="0">
-                <a:solidFill>
-                  <a:srgbClr val="00838F"/>
-                </a:solidFill>
-                <a:latin typeface="Calibri" pitchFamily="34" charset="0"/>
-                <a:ea typeface="Calibri" pitchFamily="34" charset="-122"/>
-                <a:cs typeface="Calibri" pitchFamily="34" charset="-120"/>
-              </a:rPr>
-              <a:t>MOLECULAR &amp; CYTOGENETICS   ·   CASE 1</a:t>
-            </a:r>
-            <a:endParaRPr lang="en-US" sz="1100" dirty="0"/>
-          </a:p>
-        </p:txBody>
-      </p:sp>
-      <p:sp>
-        <p:nvSpPr>
-          <p:cNvPr id="3" name="Text 1"/>
-          <p:cNvSpPr/>
-          <p:nvPr/>
-        </p:nvSpPr>
-        <p:spPr>
-          <a:xfrm>
-            <a:off x="566928" y="713232"/>
-            <a:ext cx="11064240" cy="749808"/>
-          </a:xfrm>
-          <a:prstGeom prst="rect">
-            <a:avLst/>
-          </a:prstGeom>
-          <a:noFill/>
-          <a:ln/>
-        </p:spPr>
-        <p:txBody>
-          <a:bodyPr wrap="square" lIns="0" tIns="0" rIns="0" bIns="0" rtlCol="0" anchor="ctr"/>
-          <a:lstStyle/>
-          <a:p>
-            <a:pPr algn="l" indent="0" marL="0">
-              <a:buNone/>
-            </a:pPr>
-            <a:r>
-              <a:rPr lang="en-US" sz="3000" b="1" dirty="0">
-                <a:solidFill>
-                  <a:srgbClr val="0E3A5F"/>
-                </a:solidFill>
-                <a:latin typeface="Calibri" pitchFamily="34" charset="0"/>
-                <a:ea typeface="Calibri" pitchFamily="34" charset="-122"/>
-                <a:cs typeface="Calibri" pitchFamily="34" charset="-120"/>
-              </a:rPr>
-              <a:t>Case 1</a:t>
-            </a:r>
-            <a:endParaRPr lang="en-US" sz="3000" dirty="0"/>
-          </a:p>
-        </p:txBody>
-      </p:sp>
-      <p:sp>
-        <p:nvSpPr>
-          <p:cNvPr id="4" name="Shape 2"/>
-          <p:cNvSpPr/>
-          <p:nvPr/>
-        </p:nvSpPr>
-        <p:spPr>
-          <a:xfrm>
-            <a:off x="566928" y="1517904"/>
-            <a:ext cx="11057839" cy="2788920"/>
-          </a:xfrm>
-          <a:prstGeom prst="roundRect">
-            <a:avLst>
-              <a:gd name="adj" fmla="val 2951"/>
-            </a:avLst>
-          </a:prstGeom>
-          <a:solidFill>
-            <a:srgbClr val="E0F2F4"/>
-          </a:solidFill>
-          <a:ln/>
-          <a:effectLst>
-            <a:outerShdw sx="100000" sy="100000" kx="0" ky="0" algn="bl" rotWithShape="0" blurRad="88900" dist="25400" dir="5400000">
-              <a:srgbClr val="22303C">
-                <a:alpha val="12000"/>
-              </a:srgbClr>
-            </a:outerShdw>
-          </a:effectLst>
-        </p:spPr>
-      </p:sp>
-      <p:sp>
-        <p:nvSpPr>
-          <p:cNvPr id="5" name="Text 3"/>
-          <p:cNvSpPr/>
-          <p:nvPr/>
-        </p:nvSpPr>
-        <p:spPr>
-          <a:xfrm>
-            <a:off x="841248" y="1700784"/>
-            <a:ext cx="5486400" cy="292608"/>
-          </a:xfrm>
-          <a:prstGeom prst="rect">
-            <a:avLst/>
-          </a:prstGeom>
-          <a:noFill/>
-          <a:ln/>
-        </p:spPr>
-        <p:txBody>
-          <a:bodyPr wrap="square" lIns="0" tIns="0" rIns="0" bIns="0" rtlCol="0" anchor="ctr"/>
-          <a:lstStyle/>
-          <a:p>
-            <a:pPr indent="0" marL="0">
-              <a:buNone/>
-            </a:pPr>
-            <a:r>
-              <a:rPr lang="en-US" sz="1100" b="1" spc="150" kern="0" dirty="0">
-                <a:solidFill>
-                  <a:srgbClr val="00838F"/>
-                </a:solidFill>
-                <a:latin typeface="Calibri" pitchFamily="34" charset="0"/>
-                <a:ea typeface="Calibri" pitchFamily="34" charset="-122"/>
-                <a:cs typeface="Calibri" pitchFamily="34" charset="-120"/>
-              </a:rPr>
-              <a:t>CLINICAL VIGNETTE</a:t>
-            </a:r>
-            <a:endParaRPr lang="en-US" sz="1100" dirty="0"/>
-          </a:p>
-        </p:txBody>
-      </p:sp>
-      <p:sp>
-        <p:nvSpPr>
-          <p:cNvPr id="6" name="Text 4"/>
-          <p:cNvSpPr/>
-          <p:nvPr/>
-        </p:nvSpPr>
-        <p:spPr>
-          <a:xfrm>
-            <a:off x="841248" y="2029968"/>
-            <a:ext cx="10509199" cy="2148840"/>
-          </a:xfrm>
-          <a:prstGeom prst="rect">
-            <a:avLst/>
-          </a:prstGeom>
-          <a:noFill/>
-          <a:ln/>
-        </p:spPr>
-        <p:txBody>
-          <a:bodyPr wrap="square" lIns="0" tIns="0" rIns="0" bIns="0" rtlCol="0" anchor="t"/>
-          <a:lstStyle/>
-          <a:p>
-            <a:pPr algn="l" indent="0" marL="0">
-              <a:lnSpc>
-                <a:spcPct val="108000"/>
-              </a:lnSpc>
-              <a:buNone/>
-            </a:pPr>
-            <a:r>
-              <a:rPr lang="en-US" sz="1450" dirty="0">
-                <a:solidFill>
-                  <a:srgbClr val="33444F"/>
-                </a:solidFill>
-                <a:latin typeface="Calibri" pitchFamily="34" charset="0"/>
-                <a:ea typeface="Calibri" pitchFamily="34" charset="-122"/>
-                <a:cs typeface="Calibri" pitchFamily="34" charset="-120"/>
-              </a:rPr>
-              <a:t>A tumor NGS panel reports an EGFR variant with strong evidence supporting response to a targeted therapy in this tumor type.</a:t>
-            </a:r>
-            <a:endParaRPr lang="en-US" sz="1450" dirty="0"/>
-          </a:p>
-        </p:txBody>
-      </p:sp>
-      <p:sp>
-        <p:nvSpPr>
-          <p:cNvPr id="7" name="Shape 5"/>
-          <p:cNvSpPr/>
-          <p:nvPr/>
-        </p:nvSpPr>
-        <p:spPr>
-          <a:xfrm>
-            <a:off x="566928" y="4553712"/>
-            <a:ext cx="11057839" cy="1325880"/>
-          </a:xfrm>
-          <a:prstGeom prst="roundRect">
-            <a:avLst>
-              <a:gd name="adj" fmla="val 6207"/>
-            </a:avLst>
-          </a:prstGeom>
-          <a:solidFill>
-            <a:srgbClr val="0E3A5F"/>
-          </a:solidFill>
-          <a:ln/>
-          <a:effectLst>
-            <a:outerShdw sx="100000" sy="100000" kx="0" ky="0" algn="bl" rotWithShape="0" blurRad="88900" dist="25400" dir="5400000">
-              <a:srgbClr val="22303C">
-                <a:alpha val="12000"/>
-              </a:srgbClr>
-            </a:outerShdw>
-          </a:effectLst>
-        </p:spPr>
-      </p:sp>
-      <p:sp>
-        <p:nvSpPr>
-          <p:cNvPr id="8" name="Text 6"/>
-          <p:cNvSpPr/>
-          <p:nvPr/>
-        </p:nvSpPr>
-        <p:spPr>
-          <a:xfrm>
-            <a:off x="822960" y="4681728"/>
-            <a:ext cx="640080" cy="960120"/>
-          </a:xfrm>
-          <a:prstGeom prst="rect">
-            <a:avLst/>
-          </a:prstGeom>
-          <a:noFill/>
-          <a:ln/>
-        </p:spPr>
-        <p:txBody>
-          <a:bodyPr wrap="square" lIns="0" tIns="0" rIns="0" bIns="0" rtlCol="0" anchor="ctr"/>
-          <a:lstStyle/>
-          <a:p>
-            <a:pPr algn="ctr" indent="0" marL="0">
-              <a:buNone/>
-            </a:pPr>
-            <a:r>
-              <a:rPr lang="en-US" sz="4000" b="1" dirty="0">
-                <a:solidFill>
-                  <a:srgbClr val="00838F"/>
-                </a:solidFill>
-                <a:latin typeface="Calibri" pitchFamily="34" charset="0"/>
-                <a:ea typeface="Calibri" pitchFamily="34" charset="-122"/>
-                <a:cs typeface="Calibri" pitchFamily="34" charset="-120"/>
-              </a:rPr>
-              <a:t>?</a:t>
-            </a:r>
-            <a:endParaRPr lang="en-US" sz="4000" dirty="0"/>
-          </a:p>
-        </p:txBody>
-      </p:sp>
-      <p:sp>
-        <p:nvSpPr>
-          <p:cNvPr id="9" name="Text 7"/>
-          <p:cNvSpPr/>
-          <p:nvPr/>
-        </p:nvSpPr>
-        <p:spPr>
-          <a:xfrm>
-            <a:off x="1618488" y="4553712"/>
-            <a:ext cx="9686239" cy="1325880"/>
-          </a:xfrm>
-          <a:prstGeom prst="rect">
-            <a:avLst/>
-          </a:prstGeom>
-          <a:noFill/>
-          <a:ln/>
-        </p:spPr>
-        <p:txBody>
-          <a:bodyPr wrap="square" lIns="0" tIns="0" rIns="0" bIns="0" rtlCol="0" anchor="ctr"/>
-          <a:lstStyle/>
-          <a:p>
-            <a:pPr algn="l" indent="0" marL="0">
-              <a:buNone/>
-            </a:pPr>
-            <a:r>
-              <a:rPr lang="en-US" sz="1500" b="1" dirty="0">
-                <a:solidFill>
-                  <a:srgbClr val="FFFFFF"/>
-                </a:solidFill>
-                <a:latin typeface="Calibri" pitchFamily="34" charset="0"/>
-                <a:ea typeface="Calibri" pitchFamily="34" charset="-122"/>
-                <a:cs typeface="Calibri" pitchFamily="34" charset="-120"/>
-              </a:rPr>
-              <a:t>How should this be tiered, and what does that mean for the report?</a:t>
-            </a:r>
-            <a:endParaRPr lang="en-US" sz="1500" dirty="0"/>
-          </a:p>
-        </p:txBody>
-      </p:sp>
-      <p:sp>
-        <p:nvSpPr>
-          <p:cNvPr id="10" name="Text 8"/>
-          <p:cNvSpPr/>
-          <p:nvPr/>
-        </p:nvSpPr>
-        <p:spPr>
-          <a:xfrm>
-            <a:off x="566928" y="6473952"/>
-            <a:ext cx="7772400" cy="274320"/>
-          </a:xfrm>
-          <a:prstGeom prst="rect">
-            <a:avLst/>
-          </a:prstGeom>
-          <a:noFill/>
-          <a:ln/>
-        </p:spPr>
-        <p:txBody>
-          <a:bodyPr wrap="square" lIns="0" tIns="0" rIns="0" bIns="0" rtlCol="0" anchor="ctr"/>
-          <a:lstStyle/>
-          <a:p>
-            <a:pPr algn="l" indent="0" marL="0">
-              <a:buNone/>
-            </a:pPr>
-            <a:r>
-              <a:rPr lang="en-US" sz="850" dirty="0">
-                <a:solidFill>
-                  <a:srgbClr val="9AA8B4"/>
-                </a:solidFill>
-                <a:latin typeface="Calibri" pitchFamily="34" charset="0"/>
-                <a:ea typeface="Calibri" pitchFamily="34" charset="-122"/>
-                <a:cs typeface="Calibri" pitchFamily="34" charset="-120"/>
-              </a:rPr>
-              <a:t>Makassed General Hospital  ·  Department of Laboratory Medicine</a:t>
-            </a:r>
-            <a:endParaRPr lang="en-US" sz="850" dirty="0"/>
-          </a:p>
-        </p:txBody>
-      </p:sp>
-      <p:sp>
-        <p:nvSpPr>
-          <p:cNvPr id="11" name="Text 9"/>
-          <p:cNvSpPr/>
-          <p:nvPr/>
-        </p:nvSpPr>
-        <p:spPr>
-          <a:xfrm>
-            <a:off x="9814255" y="6473952"/>
-            <a:ext cx="1828800" cy="274320"/>
-          </a:xfrm>
-          <a:prstGeom prst="rect">
-            <a:avLst/>
-          </a:prstGeom>
-          <a:noFill/>
-          <a:ln/>
-        </p:spPr>
-        <p:txBody>
-          <a:bodyPr wrap="square" lIns="0" tIns="0" rIns="0" bIns="0" rtlCol="0" anchor="ctr"/>
-          <a:lstStyle/>
-          <a:p>
-            <a:pPr algn="r" indent="0" marL="0">
-              <a:buNone/>
-            </a:pPr>
-            <a:r>
-              <a:rPr lang="en-US" sz="850" dirty="0">
-                <a:solidFill>
-                  <a:srgbClr val="9AA8B4"/>
-                </a:solidFill>
-                <a:latin typeface="Calibri" pitchFamily="34" charset="0"/>
-                <a:ea typeface="Calibri" pitchFamily="34" charset="-122"/>
-                <a:cs typeface="Calibri" pitchFamily="34" charset="-120"/>
-              </a:rPr>
-              <a:t>CP Lecture Series</a:t>
-            </a:r>
-            <a:pPr algn="r" indent="0" marL="0">
-              <a:buNone/>
-            </a:pPr>
-            <a:r>
-              <a:rPr lang="en-US" sz="850" dirty="0">
-                <a:solidFill>
-                  <a:srgbClr val="DCE4EC"/>
-                </a:solidFill>
-                <a:latin typeface="Calibri" pitchFamily="34" charset="0"/>
-                <a:ea typeface="Calibri" pitchFamily="34" charset="-122"/>
-                <a:cs typeface="Calibri" pitchFamily="34" charset="-120"/>
-              </a:rPr>
-              <a:t>   ·   </a:t>
-            </a:r>
-            <a:pPr algn="r" indent="0" marL="0">
-              <a:buNone/>
-            </a:pPr>
-            <a:r>
-              <a:rPr lang="en-US" sz="850" b="1" dirty="0">
-                <a:solidFill>
-                  <a:srgbClr val="00838F"/>
-                </a:solidFill>
-                <a:latin typeface="Calibri" pitchFamily="34" charset="0"/>
-                <a:ea typeface="Calibri" pitchFamily="34" charset="-122"/>
-                <a:cs typeface="Calibri" pitchFamily="34" charset="-120"/>
-              </a:rPr>
-              <a:t>10</a:t>
-            </a:r>
-            <a:endParaRPr lang="en-US" sz="850" dirty="0"/>
           </a:p>
         </p:txBody>
       </p:sp>
@@ -4839,7 +6284,7 @@
                 <a:ea typeface="Calibri" pitchFamily="34" charset="-122"/>
                 <a:cs typeface="Calibri" pitchFamily="34" charset="-120"/>
               </a:rPr>
-              <a:t>MOLECULAR &amp; CYTOGENETICS   ·   CASE 1  ·  RESOLUTION</a:t>
+              <a:t>MOLECULAR &amp; CYTOGENETICS   ·   CASE 1</a:t>
             </a:r>
             <a:endParaRPr lang="en-US" sz="1100" dirty="0"/>
           </a:p>
@@ -4878,7 +6323,7 @@
                 <a:ea typeface="Calibri" pitchFamily="34" charset="-122"/>
                 <a:cs typeface="Calibri" pitchFamily="34" charset="-120"/>
               </a:rPr>
-              <a:t>Case 1: Tier I Somatic Variant</a:t>
+              <a:t>Case 1</a:t>
             </a:r>
             <a:endParaRPr lang="en-US" sz="3000" dirty="0"/>
           </a:p>
@@ -4886,124 +6331,18 @@
       </p:sp>
       <p:sp>
         <p:nvSpPr>
-          <p:cNvPr id="4" name="Text 2"/>
-          <p:cNvSpPr/>
-          <p:nvPr/>
-        </p:nvSpPr>
-        <p:spPr>
-          <a:xfrm>
-            <a:off x="566928" y="1554480"/>
-            <a:ext cx="6413547" cy="4023360"/>
-          </a:xfrm>
-          <a:prstGeom prst="rect">
-            <a:avLst/>
-          </a:prstGeom>
-          <a:noFill/>
-          <a:ln/>
-        </p:spPr>
-        <p:txBody>
-          <a:bodyPr wrap="square" lIns="0" tIns="0" rIns="0" bIns="0" rtlCol="0" anchor="t"/>
-          <a:lstStyle/>
-          <a:p>
-            <a:pPr algn="l" marL="177800" indent="-177800">
-              <a:spcAft>
-                <a:spcPts val="900"/>
-              </a:spcAft>
-              <a:buSzPct val="100000"/>
-              <a:buChar char="•"/>
-            </a:pPr>
-            <a:r>
-              <a:rPr lang="en-US" sz="1400" b="1" dirty="0">
-                <a:solidFill>
-                  <a:srgbClr val="1B2A38"/>
-                </a:solidFill>
-                <a:latin typeface="Calibri" pitchFamily="34" charset="0"/>
-                <a:ea typeface="Calibri" pitchFamily="34" charset="-122"/>
-                <a:cs typeface="Calibri" pitchFamily="34" charset="-120"/>
-              </a:rPr>
-              <a:t>A variant with strong, tumor-type-specific evidence for a targeted therapy is Tier I (strong clinical significance).</a:t>
-            </a:r>
-            <a:endParaRPr lang="en-US" sz="1400" dirty="0"/>
-          </a:p>
-          <a:p>
-            <a:pPr algn="l" marL="177800" indent="-177800">
-              <a:spcAft>
-                <a:spcPts val="900"/>
-              </a:spcAft>
-              <a:buSzPct val="100000"/>
-              <a:buChar char="•"/>
-            </a:pPr>
-            <a:r>
-              <a:rPr lang="en-US" sz="1400" dirty="0">
-                <a:solidFill>
-                  <a:srgbClr val="33444F"/>
-                </a:solidFill>
-                <a:latin typeface="Calibri" pitchFamily="34" charset="0"/>
-                <a:ea typeface="Calibri" pitchFamily="34" charset="-122"/>
-                <a:cs typeface="Calibri" pitchFamily="34" charset="-120"/>
-              </a:rPr>
-              <a:t>Report it prominently with the associated therapeutic implication.</a:t>
-            </a:r>
-            <a:endParaRPr lang="en-US" sz="1400" dirty="0"/>
-          </a:p>
-          <a:p>
-            <a:pPr algn="l" marL="177800" indent="-177800">
-              <a:spcAft>
-                <a:spcPts val="900"/>
-              </a:spcAft>
-              <a:buSzPct val="100000"/>
-              <a:buChar char="•"/>
-            </a:pPr>
-            <a:r>
-              <a:rPr lang="en-US" sz="1400" dirty="0">
-                <a:solidFill>
-                  <a:srgbClr val="33444F"/>
-                </a:solidFill>
-                <a:latin typeface="Calibri" pitchFamily="34" charset="0"/>
-                <a:ea typeface="Calibri" pitchFamily="34" charset="-122"/>
-                <a:cs typeface="Calibri" pitchFamily="34" charset="-120"/>
-              </a:rPr>
-              <a:t>Somatic tiering reflects ACTIONABILITY, not pathogenicity per se.</a:t>
-            </a:r>
-            <a:endParaRPr lang="en-US" sz="1400" dirty="0"/>
-          </a:p>
-          <a:p>
-            <a:pPr algn="l" marL="177800" indent="-177800">
-              <a:spcAft>
-                <a:spcPts val="900"/>
-              </a:spcAft>
-              <a:buSzPct val="100000"/>
-              <a:buChar char="•"/>
-            </a:pPr>
-            <a:r>
-              <a:rPr lang="en-US" sz="1400" dirty="0">
-                <a:solidFill>
-                  <a:srgbClr val="33444F"/>
-                </a:solidFill>
-                <a:latin typeface="Calibri" pitchFamily="34" charset="0"/>
-                <a:ea typeface="Calibri" pitchFamily="34" charset="-122"/>
-                <a:cs typeface="Calibri" pitchFamily="34" charset="-120"/>
-              </a:rPr>
-              <a:t>The same variant could be a different tier in another tumor type.</a:t>
-            </a:r>
-            <a:endParaRPr lang="en-US" sz="1400" dirty="0"/>
-          </a:p>
-        </p:txBody>
-      </p:sp>
-      <p:sp>
-        <p:nvSpPr>
-          <p:cNvPr id="5" name="Shape 3"/>
-          <p:cNvSpPr/>
-          <p:nvPr/>
-        </p:nvSpPr>
-        <p:spPr>
-          <a:xfrm>
-            <a:off x="7422788" y="1554480"/>
-            <a:ext cx="4201979" cy="3977640"/>
+          <p:cNvPr id="4" name="Shape 2"/>
+          <p:cNvSpPr/>
+          <p:nvPr/>
+        </p:nvSpPr>
+        <p:spPr>
+          <a:xfrm>
+            <a:off x="566928" y="1517904"/>
+            <a:ext cx="11057839" cy="2788920"/>
           </a:xfrm>
           <a:prstGeom prst="roundRect">
             <a:avLst>
-              <a:gd name="adj" fmla="val 2069"/>
+              <a:gd name="adj" fmla="val 2951"/>
             </a:avLst>
           </a:prstGeom>
           <a:solidFill>
@@ -5021,53 +6360,53 @@
       </p:sp>
       <p:sp>
         <p:nvSpPr>
+          <p:cNvPr id="5" name="Text 3"/>
+          <p:cNvSpPr/>
+          <p:nvPr/>
+        </p:nvSpPr>
+        <p:spPr>
+          <a:xfrm>
+            <a:off x="841248" y="1700784"/>
+            <a:ext cx="5486400" cy="292608"/>
+          </a:xfrm>
+          <a:prstGeom prst="rect">
+            <a:avLst/>
+          </a:prstGeom>
+          <a:noFill/>
+          <a:ln/>
+        </p:spPr>
+        <p:txBody>
+          <a:bodyPr wrap="square" lIns="0" tIns="0" rIns="0" bIns="0" rtlCol="0" anchor="ctr"/>
+          <a:lstStyle/>
+          <a:p>
+            <a:pPr indent="0" marL="0">
+              <a:buNone/>
+            </a:pPr>
+            <a:r>
+              <a:rPr lang="en-US" sz="1100" b="1" spc="150" kern="0" dirty="0">
+                <a:solidFill>
+                  <a:srgbClr val="00838F"/>
+                </a:solidFill>
+                <a:latin typeface="Calibri" pitchFamily="34" charset="0"/>
+                <a:ea typeface="Calibri" pitchFamily="34" charset="-122"/>
+                <a:cs typeface="Calibri" pitchFamily="34" charset="-120"/>
+              </a:rPr>
+              <a:t>CLINICAL VIGNETTE</a:t>
+            </a:r>
+            <a:endParaRPr lang="en-US" sz="1100" dirty="0"/>
+          </a:p>
+        </p:txBody>
+      </p:sp>
+      <p:sp>
+        <p:nvSpPr>
           <p:cNvPr id="6" name="Text 4"/>
           <p:cNvSpPr/>
           <p:nvPr/>
         </p:nvSpPr>
         <p:spPr>
           <a:xfrm>
-            <a:off x="7660532" y="1755648"/>
-            <a:ext cx="3744779" cy="310896"/>
-          </a:xfrm>
-          <a:prstGeom prst="rect">
-            <a:avLst/>
-          </a:prstGeom>
-          <a:noFill/>
-          <a:ln/>
-        </p:spPr>
-        <p:txBody>
-          <a:bodyPr wrap="square" lIns="0" tIns="0" rIns="0" bIns="0" rtlCol="0" anchor="ctr"/>
-          <a:lstStyle/>
-          <a:p>
-            <a:pPr indent="0" marL="0">
-              <a:buNone/>
-            </a:pPr>
-            <a:r>
-              <a:rPr lang="en-US" sz="1100" b="1" spc="140" kern="0" dirty="0">
-                <a:solidFill>
-                  <a:srgbClr val="00838F"/>
-                </a:solidFill>
-                <a:latin typeface="Calibri" pitchFamily="34" charset="0"/>
-                <a:ea typeface="Calibri" pitchFamily="34" charset="-122"/>
-                <a:cs typeface="Calibri" pitchFamily="34" charset="-120"/>
-              </a:rPr>
-              <a:t>TEACHING POINT</a:t>
-            </a:r>
-            <a:endParaRPr lang="en-US" sz="1100" dirty="0"/>
-          </a:p>
-        </p:txBody>
-      </p:sp>
-      <p:sp>
-        <p:nvSpPr>
-          <p:cNvPr id="7" name="Text 5"/>
-          <p:cNvSpPr/>
-          <p:nvPr/>
-        </p:nvSpPr>
-        <p:spPr>
-          <a:xfrm>
-            <a:off x="7660532" y="2121408"/>
-            <a:ext cx="3726491" cy="3291840"/>
+            <a:off x="841248" y="2029968"/>
+            <a:ext cx="10509199" cy="2148840"/>
           </a:xfrm>
           <a:prstGeom prst="rect">
             <a:avLst/>
@@ -5081,12 +6420,12 @@
           <a:p>
             <a:pPr algn="l" indent="0" marL="0">
               <a:lnSpc>
-                <a:spcPct val="110000"/>
+                <a:spcPct val="108000"/>
               </a:lnSpc>
               <a:buNone/>
             </a:pPr>
             <a:r>
-              <a:rPr lang="en-US" sz="1350" dirty="0">
+              <a:rPr lang="en-US" sz="1450" dirty="0">
                 <a:solidFill>
                   <a:srgbClr val="33444F"/>
                 </a:solidFill>
@@ -5094,15 +6433,122 @@
                 <a:ea typeface="Calibri" pitchFamily="34" charset="-122"/>
                 <a:cs typeface="Calibri" pitchFamily="34" charset="-120"/>
               </a:rPr>
-              <a:t>Somatic tiers are about clinical actionability in context — Tier I drives therapy; always state the tumor-type-specific evidence.</a:t>
-            </a:r>
-            <a:endParaRPr lang="en-US" sz="1350" dirty="0"/>
-          </a:p>
-        </p:txBody>
+              <a:t>A missense variant is absent from population databases, predicted damaging in silico, and segregates with disease in a family.</a:t>
+            </a:r>
+            <a:endParaRPr lang="en-US" sz="1450" dirty="0"/>
+          </a:p>
+        </p:txBody>
+      </p:sp>
+      <p:sp>
+        <p:nvSpPr>
+          <p:cNvPr id="7" name="Shape 5"/>
+          <p:cNvSpPr/>
+          <p:nvPr/>
+        </p:nvSpPr>
+        <p:spPr>
+          <a:xfrm>
+            <a:off x="566928" y="4553712"/>
+            <a:ext cx="11057839" cy="1325880"/>
+          </a:xfrm>
+          <a:prstGeom prst="roundRect">
+            <a:avLst>
+              <a:gd name="adj" fmla="val 6207"/>
+            </a:avLst>
+          </a:prstGeom>
+          <a:solidFill>
+            <a:srgbClr val="0E3A5F"/>
+          </a:solidFill>
+          <a:ln/>
+          <a:effectLst>
+            <a:outerShdw sx="100000" sy="100000" kx="0" ky="0" algn="bl" rotWithShape="0" blurRad="88900" dist="25400" dir="5400000">
+              <a:srgbClr val="22303C">
+                <a:alpha val="12000"/>
+              </a:srgbClr>
+            </a:outerShdw>
+          </a:effectLst>
+        </p:spPr>
       </p:sp>
       <p:sp>
         <p:nvSpPr>
           <p:cNvPr id="8" name="Text 6"/>
+          <p:cNvSpPr/>
+          <p:nvPr/>
+        </p:nvSpPr>
+        <p:spPr>
+          <a:xfrm>
+            <a:off x="822960" y="4681728"/>
+            <a:ext cx="640080" cy="960120"/>
+          </a:xfrm>
+          <a:prstGeom prst="rect">
+            <a:avLst/>
+          </a:prstGeom>
+          <a:noFill/>
+          <a:ln/>
+        </p:spPr>
+        <p:txBody>
+          <a:bodyPr wrap="square" lIns="0" tIns="0" rIns="0" bIns="0" rtlCol="0" anchor="ctr"/>
+          <a:lstStyle/>
+          <a:p>
+            <a:pPr algn="ctr" indent="0" marL="0">
+              <a:buNone/>
+            </a:pPr>
+            <a:r>
+              <a:rPr lang="en-US" sz="4000" b="1" dirty="0">
+                <a:solidFill>
+                  <a:srgbClr val="00838F"/>
+                </a:solidFill>
+                <a:latin typeface="Calibri" pitchFamily="34" charset="0"/>
+                <a:ea typeface="Calibri" pitchFamily="34" charset="-122"/>
+                <a:cs typeface="Calibri" pitchFamily="34" charset="-120"/>
+              </a:rPr>
+              <a:t>?</a:t>
+            </a:r>
+            <a:endParaRPr lang="en-US" sz="4000" dirty="0"/>
+          </a:p>
+        </p:txBody>
+      </p:sp>
+      <p:sp>
+        <p:nvSpPr>
+          <p:cNvPr id="9" name="Text 7"/>
+          <p:cNvSpPr/>
+          <p:nvPr/>
+        </p:nvSpPr>
+        <p:spPr>
+          <a:xfrm>
+            <a:off x="1618488" y="4553712"/>
+            <a:ext cx="9686239" cy="1325880"/>
+          </a:xfrm>
+          <a:prstGeom prst="rect">
+            <a:avLst/>
+          </a:prstGeom>
+          <a:noFill/>
+          <a:ln/>
+        </p:spPr>
+        <p:txBody>
+          <a:bodyPr wrap="square" lIns="0" tIns="0" rIns="0" bIns="0" rtlCol="0" anchor="ctr"/>
+          <a:lstStyle/>
+          <a:p>
+            <a:pPr algn="l" indent="0" marL="0">
+              <a:buNone/>
+            </a:pPr>
+            <a:r>
+              <a:rPr lang="en-US" sz="1500" b="1" dirty="0">
+                <a:solidFill>
+                  <a:srgbClr val="FFFFFF"/>
+                </a:solidFill>
+                <a:latin typeface="Calibri" pitchFamily="34" charset="0"/>
+                <a:ea typeface="Calibri" pitchFamily="34" charset="-122"/>
+                <a:cs typeface="Calibri" pitchFamily="34" charset="-120"/>
+              </a:rPr>
+              <a:t>How do these lines of evidence combine?</a:t>
+            </a:r>
+            <a:endParaRPr lang="en-US" sz="1500" dirty="0"/>
+          </a:p>
+        </p:txBody>
+      </p:sp>
+      <p:sp>
+        <p:nvSpPr>
+          <p:cNvPr id="10" name="Text 8"/>
           <p:cNvSpPr/>
           <p:nvPr/>
         </p:nvSpPr>
@@ -5141,7 +6587,7 @@
       </p:sp>
       <p:sp>
         <p:nvSpPr>
-          <p:cNvPr id="9" name="Text 7"/>
+          <p:cNvPr id="11" name="Text 9"/>
           <p:cNvSpPr/>
           <p:nvPr/>
         </p:nvSpPr>
@@ -5271,7 +6717,7 @@
                 <a:ea typeface="Calibri" pitchFamily="34" charset="-122"/>
                 <a:cs typeface="Calibri" pitchFamily="34" charset="-120"/>
               </a:rPr>
-              <a:t>MOLECULAR &amp; CYTOGENETICS   ·   CASE 2</a:t>
+              <a:t>MOLECULAR &amp; CYTOGENETICS   ·   CASE 1  ·  RESOLUTION</a:t>
             </a:r>
             <a:endParaRPr lang="en-US" sz="1100" dirty="0"/>
           </a:p>
@@ -5310,7 +6756,7 @@
                 <a:ea typeface="Calibri" pitchFamily="34" charset="-122"/>
                 <a:cs typeface="Calibri" pitchFamily="34" charset="-120"/>
               </a:rPr>
-              <a:t>Case 2</a:t>
+              <a:t>Case 1: Building Toward Pathogenic</a:t>
             </a:r>
             <a:endParaRPr lang="en-US" sz="3000" dirty="0"/>
           </a:p>
@@ -5318,18 +6764,124 @@
       </p:sp>
       <p:sp>
         <p:nvSpPr>
-          <p:cNvPr id="4" name="Shape 2"/>
-          <p:cNvSpPr/>
-          <p:nvPr/>
-        </p:nvSpPr>
-        <p:spPr>
-          <a:xfrm>
-            <a:off x="566928" y="1517904"/>
-            <a:ext cx="11057839" cy="2788920"/>
+          <p:cNvPr id="4" name="Text 2"/>
+          <p:cNvSpPr/>
+          <p:nvPr/>
+        </p:nvSpPr>
+        <p:spPr>
+          <a:xfrm>
+            <a:off x="566928" y="1554480"/>
+            <a:ext cx="6413547" cy="4023360"/>
+          </a:xfrm>
+          <a:prstGeom prst="rect">
+            <a:avLst/>
+          </a:prstGeom>
+          <a:noFill/>
+          <a:ln/>
+        </p:spPr>
+        <p:txBody>
+          <a:bodyPr wrap="square" lIns="0" tIns="0" rIns="0" bIns="0" rtlCol="0" anchor="t"/>
+          <a:lstStyle/>
+          <a:p>
+            <a:pPr algn="l" marL="177800" indent="-177800">
+              <a:spcAft>
+                <a:spcPts val="900"/>
+              </a:spcAft>
+              <a:buSzPct val="100000"/>
+              <a:buChar char="•"/>
+            </a:pPr>
+            <a:r>
+              <a:rPr lang="en-US" sz="1400" b="1" dirty="0">
+                <a:solidFill>
+                  <a:srgbClr val="1B2A38"/>
+                </a:solidFill>
+                <a:latin typeface="Calibri" pitchFamily="34" charset="0"/>
+                <a:ea typeface="Calibri" pitchFamily="34" charset="-122"/>
+                <a:cs typeface="Calibri" pitchFamily="34" charset="-120"/>
+              </a:rPr>
+              <a:t>Rarity, segregation, and (supporting) in-silico evidence together raise the classification toward likely pathogenic/pathogenic.</a:t>
+            </a:r>
+            <a:endParaRPr lang="en-US" sz="1400" dirty="0"/>
+          </a:p>
+          <a:p>
+            <a:pPr algn="l" marL="177800" indent="-177800">
+              <a:spcAft>
+                <a:spcPts val="900"/>
+              </a:spcAft>
+              <a:buSzPct val="100000"/>
+              <a:buChar char="•"/>
+            </a:pPr>
+            <a:r>
+              <a:rPr lang="en-US" sz="1400" dirty="0">
+                <a:solidFill>
+                  <a:srgbClr val="33444F"/>
+                </a:solidFill>
+                <a:latin typeface="Calibri" pitchFamily="34" charset="0"/>
+                <a:ea typeface="Calibri" pitchFamily="34" charset="-122"/>
+                <a:cs typeface="Calibri" pitchFamily="34" charset="-120"/>
+              </a:rPr>
+              <a:t>In-silico prediction is supporting, not standalone.</a:t>
+            </a:r>
+            <a:endParaRPr lang="en-US" sz="1400" dirty="0"/>
+          </a:p>
+          <a:p>
+            <a:pPr algn="l" marL="177800" indent="-177800">
+              <a:spcAft>
+                <a:spcPts val="900"/>
+              </a:spcAft>
+              <a:buSzPct val="100000"/>
+              <a:buChar char="•"/>
+            </a:pPr>
+            <a:r>
+              <a:rPr lang="en-US" sz="1400" dirty="0">
+                <a:solidFill>
+                  <a:srgbClr val="33444F"/>
+                </a:solidFill>
+                <a:latin typeface="Calibri" pitchFamily="34" charset="0"/>
+                <a:ea typeface="Calibri" pitchFamily="34" charset="-122"/>
+                <a:cs typeface="Calibri" pitchFamily="34" charset="-120"/>
+              </a:rPr>
+              <a:t>Functional data would strengthen the call.</a:t>
+            </a:r>
+            <a:endParaRPr lang="en-US" sz="1400" dirty="0"/>
+          </a:p>
+          <a:p>
+            <a:pPr algn="l" marL="177800" indent="-177800">
+              <a:spcAft>
+                <a:spcPts val="900"/>
+              </a:spcAft>
+              <a:buSzPct val="100000"/>
+              <a:buChar char="•"/>
+            </a:pPr>
+            <a:r>
+              <a:rPr lang="en-US" sz="1400" dirty="0">
+                <a:solidFill>
+                  <a:srgbClr val="33444F"/>
+                </a:solidFill>
+                <a:latin typeface="Calibri" pitchFamily="34" charset="0"/>
+                <a:ea typeface="Calibri" pitchFamily="34" charset="-122"/>
+                <a:cs typeface="Calibri" pitchFamily="34" charset="-120"/>
+              </a:rPr>
+              <a:t>Apply the framework’s combining rules to assign a tier.</a:t>
+            </a:r>
+            <a:endParaRPr lang="en-US" sz="1400" dirty="0"/>
+          </a:p>
+        </p:txBody>
+      </p:sp>
+      <p:sp>
+        <p:nvSpPr>
+          <p:cNvPr id="5" name="Shape 3"/>
+          <p:cNvSpPr/>
+          <p:nvPr/>
+        </p:nvSpPr>
+        <p:spPr>
+          <a:xfrm>
+            <a:off x="7422788" y="1554480"/>
+            <a:ext cx="4201979" cy="3977640"/>
           </a:xfrm>
           <a:prstGeom prst="roundRect">
             <a:avLst>
-              <a:gd name="adj" fmla="val 2951"/>
+              <a:gd name="adj" fmla="val 2069"/>
             </a:avLst>
           </a:prstGeom>
           <a:solidFill>
@@ -5347,14 +6899,14 @@
       </p:sp>
       <p:sp>
         <p:nvSpPr>
-          <p:cNvPr id="5" name="Text 3"/>
-          <p:cNvSpPr/>
-          <p:nvPr/>
-        </p:nvSpPr>
-        <p:spPr>
-          <a:xfrm>
-            <a:off x="841248" y="1700784"/>
-            <a:ext cx="5486400" cy="292608"/>
+          <p:cNvPr id="6" name="Text 4"/>
+          <p:cNvSpPr/>
+          <p:nvPr/>
+        </p:nvSpPr>
+        <p:spPr>
+          <a:xfrm>
+            <a:off x="7660532" y="1755648"/>
+            <a:ext cx="3744779" cy="310896"/>
           </a:xfrm>
           <a:prstGeom prst="rect">
             <a:avLst/>
@@ -5370,7 +6922,7 @@
               <a:buNone/>
             </a:pPr>
             <a:r>
-              <a:rPr lang="en-US" sz="1100" b="1" spc="150" kern="0" dirty="0">
+              <a:rPr lang="en-US" sz="1100" b="1" spc="140" kern="0" dirty="0">
                 <a:solidFill>
                   <a:srgbClr val="00838F"/>
                 </a:solidFill>
@@ -5378,7 +6930,7 @@
                 <a:ea typeface="Calibri" pitchFamily="34" charset="-122"/>
                 <a:cs typeface="Calibri" pitchFamily="34" charset="-120"/>
               </a:rPr>
-              <a:t>CLINICAL VIGNETTE</a:t>
+              <a:t>TEACHING POINT</a:t>
             </a:r>
             <a:endParaRPr lang="en-US" sz="1100" dirty="0"/>
           </a:p>
@@ -5386,14 +6938,14 @@
       </p:sp>
       <p:sp>
         <p:nvSpPr>
-          <p:cNvPr id="6" name="Text 4"/>
-          <p:cNvSpPr/>
-          <p:nvPr/>
-        </p:nvSpPr>
-        <p:spPr>
-          <a:xfrm>
-            <a:off x="841248" y="2029968"/>
-            <a:ext cx="10509199" cy="2148840"/>
+          <p:cNvPr id="7" name="Text 5"/>
+          <p:cNvSpPr/>
+          <p:nvPr/>
+        </p:nvSpPr>
+        <p:spPr>
+          <a:xfrm>
+            <a:off x="7660532" y="2121408"/>
+            <a:ext cx="3726491" cy="3291840"/>
           </a:xfrm>
           <a:prstGeom prst="rect">
             <a:avLst/>
@@ -5407,12 +6959,12 @@
           <a:p>
             <a:pPr algn="l" indent="0" marL="0">
               <a:lnSpc>
-                <a:spcPct val="108000"/>
+                <a:spcPct val="110000"/>
               </a:lnSpc>
               <a:buNone/>
             </a:pPr>
             <a:r>
-              <a:rPr lang="en-US" sz="1450" dirty="0">
+              <a:rPr lang="en-US" sz="1350" dirty="0">
                 <a:solidFill>
                   <a:srgbClr val="33444F"/>
                 </a:solidFill>
@@ -5420,122 +6972,15 @@
                 <a:ea typeface="Calibri" pitchFamily="34" charset="-122"/>
                 <a:cs typeface="Calibri" pitchFamily="34" charset="-120"/>
               </a:rPr>
-              <a:t>A germline panel returns a missense change with conflicting/insufficient evidence — not clearly benign or pathogenic. The clinician asks whether to base risk-reducing surgery on it.</a:t>
-            </a:r>
-            <a:endParaRPr lang="en-US" sz="1450" dirty="0"/>
-          </a:p>
-        </p:txBody>
-      </p:sp>
-      <p:sp>
-        <p:nvSpPr>
-          <p:cNvPr id="7" name="Shape 5"/>
-          <p:cNvSpPr/>
-          <p:nvPr/>
-        </p:nvSpPr>
-        <p:spPr>
-          <a:xfrm>
-            <a:off x="566928" y="4553712"/>
-            <a:ext cx="11057839" cy="1325880"/>
-          </a:xfrm>
-          <a:prstGeom prst="roundRect">
-            <a:avLst>
-              <a:gd name="adj" fmla="val 6207"/>
-            </a:avLst>
-          </a:prstGeom>
-          <a:solidFill>
-            <a:srgbClr val="0E3A5F"/>
-          </a:solidFill>
-          <a:ln/>
-          <a:effectLst>
-            <a:outerShdw sx="100000" sy="100000" kx="0" ky="0" algn="bl" rotWithShape="0" blurRad="88900" dist="25400" dir="5400000">
-              <a:srgbClr val="22303C">
-                <a:alpha val="12000"/>
-              </a:srgbClr>
-            </a:outerShdw>
-          </a:effectLst>
-        </p:spPr>
+              <a:t>No single line proves pathogenicity; rarity + segregation + supporting predictions combine per the framework to reach a confident tier.</a:t>
+            </a:r>
+            <a:endParaRPr lang="en-US" sz="1350" dirty="0"/>
+          </a:p>
+        </p:txBody>
       </p:sp>
       <p:sp>
         <p:nvSpPr>
           <p:cNvPr id="8" name="Text 6"/>
-          <p:cNvSpPr/>
-          <p:nvPr/>
-        </p:nvSpPr>
-        <p:spPr>
-          <a:xfrm>
-            <a:off x="822960" y="4681728"/>
-            <a:ext cx="640080" cy="960120"/>
-          </a:xfrm>
-          <a:prstGeom prst="rect">
-            <a:avLst/>
-          </a:prstGeom>
-          <a:noFill/>
-          <a:ln/>
-        </p:spPr>
-        <p:txBody>
-          <a:bodyPr wrap="square" lIns="0" tIns="0" rIns="0" bIns="0" rtlCol="0" anchor="ctr"/>
-          <a:lstStyle/>
-          <a:p>
-            <a:pPr algn="ctr" indent="0" marL="0">
-              <a:buNone/>
-            </a:pPr>
-            <a:r>
-              <a:rPr lang="en-US" sz="4000" b="1" dirty="0">
-                <a:solidFill>
-                  <a:srgbClr val="00838F"/>
-                </a:solidFill>
-                <a:latin typeface="Calibri" pitchFamily="34" charset="0"/>
-                <a:ea typeface="Calibri" pitchFamily="34" charset="-122"/>
-                <a:cs typeface="Calibri" pitchFamily="34" charset="-120"/>
-              </a:rPr>
-              <a:t>?</a:t>
-            </a:r>
-            <a:endParaRPr lang="en-US" sz="4000" dirty="0"/>
-          </a:p>
-        </p:txBody>
-      </p:sp>
-      <p:sp>
-        <p:nvSpPr>
-          <p:cNvPr id="9" name="Text 7"/>
-          <p:cNvSpPr/>
-          <p:nvPr/>
-        </p:nvSpPr>
-        <p:spPr>
-          <a:xfrm>
-            <a:off x="1618488" y="4553712"/>
-            <a:ext cx="9686239" cy="1325880"/>
-          </a:xfrm>
-          <a:prstGeom prst="rect">
-            <a:avLst/>
-          </a:prstGeom>
-          <a:noFill/>
-          <a:ln/>
-        </p:spPr>
-        <p:txBody>
-          <a:bodyPr wrap="square" lIns="0" tIns="0" rIns="0" bIns="0" rtlCol="0" anchor="ctr"/>
-          <a:lstStyle/>
-          <a:p>
-            <a:pPr algn="l" indent="0" marL="0">
-              <a:buNone/>
-            </a:pPr>
-            <a:r>
-              <a:rPr lang="en-US" sz="1500" b="1" dirty="0">
-                <a:solidFill>
-                  <a:srgbClr val="FFFFFF"/>
-                </a:solidFill>
-                <a:latin typeface="Calibri" pitchFamily="34" charset="0"/>
-                <a:ea typeface="Calibri" pitchFamily="34" charset="-122"/>
-                <a:cs typeface="Calibri" pitchFamily="34" charset="-120"/>
-              </a:rPr>
-              <a:t>How do you classify and advise?</a:t>
-            </a:r>
-            <a:endParaRPr lang="en-US" sz="1500" dirty="0"/>
-          </a:p>
-        </p:txBody>
-      </p:sp>
-      <p:sp>
-        <p:nvSpPr>
-          <p:cNvPr id="10" name="Text 8"/>
           <p:cNvSpPr/>
           <p:nvPr/>
         </p:nvSpPr>
@@ -5574,7 +7019,7 @@
       </p:sp>
       <p:sp>
         <p:nvSpPr>
-          <p:cNvPr id="11" name="Text 9"/>
+          <p:cNvPr id="9" name="Text 7"/>
           <p:cNvSpPr/>
           <p:nvPr/>
         </p:nvSpPr>
@@ -5704,7 +7149,7 @@
                 <a:ea typeface="Calibri" pitchFamily="34" charset="-122"/>
                 <a:cs typeface="Calibri" pitchFamily="34" charset="-120"/>
               </a:rPr>
-              <a:t>MOLECULAR &amp; CYTOGENETICS   ·   CASE 2  ·  RESOLUTION</a:t>
+              <a:t>MOLECULAR &amp; CYTOGENETICS   ·   CASE 2</a:t>
             </a:r>
             <a:endParaRPr lang="en-US" sz="1100" dirty="0"/>
           </a:p>
@@ -5743,7 +7188,7 @@
                 <a:ea typeface="Calibri" pitchFamily="34" charset="-122"/>
                 <a:cs typeface="Calibri" pitchFamily="34" charset="-120"/>
               </a:rPr>
-              <a:t>Case 2: Variant of Uncertain Significance</a:t>
+              <a:t>Case 2</a:t>
             </a:r>
             <a:endParaRPr lang="en-US" sz="3000" dirty="0"/>
           </a:p>
@@ -5751,124 +7196,18 @@
       </p:sp>
       <p:sp>
         <p:nvSpPr>
-          <p:cNvPr id="4" name="Text 2"/>
-          <p:cNvSpPr/>
-          <p:nvPr/>
-        </p:nvSpPr>
-        <p:spPr>
-          <a:xfrm>
-            <a:off x="566928" y="1554480"/>
-            <a:ext cx="6413547" cy="4023360"/>
-          </a:xfrm>
-          <a:prstGeom prst="rect">
-            <a:avLst/>
-          </a:prstGeom>
-          <a:noFill/>
-          <a:ln/>
-        </p:spPr>
-        <p:txBody>
-          <a:bodyPr wrap="square" lIns="0" tIns="0" rIns="0" bIns="0" rtlCol="0" anchor="t"/>
-          <a:lstStyle/>
-          <a:p>
-            <a:pPr algn="l" marL="177800" indent="-177800">
-              <a:spcAft>
-                <a:spcPts val="900"/>
-              </a:spcAft>
-              <a:buSzPct val="100000"/>
-              <a:buChar char="•"/>
-            </a:pPr>
-            <a:r>
-              <a:rPr lang="en-US" sz="1400" b="1" dirty="0">
-                <a:solidFill>
-                  <a:srgbClr val="1B2A38"/>
-                </a:solidFill>
-                <a:latin typeface="Calibri" pitchFamily="34" charset="0"/>
-                <a:ea typeface="Calibri" pitchFamily="34" charset="-122"/>
-                <a:cs typeface="Calibri" pitchFamily="34" charset="-120"/>
-              </a:rPr>
-              <a:t>Classify as a VUS — evidence is insufficient to call pathogenic or benign.</a:t>
-            </a:r>
-            <a:endParaRPr lang="en-US" sz="1400" dirty="0"/>
-          </a:p>
-          <a:p>
-            <a:pPr algn="l" marL="177800" indent="-177800">
-              <a:spcAft>
-                <a:spcPts val="900"/>
-              </a:spcAft>
-              <a:buSzPct val="100000"/>
-              <a:buChar char="•"/>
-            </a:pPr>
-            <a:r>
-              <a:rPr lang="en-US" sz="1400" dirty="0">
-                <a:solidFill>
-                  <a:srgbClr val="33444F"/>
-                </a:solidFill>
-                <a:latin typeface="Calibri" pitchFamily="34" charset="0"/>
-                <a:ea typeface="Calibri" pitchFamily="34" charset="-122"/>
-                <a:cs typeface="Calibri" pitchFamily="34" charset="-120"/>
-              </a:rPr>
-              <a:t>A VUS must NOT drive irreversible management such as risk-reducing surgery.</a:t>
-            </a:r>
-            <a:endParaRPr lang="en-US" sz="1400" dirty="0"/>
-          </a:p>
-          <a:p>
-            <a:pPr algn="l" marL="177800" indent="-177800">
-              <a:spcAft>
-                <a:spcPts val="900"/>
-              </a:spcAft>
-              <a:buSzPct val="100000"/>
-              <a:buChar char="•"/>
-            </a:pPr>
-            <a:r>
-              <a:rPr lang="en-US" sz="1400" dirty="0">
-                <a:solidFill>
-                  <a:srgbClr val="33444F"/>
-                </a:solidFill>
-                <a:latin typeface="Calibri" pitchFamily="34" charset="0"/>
-                <a:ea typeface="Calibri" pitchFamily="34" charset="-122"/>
-                <a:cs typeface="Calibri" pitchFamily="34" charset="-120"/>
-              </a:rPr>
-              <a:t>Offer reanalysis as evidence evolves and consider family/segregation studies.</a:t>
-            </a:r>
-            <a:endParaRPr lang="en-US" sz="1400" dirty="0"/>
-          </a:p>
-          <a:p>
-            <a:pPr algn="l" marL="177800" indent="-177800">
-              <a:spcAft>
-                <a:spcPts val="900"/>
-              </a:spcAft>
-              <a:buSzPct val="100000"/>
-              <a:buChar char="•"/>
-            </a:pPr>
-            <a:r>
-              <a:rPr lang="en-US" sz="1400" dirty="0">
-                <a:solidFill>
-                  <a:srgbClr val="33444F"/>
-                </a:solidFill>
-                <a:latin typeface="Calibri" pitchFamily="34" charset="0"/>
-                <a:ea typeface="Calibri" pitchFamily="34" charset="-122"/>
-                <a:cs typeface="Calibri" pitchFamily="34" charset="-120"/>
-              </a:rPr>
-              <a:t>Counsel the clinician and patient on the uncertainty.</a:t>
-            </a:r>
-            <a:endParaRPr lang="en-US" sz="1400" dirty="0"/>
-          </a:p>
-        </p:txBody>
-      </p:sp>
-      <p:sp>
-        <p:nvSpPr>
-          <p:cNvPr id="5" name="Shape 3"/>
-          <p:cNvSpPr/>
-          <p:nvPr/>
-        </p:nvSpPr>
-        <p:spPr>
-          <a:xfrm>
-            <a:off x="7422788" y="1554480"/>
-            <a:ext cx="4201979" cy="3977640"/>
+          <p:cNvPr id="4" name="Shape 2"/>
+          <p:cNvSpPr/>
+          <p:nvPr/>
+        </p:nvSpPr>
+        <p:spPr>
+          <a:xfrm>
+            <a:off x="566928" y="1517904"/>
+            <a:ext cx="11057839" cy="2788920"/>
           </a:xfrm>
           <a:prstGeom prst="roundRect">
             <a:avLst>
-              <a:gd name="adj" fmla="val 2069"/>
+              <a:gd name="adj" fmla="val 2951"/>
             </a:avLst>
           </a:prstGeom>
           <a:solidFill>
@@ -5886,53 +7225,53 @@
       </p:sp>
       <p:sp>
         <p:nvSpPr>
+          <p:cNvPr id="5" name="Text 3"/>
+          <p:cNvSpPr/>
+          <p:nvPr/>
+        </p:nvSpPr>
+        <p:spPr>
+          <a:xfrm>
+            <a:off x="841248" y="1700784"/>
+            <a:ext cx="5486400" cy="292608"/>
+          </a:xfrm>
+          <a:prstGeom prst="rect">
+            <a:avLst/>
+          </a:prstGeom>
+          <a:noFill/>
+          <a:ln/>
+        </p:spPr>
+        <p:txBody>
+          <a:bodyPr wrap="square" lIns="0" tIns="0" rIns="0" bIns="0" rtlCol="0" anchor="ctr"/>
+          <a:lstStyle/>
+          <a:p>
+            <a:pPr indent="0" marL="0">
+              <a:buNone/>
+            </a:pPr>
+            <a:r>
+              <a:rPr lang="en-US" sz="1100" b="1" spc="150" kern="0" dirty="0">
+                <a:solidFill>
+                  <a:srgbClr val="00838F"/>
+                </a:solidFill>
+                <a:latin typeface="Calibri" pitchFamily="34" charset="0"/>
+                <a:ea typeface="Calibri" pitchFamily="34" charset="-122"/>
+                <a:cs typeface="Calibri" pitchFamily="34" charset="-120"/>
+              </a:rPr>
+              <a:t>CLINICAL VIGNETTE</a:t>
+            </a:r>
+            <a:endParaRPr lang="en-US" sz="1100" dirty="0"/>
+          </a:p>
+        </p:txBody>
+      </p:sp>
+      <p:sp>
+        <p:nvSpPr>
           <p:cNvPr id="6" name="Text 4"/>
           <p:cNvSpPr/>
           <p:nvPr/>
         </p:nvSpPr>
         <p:spPr>
           <a:xfrm>
-            <a:off x="7660532" y="1755648"/>
-            <a:ext cx="3744779" cy="310896"/>
-          </a:xfrm>
-          <a:prstGeom prst="rect">
-            <a:avLst/>
-          </a:prstGeom>
-          <a:noFill/>
-          <a:ln/>
-        </p:spPr>
-        <p:txBody>
-          <a:bodyPr wrap="square" lIns="0" tIns="0" rIns="0" bIns="0" rtlCol="0" anchor="ctr"/>
-          <a:lstStyle/>
-          <a:p>
-            <a:pPr indent="0" marL="0">
-              <a:buNone/>
-            </a:pPr>
-            <a:r>
-              <a:rPr lang="en-US" sz="1100" b="1" spc="140" kern="0" dirty="0">
-                <a:solidFill>
-                  <a:srgbClr val="00838F"/>
-                </a:solidFill>
-                <a:latin typeface="Calibri" pitchFamily="34" charset="0"/>
-                <a:ea typeface="Calibri" pitchFamily="34" charset="-122"/>
-                <a:cs typeface="Calibri" pitchFamily="34" charset="-120"/>
-              </a:rPr>
-              <a:t>TEACHING POINT</a:t>
-            </a:r>
-            <a:endParaRPr lang="en-US" sz="1100" dirty="0"/>
-          </a:p>
-        </p:txBody>
-      </p:sp>
-      <p:sp>
-        <p:nvSpPr>
-          <p:cNvPr id="7" name="Text 5"/>
-          <p:cNvSpPr/>
-          <p:nvPr/>
-        </p:nvSpPr>
-        <p:spPr>
-          <a:xfrm>
-            <a:off x="7660532" y="2121408"/>
-            <a:ext cx="3726491" cy="3291840"/>
+            <a:off x="841248" y="2029968"/>
+            <a:ext cx="10509199" cy="2148840"/>
           </a:xfrm>
           <a:prstGeom prst="rect">
             <a:avLst/>
@@ -5946,12 +7285,12 @@
           <a:p>
             <a:pPr algn="l" indent="0" marL="0">
               <a:lnSpc>
-                <a:spcPct val="110000"/>
+                <a:spcPct val="108000"/>
               </a:lnSpc>
               <a:buNone/>
             </a:pPr>
             <a:r>
-              <a:rPr lang="en-US" sz="1350" dirty="0">
+              <a:rPr lang="en-US" sz="1450" dirty="0">
                 <a:solidFill>
                   <a:srgbClr val="33444F"/>
                 </a:solidFill>
@@ -5959,15 +7298,122 @@
                 <a:ea typeface="Calibri" pitchFamily="34" charset="-122"/>
                 <a:cs typeface="Calibri" pitchFamily="34" charset="-120"/>
               </a:rPr>
-              <a:t>Never let a VUS drive irreversible decisions; manage by clinical risk and pursue reclassification over time.</a:t>
-            </a:r>
-            <a:endParaRPr lang="en-US" sz="1350" dirty="0"/>
-          </a:p>
-        </p:txBody>
+              <a:t>Tumor sequencing reveals a BRCA variant at ~50% VAF in a young patient.</a:t>
+            </a:r>
+            <a:endParaRPr lang="en-US" sz="1450" dirty="0"/>
+          </a:p>
+        </p:txBody>
+      </p:sp>
+      <p:sp>
+        <p:nvSpPr>
+          <p:cNvPr id="7" name="Shape 5"/>
+          <p:cNvSpPr/>
+          <p:nvPr/>
+        </p:nvSpPr>
+        <p:spPr>
+          <a:xfrm>
+            <a:off x="566928" y="4553712"/>
+            <a:ext cx="11057839" cy="1325880"/>
+          </a:xfrm>
+          <a:prstGeom prst="roundRect">
+            <a:avLst>
+              <a:gd name="adj" fmla="val 6207"/>
+            </a:avLst>
+          </a:prstGeom>
+          <a:solidFill>
+            <a:srgbClr val="0E3A5F"/>
+          </a:solidFill>
+          <a:ln/>
+          <a:effectLst>
+            <a:outerShdw sx="100000" sy="100000" kx="0" ky="0" algn="bl" rotWithShape="0" blurRad="88900" dist="25400" dir="5400000">
+              <a:srgbClr val="22303C">
+                <a:alpha val="12000"/>
+              </a:srgbClr>
+            </a:outerShdw>
+          </a:effectLst>
+        </p:spPr>
       </p:sp>
       <p:sp>
         <p:nvSpPr>
           <p:cNvPr id="8" name="Text 6"/>
+          <p:cNvSpPr/>
+          <p:nvPr/>
+        </p:nvSpPr>
+        <p:spPr>
+          <a:xfrm>
+            <a:off x="822960" y="4681728"/>
+            <a:ext cx="640080" cy="960120"/>
+          </a:xfrm>
+          <a:prstGeom prst="rect">
+            <a:avLst/>
+          </a:prstGeom>
+          <a:noFill/>
+          <a:ln/>
+        </p:spPr>
+        <p:txBody>
+          <a:bodyPr wrap="square" lIns="0" tIns="0" rIns="0" bIns="0" rtlCol="0" anchor="ctr"/>
+          <a:lstStyle/>
+          <a:p>
+            <a:pPr algn="ctr" indent="0" marL="0">
+              <a:buNone/>
+            </a:pPr>
+            <a:r>
+              <a:rPr lang="en-US" sz="4000" b="1" dirty="0">
+                <a:solidFill>
+                  <a:srgbClr val="00838F"/>
+                </a:solidFill>
+                <a:latin typeface="Calibri" pitchFamily="34" charset="0"/>
+                <a:ea typeface="Calibri" pitchFamily="34" charset="-122"/>
+                <a:cs typeface="Calibri" pitchFamily="34" charset="-120"/>
+              </a:rPr>
+              <a:t>?</a:t>
+            </a:r>
+            <a:endParaRPr lang="en-US" sz="4000" dirty="0"/>
+          </a:p>
+        </p:txBody>
+      </p:sp>
+      <p:sp>
+        <p:nvSpPr>
+          <p:cNvPr id="9" name="Text 7"/>
+          <p:cNvSpPr/>
+          <p:nvPr/>
+        </p:nvSpPr>
+        <p:spPr>
+          <a:xfrm>
+            <a:off x="1618488" y="4553712"/>
+            <a:ext cx="9686239" cy="1325880"/>
+          </a:xfrm>
+          <a:prstGeom prst="rect">
+            <a:avLst/>
+          </a:prstGeom>
+          <a:noFill/>
+          <a:ln/>
+        </p:spPr>
+        <p:txBody>
+          <a:bodyPr wrap="square" lIns="0" tIns="0" rIns="0" bIns="0" rtlCol="0" anchor="ctr"/>
+          <a:lstStyle/>
+          <a:p>
+            <a:pPr algn="l" indent="0" marL="0">
+              <a:buNone/>
+            </a:pPr>
+            <a:r>
+              <a:rPr lang="en-US" sz="1500" b="1" dirty="0">
+                <a:solidFill>
+                  <a:srgbClr val="FFFFFF"/>
+                </a:solidFill>
+                <a:latin typeface="Calibri" pitchFamily="34" charset="0"/>
+                <a:ea typeface="Calibri" pitchFamily="34" charset="-122"/>
+                <a:cs typeface="Calibri" pitchFamily="34" charset="-120"/>
+              </a:rPr>
+              <a:t>What additional step is essential before counseling about inherited risk?</a:t>
+            </a:r>
+            <a:endParaRPr lang="en-US" sz="1500" dirty="0"/>
+          </a:p>
+        </p:txBody>
+      </p:sp>
+      <p:sp>
+        <p:nvSpPr>
+          <p:cNvPr id="10" name="Text 8"/>
           <p:cNvSpPr/>
           <p:nvPr/>
         </p:nvSpPr>
@@ -6006,7 +7452,7 @@
       </p:sp>
       <p:sp>
         <p:nvSpPr>
-          <p:cNvPr id="9" name="Text 7"/>
+          <p:cNvPr id="11" name="Text 9"/>
           <p:cNvSpPr/>
           <p:nvPr/>
         </p:nvSpPr>
@@ -6136,7 +7582,7 @@
                 <a:ea typeface="Calibri" pitchFamily="34" charset="-122"/>
                 <a:cs typeface="Calibri" pitchFamily="34" charset="-120"/>
               </a:rPr>
-              <a:t>MOLECULAR &amp; CYTOGENETICS   ·   BOARD REVIEW  ·  Q1</a:t>
+              <a:t>MOLECULAR &amp; CYTOGENETICS   ·   CASE 2  ·  RESOLUTION</a:t>
             </a:r>
             <a:endParaRPr lang="en-US" sz="1100" dirty="0"/>
           </a:p>
@@ -6167,7 +7613,7 @@
               <a:buNone/>
             </a:pPr>
             <a:r>
-              <a:rPr lang="en-US" sz="2600" b="1" dirty="0">
+              <a:rPr lang="en-US" sz="3000" b="1" dirty="0">
                 <a:solidFill>
                   <a:srgbClr val="0E3A5F"/>
                 </a:solidFill>
@@ -6175,9 +7621,9 @@
                 <a:ea typeface="Calibri" pitchFamily="34" charset="-122"/>
                 <a:cs typeface="Calibri" pitchFamily="34" charset="-120"/>
               </a:rPr>
-              <a:t>Board-Style Review</a:t>
-            </a:r>
-            <a:endParaRPr lang="en-US" sz="2600" dirty="0"/>
+              <a:t>Case 2: Possible Germline Finding</a:t>
+            </a:r>
+            <a:endParaRPr lang="en-US" sz="3000" dirty="0"/>
           </a:p>
         </p:txBody>
       </p:sp>
@@ -6189,8 +7635,8 @@
         </p:nvSpPr>
         <p:spPr>
           <a:xfrm>
-            <a:off x="566928" y="1417320"/>
-            <a:ext cx="11057839" cy="914400"/>
+            <a:off x="566928" y="1554480"/>
+            <a:ext cx="6413547" cy="4023360"/>
           </a:xfrm>
           <a:prstGeom prst="rect">
             <a:avLst/>
@@ -6202,14 +7648,15 @@
           <a:bodyPr wrap="square" lIns="0" tIns="0" rIns="0" bIns="0" rtlCol="0" anchor="t"/>
           <a:lstStyle/>
           <a:p>
-            <a:pPr algn="l" indent="0" marL="0">
-              <a:lnSpc>
-                <a:spcPct val="105000"/>
-              </a:lnSpc>
-              <a:buNone/>
-            </a:pPr>
-            <a:r>
-              <a:rPr lang="en-US" sz="1450" b="1" dirty="0">
+            <a:pPr algn="l" marL="177800" indent="-177800">
+              <a:spcAft>
+                <a:spcPts val="900"/>
+              </a:spcAft>
+              <a:buSzPct val="100000"/>
+              <a:buChar char="•"/>
+            </a:pPr>
+            <a:r>
+              <a:rPr lang="en-US" sz="1400" b="1" dirty="0">
                 <a:solidFill>
                   <a:srgbClr val="1B2A38"/>
                 </a:solidFill>
@@ -6217,41 +7664,20 @@
                 <a:ea typeface="Calibri" pitchFamily="34" charset="-122"/>
                 <a:cs typeface="Calibri" pitchFamily="34" charset="-120"/>
               </a:rPr>
-              <a:t>In the somatic variant framework (AMP/ASCO/CAP), tiers primarily reflect:</a:t>
-            </a:r>
-            <a:endParaRPr lang="en-US" sz="1450" dirty="0"/>
-          </a:p>
-        </p:txBody>
-      </p:sp>
-      <p:sp>
-        <p:nvSpPr>
-          <p:cNvPr id="5" name="Text 3"/>
-          <p:cNvSpPr/>
-          <p:nvPr/>
-        </p:nvSpPr>
-        <p:spPr>
-          <a:xfrm>
-            <a:off x="658368" y="2395728"/>
-            <a:ext cx="6192390" cy="3017520"/>
-          </a:xfrm>
-          <a:prstGeom prst="rect">
-            <a:avLst/>
-          </a:prstGeom>
-          <a:noFill/>
-          <a:ln/>
-        </p:spPr>
-        <p:txBody>
-          <a:bodyPr wrap="square" lIns="0" tIns="0" rIns="0" bIns="0" rtlCol="0" anchor="t"/>
-          <a:lstStyle/>
-          <a:p>
-            <a:pPr algn="l" indent="0" marL="0">
+              <a:t>A ~50% VAF in a cancer-predisposition gene may be germline — confirm with a paired normal sample.</a:t>
+            </a:r>
+            <a:endParaRPr lang="en-US" sz="1400" dirty="0"/>
+          </a:p>
+          <a:p>
+            <a:pPr algn="l" marL="177800" indent="-177800">
               <a:spcAft>
-                <a:spcPts val="600"/>
+                <a:spcPts val="900"/>
               </a:spcAft>
-              <a:buNone/>
-            </a:pPr>
-            <a:r>
-              <a:rPr lang="en-US" sz="1350" dirty="0">
+              <a:buSzPct val="100000"/>
+              <a:buChar char="•"/>
+            </a:pPr>
+            <a:r>
+              <a:rPr lang="en-US" sz="1400" dirty="0">
                 <a:solidFill>
                   <a:srgbClr val="33444F"/>
                 </a:solidFill>
@@ -6259,39 +7685,41 @@
                 <a:ea typeface="Calibri" pitchFamily="34" charset="-122"/>
                 <a:cs typeface="Calibri" pitchFamily="34" charset="-120"/>
               </a:rPr>
-              <a:t>A. Pathogenicity for inherited disease</a:t>
-            </a:r>
-            <a:endParaRPr lang="en-US" sz="1350" dirty="0"/>
-          </a:p>
-          <a:p>
-            <a:pPr algn="l" indent="0" marL="0">
+              <a:t>Germline confirmation has implications for the patient and relatives.</a:t>
+            </a:r>
+            <a:endParaRPr lang="en-US" sz="1400" dirty="0"/>
+          </a:p>
+          <a:p>
+            <a:pPr algn="l" marL="177800" indent="-177800">
               <a:spcAft>
-                <a:spcPts val="600"/>
+                <a:spcPts val="900"/>
               </a:spcAft>
-              <a:buNone/>
-            </a:pPr>
-            <a:r>
-              <a:rPr lang="en-US" sz="1350" b="1" dirty="0">
-                <a:solidFill>
-                  <a:srgbClr val="005A63"/>
-                </a:solidFill>
-                <a:latin typeface="Calibri" pitchFamily="34" charset="0"/>
-                <a:ea typeface="Calibri" pitchFamily="34" charset="-122"/>
-                <a:cs typeface="Calibri" pitchFamily="34" charset="-120"/>
-              </a:rPr>
-              <a:t>B. Clinical actionability (therapy/prognosis/diagnosis)</a:t>
-            </a:r>
-            <a:endParaRPr lang="en-US" sz="1350" dirty="0"/>
-          </a:p>
-          <a:p>
-            <a:pPr algn="l" indent="0" marL="0">
+              <a:buSzPct val="100000"/>
+              <a:buChar char="•"/>
+            </a:pPr>
+            <a:r>
+              <a:rPr lang="en-US" sz="1400" dirty="0">
+                <a:solidFill>
+                  <a:srgbClr val="33444F"/>
+                </a:solidFill>
+                <a:latin typeface="Calibri" pitchFamily="34" charset="0"/>
+                <a:ea typeface="Calibri" pitchFamily="34" charset="-122"/>
+                <a:cs typeface="Calibri" pitchFamily="34" charset="-120"/>
+              </a:rPr>
+              <a:t>Requires consent and genetic counseling.</a:t>
+            </a:r>
+            <a:endParaRPr lang="en-US" sz="1400" dirty="0"/>
+          </a:p>
+          <a:p>
+            <a:pPr algn="l" marL="177800" indent="-177800">
               <a:spcAft>
-                <a:spcPts val="600"/>
+                <a:spcPts val="900"/>
               </a:spcAft>
-              <a:buNone/>
-            </a:pPr>
-            <a:r>
-              <a:rPr lang="en-US" sz="1350" dirty="0">
+              <a:buSzPct val="100000"/>
+              <a:buChar char="•"/>
+            </a:pPr>
+            <a:r>
+              <a:rPr lang="en-US" sz="1400" dirty="0">
                 <a:solidFill>
                   <a:srgbClr val="33444F"/>
                 </a:solidFill>
@@ -6299,66 +7727,26 @@
                 <a:ea typeface="Calibri" pitchFamily="34" charset="-122"/>
                 <a:cs typeface="Calibri" pitchFamily="34" charset="-120"/>
               </a:rPr>
-              <a:t>C. Allele frequency only</a:t>
-            </a:r>
-            <a:endParaRPr lang="en-US" sz="1350" dirty="0"/>
-          </a:p>
-          <a:p>
-            <a:pPr algn="l" indent="0" marL="0">
-              <a:spcAft>
-                <a:spcPts val="600"/>
-              </a:spcAft>
-              <a:buNone/>
-            </a:pPr>
-            <a:r>
-              <a:rPr lang="en-US" sz="1350" dirty="0">
-                <a:solidFill>
-                  <a:srgbClr val="33444F"/>
-                </a:solidFill>
-                <a:latin typeface="Calibri" pitchFamily="34" charset="0"/>
-                <a:ea typeface="Calibri" pitchFamily="34" charset="-122"/>
-                <a:cs typeface="Calibri" pitchFamily="34" charset="-120"/>
-              </a:rPr>
-              <a:t>D. Variant size</a:t>
-            </a:r>
-            <a:endParaRPr lang="en-US" sz="1350" dirty="0"/>
-          </a:p>
-          <a:p>
-            <a:pPr algn="l" indent="0" marL="0">
-              <a:spcAft>
-                <a:spcPts val="600"/>
-              </a:spcAft>
-              <a:buNone/>
-            </a:pPr>
-            <a:r>
-              <a:rPr lang="en-US" sz="1350" dirty="0">
-                <a:solidFill>
-                  <a:srgbClr val="33444F"/>
-                </a:solidFill>
-                <a:latin typeface="Calibri" pitchFamily="34" charset="0"/>
-                <a:ea typeface="Calibri" pitchFamily="34" charset="-122"/>
-                <a:cs typeface="Calibri" pitchFamily="34" charset="-120"/>
-              </a:rPr>
-              <a:t>E. Sequencing depth</a:t>
-            </a:r>
-            <a:endParaRPr lang="en-US" sz="1350" dirty="0"/>
-          </a:p>
-        </p:txBody>
-      </p:sp>
-      <p:sp>
-        <p:nvSpPr>
-          <p:cNvPr id="6" name="Shape 4"/>
-          <p:cNvSpPr/>
-          <p:nvPr/>
-        </p:nvSpPr>
-        <p:spPr>
-          <a:xfrm>
-            <a:off x="7201632" y="2395728"/>
-            <a:ext cx="4423136" cy="3246120"/>
+              <a:t>Do not infer inheritance from tumor VAF alone.</a:t>
+            </a:r>
+            <a:endParaRPr lang="en-US" sz="1400" dirty="0"/>
+          </a:p>
+        </p:txBody>
+      </p:sp>
+      <p:sp>
+        <p:nvSpPr>
+          <p:cNvPr id="5" name="Shape 3"/>
+          <p:cNvSpPr/>
+          <p:nvPr/>
+        </p:nvSpPr>
+        <p:spPr>
+          <a:xfrm>
+            <a:off x="7422788" y="1554480"/>
+            <a:ext cx="4201979" cy="3977640"/>
           </a:xfrm>
           <a:prstGeom prst="roundRect">
             <a:avLst>
-              <a:gd name="adj" fmla="val 2535"/>
+              <a:gd name="adj" fmla="val 2069"/>
             </a:avLst>
           </a:prstGeom>
           <a:solidFill>
@@ -6376,67 +7764,53 @@
       </p:sp>
       <p:sp>
         <p:nvSpPr>
+          <p:cNvPr id="6" name="Text 4"/>
+          <p:cNvSpPr/>
+          <p:nvPr/>
+        </p:nvSpPr>
+        <p:spPr>
+          <a:xfrm>
+            <a:off x="7660532" y="1755648"/>
+            <a:ext cx="3744779" cy="310896"/>
+          </a:xfrm>
+          <a:prstGeom prst="rect">
+            <a:avLst/>
+          </a:prstGeom>
+          <a:noFill/>
+          <a:ln/>
+        </p:spPr>
+        <p:txBody>
+          <a:bodyPr wrap="square" lIns="0" tIns="0" rIns="0" bIns="0" rtlCol="0" anchor="ctr"/>
+          <a:lstStyle/>
+          <a:p>
+            <a:pPr indent="0" marL="0">
+              <a:buNone/>
+            </a:pPr>
+            <a:r>
+              <a:rPr lang="en-US" sz="1100" b="1" spc="140" kern="0" dirty="0">
+                <a:solidFill>
+                  <a:srgbClr val="00838F"/>
+                </a:solidFill>
+                <a:latin typeface="Calibri" pitchFamily="34" charset="0"/>
+                <a:ea typeface="Calibri" pitchFamily="34" charset="-122"/>
+                <a:cs typeface="Calibri" pitchFamily="34" charset="-120"/>
+              </a:rPr>
+              <a:t>TEACHING POINT</a:t>
+            </a:r>
+            <a:endParaRPr lang="en-US" sz="1100" dirty="0"/>
+          </a:p>
+        </p:txBody>
+      </p:sp>
+      <p:sp>
+        <p:nvSpPr>
           <p:cNvPr id="7" name="Text 5"/>
           <p:cNvSpPr/>
           <p:nvPr/>
         </p:nvSpPr>
         <p:spPr>
           <a:xfrm>
-            <a:off x="7439376" y="2578608"/>
-            <a:ext cx="3965936" cy="457200"/>
-          </a:xfrm>
-          <a:prstGeom prst="rect">
-            <a:avLst/>
-          </a:prstGeom>
-          <a:noFill/>
-          <a:ln/>
-        </p:spPr>
-        <p:txBody>
-          <a:bodyPr wrap="square" lIns="0" tIns="0" rIns="0" bIns="0" rtlCol="0" anchor="ctr"/>
-          <a:lstStyle/>
-          <a:p>
-            <a:pPr indent="0" marL="0">
-              <a:buNone/>
-            </a:pPr>
-            <a:r>
-              <a:rPr lang="en-US" sz="1500" b="1" dirty="0">
-                <a:solidFill>
-                  <a:srgbClr val="00838F"/>
-                </a:solidFill>
-                <a:latin typeface="Calibri" pitchFamily="34" charset="0"/>
-                <a:ea typeface="Calibri" pitchFamily="34" charset="-122"/>
-                <a:cs typeface="Calibri" pitchFamily="34" charset="-120"/>
-              </a:rPr>
-              <a:t>ANSWER  </a:t>
-            </a:r>
-            <a:pPr indent="0" marL="0">
-              <a:buNone/>
-            </a:pPr>
-            <a:r>
-              <a:rPr lang="en-US" sz="1500" b="1" dirty="0">
-                <a:solidFill>
-                  <a:srgbClr val="1B2A38"/>
-                </a:solidFill>
-                <a:latin typeface="Calibri" pitchFamily="34" charset="0"/>
-                <a:ea typeface="Calibri" pitchFamily="34" charset="-122"/>
-                <a:cs typeface="Calibri" pitchFamily="34" charset="-120"/>
-              </a:rPr>
-              <a:t>B — Clinical actionability</a:t>
-            </a:r>
-            <a:endParaRPr lang="en-US" sz="1500" dirty="0"/>
-          </a:p>
-        </p:txBody>
-      </p:sp>
-      <p:sp>
-        <p:nvSpPr>
-          <p:cNvPr id="8" name="Text 6"/>
-          <p:cNvSpPr/>
-          <p:nvPr/>
-        </p:nvSpPr>
-        <p:spPr>
-          <a:xfrm>
-            <a:off x="7439376" y="3127248"/>
-            <a:ext cx="3947648" cy="2377440"/>
+            <a:off x="7660532" y="2121408"/>
+            <a:ext cx="3726491" cy="3291840"/>
           </a:xfrm>
           <a:prstGeom prst="rect">
             <a:avLst/>
@@ -6450,12 +7824,12 @@
           <a:p>
             <a:pPr algn="l" indent="0" marL="0">
               <a:lnSpc>
-                <a:spcPct val="108000"/>
+                <a:spcPct val="110000"/>
               </a:lnSpc>
               <a:buNone/>
             </a:pPr>
             <a:r>
-              <a:rPr lang="en-US" sz="1250" dirty="0">
+              <a:rPr lang="en-US" sz="1350" dirty="0">
                 <a:solidFill>
                   <a:srgbClr val="33444F"/>
                 </a:solidFill>
@@ -6463,15 +7837,15 @@
                 <a:ea typeface="Calibri" pitchFamily="34" charset="-122"/>
                 <a:cs typeface="Calibri" pitchFamily="34" charset="-120"/>
               </a:rPr>
-              <a:t>Somatic tiers (I–IV) grade clinical significance/actionability in the tumor context, distinct from germline pathogenicity classification.</a:t>
-            </a:r>
-            <a:endParaRPr lang="en-US" sz="1250" dirty="0"/>
-          </a:p>
-        </p:txBody>
-      </p:sp>
-      <p:sp>
-        <p:nvSpPr>
-          <p:cNvPr id="9" name="Text 7"/>
+              <a:t>Somatic testing can incidentally reveal germline variants — confirm with normal tissue and refer for counseling before acting on inherited risk.</a:t>
+            </a:r>
+            <a:endParaRPr lang="en-US" sz="1350" dirty="0"/>
+          </a:p>
+        </p:txBody>
+      </p:sp>
+      <p:sp>
+        <p:nvSpPr>
+          <p:cNvPr id="8" name="Text 6"/>
           <p:cNvSpPr/>
           <p:nvPr/>
         </p:nvSpPr>
@@ -6510,7 +7884,7 @@
       </p:sp>
       <p:sp>
         <p:nvSpPr>
-          <p:cNvPr id="10" name="Text 8"/>
+          <p:cNvPr id="9" name="Text 7"/>
           <p:cNvSpPr/>
           <p:nvPr/>
         </p:nvSpPr>
@@ -6640,7 +8014,7 @@
                 <a:ea typeface="Calibri" pitchFamily="34" charset="-122"/>
                 <a:cs typeface="Calibri" pitchFamily="34" charset="-120"/>
               </a:rPr>
-              <a:t>MOLECULAR &amp; CYTOGENETICS   ·   BOARD REVIEW  ·  Q2</a:t>
+              <a:t>MOLECULAR &amp; CYTOGENETICS   ·   CASE 3</a:t>
             </a:r>
             <a:endParaRPr lang="en-US" sz="1100" dirty="0"/>
           </a:p>
@@ -6671,7 +8045,7 @@
               <a:buNone/>
             </a:pPr>
             <a:r>
-              <a:rPr lang="en-US" sz="2600" b="1" dirty="0">
+              <a:rPr lang="en-US" sz="3000" b="1" dirty="0">
                 <a:solidFill>
                   <a:srgbClr val="0E3A5F"/>
                 </a:solidFill>
@@ -6679,190 +8053,26 @@
                 <a:ea typeface="Calibri" pitchFamily="34" charset="-122"/>
                 <a:cs typeface="Calibri" pitchFamily="34" charset="-120"/>
               </a:rPr>
-              <a:t>Board-Style Review</a:t>
-            </a:r>
-            <a:endParaRPr lang="en-US" sz="2600" dirty="0"/>
-          </a:p>
-        </p:txBody>
-      </p:sp>
-      <p:sp>
-        <p:nvSpPr>
-          <p:cNvPr id="4" name="Text 2"/>
-          <p:cNvSpPr/>
-          <p:nvPr/>
-        </p:nvSpPr>
-        <p:spPr>
-          <a:xfrm>
-            <a:off x="566928" y="1417320"/>
-            <a:ext cx="11057839" cy="914400"/>
-          </a:xfrm>
-          <a:prstGeom prst="rect">
-            <a:avLst/>
-          </a:prstGeom>
-          <a:noFill/>
-          <a:ln/>
-        </p:spPr>
-        <p:txBody>
-          <a:bodyPr wrap="square" lIns="0" tIns="0" rIns="0" bIns="0" rtlCol="0" anchor="t"/>
-          <a:lstStyle/>
-          <a:p>
-            <a:pPr algn="l" indent="0" marL="0">
-              <a:lnSpc>
-                <a:spcPct val="105000"/>
-              </a:lnSpc>
-              <a:buNone/>
-            </a:pPr>
-            <a:r>
-              <a:rPr lang="en-US" sz="1450" b="1" dirty="0">
-                <a:solidFill>
-                  <a:srgbClr val="1B2A38"/>
-                </a:solidFill>
-                <a:latin typeface="Calibri" pitchFamily="34" charset="0"/>
-                <a:ea typeface="Calibri" pitchFamily="34" charset="-122"/>
-                <a:cs typeface="Calibri" pitchFamily="34" charset="-120"/>
-              </a:rPr>
-              <a:t>A germline variant of uncertain significance (VUS) should be:</a:t>
-            </a:r>
-            <a:endParaRPr lang="en-US" sz="1450" dirty="0"/>
-          </a:p>
-        </p:txBody>
-      </p:sp>
-      <p:sp>
-        <p:nvSpPr>
-          <p:cNvPr id="5" name="Text 3"/>
-          <p:cNvSpPr/>
-          <p:nvPr/>
-        </p:nvSpPr>
-        <p:spPr>
-          <a:xfrm>
-            <a:off x="658368" y="2395728"/>
-            <a:ext cx="6192390" cy="3017520"/>
-          </a:xfrm>
-          <a:prstGeom prst="rect">
-            <a:avLst/>
-          </a:prstGeom>
-          <a:noFill/>
-          <a:ln/>
-        </p:spPr>
-        <p:txBody>
-          <a:bodyPr wrap="square" lIns="0" tIns="0" rIns="0" bIns="0" rtlCol="0" anchor="t"/>
-          <a:lstStyle/>
-          <a:p>
-            <a:pPr algn="l" indent="0" marL="0">
-              <a:spcAft>
-                <a:spcPts val="600"/>
-              </a:spcAft>
-              <a:buNone/>
-            </a:pPr>
-            <a:r>
-              <a:rPr lang="en-US" sz="1350" dirty="0">
-                <a:solidFill>
-                  <a:srgbClr val="33444F"/>
-                </a:solidFill>
-                <a:latin typeface="Calibri" pitchFamily="34" charset="0"/>
-                <a:ea typeface="Calibri" pitchFamily="34" charset="-122"/>
-                <a:cs typeface="Calibri" pitchFamily="34" charset="-120"/>
-              </a:rPr>
-              <a:t>A. Treated as pathogenic</a:t>
-            </a:r>
-            <a:endParaRPr lang="en-US" sz="1350" dirty="0"/>
-          </a:p>
-          <a:p>
-            <a:pPr algn="l" indent="0" marL="0">
-              <a:spcAft>
-                <a:spcPts val="600"/>
-              </a:spcAft>
-              <a:buNone/>
-            </a:pPr>
-            <a:r>
-              <a:rPr lang="en-US" sz="1350" dirty="0">
-                <a:solidFill>
-                  <a:srgbClr val="33444F"/>
-                </a:solidFill>
-                <a:latin typeface="Calibri" pitchFamily="34" charset="0"/>
-                <a:ea typeface="Calibri" pitchFamily="34" charset="-122"/>
-                <a:cs typeface="Calibri" pitchFamily="34" charset="-120"/>
-              </a:rPr>
-              <a:t>B. Treated as benign</a:t>
-            </a:r>
-            <a:endParaRPr lang="en-US" sz="1350" dirty="0"/>
-          </a:p>
-          <a:p>
-            <a:pPr algn="l" indent="0" marL="0">
-              <a:spcAft>
-                <a:spcPts val="600"/>
-              </a:spcAft>
-              <a:buNone/>
-            </a:pPr>
-            <a:r>
-              <a:rPr lang="en-US" sz="1350" b="1" dirty="0">
-                <a:solidFill>
-                  <a:srgbClr val="005A63"/>
-                </a:solidFill>
-                <a:latin typeface="Calibri" pitchFamily="34" charset="0"/>
-                <a:ea typeface="Calibri" pitchFamily="34" charset="-122"/>
-                <a:cs typeface="Calibri" pitchFamily="34" charset="-120"/>
-              </a:rPr>
-              <a:t>C. Not used to guide clinical management; reanalyzed over time</a:t>
-            </a:r>
-            <a:endParaRPr lang="en-US" sz="1350" dirty="0"/>
-          </a:p>
-          <a:p>
-            <a:pPr algn="l" indent="0" marL="0">
-              <a:spcAft>
-                <a:spcPts val="600"/>
-              </a:spcAft>
-              <a:buNone/>
-            </a:pPr>
-            <a:r>
-              <a:rPr lang="en-US" sz="1350" dirty="0">
-                <a:solidFill>
-                  <a:srgbClr val="33444F"/>
-                </a:solidFill>
-                <a:latin typeface="Calibri" pitchFamily="34" charset="0"/>
-                <a:ea typeface="Calibri" pitchFamily="34" charset="-122"/>
-                <a:cs typeface="Calibri" pitchFamily="34" charset="-120"/>
-              </a:rPr>
-              <a:t>D. Reported as a secondary finding</a:t>
-            </a:r>
-            <a:endParaRPr lang="en-US" sz="1350" dirty="0"/>
-          </a:p>
-          <a:p>
-            <a:pPr algn="l" indent="0" marL="0">
-              <a:spcAft>
-                <a:spcPts val="600"/>
-              </a:spcAft>
-              <a:buNone/>
-            </a:pPr>
-            <a:r>
-              <a:rPr lang="en-US" sz="1350" dirty="0">
-                <a:solidFill>
-                  <a:srgbClr val="33444F"/>
-                </a:solidFill>
-                <a:latin typeface="Calibri" pitchFamily="34" charset="0"/>
-                <a:ea typeface="Calibri" pitchFamily="34" charset="-122"/>
-                <a:cs typeface="Calibri" pitchFamily="34" charset="-120"/>
-              </a:rPr>
-              <a:t>E. Ignored entirely</a:t>
-            </a:r>
-            <a:endParaRPr lang="en-US" sz="1350" dirty="0"/>
-          </a:p>
-        </p:txBody>
-      </p:sp>
-      <p:sp>
-        <p:nvSpPr>
-          <p:cNvPr id="6" name="Shape 4"/>
-          <p:cNvSpPr/>
-          <p:nvPr/>
-        </p:nvSpPr>
-        <p:spPr>
-          <a:xfrm>
-            <a:off x="7201632" y="2395728"/>
-            <a:ext cx="4423136" cy="3246120"/>
+              <a:t>Case 3</a:t>
+            </a:r>
+            <a:endParaRPr lang="en-US" sz="3000" dirty="0"/>
+          </a:p>
+        </p:txBody>
+      </p:sp>
+      <p:sp>
+        <p:nvSpPr>
+          <p:cNvPr id="4" name="Shape 2"/>
+          <p:cNvSpPr/>
+          <p:nvPr/>
+        </p:nvSpPr>
+        <p:spPr>
+          <a:xfrm>
+            <a:off x="566928" y="1517904"/>
+            <a:ext cx="11057839" cy="2788920"/>
           </a:xfrm>
           <a:prstGeom prst="roundRect">
             <a:avLst>
-              <a:gd name="adj" fmla="val 2535"/>
+              <a:gd name="adj" fmla="val 2951"/>
             </a:avLst>
           </a:prstGeom>
           <a:solidFill>
@@ -6880,14 +8090,14 @@
       </p:sp>
       <p:sp>
         <p:nvSpPr>
-          <p:cNvPr id="7" name="Text 5"/>
-          <p:cNvSpPr/>
-          <p:nvPr/>
-        </p:nvSpPr>
-        <p:spPr>
-          <a:xfrm>
-            <a:off x="7439376" y="2578608"/>
-            <a:ext cx="3965936" cy="457200"/>
+          <p:cNvPr id="5" name="Text 3"/>
+          <p:cNvSpPr/>
+          <p:nvPr/>
+        </p:nvSpPr>
+        <p:spPr>
+          <a:xfrm>
+            <a:off x="841248" y="1700784"/>
+            <a:ext cx="5486400" cy="292608"/>
           </a:xfrm>
           <a:prstGeom prst="rect">
             <a:avLst/>
@@ -6903,7 +8113,7 @@
               <a:buNone/>
             </a:pPr>
             <a:r>
-              <a:rPr lang="en-US" sz="1500" b="1" dirty="0">
+              <a:rPr lang="en-US" sz="1100" b="1" spc="150" kern="0" dirty="0">
                 <a:solidFill>
                   <a:srgbClr val="00838F"/>
                 </a:solidFill>
@@ -6911,36 +8121,22 @@
                 <a:ea typeface="Calibri" pitchFamily="34" charset="-122"/>
                 <a:cs typeface="Calibri" pitchFamily="34" charset="-120"/>
               </a:rPr>
-              <a:t>ANSWER  </a:t>
-            </a:r>
-            <a:pPr indent="0" marL="0">
-              <a:buNone/>
-            </a:pPr>
-            <a:r>
-              <a:rPr lang="en-US" sz="1500" b="1" dirty="0">
-                <a:solidFill>
-                  <a:srgbClr val="1B2A38"/>
-                </a:solidFill>
-                <a:latin typeface="Calibri" pitchFamily="34" charset="0"/>
-                <a:ea typeface="Calibri" pitchFamily="34" charset="-122"/>
-                <a:cs typeface="Calibri" pitchFamily="34" charset="-120"/>
-              </a:rPr>
-              <a:t>C — Not used for management; reanalyze</a:t>
-            </a:r>
-            <a:endParaRPr lang="en-US" sz="1500" dirty="0"/>
-          </a:p>
-        </p:txBody>
-      </p:sp>
-      <p:sp>
-        <p:nvSpPr>
-          <p:cNvPr id="8" name="Text 6"/>
-          <p:cNvSpPr/>
-          <p:nvPr/>
-        </p:nvSpPr>
-        <p:spPr>
-          <a:xfrm>
-            <a:off x="7439376" y="3127248"/>
-            <a:ext cx="3947648" cy="2377440"/>
+              <a:t>CLINICAL VIGNETTE</a:t>
+            </a:r>
+            <a:endParaRPr lang="en-US" sz="1100" dirty="0"/>
+          </a:p>
+        </p:txBody>
+      </p:sp>
+      <p:sp>
+        <p:nvSpPr>
+          <p:cNvPr id="6" name="Text 4"/>
+          <p:cNvSpPr/>
+          <p:nvPr/>
+        </p:nvSpPr>
+        <p:spPr>
+          <a:xfrm>
+            <a:off x="841248" y="2029968"/>
+            <a:ext cx="10509199" cy="2148840"/>
           </a:xfrm>
           <a:prstGeom prst="rect">
             <a:avLst/>
@@ -6959,7 +8155,7 @@
               <a:buNone/>
             </a:pPr>
             <a:r>
-              <a:rPr lang="en-US" sz="1250" dirty="0">
+              <a:rPr lang="en-US" sz="1450" dirty="0">
                 <a:solidFill>
                   <a:srgbClr val="33444F"/>
                 </a:solidFill>
@@ -6967,15 +8163,122 @@
                 <a:ea typeface="Calibri" pitchFamily="34" charset="-122"/>
                 <a:cs typeface="Calibri" pitchFamily="34" charset="-120"/>
               </a:rPr>
-              <a:t>A VUS lacks sufficient evidence for action; management follows clinical risk, with reclassification as new evidence emerges.</a:t>
-            </a:r>
-            <a:endParaRPr lang="en-US" sz="1250" dirty="0"/>
+              <a:t>A VUS in a relevant gene is reported, and the clinician asks to base management on it.</a:t>
+            </a:r>
+            <a:endParaRPr lang="en-US" sz="1450" dirty="0"/>
+          </a:p>
+        </p:txBody>
+      </p:sp>
+      <p:sp>
+        <p:nvSpPr>
+          <p:cNvPr id="7" name="Shape 5"/>
+          <p:cNvSpPr/>
+          <p:nvPr/>
+        </p:nvSpPr>
+        <p:spPr>
+          <a:xfrm>
+            <a:off x="566928" y="4553712"/>
+            <a:ext cx="11057839" cy="1325880"/>
+          </a:xfrm>
+          <a:prstGeom prst="roundRect">
+            <a:avLst>
+              <a:gd name="adj" fmla="val 6207"/>
+            </a:avLst>
+          </a:prstGeom>
+          <a:solidFill>
+            <a:srgbClr val="0E3A5F"/>
+          </a:solidFill>
+          <a:ln/>
+          <a:effectLst>
+            <a:outerShdw sx="100000" sy="100000" kx="0" ky="0" algn="bl" rotWithShape="0" blurRad="88900" dist="25400" dir="5400000">
+              <a:srgbClr val="22303C">
+                <a:alpha val="12000"/>
+              </a:srgbClr>
+            </a:outerShdw>
+          </a:effectLst>
+        </p:spPr>
+      </p:sp>
+      <p:sp>
+        <p:nvSpPr>
+          <p:cNvPr id="8" name="Text 6"/>
+          <p:cNvSpPr/>
+          <p:nvPr/>
+        </p:nvSpPr>
+        <p:spPr>
+          <a:xfrm>
+            <a:off x="822960" y="4681728"/>
+            <a:ext cx="640080" cy="960120"/>
+          </a:xfrm>
+          <a:prstGeom prst="rect">
+            <a:avLst/>
+          </a:prstGeom>
+          <a:noFill/>
+          <a:ln/>
+        </p:spPr>
+        <p:txBody>
+          <a:bodyPr wrap="square" lIns="0" tIns="0" rIns="0" bIns="0" rtlCol="0" anchor="ctr"/>
+          <a:lstStyle/>
+          <a:p>
+            <a:pPr algn="ctr" indent="0" marL="0">
+              <a:buNone/>
+            </a:pPr>
+            <a:r>
+              <a:rPr lang="en-US" sz="4000" b="1" dirty="0">
+                <a:solidFill>
+                  <a:srgbClr val="00838F"/>
+                </a:solidFill>
+                <a:latin typeface="Calibri" pitchFamily="34" charset="0"/>
+                <a:ea typeface="Calibri" pitchFamily="34" charset="-122"/>
+                <a:cs typeface="Calibri" pitchFamily="34" charset="-120"/>
+              </a:rPr>
+              <a:t>?</a:t>
+            </a:r>
+            <a:endParaRPr lang="en-US" sz="4000" dirty="0"/>
           </a:p>
         </p:txBody>
       </p:sp>
       <p:sp>
         <p:nvSpPr>
           <p:cNvPr id="9" name="Text 7"/>
+          <p:cNvSpPr/>
+          <p:nvPr/>
+        </p:nvSpPr>
+        <p:spPr>
+          <a:xfrm>
+            <a:off x="1618488" y="4553712"/>
+            <a:ext cx="9686239" cy="1325880"/>
+          </a:xfrm>
+          <a:prstGeom prst="rect">
+            <a:avLst/>
+          </a:prstGeom>
+          <a:noFill/>
+          <a:ln/>
+        </p:spPr>
+        <p:txBody>
+          <a:bodyPr wrap="square" lIns="0" tIns="0" rIns="0" bIns="0" rtlCol="0" anchor="ctr"/>
+          <a:lstStyle/>
+          <a:p>
+            <a:pPr algn="l" indent="0" marL="0">
+              <a:buNone/>
+            </a:pPr>
+            <a:r>
+              <a:rPr lang="en-US" sz="1500" b="1" dirty="0">
+                <a:solidFill>
+                  <a:srgbClr val="FFFFFF"/>
+                </a:solidFill>
+                <a:latin typeface="Calibri" pitchFamily="34" charset="0"/>
+                <a:ea typeface="Calibri" pitchFamily="34" charset="-122"/>
+                <a:cs typeface="Calibri" pitchFamily="34" charset="-120"/>
+              </a:rPr>
+              <a:t>How should the laboratory advise?</a:t>
+            </a:r>
+            <a:endParaRPr lang="en-US" sz="1500" dirty="0"/>
+          </a:p>
+        </p:txBody>
+      </p:sp>
+      <p:sp>
+        <p:nvSpPr>
+          <p:cNvPr id="10" name="Text 8"/>
           <p:cNvSpPr/>
           <p:nvPr/>
         </p:nvSpPr>
@@ -7014,7 +8317,7 @@
       </p:sp>
       <p:sp>
         <p:nvSpPr>
-          <p:cNvPr id="10" name="Text 8"/>
+          <p:cNvPr id="11" name="Text 9"/>
           <p:cNvSpPr/>
           <p:nvPr/>
         </p:nvSpPr>
@@ -7144,7 +8447,7 @@
                 <a:ea typeface="Calibri" pitchFamily="34" charset="-122"/>
                 <a:cs typeface="Calibri" pitchFamily="34" charset="-120"/>
               </a:rPr>
-              <a:t>MOLECULAR &amp; CYTOGENETICS   ·   BOARD REVIEW  ·  Q3</a:t>
+              <a:t>MOLECULAR &amp; CYTOGENETICS   ·   CASE 3  ·  RESOLUTION</a:t>
             </a:r>
             <a:endParaRPr lang="en-US" sz="1100" dirty="0"/>
           </a:p>
@@ -7175,7 +8478,7 @@
               <a:buNone/>
             </a:pPr>
             <a:r>
-              <a:rPr lang="en-US" sz="2600" b="1" dirty="0">
+              <a:rPr lang="en-US" sz="3000" b="1" dirty="0">
                 <a:solidFill>
                   <a:srgbClr val="0E3A5F"/>
                 </a:solidFill>
@@ -7183,9 +8486,9 @@
                 <a:ea typeface="Calibri" pitchFamily="34" charset="-122"/>
                 <a:cs typeface="Calibri" pitchFamily="34" charset="-120"/>
               </a:rPr>
-              <a:t>Board-Style Review</a:t>
-            </a:r>
-            <a:endParaRPr lang="en-US" sz="2600" dirty="0"/>
+              <a:t>Case 3: Managing a VUS</a:t>
+            </a:r>
+            <a:endParaRPr lang="en-US" sz="3000" dirty="0"/>
           </a:p>
         </p:txBody>
       </p:sp>
@@ -7197,8 +8500,8 @@
         </p:nvSpPr>
         <p:spPr>
           <a:xfrm>
-            <a:off x="566928" y="1417320"/>
-            <a:ext cx="11057839" cy="914400"/>
+            <a:off x="566928" y="1554480"/>
+            <a:ext cx="6413547" cy="4023360"/>
           </a:xfrm>
           <a:prstGeom prst="rect">
             <a:avLst/>
@@ -7210,14 +8513,15 @@
           <a:bodyPr wrap="square" lIns="0" tIns="0" rIns="0" bIns="0" rtlCol="0" anchor="t"/>
           <a:lstStyle/>
           <a:p>
-            <a:pPr algn="l" indent="0" marL="0">
-              <a:lnSpc>
-                <a:spcPct val="105000"/>
-              </a:lnSpc>
-              <a:buNone/>
-            </a:pPr>
-            <a:r>
-              <a:rPr lang="en-US" sz="1450" b="1" dirty="0">
+            <a:pPr algn="l" marL="177800" indent="-177800">
+              <a:spcAft>
+                <a:spcPts val="900"/>
+              </a:spcAft>
+              <a:buSzPct val="100000"/>
+              <a:buChar char="•"/>
+            </a:pPr>
+            <a:r>
+              <a:rPr lang="en-US" sz="1400" b="1" dirty="0">
                 <a:solidFill>
                   <a:srgbClr val="1B2A38"/>
                 </a:solidFill>
@@ -7225,41 +8529,20 @@
                 <a:ea typeface="Calibri" pitchFamily="34" charset="-122"/>
                 <a:cs typeface="Calibri" pitchFamily="34" charset="-120"/>
               </a:rPr>
-              <a:t>Why is specifying the reference transcript essential in variant nomenclature?</a:t>
-            </a:r>
-            <a:endParaRPr lang="en-US" sz="1450" dirty="0"/>
-          </a:p>
-        </p:txBody>
-      </p:sp>
-      <p:sp>
-        <p:nvSpPr>
-          <p:cNvPr id="5" name="Text 3"/>
-          <p:cNvSpPr/>
-          <p:nvPr/>
-        </p:nvSpPr>
-        <p:spPr>
-          <a:xfrm>
-            <a:off x="658368" y="2395728"/>
-            <a:ext cx="6192390" cy="3017520"/>
-          </a:xfrm>
-          <a:prstGeom prst="rect">
-            <a:avLst/>
-          </a:prstGeom>
-          <a:noFill/>
-          <a:ln/>
-        </p:spPr>
-        <p:txBody>
-          <a:bodyPr wrap="square" lIns="0" tIns="0" rIns="0" bIns="0" rtlCol="0" anchor="t"/>
-          <a:lstStyle/>
-          <a:p>
-            <a:pPr algn="l" indent="0" marL="0">
+              <a:t>A VUS should not be used to guide management as if pathogenic.</a:t>
+            </a:r>
+            <a:endParaRPr lang="en-US" sz="1400" dirty="0"/>
+          </a:p>
+          <a:p>
+            <a:pPr algn="l" marL="177800" indent="-177800">
               <a:spcAft>
-                <a:spcPts val="600"/>
+                <a:spcPts val="900"/>
               </a:spcAft>
-              <a:buNone/>
-            </a:pPr>
-            <a:r>
-              <a:rPr lang="en-US" sz="1350" dirty="0">
+              <a:buSzPct val="100000"/>
+              <a:buChar char="•"/>
+            </a:pPr>
+            <a:r>
+              <a:rPr lang="en-US" sz="1400" dirty="0">
                 <a:solidFill>
                   <a:srgbClr val="33444F"/>
                 </a:solidFill>
@@ -7267,39 +8550,41 @@
                 <a:ea typeface="Calibri" pitchFamily="34" charset="-122"/>
                 <a:cs typeface="Calibri" pitchFamily="34" charset="-120"/>
               </a:rPr>
-              <a:t>A. It changes the patient’s genome</a:t>
-            </a:r>
-            <a:endParaRPr lang="en-US" sz="1350" dirty="0"/>
-          </a:p>
-          <a:p>
-            <a:pPr algn="l" indent="0" marL="0">
+              <a:t>Communicate uncertainty and the possibility of reclassification.</a:t>
+            </a:r>
+            <a:endParaRPr lang="en-US" sz="1400" dirty="0"/>
+          </a:p>
+          <a:p>
+            <a:pPr algn="l" marL="177800" indent="-177800">
               <a:spcAft>
-                <a:spcPts val="600"/>
+                <a:spcPts val="900"/>
               </a:spcAft>
-              <a:buNone/>
-            </a:pPr>
-            <a:r>
-              <a:rPr lang="en-US" sz="1350" b="1" dirty="0">
-                <a:solidFill>
-                  <a:srgbClr val="005A63"/>
-                </a:solidFill>
-                <a:latin typeface="Calibri" pitchFamily="34" charset="0"/>
-                <a:ea typeface="Calibri" pitchFamily="34" charset="-122"/>
-                <a:cs typeface="Calibri" pitchFamily="34" charset="-120"/>
-              </a:rPr>
-              <a:t>B. The same nucleotide change can have different c./p. designations across transcripts, risking misinterpretation</a:t>
-            </a:r>
-            <a:endParaRPr lang="en-US" sz="1350" dirty="0"/>
-          </a:p>
-          <a:p>
-            <a:pPr algn="l" indent="0" marL="0">
+              <a:buSzPct val="100000"/>
+              <a:buChar char="•"/>
+            </a:pPr>
+            <a:r>
+              <a:rPr lang="en-US" sz="1400" dirty="0">
+                <a:solidFill>
+                  <a:srgbClr val="33444F"/>
+                </a:solidFill>
+                <a:latin typeface="Calibri" pitchFamily="34" charset="0"/>
+                <a:ea typeface="Calibri" pitchFamily="34" charset="-122"/>
+                <a:cs typeface="Calibri" pitchFamily="34" charset="-120"/>
+              </a:rPr>
+              <a:t>Recommend correlation with phenotype and possible reanalysis over time.</a:t>
+            </a:r>
+            <a:endParaRPr lang="en-US" sz="1400" dirty="0"/>
+          </a:p>
+          <a:p>
+            <a:pPr algn="l" marL="177800" indent="-177800">
               <a:spcAft>
-                <a:spcPts val="600"/>
+                <a:spcPts val="900"/>
               </a:spcAft>
-              <a:buNone/>
-            </a:pPr>
-            <a:r>
-              <a:rPr lang="en-US" sz="1350" dirty="0">
+              <a:buSzPct val="100000"/>
+              <a:buChar char="•"/>
+            </a:pPr>
+            <a:r>
+              <a:rPr lang="en-US" sz="1400" dirty="0">
                 <a:solidFill>
                   <a:srgbClr val="33444F"/>
                 </a:solidFill>
@@ -7307,66 +8592,26 @@
                 <a:ea typeface="Calibri" pitchFamily="34" charset="-122"/>
                 <a:cs typeface="Calibri" pitchFamily="34" charset="-120"/>
               </a:rPr>
-              <a:t>C. It is only a formatting preference</a:t>
-            </a:r>
-            <a:endParaRPr lang="en-US" sz="1350" dirty="0"/>
-          </a:p>
-          <a:p>
-            <a:pPr algn="l" indent="0" marL="0">
-              <a:spcAft>
-                <a:spcPts val="600"/>
-              </a:spcAft>
-              <a:buNone/>
-            </a:pPr>
-            <a:r>
-              <a:rPr lang="en-US" sz="1350" dirty="0">
-                <a:solidFill>
-                  <a:srgbClr val="33444F"/>
-                </a:solidFill>
-                <a:latin typeface="Calibri" pitchFamily="34" charset="0"/>
-                <a:ea typeface="Calibri" pitchFamily="34" charset="-122"/>
-                <a:cs typeface="Calibri" pitchFamily="34" charset="-120"/>
-              </a:rPr>
-              <a:t>D. It improves sequencing depth</a:t>
-            </a:r>
-            <a:endParaRPr lang="en-US" sz="1350" dirty="0"/>
-          </a:p>
-          <a:p>
-            <a:pPr algn="l" indent="0" marL="0">
-              <a:spcAft>
-                <a:spcPts val="600"/>
-              </a:spcAft>
-              <a:buNone/>
-            </a:pPr>
-            <a:r>
-              <a:rPr lang="en-US" sz="1350" dirty="0">
-                <a:solidFill>
-                  <a:srgbClr val="33444F"/>
-                </a:solidFill>
-                <a:latin typeface="Calibri" pitchFamily="34" charset="0"/>
-                <a:ea typeface="Calibri" pitchFamily="34" charset="-122"/>
-                <a:cs typeface="Calibri" pitchFamily="34" charset="-120"/>
-              </a:rPr>
-              <a:t>E. It is required for billing only</a:t>
-            </a:r>
-            <a:endParaRPr lang="en-US" sz="1350" dirty="0"/>
-          </a:p>
-        </p:txBody>
-      </p:sp>
-      <p:sp>
-        <p:nvSpPr>
-          <p:cNvPr id="6" name="Shape 4"/>
-          <p:cNvSpPr/>
-          <p:nvPr/>
-        </p:nvSpPr>
-        <p:spPr>
-          <a:xfrm>
-            <a:off x="7201632" y="2395728"/>
-            <a:ext cx="4423136" cy="3246120"/>
+              <a:t>Avoid irreversible decisions based on a VUS.</a:t>
+            </a:r>
+            <a:endParaRPr lang="en-US" sz="1400" dirty="0"/>
+          </a:p>
+        </p:txBody>
+      </p:sp>
+      <p:sp>
+        <p:nvSpPr>
+          <p:cNvPr id="5" name="Shape 3"/>
+          <p:cNvSpPr/>
+          <p:nvPr/>
+        </p:nvSpPr>
+        <p:spPr>
+          <a:xfrm>
+            <a:off x="7422788" y="1554480"/>
+            <a:ext cx="4201979" cy="3977640"/>
           </a:xfrm>
           <a:prstGeom prst="roundRect">
             <a:avLst>
-              <a:gd name="adj" fmla="val 2535"/>
+              <a:gd name="adj" fmla="val 2069"/>
             </a:avLst>
           </a:prstGeom>
           <a:solidFill>
@@ -7384,67 +8629,53 @@
       </p:sp>
       <p:sp>
         <p:nvSpPr>
+          <p:cNvPr id="6" name="Text 4"/>
+          <p:cNvSpPr/>
+          <p:nvPr/>
+        </p:nvSpPr>
+        <p:spPr>
+          <a:xfrm>
+            <a:off x="7660532" y="1755648"/>
+            <a:ext cx="3744779" cy="310896"/>
+          </a:xfrm>
+          <a:prstGeom prst="rect">
+            <a:avLst/>
+          </a:prstGeom>
+          <a:noFill/>
+          <a:ln/>
+        </p:spPr>
+        <p:txBody>
+          <a:bodyPr wrap="square" lIns="0" tIns="0" rIns="0" bIns="0" rtlCol="0" anchor="ctr"/>
+          <a:lstStyle/>
+          <a:p>
+            <a:pPr indent="0" marL="0">
+              <a:buNone/>
+            </a:pPr>
+            <a:r>
+              <a:rPr lang="en-US" sz="1100" b="1" spc="140" kern="0" dirty="0">
+                <a:solidFill>
+                  <a:srgbClr val="00838F"/>
+                </a:solidFill>
+                <a:latin typeface="Calibri" pitchFamily="34" charset="0"/>
+                <a:ea typeface="Calibri" pitchFamily="34" charset="-122"/>
+                <a:cs typeface="Calibri" pitchFamily="34" charset="-120"/>
+              </a:rPr>
+              <a:t>TEACHING POINT</a:t>
+            </a:r>
+            <a:endParaRPr lang="en-US" sz="1100" dirty="0"/>
+          </a:p>
+        </p:txBody>
+      </p:sp>
+      <p:sp>
+        <p:nvSpPr>
           <p:cNvPr id="7" name="Text 5"/>
           <p:cNvSpPr/>
           <p:nvPr/>
         </p:nvSpPr>
         <p:spPr>
           <a:xfrm>
-            <a:off x="7439376" y="2578608"/>
-            <a:ext cx="3965936" cy="457200"/>
-          </a:xfrm>
-          <a:prstGeom prst="rect">
-            <a:avLst/>
-          </a:prstGeom>
-          <a:noFill/>
-          <a:ln/>
-        </p:spPr>
-        <p:txBody>
-          <a:bodyPr wrap="square" lIns="0" tIns="0" rIns="0" bIns="0" rtlCol="0" anchor="ctr"/>
-          <a:lstStyle/>
-          <a:p>
-            <a:pPr indent="0" marL="0">
-              <a:buNone/>
-            </a:pPr>
-            <a:r>
-              <a:rPr lang="en-US" sz="1500" b="1" dirty="0">
-                <a:solidFill>
-                  <a:srgbClr val="00838F"/>
-                </a:solidFill>
-                <a:latin typeface="Calibri" pitchFamily="34" charset="0"/>
-                <a:ea typeface="Calibri" pitchFamily="34" charset="-122"/>
-                <a:cs typeface="Calibri" pitchFamily="34" charset="-120"/>
-              </a:rPr>
-              <a:t>ANSWER  </a:t>
-            </a:r>
-            <a:pPr indent="0" marL="0">
-              <a:buNone/>
-            </a:pPr>
-            <a:r>
-              <a:rPr lang="en-US" sz="1500" b="1" dirty="0">
-                <a:solidFill>
-                  <a:srgbClr val="1B2A38"/>
-                </a:solidFill>
-                <a:latin typeface="Calibri" pitchFamily="34" charset="0"/>
-                <a:ea typeface="Calibri" pitchFamily="34" charset="-122"/>
-                <a:cs typeface="Calibri" pitchFamily="34" charset="-120"/>
-              </a:rPr>
-              <a:t>B — Avoids ambiguity across transcripts</a:t>
-            </a:r>
-            <a:endParaRPr lang="en-US" sz="1500" dirty="0"/>
-          </a:p>
-        </p:txBody>
-      </p:sp>
-      <p:sp>
-        <p:nvSpPr>
-          <p:cNvPr id="8" name="Text 6"/>
-          <p:cNvSpPr/>
-          <p:nvPr/>
-        </p:nvSpPr>
-        <p:spPr>
-          <a:xfrm>
-            <a:off x="7439376" y="3127248"/>
-            <a:ext cx="3947648" cy="2377440"/>
+            <a:off x="7660532" y="2121408"/>
+            <a:ext cx="3726491" cy="3291840"/>
           </a:xfrm>
           <a:prstGeom prst="rect">
             <a:avLst/>
@@ -7458,12 +8689,12 @@
           <a:p>
             <a:pPr algn="l" indent="0" marL="0">
               <a:lnSpc>
-                <a:spcPct val="108000"/>
+                <a:spcPct val="110000"/>
               </a:lnSpc>
               <a:buNone/>
             </a:pPr>
             <a:r>
-              <a:rPr lang="en-US" sz="1250" dirty="0">
+              <a:rPr lang="en-US" sz="1350" dirty="0">
                 <a:solidFill>
                   <a:srgbClr val="33444F"/>
                 </a:solidFill>
@@ -7471,15 +8702,15 @@
                 <a:ea typeface="Calibri" pitchFamily="34" charset="-122"/>
                 <a:cs typeface="Calibri" pitchFamily="34" charset="-120"/>
               </a:rPr>
-              <a:t>Coordinates depend on the chosen transcript and build; omitting them can cause dangerous misinterpretation of which variant is meant.</a:t>
-            </a:r>
-            <a:endParaRPr lang="en-US" sz="1250" dirty="0"/>
-          </a:p>
-        </p:txBody>
-      </p:sp>
-      <p:sp>
-        <p:nvSpPr>
-          <p:cNvPr id="9" name="Text 7"/>
+              <a:t>A VUS is uncertain by definition — it must not drive clinical action; periodic reanalysis may reclassify it later.</a:t>
+            </a:r>
+            <a:endParaRPr lang="en-US" sz="1350" dirty="0"/>
+          </a:p>
+        </p:txBody>
+      </p:sp>
+      <p:sp>
+        <p:nvSpPr>
+          <p:cNvPr id="8" name="Text 6"/>
           <p:cNvSpPr/>
           <p:nvPr/>
         </p:nvSpPr>
@@ -7518,7 +8749,7 @@
       </p:sp>
       <p:sp>
         <p:nvSpPr>
-          <p:cNvPr id="10" name="Text 8"/>
+          <p:cNvPr id="9" name="Text 7"/>
           <p:cNvSpPr/>
           <p:nvPr/>
         </p:nvSpPr>
@@ -7755,7 +8986,7 @@
                 <a:ea typeface="Calibri" pitchFamily="34" charset="-122"/>
                 <a:cs typeface="Calibri" pitchFamily="34" charset="-120"/>
               </a:rPr>
-              <a:t>Tiers</a:t>
+              <a:t>5 tiers</a:t>
             </a:r>
             <a:endParaRPr lang="en-US" sz="3600" dirty="0"/>
           </a:p>
@@ -7794,7 +9025,7 @@
                 <a:ea typeface="Calibri" pitchFamily="34" charset="-122"/>
                 <a:cs typeface="Calibri" pitchFamily="34" charset="-120"/>
               </a:rPr>
-              <a:t>Frameworks turn raw variants into clinically meaningful categories</a:t>
+              <a:t>Pathogenic to benign, with VUS in between</a:t>
             </a:r>
             <a:endParaRPr lang="en-US" sz="1150" dirty="0"/>
           </a:p>
@@ -7862,7 +9093,7 @@
                 <a:ea typeface="Calibri" pitchFamily="34" charset="-122"/>
                 <a:cs typeface="Calibri" pitchFamily="34" charset="-120"/>
               </a:rPr>
-              <a:t>VUS</a:t>
+              <a:t>Evidence</a:t>
             </a:r>
             <a:endParaRPr lang="en-US" sz="3600" dirty="0"/>
           </a:p>
@@ -7901,7 +9132,7 @@
                 <a:ea typeface="Calibri" pitchFamily="34" charset="-122"/>
                 <a:cs typeface="Calibri" pitchFamily="34" charset="-120"/>
               </a:rPr>
-              <a:t>The uncertain middle ground — handled, not acted upon</a:t>
+              <a:t>Population, computational, functional, and segregation data</a:t>
             </a:r>
             <a:endParaRPr lang="en-US" sz="1150" dirty="0"/>
           </a:p>
@@ -7969,7 +9200,7 @@
                 <a:ea typeface="Calibri" pitchFamily="34" charset="-122"/>
                 <a:cs typeface="Calibri" pitchFamily="34" charset="-120"/>
               </a:rPr>
-              <a:t>HGVS</a:t>
+              <a:t>VUS</a:t>
             </a:r>
             <a:endParaRPr lang="en-US" sz="3600" dirty="0"/>
           </a:p>
@@ -8008,7 +9239,7 @@
                 <a:ea typeface="Calibri" pitchFamily="34" charset="-122"/>
                 <a:cs typeface="Calibri" pitchFamily="34" charset="-120"/>
               </a:rPr>
-              <a:t>Standard nomenclature prevents dangerous ambiguity</a:t>
+              <a:t>Uncertain variants must not be over-interpreted</a:t>
             </a:r>
             <a:endParaRPr lang="en-US" sz="1150" dirty="0"/>
           </a:p>
@@ -8079,7 +9310,7 @@
                 <a:ea typeface="Calibri" pitchFamily="34" charset="-122"/>
                 <a:cs typeface="Calibri" pitchFamily="34" charset="-120"/>
               </a:rPr>
-              <a:t>A sequencing result is only as good as its interpretation and report. Standardized frameworks, correct nomenclature, and the germline-vs-somatic distinction make a report actionable and safe.</a:t>
+              <a:t>The hardest part of molecular testing is not generating the variant — it is classifying and reporting it. Structured frameworks translate heterogeneous evidence into an actionable, defensible call.</a:t>
             </a:r>
             <a:endParaRPr lang="en-US" sz="1450" dirty="0"/>
           </a:p>
@@ -8122,7 +9353,7 @@
                 <a:ea typeface="Calibri" pitchFamily="34" charset="-122"/>
                 <a:cs typeface="Calibri" pitchFamily="34" charset="-120"/>
               </a:rPr>
-              <a:t>The report — classification, nomenclature, and clear actionability — is the deliverable; the raw variant list is not.</a:t>
+              <a:t>A variant’s meaning comes from weighing evidence in a framework — and a VUS is not a positive result.</a:t>
             </a:r>
             <a:endParaRPr lang="en-US" sz="1300" dirty="0"/>
           </a:p>
@@ -8248,7 +9479,7 @@
     <p:bg>
       <p:bgPr>
         <a:solidFill>
-          <a:srgbClr val="0A2A45"/>
+          <a:srgbClr val="FFFFFF"/>
         </a:solidFill>
       </p:bgPr>
     </p:bg>
@@ -8275,7 +9506,7 @@
         <p:spPr>
           <a:xfrm>
             <a:off x="566928" y="329184"/>
-            <a:ext cx="10058400" cy="310896"/>
+            <a:ext cx="10515600" cy="310896"/>
           </a:xfrm>
           <a:prstGeom prst="rect">
             <a:avLst/>
@@ -8287,7 +9518,7 @@
           <a:bodyPr wrap="square" lIns="0" tIns="0" rIns="0" bIns="0" rtlCol="0" anchor="ctr"/>
           <a:lstStyle/>
           <a:p>
-            <a:pPr indent="0" marL="0">
+            <a:pPr algn="l" indent="0" marL="0">
               <a:buNone/>
             </a:pPr>
             <a:r>
@@ -8299,7 +9530,7 @@
                 <a:ea typeface="Calibri" pitchFamily="34" charset="-122"/>
                 <a:cs typeface="Calibri" pitchFamily="34" charset="-120"/>
               </a:rPr>
-              <a:t>MOLECULAR &amp; CYTOGENETICS</a:t>
+              <a:t>MOLECULAR &amp; CYTOGENETICS   ·   BOARD REVIEW  ·  Q1</a:t>
             </a:r>
             <a:endParaRPr lang="en-US" sz="1100" dirty="0"/>
           </a:p>
@@ -8313,8 +9544,8 @@
         </p:nvSpPr>
         <p:spPr>
           <a:xfrm>
-            <a:off x="566928" y="676656"/>
-            <a:ext cx="10972800" cy="749808"/>
+            <a:off x="566928" y="713232"/>
+            <a:ext cx="11064240" cy="749808"/>
           </a:xfrm>
           <a:prstGeom prst="rect">
             <a:avLst/>
@@ -8326,62 +9557,206 @@
           <a:bodyPr wrap="square" lIns="0" tIns="0" rIns="0" bIns="0" rtlCol="0" anchor="ctr"/>
           <a:lstStyle/>
           <a:p>
-            <a:pPr indent="0" marL="0">
-              <a:buNone/>
-            </a:pPr>
-            <a:r>
-              <a:rPr lang="en-US" sz="3000" b="1" dirty="0">
-                <a:solidFill>
-                  <a:srgbClr val="FFFFFF"/>
-                </a:solidFill>
-                <a:latin typeface="Calibri" pitchFamily="34" charset="0"/>
-                <a:ea typeface="Calibri" pitchFamily="34" charset="-122"/>
-                <a:cs typeface="Calibri" pitchFamily="34" charset="-120"/>
-              </a:rPr>
-              <a:t>Key Take-Home Points</a:t>
-            </a:r>
-            <a:endParaRPr lang="en-US" sz="3000" dirty="0"/>
-          </a:p>
-        </p:txBody>
-      </p:sp>
-      <p:sp>
-        <p:nvSpPr>
-          <p:cNvPr id="4" name="Shape 2"/>
-          <p:cNvSpPr/>
-          <p:nvPr/>
-        </p:nvSpPr>
-        <p:spPr>
-          <a:xfrm>
-            <a:off x="566928" y="1517904"/>
-            <a:ext cx="11057839" cy="841248"/>
+            <a:pPr algn="l" indent="0" marL="0">
+              <a:buNone/>
+            </a:pPr>
+            <a:r>
+              <a:rPr lang="en-US" sz="2600" b="1" dirty="0">
+                <a:solidFill>
+                  <a:srgbClr val="0E3A5F"/>
+                </a:solidFill>
+                <a:latin typeface="Calibri" pitchFamily="34" charset="0"/>
+                <a:ea typeface="Calibri" pitchFamily="34" charset="-122"/>
+                <a:cs typeface="Calibri" pitchFamily="34" charset="-120"/>
+              </a:rPr>
+              <a:t>Board-Style Review</a:t>
+            </a:r>
+            <a:endParaRPr lang="en-US" sz="2600" dirty="0"/>
+          </a:p>
+        </p:txBody>
+      </p:sp>
+      <p:sp>
+        <p:nvSpPr>
+          <p:cNvPr id="4" name="Text 2"/>
+          <p:cNvSpPr/>
+          <p:nvPr/>
+        </p:nvSpPr>
+        <p:spPr>
+          <a:xfrm>
+            <a:off x="566928" y="1417320"/>
+            <a:ext cx="11057839" cy="914400"/>
+          </a:xfrm>
+          <a:prstGeom prst="rect">
+            <a:avLst/>
+          </a:prstGeom>
+          <a:noFill/>
+          <a:ln/>
+        </p:spPr>
+        <p:txBody>
+          <a:bodyPr wrap="square" lIns="0" tIns="0" rIns="0" bIns="0" rtlCol="0" anchor="t"/>
+          <a:lstStyle/>
+          <a:p>
+            <a:pPr algn="l" indent="0" marL="0">
+              <a:lnSpc>
+                <a:spcPct val="105000"/>
+              </a:lnSpc>
+              <a:buNone/>
+            </a:pPr>
+            <a:r>
+              <a:rPr lang="en-US" sz="1450" b="1" dirty="0">
+                <a:solidFill>
+                  <a:srgbClr val="1B2A38"/>
+                </a:solidFill>
+                <a:latin typeface="Calibri" pitchFamily="34" charset="0"/>
+                <a:ea typeface="Calibri" pitchFamily="34" charset="-122"/>
+                <a:cs typeface="Calibri" pitchFamily="34" charset="-120"/>
+              </a:rPr>
+              <a:t>A variant classified as VUS should be:</a:t>
+            </a:r>
+            <a:endParaRPr lang="en-US" sz="1450" dirty="0"/>
+          </a:p>
+        </p:txBody>
+      </p:sp>
+      <p:sp>
+        <p:nvSpPr>
+          <p:cNvPr id="5" name="Text 3"/>
+          <p:cNvSpPr/>
+          <p:nvPr/>
+        </p:nvSpPr>
+        <p:spPr>
+          <a:xfrm>
+            <a:off x="658368" y="2395728"/>
+            <a:ext cx="6192390" cy="3017520"/>
+          </a:xfrm>
+          <a:prstGeom prst="rect">
+            <a:avLst/>
+          </a:prstGeom>
+          <a:noFill/>
+          <a:ln/>
+        </p:spPr>
+        <p:txBody>
+          <a:bodyPr wrap="square" lIns="0" tIns="0" rIns="0" bIns="0" rtlCol="0" anchor="t"/>
+          <a:lstStyle/>
+          <a:p>
+            <a:pPr algn="l" indent="0" marL="0">
+              <a:spcAft>
+                <a:spcPts val="600"/>
+              </a:spcAft>
+              <a:buNone/>
+            </a:pPr>
+            <a:r>
+              <a:rPr lang="en-US" sz="1350" dirty="0">
+                <a:solidFill>
+                  <a:srgbClr val="33444F"/>
+                </a:solidFill>
+                <a:latin typeface="Calibri" pitchFamily="34" charset="0"/>
+                <a:ea typeface="Calibri" pitchFamily="34" charset="-122"/>
+                <a:cs typeface="Calibri" pitchFamily="34" charset="-120"/>
+              </a:rPr>
+              <a:t>A. Treated as pathogenic</a:t>
+            </a:r>
+            <a:endParaRPr lang="en-US" sz="1350" dirty="0"/>
+          </a:p>
+          <a:p>
+            <a:pPr algn="l" indent="0" marL="0">
+              <a:spcAft>
+                <a:spcPts val="600"/>
+              </a:spcAft>
+              <a:buNone/>
+            </a:pPr>
+            <a:r>
+              <a:rPr lang="en-US" sz="1350" dirty="0">
+                <a:solidFill>
+                  <a:srgbClr val="33444F"/>
+                </a:solidFill>
+                <a:latin typeface="Calibri" pitchFamily="34" charset="0"/>
+                <a:ea typeface="Calibri" pitchFamily="34" charset="-122"/>
+                <a:cs typeface="Calibri" pitchFamily="34" charset="-120"/>
+              </a:rPr>
+              <a:t>B. Treated as benign</a:t>
+            </a:r>
+            <a:endParaRPr lang="en-US" sz="1350" dirty="0"/>
+          </a:p>
+          <a:p>
+            <a:pPr algn="l" indent="0" marL="0">
+              <a:spcAft>
+                <a:spcPts val="600"/>
+              </a:spcAft>
+              <a:buNone/>
+            </a:pPr>
+            <a:r>
+              <a:rPr lang="en-US" sz="1350" b="1" dirty="0">
+                <a:solidFill>
+                  <a:srgbClr val="005A63"/>
+                </a:solidFill>
+                <a:latin typeface="Calibri" pitchFamily="34" charset="0"/>
+                <a:ea typeface="Calibri" pitchFamily="34" charset="-122"/>
+                <a:cs typeface="Calibri" pitchFamily="34" charset="-120"/>
+              </a:rPr>
+              <a:t>C. Not used to drive clinical action; reassessed over time</a:t>
+            </a:r>
+            <a:endParaRPr lang="en-US" sz="1350" dirty="0"/>
+          </a:p>
+          <a:p>
+            <a:pPr algn="l" indent="0" marL="0">
+              <a:spcAft>
+                <a:spcPts val="600"/>
+              </a:spcAft>
+              <a:buNone/>
+            </a:pPr>
+            <a:r>
+              <a:rPr lang="en-US" sz="1350" dirty="0">
+                <a:solidFill>
+                  <a:srgbClr val="33444F"/>
+                </a:solidFill>
+                <a:latin typeface="Calibri" pitchFamily="34" charset="0"/>
+                <a:ea typeface="Calibri" pitchFamily="34" charset="-122"/>
+                <a:cs typeface="Calibri" pitchFamily="34" charset="-120"/>
+              </a:rPr>
+              <a:t>D. Ignored entirely</a:t>
+            </a:r>
+            <a:endParaRPr lang="en-US" sz="1350" dirty="0"/>
+          </a:p>
+          <a:p>
+            <a:pPr algn="l" indent="0" marL="0">
+              <a:spcAft>
+                <a:spcPts val="600"/>
+              </a:spcAft>
+              <a:buNone/>
+            </a:pPr>
+            <a:r>
+              <a:rPr lang="en-US" sz="1350" dirty="0">
+                <a:solidFill>
+                  <a:srgbClr val="33444F"/>
+                </a:solidFill>
+                <a:latin typeface="Calibri" pitchFamily="34" charset="0"/>
+                <a:ea typeface="Calibri" pitchFamily="34" charset="-122"/>
+                <a:cs typeface="Calibri" pitchFamily="34" charset="-120"/>
+              </a:rPr>
+              <a:t>E. Reported as negative</a:t>
+            </a:r>
+            <a:endParaRPr lang="en-US" sz="1350" dirty="0"/>
+          </a:p>
+        </p:txBody>
+      </p:sp>
+      <p:sp>
+        <p:nvSpPr>
+          <p:cNvPr id="6" name="Shape 4"/>
+          <p:cNvSpPr/>
+          <p:nvPr/>
+        </p:nvSpPr>
+        <p:spPr>
+          <a:xfrm>
+            <a:off x="7201632" y="2395728"/>
+            <a:ext cx="4423136" cy="3246120"/>
           </a:xfrm>
           <a:prstGeom prst="roundRect">
             <a:avLst>
-              <a:gd name="adj" fmla="val 7609"/>
+              <a:gd name="adj" fmla="val 2535"/>
             </a:avLst>
           </a:prstGeom>
           <a:solidFill>
-            <a:srgbClr val="143651"/>
-          </a:solidFill>
-          <a:ln/>
-        </p:spPr>
-      </p:sp>
-      <p:sp>
-        <p:nvSpPr>
-          <p:cNvPr id="5" name="Shape 3"/>
-          <p:cNvSpPr/>
-          <p:nvPr/>
-        </p:nvSpPr>
-        <p:spPr>
-          <a:xfrm>
-            <a:off x="749808" y="1755648"/>
-            <a:ext cx="365760" cy="365760"/>
-          </a:xfrm>
-          <a:prstGeom prst="ellipse">
-            <a:avLst/>
-          </a:prstGeom>
-          <a:solidFill>
-            <a:srgbClr val="00838F"/>
+            <a:srgbClr val="E0F2F4"/>
           </a:solidFill>
           <a:ln/>
           <a:effectLst>
@@ -8395,14 +9770,14 @@
       </p:sp>
       <p:sp>
         <p:nvSpPr>
-          <p:cNvPr id="6" name="Text 4"/>
-          <p:cNvSpPr/>
-          <p:nvPr/>
-        </p:nvSpPr>
-        <p:spPr>
-          <a:xfrm>
-            <a:off x="749808" y="1755648"/>
-            <a:ext cx="365760" cy="365760"/>
+          <p:cNvPr id="7" name="Text 5"/>
+          <p:cNvSpPr/>
+          <p:nvPr/>
+        </p:nvSpPr>
+        <p:spPr>
+          <a:xfrm>
+            <a:off x="7439376" y="2578608"/>
+            <a:ext cx="3965936" cy="457200"/>
           </a:xfrm>
           <a:prstGeom prst="rect">
             <a:avLst/>
@@ -8414,19 +9789,33 @@
           <a:bodyPr wrap="square" lIns="0" tIns="0" rIns="0" bIns="0" rtlCol="0" anchor="ctr"/>
           <a:lstStyle/>
           <a:p>
-            <a:pPr algn="ctr" indent="0" marL="0">
+            <a:pPr indent="0" marL="0">
               <a:buNone/>
             </a:pPr>
             <a:r>
               <a:rPr lang="en-US" sz="1500" b="1" dirty="0">
                 <a:solidFill>
-                  <a:srgbClr val="FFFFFF"/>
-                </a:solidFill>
-                <a:latin typeface="Calibri" pitchFamily="34" charset="0"/>
-                <a:ea typeface="Calibri" pitchFamily="34" charset="-122"/>
-                <a:cs typeface="Calibri" pitchFamily="34" charset="-120"/>
-              </a:rPr>
-              <a:t>1</a:t>
+                  <a:srgbClr val="00838F"/>
+                </a:solidFill>
+                <a:latin typeface="Calibri" pitchFamily="34" charset="0"/>
+                <a:ea typeface="Calibri" pitchFamily="34" charset="-122"/>
+                <a:cs typeface="Calibri" pitchFamily="34" charset="-120"/>
+              </a:rPr>
+              <a:t>ANSWER  </a:t>
+            </a:r>
+            <a:pPr indent="0" marL="0">
+              <a:buNone/>
+            </a:pPr>
+            <a:r>
+              <a:rPr lang="en-US" sz="1500" b="1" dirty="0">
+                <a:solidFill>
+                  <a:srgbClr val="1B2A38"/>
+                </a:solidFill>
+                <a:latin typeface="Calibri" pitchFamily="34" charset="0"/>
+                <a:ea typeface="Calibri" pitchFamily="34" charset="-122"/>
+                <a:cs typeface="Calibri" pitchFamily="34" charset="-120"/>
+              </a:rPr>
+              <a:t>C — Not acted on; reassessed</a:t>
             </a:r>
             <a:endParaRPr lang="en-US" sz="1500" dirty="0"/>
           </a:p>
@@ -8434,14 +9823,56 @@
       </p:sp>
       <p:sp>
         <p:nvSpPr>
-          <p:cNvPr id="7" name="Text 5"/>
-          <p:cNvSpPr/>
-          <p:nvPr/>
-        </p:nvSpPr>
-        <p:spPr>
-          <a:xfrm>
-            <a:off x="1280160" y="1517904"/>
-            <a:ext cx="10143439" cy="841248"/>
+          <p:cNvPr id="8" name="Text 6"/>
+          <p:cNvSpPr/>
+          <p:nvPr/>
+        </p:nvSpPr>
+        <p:spPr>
+          <a:xfrm>
+            <a:off x="7439376" y="3127248"/>
+            <a:ext cx="3947648" cy="2377440"/>
+          </a:xfrm>
+          <a:prstGeom prst="rect">
+            <a:avLst/>
+          </a:prstGeom>
+          <a:noFill/>
+          <a:ln/>
+        </p:spPr>
+        <p:txBody>
+          <a:bodyPr wrap="square" lIns="0" tIns="0" rIns="0" bIns="0" rtlCol="0" anchor="t"/>
+          <a:lstStyle/>
+          <a:p>
+            <a:pPr algn="l" indent="0" marL="0">
+              <a:lnSpc>
+                <a:spcPct val="108000"/>
+              </a:lnSpc>
+              <a:buNone/>
+            </a:pPr>
+            <a:r>
+              <a:rPr lang="en-US" sz="1250" dirty="0">
+                <a:solidFill>
+                  <a:srgbClr val="33444F"/>
+                </a:solidFill>
+                <a:latin typeface="Calibri" pitchFamily="34" charset="0"/>
+                <a:ea typeface="Calibri" pitchFamily="34" charset="-122"/>
+                <a:cs typeface="Calibri" pitchFamily="34" charset="-120"/>
+              </a:rPr>
+              <a:t>VUS means uncertain significance; it should not guide management and may be reclassified as evidence accrues.</a:t>
+            </a:r>
+            <a:endParaRPr lang="en-US" sz="1250" dirty="0"/>
+          </a:p>
+        </p:txBody>
+      </p:sp>
+      <p:sp>
+        <p:nvSpPr>
+          <p:cNvPr id="9" name="Text 7"/>
+          <p:cNvSpPr/>
+          <p:nvPr/>
+        </p:nvSpPr>
+        <p:spPr>
+          <a:xfrm>
+            <a:off x="566928" y="6473952"/>
+            <a:ext cx="7772400" cy="274320"/>
           </a:xfrm>
           <a:prstGeom prst="rect">
             <a:avLst/>
@@ -8457,68 +9888,19 @@
               <a:buNone/>
             </a:pPr>
             <a:r>
-              <a:rPr lang="en-US" sz="1350" dirty="0">
-                <a:solidFill>
-                  <a:srgbClr val="E7EEF4"/>
-                </a:solidFill>
-                <a:latin typeface="Calibri" pitchFamily="34" charset="0"/>
-                <a:ea typeface="Calibri" pitchFamily="34" charset="-122"/>
-                <a:cs typeface="Calibri" pitchFamily="34" charset="-120"/>
-              </a:rPr>
-              <a:t>Use the right framework: germline ACMG/AMP classifies pathogenicity (5 classes); somatic AMP/ASCO/CAP tiers reflect actionability (4 tiers).</a:t>
-            </a:r>
-            <a:endParaRPr lang="en-US" sz="1350" dirty="0"/>
-          </a:p>
-        </p:txBody>
-      </p:sp>
-      <p:sp>
-        <p:nvSpPr>
-          <p:cNvPr id="8" name="Shape 6"/>
-          <p:cNvSpPr/>
-          <p:nvPr/>
-        </p:nvSpPr>
-        <p:spPr>
-          <a:xfrm>
-            <a:off x="566928" y="2505456"/>
-            <a:ext cx="11057839" cy="841248"/>
-          </a:xfrm>
-          <a:prstGeom prst="roundRect">
-            <a:avLst>
-              <a:gd name="adj" fmla="val 7609"/>
-            </a:avLst>
-          </a:prstGeom>
-          <a:solidFill>
-            <a:srgbClr val="143651"/>
-          </a:solidFill>
-          <a:ln/>
-        </p:spPr>
-      </p:sp>
-      <p:sp>
-        <p:nvSpPr>
-          <p:cNvPr id="9" name="Shape 7"/>
-          <p:cNvSpPr/>
-          <p:nvPr/>
-        </p:nvSpPr>
-        <p:spPr>
-          <a:xfrm>
-            <a:off x="749808" y="2743200"/>
-            <a:ext cx="365760" cy="365760"/>
-          </a:xfrm>
-          <a:prstGeom prst="ellipse">
-            <a:avLst/>
-          </a:prstGeom>
-          <a:solidFill>
-            <a:srgbClr val="00838F"/>
-          </a:solidFill>
-          <a:ln/>
-          <a:effectLst>
-            <a:outerShdw sx="100000" sy="100000" kx="0" ky="0" algn="bl" rotWithShape="0" blurRad="88900" dist="25400" dir="5400000">
-              <a:srgbClr val="22303C">
-                <a:alpha val="12000"/>
-              </a:srgbClr>
-            </a:outerShdw>
-          </a:effectLst>
-        </p:spPr>
+              <a:rPr lang="en-US" sz="850" dirty="0">
+                <a:solidFill>
+                  <a:srgbClr val="9AA8B4"/>
+                </a:solidFill>
+                <a:latin typeface="Calibri" pitchFamily="34" charset="0"/>
+                <a:ea typeface="Calibri" pitchFamily="34" charset="-122"/>
+                <a:cs typeface="Calibri" pitchFamily="34" charset="-120"/>
+              </a:rPr>
+              <a:t>Makassed General Hospital  ·  Department of Laboratory Medicine</a:t>
+            </a:r>
+            <a:endParaRPr lang="en-US" sz="850" dirty="0"/>
+          </a:p>
+        </p:txBody>
       </p:sp>
       <p:sp>
         <p:nvSpPr>
@@ -8528,8 +9910,8 @@
         </p:nvSpPr>
         <p:spPr>
           <a:xfrm>
-            <a:off x="749808" y="2743200"/>
-            <a:ext cx="365760" cy="365760"/>
+            <a:off x="9814255" y="6473952"/>
+            <a:ext cx="1828800" cy="274320"/>
           </a:xfrm>
           <a:prstGeom prst="rect">
             <a:avLst/>
@@ -8541,504 +9923,34 @@
           <a:bodyPr wrap="square" lIns="0" tIns="0" rIns="0" bIns="0" rtlCol="0" anchor="ctr"/>
           <a:lstStyle/>
           <a:p>
-            <a:pPr algn="ctr" indent="0" marL="0">
-              <a:buNone/>
-            </a:pPr>
-            <a:r>
-              <a:rPr lang="en-US" sz="1500" b="1" dirty="0">
-                <a:solidFill>
-                  <a:srgbClr val="FFFFFF"/>
-                </a:solidFill>
-                <a:latin typeface="Calibri" pitchFamily="34" charset="0"/>
-                <a:ea typeface="Calibri" pitchFamily="34" charset="-122"/>
-                <a:cs typeface="Calibri" pitchFamily="34" charset="-120"/>
-              </a:rPr>
-              <a:t>2</a:t>
-            </a:r>
-            <a:endParaRPr lang="en-US" sz="1500" dirty="0"/>
-          </a:p>
-        </p:txBody>
-      </p:sp>
-      <p:sp>
-        <p:nvSpPr>
-          <p:cNvPr id="11" name="Text 9"/>
-          <p:cNvSpPr/>
-          <p:nvPr/>
-        </p:nvSpPr>
-        <p:spPr>
-          <a:xfrm>
-            <a:off x="1280160" y="2505456"/>
-            <a:ext cx="10143439" cy="841248"/>
-          </a:xfrm>
-          <a:prstGeom prst="rect">
-            <a:avLst/>
-          </a:prstGeom>
-          <a:noFill/>
-          <a:ln/>
-        </p:spPr>
-        <p:txBody>
-          <a:bodyPr wrap="square" lIns="0" tIns="0" rIns="0" bIns="0" rtlCol="0" anchor="ctr"/>
-          <a:lstStyle/>
-          <a:p>
-            <a:pPr algn="l" indent="0" marL="0">
-              <a:buNone/>
-            </a:pPr>
-            <a:r>
-              <a:rPr lang="en-US" sz="1350" dirty="0">
-                <a:solidFill>
-                  <a:srgbClr val="E7EEF4"/>
-                </a:solidFill>
-                <a:latin typeface="Calibri" pitchFamily="34" charset="0"/>
-                <a:ea typeface="Calibri" pitchFamily="34" charset="-122"/>
-                <a:cs typeface="Calibri" pitchFamily="34" charset="-120"/>
-              </a:rPr>
-              <a:t>Report HGVS nomenclature with the reference transcript and genome build — ambiguity is dangerous.</a:t>
-            </a:r>
-            <a:endParaRPr lang="en-US" sz="1350" dirty="0"/>
-          </a:p>
-        </p:txBody>
-      </p:sp>
-      <p:sp>
-        <p:nvSpPr>
-          <p:cNvPr id="12" name="Shape 10"/>
-          <p:cNvSpPr/>
-          <p:nvPr/>
-        </p:nvSpPr>
-        <p:spPr>
-          <a:xfrm>
-            <a:off x="566928" y="3493008"/>
-            <a:ext cx="11057839" cy="841248"/>
-          </a:xfrm>
-          <a:prstGeom prst="roundRect">
-            <a:avLst>
-              <a:gd name="adj" fmla="val 7609"/>
-            </a:avLst>
-          </a:prstGeom>
-          <a:solidFill>
-            <a:srgbClr val="143651"/>
-          </a:solidFill>
-          <a:ln/>
-        </p:spPr>
-      </p:sp>
-      <p:sp>
-        <p:nvSpPr>
-          <p:cNvPr id="13" name="Shape 11"/>
-          <p:cNvSpPr/>
-          <p:nvPr/>
-        </p:nvSpPr>
-        <p:spPr>
-          <a:xfrm>
-            <a:off x="749808" y="3730752"/>
-            <a:ext cx="365760" cy="365760"/>
-          </a:xfrm>
-          <a:prstGeom prst="ellipse">
-            <a:avLst/>
-          </a:prstGeom>
-          <a:solidFill>
-            <a:srgbClr val="00838F"/>
-          </a:solidFill>
-          <a:ln/>
-          <a:effectLst>
-            <a:outerShdw sx="100000" sy="100000" kx="0" ky="0" algn="bl" rotWithShape="0" blurRad="88900" dist="25400" dir="5400000">
-              <a:srgbClr val="22303C">
-                <a:alpha val="12000"/>
-              </a:srgbClr>
-            </a:outerShdw>
-          </a:effectLst>
-        </p:spPr>
-      </p:sp>
-      <p:sp>
-        <p:nvSpPr>
-          <p:cNvPr id="14" name="Text 12"/>
-          <p:cNvSpPr/>
-          <p:nvPr/>
-        </p:nvSpPr>
-        <p:spPr>
-          <a:xfrm>
-            <a:off x="749808" y="3730752"/>
-            <a:ext cx="365760" cy="365760"/>
-          </a:xfrm>
-          <a:prstGeom prst="rect">
-            <a:avLst/>
-          </a:prstGeom>
-          <a:noFill/>
-          <a:ln/>
-        </p:spPr>
-        <p:txBody>
-          <a:bodyPr wrap="square" lIns="0" tIns="0" rIns="0" bIns="0" rtlCol="0" anchor="ctr"/>
-          <a:lstStyle/>
-          <a:p>
-            <a:pPr algn="ctr" indent="0" marL="0">
-              <a:buNone/>
-            </a:pPr>
-            <a:r>
-              <a:rPr lang="en-US" sz="1500" b="1" dirty="0">
-                <a:solidFill>
-                  <a:srgbClr val="FFFFFF"/>
-                </a:solidFill>
-                <a:latin typeface="Calibri" pitchFamily="34" charset="0"/>
-                <a:ea typeface="Calibri" pitchFamily="34" charset="-122"/>
-                <a:cs typeface="Calibri" pitchFamily="34" charset="-120"/>
-              </a:rPr>
-              <a:t>3</a:t>
-            </a:r>
-            <a:endParaRPr lang="en-US" sz="1500" dirty="0"/>
-          </a:p>
-        </p:txBody>
-      </p:sp>
-      <p:sp>
-        <p:nvSpPr>
-          <p:cNvPr id="15" name="Text 13"/>
-          <p:cNvSpPr/>
-          <p:nvPr/>
-        </p:nvSpPr>
-        <p:spPr>
-          <a:xfrm>
-            <a:off x="1280160" y="3493008"/>
-            <a:ext cx="10143439" cy="841248"/>
-          </a:xfrm>
-          <a:prstGeom prst="rect">
-            <a:avLst/>
-          </a:prstGeom>
-          <a:noFill/>
-          <a:ln/>
-        </p:spPr>
-        <p:txBody>
-          <a:bodyPr wrap="square" lIns="0" tIns="0" rIns="0" bIns="0" rtlCol="0" anchor="ctr"/>
-          <a:lstStyle/>
-          <a:p>
-            <a:pPr algn="l" indent="0" marL="0">
-              <a:buNone/>
-            </a:pPr>
-            <a:r>
-              <a:rPr lang="en-US" sz="1350" dirty="0">
-                <a:solidFill>
-                  <a:srgbClr val="E7EEF4"/>
-                </a:solidFill>
-                <a:latin typeface="Calibri" pitchFamily="34" charset="0"/>
-                <a:ea typeface="Calibri" pitchFamily="34" charset="-122"/>
-                <a:cs typeface="Calibri" pitchFamily="34" charset="-120"/>
-              </a:rPr>
-              <a:t>A VUS must not drive irreversible management; offer reanalysis over time.</a:t>
-            </a:r>
-            <a:endParaRPr lang="en-US" sz="1350" dirty="0"/>
-          </a:p>
-        </p:txBody>
-      </p:sp>
-      <p:sp>
-        <p:nvSpPr>
-          <p:cNvPr id="16" name="Shape 14"/>
-          <p:cNvSpPr/>
-          <p:nvPr/>
-        </p:nvSpPr>
-        <p:spPr>
-          <a:xfrm>
-            <a:off x="566928" y="4480560"/>
-            <a:ext cx="11057839" cy="841248"/>
-          </a:xfrm>
-          <a:prstGeom prst="roundRect">
-            <a:avLst>
-              <a:gd name="adj" fmla="val 7609"/>
-            </a:avLst>
-          </a:prstGeom>
-          <a:solidFill>
-            <a:srgbClr val="143651"/>
-          </a:solidFill>
-          <a:ln/>
-        </p:spPr>
-      </p:sp>
-      <p:sp>
-        <p:nvSpPr>
-          <p:cNvPr id="17" name="Shape 15"/>
-          <p:cNvSpPr/>
-          <p:nvPr/>
-        </p:nvSpPr>
-        <p:spPr>
-          <a:xfrm>
-            <a:off x="749808" y="4718304"/>
-            <a:ext cx="365760" cy="365760"/>
-          </a:xfrm>
-          <a:prstGeom prst="ellipse">
-            <a:avLst/>
-          </a:prstGeom>
-          <a:solidFill>
-            <a:srgbClr val="00838F"/>
-          </a:solidFill>
-          <a:ln/>
-          <a:effectLst>
-            <a:outerShdw sx="100000" sy="100000" kx="0" ky="0" algn="bl" rotWithShape="0" blurRad="88900" dist="25400" dir="5400000">
-              <a:srgbClr val="22303C">
-                <a:alpha val="12000"/>
-              </a:srgbClr>
-            </a:outerShdw>
-          </a:effectLst>
-        </p:spPr>
-      </p:sp>
-      <p:sp>
-        <p:nvSpPr>
-          <p:cNvPr id="18" name="Text 16"/>
-          <p:cNvSpPr/>
-          <p:nvPr/>
-        </p:nvSpPr>
-        <p:spPr>
-          <a:xfrm>
-            <a:off x="749808" y="4718304"/>
-            <a:ext cx="365760" cy="365760"/>
-          </a:xfrm>
-          <a:prstGeom prst="rect">
-            <a:avLst/>
-          </a:prstGeom>
-          <a:noFill/>
-          <a:ln/>
-        </p:spPr>
-        <p:txBody>
-          <a:bodyPr wrap="square" lIns="0" tIns="0" rIns="0" bIns="0" rtlCol="0" anchor="ctr"/>
-          <a:lstStyle/>
-          <a:p>
-            <a:pPr algn="ctr" indent="0" marL="0">
-              <a:buNone/>
-            </a:pPr>
-            <a:r>
-              <a:rPr lang="en-US" sz="1500" b="1" dirty="0">
-                <a:solidFill>
-                  <a:srgbClr val="FFFFFF"/>
-                </a:solidFill>
-                <a:latin typeface="Calibri" pitchFamily="34" charset="0"/>
-                <a:ea typeface="Calibri" pitchFamily="34" charset="-122"/>
-                <a:cs typeface="Calibri" pitchFamily="34" charset="-120"/>
-              </a:rPr>
-              <a:t>4</a:t>
-            </a:r>
-            <a:endParaRPr lang="en-US" sz="1500" dirty="0"/>
-          </a:p>
-        </p:txBody>
-      </p:sp>
-      <p:sp>
-        <p:nvSpPr>
-          <p:cNvPr id="19" name="Text 17"/>
-          <p:cNvSpPr/>
-          <p:nvPr/>
-        </p:nvSpPr>
-        <p:spPr>
-          <a:xfrm>
-            <a:off x="1280160" y="4480560"/>
-            <a:ext cx="10143439" cy="841248"/>
-          </a:xfrm>
-          <a:prstGeom prst="rect">
-            <a:avLst/>
-          </a:prstGeom>
-          <a:noFill/>
-          <a:ln/>
-        </p:spPr>
-        <p:txBody>
-          <a:bodyPr wrap="square" lIns="0" tIns="0" rIns="0" bIns="0" rtlCol="0" anchor="ctr"/>
-          <a:lstStyle/>
-          <a:p>
-            <a:pPr algn="l" indent="0" marL="0">
-              <a:buNone/>
-            </a:pPr>
-            <a:r>
-              <a:rPr lang="en-US" sz="1350" dirty="0">
-                <a:solidFill>
-                  <a:srgbClr val="E7EEF4"/>
-                </a:solidFill>
-                <a:latin typeface="Calibri" pitchFamily="34" charset="0"/>
-                <a:ea typeface="Calibri" pitchFamily="34" charset="-122"/>
-                <a:cs typeface="Calibri" pitchFamily="34" charset="-120"/>
-              </a:rPr>
-              <a:t>Tumor-only results may reflect germline variants — confirm and refer when hereditary disease is implicated.</a:t>
-            </a:r>
-            <a:endParaRPr lang="en-US" sz="1350" dirty="0"/>
-          </a:p>
-        </p:txBody>
-      </p:sp>
-      <p:sp>
-        <p:nvSpPr>
-          <p:cNvPr id="20" name="Shape 18"/>
-          <p:cNvSpPr/>
-          <p:nvPr/>
-        </p:nvSpPr>
-        <p:spPr>
-          <a:xfrm>
-            <a:off x="566928" y="5468112"/>
-            <a:ext cx="11057839" cy="841248"/>
-          </a:xfrm>
-          <a:prstGeom prst="roundRect">
-            <a:avLst>
-              <a:gd name="adj" fmla="val 7609"/>
-            </a:avLst>
-          </a:prstGeom>
-          <a:solidFill>
-            <a:srgbClr val="143651"/>
-          </a:solidFill>
-          <a:ln/>
-        </p:spPr>
-      </p:sp>
-      <p:sp>
-        <p:nvSpPr>
-          <p:cNvPr id="21" name="Shape 19"/>
-          <p:cNvSpPr/>
-          <p:nvPr/>
-        </p:nvSpPr>
-        <p:spPr>
-          <a:xfrm>
-            <a:off x="749808" y="5705856"/>
-            <a:ext cx="365760" cy="365760"/>
-          </a:xfrm>
-          <a:prstGeom prst="ellipse">
-            <a:avLst/>
-          </a:prstGeom>
-          <a:solidFill>
-            <a:srgbClr val="00838F"/>
-          </a:solidFill>
-          <a:ln/>
-          <a:effectLst>
-            <a:outerShdw sx="100000" sy="100000" kx="0" ky="0" algn="bl" rotWithShape="0" blurRad="88900" dist="25400" dir="5400000">
-              <a:srgbClr val="22303C">
-                <a:alpha val="12000"/>
-              </a:srgbClr>
-            </a:outerShdw>
-          </a:effectLst>
-        </p:spPr>
-      </p:sp>
-      <p:sp>
-        <p:nvSpPr>
-          <p:cNvPr id="22" name="Text 20"/>
-          <p:cNvSpPr/>
-          <p:nvPr/>
-        </p:nvSpPr>
-        <p:spPr>
-          <a:xfrm>
-            <a:off x="749808" y="5705856"/>
-            <a:ext cx="365760" cy="365760"/>
-          </a:xfrm>
-          <a:prstGeom prst="rect">
-            <a:avLst/>
-          </a:prstGeom>
-          <a:noFill/>
-          <a:ln/>
-        </p:spPr>
-        <p:txBody>
-          <a:bodyPr wrap="square" lIns="0" tIns="0" rIns="0" bIns="0" rtlCol="0" anchor="ctr"/>
-          <a:lstStyle/>
-          <a:p>
-            <a:pPr algn="ctr" indent="0" marL="0">
-              <a:buNone/>
-            </a:pPr>
-            <a:r>
-              <a:rPr lang="en-US" sz="1500" b="1" dirty="0">
-                <a:solidFill>
-                  <a:srgbClr val="FFFFFF"/>
-                </a:solidFill>
-                <a:latin typeface="Calibri" pitchFamily="34" charset="0"/>
-                <a:ea typeface="Calibri" pitchFamily="34" charset="-122"/>
-                <a:cs typeface="Calibri" pitchFamily="34" charset="-120"/>
-              </a:rPr>
-              <a:t>5</a:t>
-            </a:r>
-            <a:endParaRPr lang="en-US" sz="1500" dirty="0"/>
-          </a:p>
-        </p:txBody>
-      </p:sp>
-      <p:sp>
-        <p:nvSpPr>
-          <p:cNvPr id="23" name="Text 21"/>
-          <p:cNvSpPr/>
-          <p:nvPr/>
-        </p:nvSpPr>
-        <p:spPr>
-          <a:xfrm>
-            <a:off x="1280160" y="5468112"/>
-            <a:ext cx="10143439" cy="841248"/>
-          </a:xfrm>
-          <a:prstGeom prst="rect">
-            <a:avLst/>
-          </a:prstGeom>
-          <a:noFill/>
-          <a:ln/>
-        </p:spPr>
-        <p:txBody>
-          <a:bodyPr wrap="square" lIns="0" tIns="0" rIns="0" bIns="0" rtlCol="0" anchor="ctr"/>
-          <a:lstStyle/>
-          <a:p>
-            <a:pPr algn="l" indent="0" marL="0">
-              <a:buNone/>
-            </a:pPr>
-            <a:r>
-              <a:rPr lang="en-US" sz="1350" dirty="0">
-                <a:solidFill>
-                  <a:srgbClr val="E7EEF4"/>
-                </a:solidFill>
-                <a:latin typeface="Calibri" pitchFamily="34" charset="0"/>
-                <a:ea typeface="Calibri" pitchFamily="34" charset="-122"/>
-                <a:cs typeface="Calibri" pitchFamily="34" charset="-120"/>
-              </a:rPr>
-              <a:t>The actionable, clearly written report — not the raw variant list — is the deliverable.</a:t>
-            </a:r>
-            <a:endParaRPr lang="en-US" sz="1350" dirty="0"/>
-          </a:p>
-        </p:txBody>
-      </p:sp>
-      <p:sp>
-        <p:nvSpPr>
-          <p:cNvPr id="24" name="Text 22"/>
-          <p:cNvSpPr/>
-          <p:nvPr/>
-        </p:nvSpPr>
-        <p:spPr>
-          <a:xfrm>
-            <a:off x="566928" y="6473952"/>
-            <a:ext cx="8229600" cy="274320"/>
-          </a:xfrm>
-          <a:prstGeom prst="rect">
-            <a:avLst/>
-          </a:prstGeom>
-          <a:noFill/>
-          <a:ln/>
-        </p:spPr>
-        <p:txBody>
-          <a:bodyPr wrap="square" lIns="0" tIns="0" rIns="0" bIns="0" rtlCol="0" anchor="ctr"/>
-          <a:lstStyle/>
-          <a:p>
-            <a:pPr indent="0" marL="0">
+            <a:pPr algn="r" indent="0" marL="0">
               <a:buNone/>
             </a:pPr>
             <a:r>
               <a:rPr lang="en-US" sz="850" dirty="0">
                 <a:solidFill>
-                  <a:srgbClr val="5E7488"/>
-                </a:solidFill>
-                <a:latin typeface="Calibri" pitchFamily="34" charset="0"/>
-                <a:ea typeface="Calibri" pitchFamily="34" charset="-122"/>
-                <a:cs typeface="Calibri" pitchFamily="34" charset="-120"/>
-              </a:rPr>
-              <a:t>Makassed General Hospital  ·  Department of Laboratory Medicine</a:t>
-            </a:r>
-            <a:endParaRPr lang="en-US" sz="850" dirty="0"/>
-          </a:p>
-        </p:txBody>
-      </p:sp>
-      <p:sp>
-        <p:nvSpPr>
-          <p:cNvPr id="25" name="Text 23"/>
-          <p:cNvSpPr/>
-          <p:nvPr/>
-        </p:nvSpPr>
-        <p:spPr>
-          <a:xfrm>
-            <a:off x="11002975" y="6473952"/>
-            <a:ext cx="640080" cy="274320"/>
-          </a:xfrm>
-          <a:prstGeom prst="rect">
-            <a:avLst/>
-          </a:prstGeom>
-          <a:noFill/>
-          <a:ln/>
-        </p:spPr>
-        <p:txBody>
-          <a:bodyPr wrap="square" lIns="0" tIns="0" rIns="0" bIns="0" rtlCol="0" anchor="ctr"/>
-          <a:lstStyle/>
-          <a:p>
+                  <a:srgbClr val="9AA8B4"/>
+                </a:solidFill>
+                <a:latin typeface="Calibri" pitchFamily="34" charset="0"/>
+                <a:ea typeface="Calibri" pitchFamily="34" charset="-122"/>
+                <a:cs typeface="Calibri" pitchFamily="34" charset="-120"/>
+              </a:rPr>
+              <a:t>CP Lecture Series</a:t>
+            </a:r>
+            <a:pPr algn="r" indent="0" marL="0">
+              <a:buNone/>
+            </a:pPr>
+            <a:r>
+              <a:rPr lang="en-US" sz="850" dirty="0">
+                <a:solidFill>
+                  <a:srgbClr val="DCE4EC"/>
+                </a:solidFill>
+                <a:latin typeface="Calibri" pitchFamily="34" charset="0"/>
+                <a:ea typeface="Calibri" pitchFamily="34" charset="-122"/>
+                <a:cs typeface="Calibri" pitchFamily="34" charset="-120"/>
+              </a:rPr>
+              <a:t>   ·   </a:t>
+            </a:r>
             <a:pPr algn="r" indent="0" marL="0">
               <a:buNone/>
             </a:pPr>
@@ -9122,6 +10034,2341 @@
                 <a:ea typeface="Calibri" pitchFamily="34" charset="-122"/>
                 <a:cs typeface="Calibri" pitchFamily="34" charset="-120"/>
               </a:rPr>
+              <a:t>MOLECULAR &amp; CYTOGENETICS   ·   BOARD REVIEW  ·  Q2</a:t>
+            </a:r>
+            <a:endParaRPr lang="en-US" sz="1100" dirty="0"/>
+          </a:p>
+        </p:txBody>
+      </p:sp>
+      <p:sp>
+        <p:nvSpPr>
+          <p:cNvPr id="3" name="Text 1"/>
+          <p:cNvSpPr/>
+          <p:nvPr/>
+        </p:nvSpPr>
+        <p:spPr>
+          <a:xfrm>
+            <a:off x="566928" y="713232"/>
+            <a:ext cx="11064240" cy="749808"/>
+          </a:xfrm>
+          <a:prstGeom prst="rect">
+            <a:avLst/>
+          </a:prstGeom>
+          <a:noFill/>
+          <a:ln/>
+        </p:spPr>
+        <p:txBody>
+          <a:bodyPr wrap="square" lIns="0" tIns="0" rIns="0" bIns="0" rtlCol="0" anchor="ctr"/>
+          <a:lstStyle/>
+          <a:p>
+            <a:pPr algn="l" indent="0" marL="0">
+              <a:buNone/>
+            </a:pPr>
+            <a:r>
+              <a:rPr lang="en-US" sz="2600" b="1" dirty="0">
+                <a:solidFill>
+                  <a:srgbClr val="0E3A5F"/>
+                </a:solidFill>
+                <a:latin typeface="Calibri" pitchFamily="34" charset="0"/>
+                <a:ea typeface="Calibri" pitchFamily="34" charset="-122"/>
+                <a:cs typeface="Calibri" pitchFamily="34" charset="-120"/>
+              </a:rPr>
+              <a:t>Board-Style Review</a:t>
+            </a:r>
+            <a:endParaRPr lang="en-US" sz="2600" dirty="0"/>
+          </a:p>
+        </p:txBody>
+      </p:sp>
+      <p:sp>
+        <p:nvSpPr>
+          <p:cNvPr id="4" name="Text 2"/>
+          <p:cNvSpPr/>
+          <p:nvPr/>
+        </p:nvSpPr>
+        <p:spPr>
+          <a:xfrm>
+            <a:off x="566928" y="1417320"/>
+            <a:ext cx="11057839" cy="914400"/>
+          </a:xfrm>
+          <a:prstGeom prst="rect">
+            <a:avLst/>
+          </a:prstGeom>
+          <a:noFill/>
+          <a:ln/>
+        </p:spPr>
+        <p:txBody>
+          <a:bodyPr wrap="square" lIns="0" tIns="0" rIns="0" bIns="0" rtlCol="0" anchor="t"/>
+          <a:lstStyle/>
+          <a:p>
+            <a:pPr algn="l" indent="0" marL="0">
+              <a:lnSpc>
+                <a:spcPct val="105000"/>
+              </a:lnSpc>
+              <a:buNone/>
+            </a:pPr>
+            <a:r>
+              <a:rPr lang="en-US" sz="1450" b="1" dirty="0">
+                <a:solidFill>
+                  <a:srgbClr val="1B2A38"/>
+                </a:solidFill>
+                <a:latin typeface="Calibri" pitchFamily="34" charset="0"/>
+                <a:ea typeface="Calibri" pitchFamily="34" charset="-122"/>
+                <a:cs typeface="Calibri" pitchFamily="34" charset="-120"/>
+              </a:rPr>
+              <a:t>In-silico (computational) prediction evidence is generally considered:</a:t>
+            </a:r>
+            <a:endParaRPr lang="en-US" sz="1450" dirty="0"/>
+          </a:p>
+        </p:txBody>
+      </p:sp>
+      <p:sp>
+        <p:nvSpPr>
+          <p:cNvPr id="5" name="Text 3"/>
+          <p:cNvSpPr/>
+          <p:nvPr/>
+        </p:nvSpPr>
+        <p:spPr>
+          <a:xfrm>
+            <a:off x="658368" y="2395728"/>
+            <a:ext cx="6192390" cy="3017520"/>
+          </a:xfrm>
+          <a:prstGeom prst="rect">
+            <a:avLst/>
+          </a:prstGeom>
+          <a:noFill/>
+          <a:ln/>
+        </p:spPr>
+        <p:txBody>
+          <a:bodyPr wrap="square" lIns="0" tIns="0" rIns="0" bIns="0" rtlCol="0" anchor="t"/>
+          <a:lstStyle/>
+          <a:p>
+            <a:pPr algn="l" indent="0" marL="0">
+              <a:spcAft>
+                <a:spcPts val="600"/>
+              </a:spcAft>
+              <a:buNone/>
+            </a:pPr>
+            <a:r>
+              <a:rPr lang="en-US" sz="1350" dirty="0">
+                <a:solidFill>
+                  <a:srgbClr val="33444F"/>
+                </a:solidFill>
+                <a:latin typeface="Calibri" pitchFamily="34" charset="0"/>
+                <a:ea typeface="Calibri" pitchFamily="34" charset="-122"/>
+                <a:cs typeface="Calibri" pitchFamily="34" charset="-120"/>
+              </a:rPr>
+              <a:t>A. Definitive on its own</a:t>
+            </a:r>
+            <a:endParaRPr lang="en-US" sz="1350" dirty="0"/>
+          </a:p>
+          <a:p>
+            <a:pPr algn="l" indent="0" marL="0">
+              <a:spcAft>
+                <a:spcPts val="600"/>
+              </a:spcAft>
+              <a:buNone/>
+            </a:pPr>
+            <a:r>
+              <a:rPr lang="en-US" sz="1350" b="1" dirty="0">
+                <a:solidFill>
+                  <a:srgbClr val="005A63"/>
+                </a:solidFill>
+                <a:latin typeface="Calibri" pitchFamily="34" charset="0"/>
+                <a:ea typeface="Calibri" pitchFamily="34" charset="-122"/>
+                <a:cs typeface="Calibri" pitchFamily="34" charset="-120"/>
+              </a:rPr>
+              <a:t>B. Supporting evidence only</a:t>
+            </a:r>
+            <a:endParaRPr lang="en-US" sz="1350" dirty="0"/>
+          </a:p>
+          <a:p>
+            <a:pPr algn="l" indent="0" marL="0">
+              <a:spcAft>
+                <a:spcPts val="600"/>
+              </a:spcAft>
+              <a:buNone/>
+            </a:pPr>
+            <a:r>
+              <a:rPr lang="en-US" sz="1350" dirty="0">
+                <a:solidFill>
+                  <a:srgbClr val="33444F"/>
+                </a:solidFill>
+                <a:latin typeface="Calibri" pitchFamily="34" charset="0"/>
+                <a:ea typeface="Calibri" pitchFamily="34" charset="-122"/>
+                <a:cs typeface="Calibri" pitchFamily="34" charset="-120"/>
+              </a:rPr>
+              <a:t>C. Stronger than functional data</a:t>
+            </a:r>
+            <a:endParaRPr lang="en-US" sz="1350" dirty="0"/>
+          </a:p>
+          <a:p>
+            <a:pPr algn="l" indent="0" marL="0">
+              <a:spcAft>
+                <a:spcPts val="600"/>
+              </a:spcAft>
+              <a:buNone/>
+            </a:pPr>
+            <a:r>
+              <a:rPr lang="en-US" sz="1350" dirty="0">
+                <a:solidFill>
+                  <a:srgbClr val="33444F"/>
+                </a:solidFill>
+                <a:latin typeface="Calibri" pitchFamily="34" charset="0"/>
+                <a:ea typeface="Calibri" pitchFamily="34" charset="-122"/>
+                <a:cs typeface="Calibri" pitchFamily="34" charset="-120"/>
+              </a:rPr>
+              <a:t>D. Irrelevant</a:t>
+            </a:r>
+            <a:endParaRPr lang="en-US" sz="1350" dirty="0"/>
+          </a:p>
+          <a:p>
+            <a:pPr algn="l" indent="0" marL="0">
+              <a:spcAft>
+                <a:spcPts val="600"/>
+              </a:spcAft>
+              <a:buNone/>
+            </a:pPr>
+            <a:r>
+              <a:rPr lang="en-US" sz="1350" dirty="0">
+                <a:solidFill>
+                  <a:srgbClr val="33444F"/>
+                </a:solidFill>
+                <a:latin typeface="Calibri" pitchFamily="34" charset="0"/>
+                <a:ea typeface="Calibri" pitchFamily="34" charset="-122"/>
+                <a:cs typeface="Calibri" pitchFamily="34" charset="-120"/>
+              </a:rPr>
+              <a:t>E. Sufficient for pathogenic</a:t>
+            </a:r>
+            <a:endParaRPr lang="en-US" sz="1350" dirty="0"/>
+          </a:p>
+        </p:txBody>
+      </p:sp>
+      <p:sp>
+        <p:nvSpPr>
+          <p:cNvPr id="6" name="Shape 4"/>
+          <p:cNvSpPr/>
+          <p:nvPr/>
+        </p:nvSpPr>
+        <p:spPr>
+          <a:xfrm>
+            <a:off x="7201632" y="2395728"/>
+            <a:ext cx="4423136" cy="3246120"/>
+          </a:xfrm>
+          <a:prstGeom prst="roundRect">
+            <a:avLst>
+              <a:gd name="adj" fmla="val 2535"/>
+            </a:avLst>
+          </a:prstGeom>
+          <a:solidFill>
+            <a:srgbClr val="E0F2F4"/>
+          </a:solidFill>
+          <a:ln/>
+          <a:effectLst>
+            <a:outerShdw sx="100000" sy="100000" kx="0" ky="0" algn="bl" rotWithShape="0" blurRad="88900" dist="25400" dir="5400000">
+              <a:srgbClr val="22303C">
+                <a:alpha val="12000"/>
+              </a:srgbClr>
+            </a:outerShdw>
+          </a:effectLst>
+        </p:spPr>
+      </p:sp>
+      <p:sp>
+        <p:nvSpPr>
+          <p:cNvPr id="7" name="Text 5"/>
+          <p:cNvSpPr/>
+          <p:nvPr/>
+        </p:nvSpPr>
+        <p:spPr>
+          <a:xfrm>
+            <a:off x="7439376" y="2578608"/>
+            <a:ext cx="3965936" cy="457200"/>
+          </a:xfrm>
+          <a:prstGeom prst="rect">
+            <a:avLst/>
+          </a:prstGeom>
+          <a:noFill/>
+          <a:ln/>
+        </p:spPr>
+        <p:txBody>
+          <a:bodyPr wrap="square" lIns="0" tIns="0" rIns="0" bIns="0" rtlCol="0" anchor="ctr"/>
+          <a:lstStyle/>
+          <a:p>
+            <a:pPr indent="0" marL="0">
+              <a:buNone/>
+            </a:pPr>
+            <a:r>
+              <a:rPr lang="en-US" sz="1500" b="1" dirty="0">
+                <a:solidFill>
+                  <a:srgbClr val="00838F"/>
+                </a:solidFill>
+                <a:latin typeface="Calibri" pitchFamily="34" charset="0"/>
+                <a:ea typeface="Calibri" pitchFamily="34" charset="-122"/>
+                <a:cs typeface="Calibri" pitchFamily="34" charset="-120"/>
+              </a:rPr>
+              <a:t>ANSWER  </a:t>
+            </a:r>
+            <a:pPr indent="0" marL="0">
+              <a:buNone/>
+            </a:pPr>
+            <a:r>
+              <a:rPr lang="en-US" sz="1500" b="1" dirty="0">
+                <a:solidFill>
+                  <a:srgbClr val="1B2A38"/>
+                </a:solidFill>
+                <a:latin typeface="Calibri" pitchFamily="34" charset="0"/>
+                <a:ea typeface="Calibri" pitchFamily="34" charset="-122"/>
+                <a:cs typeface="Calibri" pitchFamily="34" charset="-120"/>
+              </a:rPr>
+              <a:t>B — Supporting evidence only</a:t>
+            </a:r>
+            <a:endParaRPr lang="en-US" sz="1500" dirty="0"/>
+          </a:p>
+        </p:txBody>
+      </p:sp>
+      <p:sp>
+        <p:nvSpPr>
+          <p:cNvPr id="8" name="Text 6"/>
+          <p:cNvSpPr/>
+          <p:nvPr/>
+        </p:nvSpPr>
+        <p:spPr>
+          <a:xfrm>
+            <a:off x="7439376" y="3127248"/>
+            <a:ext cx="3947648" cy="2377440"/>
+          </a:xfrm>
+          <a:prstGeom prst="rect">
+            <a:avLst/>
+          </a:prstGeom>
+          <a:noFill/>
+          <a:ln/>
+        </p:spPr>
+        <p:txBody>
+          <a:bodyPr wrap="square" lIns="0" tIns="0" rIns="0" bIns="0" rtlCol="0" anchor="t"/>
+          <a:lstStyle/>
+          <a:p>
+            <a:pPr algn="l" indent="0" marL="0">
+              <a:lnSpc>
+                <a:spcPct val="108000"/>
+              </a:lnSpc>
+              <a:buNone/>
+            </a:pPr>
+            <a:r>
+              <a:rPr lang="en-US" sz="1250" dirty="0">
+                <a:solidFill>
+                  <a:srgbClr val="33444F"/>
+                </a:solidFill>
+                <a:latin typeface="Calibri" pitchFamily="34" charset="0"/>
+                <a:ea typeface="Calibri" pitchFamily="34" charset="-122"/>
+                <a:cs typeface="Calibri" pitchFamily="34" charset="-120"/>
+              </a:rPr>
+              <a:t>Computational predictions provide supporting evidence; they are not standalone proof of pathogenicity.</a:t>
+            </a:r>
+            <a:endParaRPr lang="en-US" sz="1250" dirty="0"/>
+          </a:p>
+        </p:txBody>
+      </p:sp>
+      <p:sp>
+        <p:nvSpPr>
+          <p:cNvPr id="9" name="Text 7"/>
+          <p:cNvSpPr/>
+          <p:nvPr/>
+        </p:nvSpPr>
+        <p:spPr>
+          <a:xfrm>
+            <a:off x="566928" y="6473952"/>
+            <a:ext cx="7772400" cy="274320"/>
+          </a:xfrm>
+          <a:prstGeom prst="rect">
+            <a:avLst/>
+          </a:prstGeom>
+          <a:noFill/>
+          <a:ln/>
+        </p:spPr>
+        <p:txBody>
+          <a:bodyPr wrap="square" lIns="0" tIns="0" rIns="0" bIns="0" rtlCol="0" anchor="ctr"/>
+          <a:lstStyle/>
+          <a:p>
+            <a:pPr algn="l" indent="0" marL="0">
+              <a:buNone/>
+            </a:pPr>
+            <a:r>
+              <a:rPr lang="en-US" sz="850" dirty="0">
+                <a:solidFill>
+                  <a:srgbClr val="9AA8B4"/>
+                </a:solidFill>
+                <a:latin typeface="Calibri" pitchFamily="34" charset="0"/>
+                <a:ea typeface="Calibri" pitchFamily="34" charset="-122"/>
+                <a:cs typeface="Calibri" pitchFamily="34" charset="-120"/>
+              </a:rPr>
+              <a:t>Makassed General Hospital  ·  Department of Laboratory Medicine</a:t>
+            </a:r>
+            <a:endParaRPr lang="en-US" sz="850" dirty="0"/>
+          </a:p>
+        </p:txBody>
+      </p:sp>
+      <p:sp>
+        <p:nvSpPr>
+          <p:cNvPr id="10" name="Text 8"/>
+          <p:cNvSpPr/>
+          <p:nvPr/>
+        </p:nvSpPr>
+        <p:spPr>
+          <a:xfrm>
+            <a:off x="9814255" y="6473952"/>
+            <a:ext cx="1828800" cy="274320"/>
+          </a:xfrm>
+          <a:prstGeom prst="rect">
+            <a:avLst/>
+          </a:prstGeom>
+          <a:noFill/>
+          <a:ln/>
+        </p:spPr>
+        <p:txBody>
+          <a:bodyPr wrap="square" lIns="0" tIns="0" rIns="0" bIns="0" rtlCol="0" anchor="ctr"/>
+          <a:lstStyle/>
+          <a:p>
+            <a:pPr algn="r" indent="0" marL="0">
+              <a:buNone/>
+            </a:pPr>
+            <a:r>
+              <a:rPr lang="en-US" sz="850" dirty="0">
+                <a:solidFill>
+                  <a:srgbClr val="9AA8B4"/>
+                </a:solidFill>
+                <a:latin typeface="Calibri" pitchFamily="34" charset="0"/>
+                <a:ea typeface="Calibri" pitchFamily="34" charset="-122"/>
+                <a:cs typeface="Calibri" pitchFamily="34" charset="-120"/>
+              </a:rPr>
+              <a:t>CP Lecture Series</a:t>
+            </a:r>
+            <a:pPr algn="r" indent="0" marL="0">
+              <a:buNone/>
+            </a:pPr>
+            <a:r>
+              <a:rPr lang="en-US" sz="850" dirty="0">
+                <a:solidFill>
+                  <a:srgbClr val="DCE4EC"/>
+                </a:solidFill>
+                <a:latin typeface="Calibri" pitchFamily="34" charset="0"/>
+                <a:ea typeface="Calibri" pitchFamily="34" charset="-122"/>
+                <a:cs typeface="Calibri" pitchFamily="34" charset="-120"/>
+              </a:rPr>
+              <a:t>   ·   </a:t>
+            </a:r>
+            <a:pPr algn="r" indent="0" marL="0">
+              <a:buNone/>
+            </a:pPr>
+            <a:r>
+              <a:rPr lang="en-US" sz="850" b="1" dirty="0">
+                <a:solidFill>
+                  <a:srgbClr val="00838F"/>
+                </a:solidFill>
+                <a:latin typeface="Calibri" pitchFamily="34" charset="0"/>
+                <a:ea typeface="Calibri" pitchFamily="34" charset="-122"/>
+                <a:cs typeface="Calibri" pitchFamily="34" charset="-120"/>
+              </a:rPr>
+              <a:t>18</a:t>
+            </a:r>
+            <a:endParaRPr lang="en-US" sz="850" dirty="0"/>
+          </a:p>
+        </p:txBody>
+      </p:sp>
+    </p:spTree>
+  </p:cSld>
+  <p:clrMapOvr>
+    <a:masterClrMapping/>
+  </p:clrMapOvr>
+</p:sld>
+</file>
+
+<file path=ppt/slides/slide22.xml><?xml version="1.0" encoding="utf-8"?>
+<p:sld xmlns:a="http://schemas.openxmlformats.org/drawingml/2006/main" xmlns:r="http://schemas.openxmlformats.org/officeDocument/2006/relationships" xmlns:p="http://schemas.openxmlformats.org/presentationml/2006/main">
+  <p:cSld name="Slide 22">
+    <p:bg>
+      <p:bgPr>
+        <a:solidFill>
+          <a:srgbClr val="FFFFFF"/>
+        </a:solidFill>
+      </p:bgPr>
+    </p:bg>
+    <p:spTree>
+      <p:nvGrpSpPr>
+        <p:cNvPr id="1" name=""/>
+        <p:cNvGrpSpPr/>
+        <p:nvPr/>
+      </p:nvGrpSpPr>
+      <p:grpSpPr>
+        <a:xfrm>
+          <a:off x="0" y="0"/>
+          <a:ext cx="0" cy="0"/>
+          <a:chOff x="0" y="0"/>
+          <a:chExt cx="0" cy="0"/>
+        </a:xfrm>
+      </p:grpSpPr>
+      <p:sp>
+        <p:nvSpPr>
+          <p:cNvPr id="2" name="Text 0"/>
+          <p:cNvSpPr/>
+          <p:nvPr/>
+        </p:nvSpPr>
+        <p:spPr>
+          <a:xfrm>
+            <a:off x="566928" y="329184"/>
+            <a:ext cx="10515600" cy="310896"/>
+          </a:xfrm>
+          <a:prstGeom prst="rect">
+            <a:avLst/>
+          </a:prstGeom>
+          <a:noFill/>
+          <a:ln/>
+        </p:spPr>
+        <p:txBody>
+          <a:bodyPr wrap="square" lIns="0" tIns="0" rIns="0" bIns="0" rtlCol="0" anchor="ctr"/>
+          <a:lstStyle/>
+          <a:p>
+            <a:pPr algn="l" indent="0" marL="0">
+              <a:buNone/>
+            </a:pPr>
+            <a:r>
+              <a:rPr lang="en-US" sz="1100" b="1" spc="150" kern="0" dirty="0">
+                <a:solidFill>
+                  <a:srgbClr val="00838F"/>
+                </a:solidFill>
+                <a:latin typeface="Calibri" pitchFamily="34" charset="0"/>
+                <a:ea typeface="Calibri" pitchFamily="34" charset="-122"/>
+                <a:cs typeface="Calibri" pitchFamily="34" charset="-120"/>
+              </a:rPr>
+              <a:t>MOLECULAR &amp; CYTOGENETICS   ·   BOARD REVIEW  ·  Q3</a:t>
+            </a:r>
+            <a:endParaRPr lang="en-US" sz="1100" dirty="0"/>
+          </a:p>
+        </p:txBody>
+      </p:sp>
+      <p:sp>
+        <p:nvSpPr>
+          <p:cNvPr id="3" name="Text 1"/>
+          <p:cNvSpPr/>
+          <p:nvPr/>
+        </p:nvSpPr>
+        <p:spPr>
+          <a:xfrm>
+            <a:off x="566928" y="713232"/>
+            <a:ext cx="11064240" cy="749808"/>
+          </a:xfrm>
+          <a:prstGeom prst="rect">
+            <a:avLst/>
+          </a:prstGeom>
+          <a:noFill/>
+          <a:ln/>
+        </p:spPr>
+        <p:txBody>
+          <a:bodyPr wrap="square" lIns="0" tIns="0" rIns="0" bIns="0" rtlCol="0" anchor="ctr"/>
+          <a:lstStyle/>
+          <a:p>
+            <a:pPr algn="l" indent="0" marL="0">
+              <a:buNone/>
+            </a:pPr>
+            <a:r>
+              <a:rPr lang="en-US" sz="2600" b="1" dirty="0">
+                <a:solidFill>
+                  <a:srgbClr val="0E3A5F"/>
+                </a:solidFill>
+                <a:latin typeface="Calibri" pitchFamily="34" charset="0"/>
+                <a:ea typeface="Calibri" pitchFamily="34" charset="-122"/>
+                <a:cs typeface="Calibri" pitchFamily="34" charset="-120"/>
+              </a:rPr>
+              <a:t>Board-Style Review</a:t>
+            </a:r>
+            <a:endParaRPr lang="en-US" sz="2600" dirty="0"/>
+          </a:p>
+        </p:txBody>
+      </p:sp>
+      <p:sp>
+        <p:nvSpPr>
+          <p:cNvPr id="4" name="Text 2"/>
+          <p:cNvSpPr/>
+          <p:nvPr/>
+        </p:nvSpPr>
+        <p:spPr>
+          <a:xfrm>
+            <a:off x="566928" y="1417320"/>
+            <a:ext cx="11057839" cy="914400"/>
+          </a:xfrm>
+          <a:prstGeom prst="rect">
+            <a:avLst/>
+          </a:prstGeom>
+          <a:noFill/>
+          <a:ln/>
+        </p:spPr>
+        <p:txBody>
+          <a:bodyPr wrap="square" lIns="0" tIns="0" rIns="0" bIns="0" rtlCol="0" anchor="t"/>
+          <a:lstStyle/>
+          <a:p>
+            <a:pPr algn="l" indent="0" marL="0">
+              <a:lnSpc>
+                <a:spcPct val="105000"/>
+              </a:lnSpc>
+              <a:buNone/>
+            </a:pPr>
+            <a:r>
+              <a:rPr lang="en-US" sz="1450" b="1" dirty="0">
+                <a:solidFill>
+                  <a:srgbClr val="1B2A38"/>
+                </a:solidFill>
+                <a:latin typeface="Calibri" pitchFamily="34" charset="0"/>
+                <a:ea typeface="Calibri" pitchFamily="34" charset="-122"/>
+                <a:cs typeface="Calibri" pitchFamily="34" charset="-120"/>
+              </a:rPr>
+              <a:t>A high population frequency for a variant argues that it is:</a:t>
+            </a:r>
+            <a:endParaRPr lang="en-US" sz="1450" dirty="0"/>
+          </a:p>
+        </p:txBody>
+      </p:sp>
+      <p:sp>
+        <p:nvSpPr>
+          <p:cNvPr id="5" name="Text 3"/>
+          <p:cNvSpPr/>
+          <p:nvPr/>
+        </p:nvSpPr>
+        <p:spPr>
+          <a:xfrm>
+            <a:off x="658368" y="2395728"/>
+            <a:ext cx="6192390" cy="3017520"/>
+          </a:xfrm>
+          <a:prstGeom prst="rect">
+            <a:avLst/>
+          </a:prstGeom>
+          <a:noFill/>
+          <a:ln/>
+        </p:spPr>
+        <p:txBody>
+          <a:bodyPr wrap="square" lIns="0" tIns="0" rIns="0" bIns="0" rtlCol="0" anchor="t"/>
+          <a:lstStyle/>
+          <a:p>
+            <a:pPr algn="l" indent="0" marL="0">
+              <a:spcAft>
+                <a:spcPts val="600"/>
+              </a:spcAft>
+              <a:buNone/>
+            </a:pPr>
+            <a:r>
+              <a:rPr lang="en-US" sz="1350" dirty="0">
+                <a:solidFill>
+                  <a:srgbClr val="33444F"/>
+                </a:solidFill>
+                <a:latin typeface="Calibri" pitchFamily="34" charset="0"/>
+                <a:ea typeface="Calibri" pitchFamily="34" charset="-122"/>
+                <a:cs typeface="Calibri" pitchFamily="34" charset="-120"/>
+              </a:rPr>
+              <a:t>A. Likely pathogenic</a:t>
+            </a:r>
+            <a:endParaRPr lang="en-US" sz="1350" dirty="0"/>
+          </a:p>
+          <a:p>
+            <a:pPr algn="l" indent="0" marL="0">
+              <a:spcAft>
+                <a:spcPts val="600"/>
+              </a:spcAft>
+              <a:buNone/>
+            </a:pPr>
+            <a:r>
+              <a:rPr lang="en-US" sz="1350" b="1" dirty="0">
+                <a:solidFill>
+                  <a:srgbClr val="005A63"/>
+                </a:solidFill>
+                <a:latin typeface="Calibri" pitchFamily="34" charset="0"/>
+                <a:ea typeface="Calibri" pitchFamily="34" charset="-122"/>
+                <a:cs typeface="Calibri" pitchFamily="34" charset="-120"/>
+              </a:rPr>
+              <a:t>B. Likely benign</a:t>
+            </a:r>
+            <a:endParaRPr lang="en-US" sz="1350" dirty="0"/>
+          </a:p>
+          <a:p>
+            <a:pPr algn="l" indent="0" marL="0">
+              <a:spcAft>
+                <a:spcPts val="600"/>
+              </a:spcAft>
+              <a:buNone/>
+            </a:pPr>
+            <a:r>
+              <a:rPr lang="en-US" sz="1350" dirty="0">
+                <a:solidFill>
+                  <a:srgbClr val="33444F"/>
+                </a:solidFill>
+                <a:latin typeface="Calibri" pitchFamily="34" charset="0"/>
+                <a:ea typeface="Calibri" pitchFamily="34" charset="-122"/>
+                <a:cs typeface="Calibri" pitchFamily="34" charset="-120"/>
+              </a:rPr>
+              <a:t>C. A VUS by default</a:t>
+            </a:r>
+            <a:endParaRPr lang="en-US" sz="1350" dirty="0"/>
+          </a:p>
+          <a:p>
+            <a:pPr algn="l" indent="0" marL="0">
+              <a:spcAft>
+                <a:spcPts val="600"/>
+              </a:spcAft>
+              <a:buNone/>
+            </a:pPr>
+            <a:r>
+              <a:rPr lang="en-US" sz="1350" dirty="0">
+                <a:solidFill>
+                  <a:srgbClr val="33444F"/>
+                </a:solidFill>
+                <a:latin typeface="Calibri" pitchFamily="34" charset="0"/>
+                <a:ea typeface="Calibri" pitchFamily="34" charset="-122"/>
+                <a:cs typeface="Calibri" pitchFamily="34" charset="-120"/>
+              </a:rPr>
+              <a:t>D. Somatic</a:t>
+            </a:r>
+            <a:endParaRPr lang="en-US" sz="1350" dirty="0"/>
+          </a:p>
+          <a:p>
+            <a:pPr algn="l" indent="0" marL="0">
+              <a:spcAft>
+                <a:spcPts val="600"/>
+              </a:spcAft>
+              <a:buNone/>
+            </a:pPr>
+            <a:r>
+              <a:rPr lang="en-US" sz="1350" dirty="0">
+                <a:solidFill>
+                  <a:srgbClr val="33444F"/>
+                </a:solidFill>
+                <a:latin typeface="Calibri" pitchFamily="34" charset="0"/>
+                <a:ea typeface="Calibri" pitchFamily="34" charset="-122"/>
+                <a:cs typeface="Calibri" pitchFamily="34" charset="-120"/>
+              </a:rPr>
+              <a:t>E. Untestable</a:t>
+            </a:r>
+            <a:endParaRPr lang="en-US" sz="1350" dirty="0"/>
+          </a:p>
+        </p:txBody>
+      </p:sp>
+      <p:sp>
+        <p:nvSpPr>
+          <p:cNvPr id="6" name="Shape 4"/>
+          <p:cNvSpPr/>
+          <p:nvPr/>
+        </p:nvSpPr>
+        <p:spPr>
+          <a:xfrm>
+            <a:off x="7201632" y="2395728"/>
+            <a:ext cx="4423136" cy="3246120"/>
+          </a:xfrm>
+          <a:prstGeom prst="roundRect">
+            <a:avLst>
+              <a:gd name="adj" fmla="val 2535"/>
+            </a:avLst>
+          </a:prstGeom>
+          <a:solidFill>
+            <a:srgbClr val="E0F2F4"/>
+          </a:solidFill>
+          <a:ln/>
+          <a:effectLst>
+            <a:outerShdw sx="100000" sy="100000" kx="0" ky="0" algn="bl" rotWithShape="0" blurRad="88900" dist="25400" dir="5400000">
+              <a:srgbClr val="22303C">
+                <a:alpha val="12000"/>
+              </a:srgbClr>
+            </a:outerShdw>
+          </a:effectLst>
+        </p:spPr>
+      </p:sp>
+      <p:sp>
+        <p:nvSpPr>
+          <p:cNvPr id="7" name="Text 5"/>
+          <p:cNvSpPr/>
+          <p:nvPr/>
+        </p:nvSpPr>
+        <p:spPr>
+          <a:xfrm>
+            <a:off x="7439376" y="2578608"/>
+            <a:ext cx="3965936" cy="457200"/>
+          </a:xfrm>
+          <a:prstGeom prst="rect">
+            <a:avLst/>
+          </a:prstGeom>
+          <a:noFill/>
+          <a:ln/>
+        </p:spPr>
+        <p:txBody>
+          <a:bodyPr wrap="square" lIns="0" tIns="0" rIns="0" bIns="0" rtlCol="0" anchor="ctr"/>
+          <a:lstStyle/>
+          <a:p>
+            <a:pPr indent="0" marL="0">
+              <a:buNone/>
+            </a:pPr>
+            <a:r>
+              <a:rPr lang="en-US" sz="1500" b="1" dirty="0">
+                <a:solidFill>
+                  <a:srgbClr val="00838F"/>
+                </a:solidFill>
+                <a:latin typeface="Calibri" pitchFamily="34" charset="0"/>
+                <a:ea typeface="Calibri" pitchFamily="34" charset="-122"/>
+                <a:cs typeface="Calibri" pitchFamily="34" charset="-120"/>
+              </a:rPr>
+              <a:t>ANSWER  </a:t>
+            </a:r>
+            <a:pPr indent="0" marL="0">
+              <a:buNone/>
+            </a:pPr>
+            <a:r>
+              <a:rPr lang="en-US" sz="1500" b="1" dirty="0">
+                <a:solidFill>
+                  <a:srgbClr val="1B2A38"/>
+                </a:solidFill>
+                <a:latin typeface="Calibri" pitchFamily="34" charset="0"/>
+                <a:ea typeface="Calibri" pitchFamily="34" charset="-122"/>
+                <a:cs typeface="Calibri" pitchFamily="34" charset="-120"/>
+              </a:rPr>
+              <a:t>B — Likely benign</a:t>
+            </a:r>
+            <a:endParaRPr lang="en-US" sz="1500" dirty="0"/>
+          </a:p>
+        </p:txBody>
+      </p:sp>
+      <p:sp>
+        <p:nvSpPr>
+          <p:cNvPr id="8" name="Text 6"/>
+          <p:cNvSpPr/>
+          <p:nvPr/>
+        </p:nvSpPr>
+        <p:spPr>
+          <a:xfrm>
+            <a:off x="7439376" y="3127248"/>
+            <a:ext cx="3947648" cy="2377440"/>
+          </a:xfrm>
+          <a:prstGeom prst="rect">
+            <a:avLst/>
+          </a:prstGeom>
+          <a:noFill/>
+          <a:ln/>
+        </p:spPr>
+        <p:txBody>
+          <a:bodyPr wrap="square" lIns="0" tIns="0" rIns="0" bIns="0" rtlCol="0" anchor="t"/>
+          <a:lstStyle/>
+          <a:p>
+            <a:pPr algn="l" indent="0" marL="0">
+              <a:lnSpc>
+                <a:spcPct val="108000"/>
+              </a:lnSpc>
+              <a:buNone/>
+            </a:pPr>
+            <a:r>
+              <a:rPr lang="en-US" sz="1250" dirty="0">
+                <a:solidFill>
+                  <a:srgbClr val="33444F"/>
+                </a:solidFill>
+                <a:latin typeface="Calibri" pitchFamily="34" charset="0"/>
+                <a:ea typeface="Calibri" pitchFamily="34" charset="-122"/>
+                <a:cs typeface="Calibri" pitchFamily="34" charset="-120"/>
+              </a:rPr>
+              <a:t>Variants common in the general population are unlikely to cause rare severe disease (stand-alone/strong benign evidence).</a:t>
+            </a:r>
+            <a:endParaRPr lang="en-US" sz="1250" dirty="0"/>
+          </a:p>
+        </p:txBody>
+      </p:sp>
+      <p:sp>
+        <p:nvSpPr>
+          <p:cNvPr id="9" name="Text 7"/>
+          <p:cNvSpPr/>
+          <p:nvPr/>
+        </p:nvSpPr>
+        <p:spPr>
+          <a:xfrm>
+            <a:off x="566928" y="6473952"/>
+            <a:ext cx="7772400" cy="274320"/>
+          </a:xfrm>
+          <a:prstGeom prst="rect">
+            <a:avLst/>
+          </a:prstGeom>
+          <a:noFill/>
+          <a:ln/>
+        </p:spPr>
+        <p:txBody>
+          <a:bodyPr wrap="square" lIns="0" tIns="0" rIns="0" bIns="0" rtlCol="0" anchor="ctr"/>
+          <a:lstStyle/>
+          <a:p>
+            <a:pPr algn="l" indent="0" marL="0">
+              <a:buNone/>
+            </a:pPr>
+            <a:r>
+              <a:rPr lang="en-US" sz="850" dirty="0">
+                <a:solidFill>
+                  <a:srgbClr val="9AA8B4"/>
+                </a:solidFill>
+                <a:latin typeface="Calibri" pitchFamily="34" charset="0"/>
+                <a:ea typeface="Calibri" pitchFamily="34" charset="-122"/>
+                <a:cs typeface="Calibri" pitchFamily="34" charset="-120"/>
+              </a:rPr>
+              <a:t>Makassed General Hospital  ·  Department of Laboratory Medicine</a:t>
+            </a:r>
+            <a:endParaRPr lang="en-US" sz="850" dirty="0"/>
+          </a:p>
+        </p:txBody>
+      </p:sp>
+      <p:sp>
+        <p:nvSpPr>
+          <p:cNvPr id="10" name="Text 8"/>
+          <p:cNvSpPr/>
+          <p:nvPr/>
+        </p:nvSpPr>
+        <p:spPr>
+          <a:xfrm>
+            <a:off x="9814255" y="6473952"/>
+            <a:ext cx="1828800" cy="274320"/>
+          </a:xfrm>
+          <a:prstGeom prst="rect">
+            <a:avLst/>
+          </a:prstGeom>
+          <a:noFill/>
+          <a:ln/>
+        </p:spPr>
+        <p:txBody>
+          <a:bodyPr wrap="square" lIns="0" tIns="0" rIns="0" bIns="0" rtlCol="0" anchor="ctr"/>
+          <a:lstStyle/>
+          <a:p>
+            <a:pPr algn="r" indent="0" marL="0">
+              <a:buNone/>
+            </a:pPr>
+            <a:r>
+              <a:rPr lang="en-US" sz="850" dirty="0">
+                <a:solidFill>
+                  <a:srgbClr val="9AA8B4"/>
+                </a:solidFill>
+                <a:latin typeface="Calibri" pitchFamily="34" charset="0"/>
+                <a:ea typeface="Calibri" pitchFamily="34" charset="-122"/>
+                <a:cs typeface="Calibri" pitchFamily="34" charset="-120"/>
+              </a:rPr>
+              <a:t>CP Lecture Series</a:t>
+            </a:r>
+            <a:pPr algn="r" indent="0" marL="0">
+              <a:buNone/>
+            </a:pPr>
+            <a:r>
+              <a:rPr lang="en-US" sz="850" dirty="0">
+                <a:solidFill>
+                  <a:srgbClr val="DCE4EC"/>
+                </a:solidFill>
+                <a:latin typeface="Calibri" pitchFamily="34" charset="0"/>
+                <a:ea typeface="Calibri" pitchFamily="34" charset="-122"/>
+                <a:cs typeface="Calibri" pitchFamily="34" charset="-120"/>
+              </a:rPr>
+              <a:t>   ·   </a:t>
+            </a:r>
+            <a:pPr algn="r" indent="0" marL="0">
+              <a:buNone/>
+            </a:pPr>
+            <a:r>
+              <a:rPr lang="en-US" sz="850" b="1" dirty="0">
+                <a:solidFill>
+                  <a:srgbClr val="00838F"/>
+                </a:solidFill>
+                <a:latin typeface="Calibri" pitchFamily="34" charset="0"/>
+                <a:ea typeface="Calibri" pitchFamily="34" charset="-122"/>
+                <a:cs typeface="Calibri" pitchFamily="34" charset="-120"/>
+              </a:rPr>
+              <a:t>19</a:t>
+            </a:r>
+            <a:endParaRPr lang="en-US" sz="850" dirty="0"/>
+          </a:p>
+        </p:txBody>
+      </p:sp>
+    </p:spTree>
+  </p:cSld>
+  <p:clrMapOvr>
+    <a:masterClrMapping/>
+  </p:clrMapOvr>
+</p:sld>
+</file>
+
+<file path=ppt/slides/slide23.xml><?xml version="1.0" encoding="utf-8"?>
+<p:sld xmlns:a="http://schemas.openxmlformats.org/drawingml/2006/main" xmlns:r="http://schemas.openxmlformats.org/officeDocument/2006/relationships" xmlns:p="http://schemas.openxmlformats.org/presentationml/2006/main">
+  <p:cSld name="Slide 23">
+    <p:bg>
+      <p:bgPr>
+        <a:solidFill>
+          <a:srgbClr val="FFFFFF"/>
+        </a:solidFill>
+      </p:bgPr>
+    </p:bg>
+    <p:spTree>
+      <p:nvGrpSpPr>
+        <p:cNvPr id="1" name=""/>
+        <p:cNvGrpSpPr/>
+        <p:nvPr/>
+      </p:nvGrpSpPr>
+      <p:grpSpPr>
+        <a:xfrm>
+          <a:off x="0" y="0"/>
+          <a:ext cx="0" cy="0"/>
+          <a:chOff x="0" y="0"/>
+          <a:chExt cx="0" cy="0"/>
+        </a:xfrm>
+      </p:grpSpPr>
+      <p:sp>
+        <p:nvSpPr>
+          <p:cNvPr id="2" name="Text 0"/>
+          <p:cNvSpPr/>
+          <p:nvPr/>
+        </p:nvSpPr>
+        <p:spPr>
+          <a:xfrm>
+            <a:off x="566928" y="329184"/>
+            <a:ext cx="10515600" cy="310896"/>
+          </a:xfrm>
+          <a:prstGeom prst="rect">
+            <a:avLst/>
+          </a:prstGeom>
+          <a:noFill/>
+          <a:ln/>
+        </p:spPr>
+        <p:txBody>
+          <a:bodyPr wrap="square" lIns="0" tIns="0" rIns="0" bIns="0" rtlCol="0" anchor="ctr"/>
+          <a:lstStyle/>
+          <a:p>
+            <a:pPr algn="l" indent="0" marL="0">
+              <a:buNone/>
+            </a:pPr>
+            <a:r>
+              <a:rPr lang="en-US" sz="1100" b="1" spc="150" kern="0" dirty="0">
+                <a:solidFill>
+                  <a:srgbClr val="00838F"/>
+                </a:solidFill>
+                <a:latin typeface="Calibri" pitchFamily="34" charset="0"/>
+                <a:ea typeface="Calibri" pitchFamily="34" charset="-122"/>
+                <a:cs typeface="Calibri" pitchFamily="34" charset="-120"/>
+              </a:rPr>
+              <a:t>MOLECULAR &amp; CYTOGENETICS   ·   BOARD REVIEW  ·  Q4</a:t>
+            </a:r>
+            <a:endParaRPr lang="en-US" sz="1100" dirty="0"/>
+          </a:p>
+        </p:txBody>
+      </p:sp>
+      <p:sp>
+        <p:nvSpPr>
+          <p:cNvPr id="3" name="Text 1"/>
+          <p:cNvSpPr/>
+          <p:nvPr/>
+        </p:nvSpPr>
+        <p:spPr>
+          <a:xfrm>
+            <a:off x="566928" y="713232"/>
+            <a:ext cx="11064240" cy="749808"/>
+          </a:xfrm>
+          <a:prstGeom prst="rect">
+            <a:avLst/>
+          </a:prstGeom>
+          <a:noFill/>
+          <a:ln/>
+        </p:spPr>
+        <p:txBody>
+          <a:bodyPr wrap="square" lIns="0" tIns="0" rIns="0" bIns="0" rtlCol="0" anchor="ctr"/>
+          <a:lstStyle/>
+          <a:p>
+            <a:pPr algn="l" indent="0" marL="0">
+              <a:buNone/>
+            </a:pPr>
+            <a:r>
+              <a:rPr lang="en-US" sz="2600" b="1" dirty="0">
+                <a:solidFill>
+                  <a:srgbClr val="0E3A5F"/>
+                </a:solidFill>
+                <a:latin typeface="Calibri" pitchFamily="34" charset="0"/>
+                <a:ea typeface="Calibri" pitchFamily="34" charset="-122"/>
+                <a:cs typeface="Calibri" pitchFamily="34" charset="-120"/>
+              </a:rPr>
+              <a:t>Board-Style Review</a:t>
+            </a:r>
+            <a:endParaRPr lang="en-US" sz="2600" dirty="0"/>
+          </a:p>
+        </p:txBody>
+      </p:sp>
+      <p:sp>
+        <p:nvSpPr>
+          <p:cNvPr id="4" name="Text 2"/>
+          <p:cNvSpPr/>
+          <p:nvPr/>
+        </p:nvSpPr>
+        <p:spPr>
+          <a:xfrm>
+            <a:off x="566928" y="1417320"/>
+            <a:ext cx="11057839" cy="914400"/>
+          </a:xfrm>
+          <a:prstGeom prst="rect">
+            <a:avLst/>
+          </a:prstGeom>
+          <a:noFill/>
+          <a:ln/>
+        </p:spPr>
+        <p:txBody>
+          <a:bodyPr wrap="square" lIns="0" tIns="0" rIns="0" bIns="0" rtlCol="0" anchor="t"/>
+          <a:lstStyle/>
+          <a:p>
+            <a:pPr algn="l" indent="0" marL="0">
+              <a:lnSpc>
+                <a:spcPct val="105000"/>
+              </a:lnSpc>
+              <a:buNone/>
+            </a:pPr>
+            <a:r>
+              <a:rPr lang="en-US" sz="1450" b="1" dirty="0">
+                <a:solidFill>
+                  <a:srgbClr val="1B2A38"/>
+                </a:solidFill>
+                <a:latin typeface="Calibri" pitchFamily="34" charset="0"/>
+                <a:ea typeface="Calibri" pitchFamily="34" charset="-122"/>
+                <a:cs typeface="Calibri" pitchFamily="34" charset="-120"/>
+              </a:rPr>
+              <a:t>A ~50% VAF for a variant in a cancer-predisposition gene on tumor testing should prompt:</a:t>
+            </a:r>
+            <a:endParaRPr lang="en-US" sz="1450" dirty="0"/>
+          </a:p>
+        </p:txBody>
+      </p:sp>
+      <p:sp>
+        <p:nvSpPr>
+          <p:cNvPr id="5" name="Text 3"/>
+          <p:cNvSpPr/>
+          <p:nvPr/>
+        </p:nvSpPr>
+        <p:spPr>
+          <a:xfrm>
+            <a:off x="658368" y="2395728"/>
+            <a:ext cx="6192390" cy="3017520"/>
+          </a:xfrm>
+          <a:prstGeom prst="rect">
+            <a:avLst/>
+          </a:prstGeom>
+          <a:noFill/>
+          <a:ln/>
+        </p:spPr>
+        <p:txBody>
+          <a:bodyPr wrap="square" lIns="0" tIns="0" rIns="0" bIns="0" rtlCol="0" anchor="t"/>
+          <a:lstStyle/>
+          <a:p>
+            <a:pPr algn="l" indent="0" marL="0">
+              <a:spcAft>
+                <a:spcPts val="600"/>
+              </a:spcAft>
+              <a:buNone/>
+            </a:pPr>
+            <a:r>
+              <a:rPr lang="en-US" sz="1350" dirty="0">
+                <a:solidFill>
+                  <a:srgbClr val="33444F"/>
+                </a:solidFill>
+                <a:latin typeface="Calibri" pitchFamily="34" charset="0"/>
+                <a:ea typeface="Calibri" pitchFamily="34" charset="-122"/>
+                <a:cs typeface="Calibri" pitchFamily="34" charset="-120"/>
+              </a:rPr>
+              <a:t>A. Immediate germline diagnosis</a:t>
+            </a:r>
+            <a:endParaRPr lang="en-US" sz="1350" dirty="0"/>
+          </a:p>
+          <a:p>
+            <a:pPr algn="l" indent="0" marL="0">
+              <a:spcAft>
+                <a:spcPts val="600"/>
+              </a:spcAft>
+              <a:buNone/>
+            </a:pPr>
+            <a:r>
+              <a:rPr lang="en-US" sz="1350" b="1" dirty="0">
+                <a:solidFill>
+                  <a:srgbClr val="005A63"/>
+                </a:solidFill>
+                <a:latin typeface="Calibri" pitchFamily="34" charset="0"/>
+                <a:ea typeface="Calibri" pitchFamily="34" charset="-122"/>
+                <a:cs typeface="Calibri" pitchFamily="34" charset="-120"/>
+              </a:rPr>
+              <a:t>B. Confirmation with a paired normal sample</a:t>
+            </a:r>
+            <a:endParaRPr lang="en-US" sz="1350" dirty="0"/>
+          </a:p>
+          <a:p>
+            <a:pPr algn="l" indent="0" marL="0">
+              <a:spcAft>
+                <a:spcPts val="600"/>
+              </a:spcAft>
+              <a:buNone/>
+            </a:pPr>
+            <a:r>
+              <a:rPr lang="en-US" sz="1350" dirty="0">
+                <a:solidFill>
+                  <a:srgbClr val="33444F"/>
+                </a:solidFill>
+                <a:latin typeface="Calibri" pitchFamily="34" charset="0"/>
+                <a:ea typeface="Calibri" pitchFamily="34" charset="-122"/>
+                <a:cs typeface="Calibri" pitchFamily="34" charset="-120"/>
+              </a:rPr>
+              <a:t>C. No further action</a:t>
+            </a:r>
+            <a:endParaRPr lang="en-US" sz="1350" dirty="0"/>
+          </a:p>
+          <a:p>
+            <a:pPr algn="l" indent="0" marL="0">
+              <a:spcAft>
+                <a:spcPts val="600"/>
+              </a:spcAft>
+              <a:buNone/>
+            </a:pPr>
+            <a:r>
+              <a:rPr lang="en-US" sz="1350" dirty="0">
+                <a:solidFill>
+                  <a:srgbClr val="33444F"/>
+                </a:solidFill>
+                <a:latin typeface="Calibri" pitchFamily="34" charset="0"/>
+                <a:ea typeface="Calibri" pitchFamily="34" charset="-122"/>
+                <a:cs typeface="Calibri" pitchFamily="34" charset="-120"/>
+              </a:rPr>
+              <a:t>D. Reporting as benign</a:t>
+            </a:r>
+            <a:endParaRPr lang="en-US" sz="1350" dirty="0"/>
+          </a:p>
+          <a:p>
+            <a:pPr algn="l" indent="0" marL="0">
+              <a:spcAft>
+                <a:spcPts val="600"/>
+              </a:spcAft>
+              <a:buNone/>
+            </a:pPr>
+            <a:r>
+              <a:rPr lang="en-US" sz="1350" dirty="0">
+                <a:solidFill>
+                  <a:srgbClr val="33444F"/>
+                </a:solidFill>
+                <a:latin typeface="Calibri" pitchFamily="34" charset="0"/>
+                <a:ea typeface="Calibri" pitchFamily="34" charset="-122"/>
+                <a:cs typeface="Calibri" pitchFamily="34" charset="-120"/>
+              </a:rPr>
+              <a:t>E. Repeat tumor testing only</a:t>
+            </a:r>
+            <a:endParaRPr lang="en-US" sz="1350" dirty="0"/>
+          </a:p>
+        </p:txBody>
+      </p:sp>
+      <p:sp>
+        <p:nvSpPr>
+          <p:cNvPr id="6" name="Shape 4"/>
+          <p:cNvSpPr/>
+          <p:nvPr/>
+        </p:nvSpPr>
+        <p:spPr>
+          <a:xfrm>
+            <a:off x="7201632" y="2395728"/>
+            <a:ext cx="4423136" cy="3246120"/>
+          </a:xfrm>
+          <a:prstGeom prst="roundRect">
+            <a:avLst>
+              <a:gd name="adj" fmla="val 2535"/>
+            </a:avLst>
+          </a:prstGeom>
+          <a:solidFill>
+            <a:srgbClr val="E0F2F4"/>
+          </a:solidFill>
+          <a:ln/>
+          <a:effectLst>
+            <a:outerShdw sx="100000" sy="100000" kx="0" ky="0" algn="bl" rotWithShape="0" blurRad="88900" dist="25400" dir="5400000">
+              <a:srgbClr val="22303C">
+                <a:alpha val="12000"/>
+              </a:srgbClr>
+            </a:outerShdw>
+          </a:effectLst>
+        </p:spPr>
+      </p:sp>
+      <p:sp>
+        <p:nvSpPr>
+          <p:cNvPr id="7" name="Text 5"/>
+          <p:cNvSpPr/>
+          <p:nvPr/>
+        </p:nvSpPr>
+        <p:spPr>
+          <a:xfrm>
+            <a:off x="7439376" y="2578608"/>
+            <a:ext cx="3965936" cy="457200"/>
+          </a:xfrm>
+          <a:prstGeom prst="rect">
+            <a:avLst/>
+          </a:prstGeom>
+          <a:noFill/>
+          <a:ln/>
+        </p:spPr>
+        <p:txBody>
+          <a:bodyPr wrap="square" lIns="0" tIns="0" rIns="0" bIns="0" rtlCol="0" anchor="ctr"/>
+          <a:lstStyle/>
+          <a:p>
+            <a:pPr indent="0" marL="0">
+              <a:buNone/>
+            </a:pPr>
+            <a:r>
+              <a:rPr lang="en-US" sz="1500" b="1" dirty="0">
+                <a:solidFill>
+                  <a:srgbClr val="00838F"/>
+                </a:solidFill>
+                <a:latin typeface="Calibri" pitchFamily="34" charset="0"/>
+                <a:ea typeface="Calibri" pitchFamily="34" charset="-122"/>
+                <a:cs typeface="Calibri" pitchFamily="34" charset="-120"/>
+              </a:rPr>
+              <a:t>ANSWER  </a:t>
+            </a:r>
+            <a:pPr indent="0" marL="0">
+              <a:buNone/>
+            </a:pPr>
+            <a:r>
+              <a:rPr lang="en-US" sz="1500" b="1" dirty="0">
+                <a:solidFill>
+                  <a:srgbClr val="1B2A38"/>
+                </a:solidFill>
+                <a:latin typeface="Calibri" pitchFamily="34" charset="0"/>
+                <a:ea typeface="Calibri" pitchFamily="34" charset="-122"/>
+                <a:cs typeface="Calibri" pitchFamily="34" charset="-120"/>
+              </a:rPr>
+              <a:t>B — Confirm with paired normal</a:t>
+            </a:r>
+            <a:endParaRPr lang="en-US" sz="1500" dirty="0"/>
+          </a:p>
+        </p:txBody>
+      </p:sp>
+      <p:sp>
+        <p:nvSpPr>
+          <p:cNvPr id="8" name="Text 6"/>
+          <p:cNvSpPr/>
+          <p:nvPr/>
+        </p:nvSpPr>
+        <p:spPr>
+          <a:xfrm>
+            <a:off x="7439376" y="3127248"/>
+            <a:ext cx="3947648" cy="2377440"/>
+          </a:xfrm>
+          <a:prstGeom prst="rect">
+            <a:avLst/>
+          </a:prstGeom>
+          <a:noFill/>
+          <a:ln/>
+        </p:spPr>
+        <p:txBody>
+          <a:bodyPr wrap="square" lIns="0" tIns="0" rIns="0" bIns="0" rtlCol="0" anchor="t"/>
+          <a:lstStyle/>
+          <a:p>
+            <a:pPr algn="l" indent="0" marL="0">
+              <a:lnSpc>
+                <a:spcPct val="108000"/>
+              </a:lnSpc>
+              <a:buNone/>
+            </a:pPr>
+            <a:r>
+              <a:rPr lang="en-US" sz="1250" dirty="0">
+                <a:solidFill>
+                  <a:srgbClr val="33444F"/>
+                </a:solidFill>
+                <a:latin typeface="Calibri" pitchFamily="34" charset="0"/>
+                <a:ea typeface="Calibri" pitchFamily="34" charset="-122"/>
+                <a:cs typeface="Calibri" pitchFamily="34" charset="-120"/>
+              </a:rPr>
+              <a:t>A ~50% VAF can reflect a germline variant; confirm in normal tissue with consent and counseling before attributing inherited risk.</a:t>
+            </a:r>
+            <a:endParaRPr lang="en-US" sz="1250" dirty="0"/>
+          </a:p>
+        </p:txBody>
+      </p:sp>
+      <p:sp>
+        <p:nvSpPr>
+          <p:cNvPr id="9" name="Text 7"/>
+          <p:cNvSpPr/>
+          <p:nvPr/>
+        </p:nvSpPr>
+        <p:spPr>
+          <a:xfrm>
+            <a:off x="566928" y="6473952"/>
+            <a:ext cx="7772400" cy="274320"/>
+          </a:xfrm>
+          <a:prstGeom prst="rect">
+            <a:avLst/>
+          </a:prstGeom>
+          <a:noFill/>
+          <a:ln/>
+        </p:spPr>
+        <p:txBody>
+          <a:bodyPr wrap="square" lIns="0" tIns="0" rIns="0" bIns="0" rtlCol="0" anchor="ctr"/>
+          <a:lstStyle/>
+          <a:p>
+            <a:pPr algn="l" indent="0" marL="0">
+              <a:buNone/>
+            </a:pPr>
+            <a:r>
+              <a:rPr lang="en-US" sz="850" dirty="0">
+                <a:solidFill>
+                  <a:srgbClr val="9AA8B4"/>
+                </a:solidFill>
+                <a:latin typeface="Calibri" pitchFamily="34" charset="0"/>
+                <a:ea typeface="Calibri" pitchFamily="34" charset="-122"/>
+                <a:cs typeface="Calibri" pitchFamily="34" charset="-120"/>
+              </a:rPr>
+              <a:t>Makassed General Hospital  ·  Department of Laboratory Medicine</a:t>
+            </a:r>
+            <a:endParaRPr lang="en-US" sz="850" dirty="0"/>
+          </a:p>
+        </p:txBody>
+      </p:sp>
+      <p:sp>
+        <p:nvSpPr>
+          <p:cNvPr id="10" name="Text 8"/>
+          <p:cNvSpPr/>
+          <p:nvPr/>
+        </p:nvSpPr>
+        <p:spPr>
+          <a:xfrm>
+            <a:off x="9814255" y="6473952"/>
+            <a:ext cx="1828800" cy="274320"/>
+          </a:xfrm>
+          <a:prstGeom prst="rect">
+            <a:avLst/>
+          </a:prstGeom>
+          <a:noFill/>
+          <a:ln/>
+        </p:spPr>
+        <p:txBody>
+          <a:bodyPr wrap="square" lIns="0" tIns="0" rIns="0" bIns="0" rtlCol="0" anchor="ctr"/>
+          <a:lstStyle/>
+          <a:p>
+            <a:pPr algn="r" indent="0" marL="0">
+              <a:buNone/>
+            </a:pPr>
+            <a:r>
+              <a:rPr lang="en-US" sz="850" dirty="0">
+                <a:solidFill>
+                  <a:srgbClr val="9AA8B4"/>
+                </a:solidFill>
+                <a:latin typeface="Calibri" pitchFamily="34" charset="0"/>
+                <a:ea typeface="Calibri" pitchFamily="34" charset="-122"/>
+                <a:cs typeface="Calibri" pitchFamily="34" charset="-120"/>
+              </a:rPr>
+              <a:t>CP Lecture Series</a:t>
+            </a:r>
+            <a:pPr algn="r" indent="0" marL="0">
+              <a:buNone/>
+            </a:pPr>
+            <a:r>
+              <a:rPr lang="en-US" sz="850" dirty="0">
+                <a:solidFill>
+                  <a:srgbClr val="DCE4EC"/>
+                </a:solidFill>
+                <a:latin typeface="Calibri" pitchFamily="34" charset="0"/>
+                <a:ea typeface="Calibri" pitchFamily="34" charset="-122"/>
+                <a:cs typeface="Calibri" pitchFamily="34" charset="-120"/>
+              </a:rPr>
+              <a:t>   ·   </a:t>
+            </a:r>
+            <a:pPr algn="r" indent="0" marL="0">
+              <a:buNone/>
+            </a:pPr>
+            <a:r>
+              <a:rPr lang="en-US" sz="850" b="1" dirty="0">
+                <a:solidFill>
+                  <a:srgbClr val="00838F"/>
+                </a:solidFill>
+                <a:latin typeface="Calibri" pitchFamily="34" charset="0"/>
+                <a:ea typeface="Calibri" pitchFamily="34" charset="-122"/>
+                <a:cs typeface="Calibri" pitchFamily="34" charset="-120"/>
+              </a:rPr>
+              <a:t>20</a:t>
+            </a:r>
+            <a:endParaRPr lang="en-US" sz="850" dirty="0"/>
+          </a:p>
+        </p:txBody>
+      </p:sp>
+    </p:spTree>
+  </p:cSld>
+  <p:clrMapOvr>
+    <a:masterClrMapping/>
+  </p:clrMapOvr>
+</p:sld>
+</file>
+
+<file path=ppt/slides/slide24.xml><?xml version="1.0" encoding="utf-8"?>
+<p:sld xmlns:a="http://schemas.openxmlformats.org/drawingml/2006/main" xmlns:r="http://schemas.openxmlformats.org/officeDocument/2006/relationships" xmlns:p="http://schemas.openxmlformats.org/presentationml/2006/main">
+  <p:cSld name="Slide 24">
+    <p:bg>
+      <p:bgPr>
+        <a:solidFill>
+          <a:srgbClr val="0A2A45"/>
+        </a:solidFill>
+      </p:bgPr>
+    </p:bg>
+    <p:spTree>
+      <p:nvGrpSpPr>
+        <p:cNvPr id="1" name=""/>
+        <p:cNvGrpSpPr/>
+        <p:nvPr/>
+      </p:nvGrpSpPr>
+      <p:grpSpPr>
+        <a:xfrm>
+          <a:off x="0" y="0"/>
+          <a:ext cx="0" cy="0"/>
+          <a:chOff x="0" y="0"/>
+          <a:chExt cx="0" cy="0"/>
+        </a:xfrm>
+      </p:grpSpPr>
+      <p:sp>
+        <p:nvSpPr>
+          <p:cNvPr id="2" name="Text 0"/>
+          <p:cNvSpPr/>
+          <p:nvPr/>
+        </p:nvSpPr>
+        <p:spPr>
+          <a:xfrm>
+            <a:off x="566928" y="329184"/>
+            <a:ext cx="10058400" cy="310896"/>
+          </a:xfrm>
+          <a:prstGeom prst="rect">
+            <a:avLst/>
+          </a:prstGeom>
+          <a:noFill/>
+          <a:ln/>
+        </p:spPr>
+        <p:txBody>
+          <a:bodyPr wrap="square" lIns="0" tIns="0" rIns="0" bIns="0" rtlCol="0" anchor="ctr"/>
+          <a:lstStyle/>
+          <a:p>
+            <a:pPr indent="0" marL="0">
+              <a:buNone/>
+            </a:pPr>
+            <a:r>
+              <a:rPr lang="en-US" sz="1100" b="1" spc="150" kern="0" dirty="0">
+                <a:solidFill>
+                  <a:srgbClr val="00838F"/>
+                </a:solidFill>
+                <a:latin typeface="Calibri" pitchFamily="34" charset="0"/>
+                <a:ea typeface="Calibri" pitchFamily="34" charset="-122"/>
+                <a:cs typeface="Calibri" pitchFamily="34" charset="-120"/>
+              </a:rPr>
+              <a:t>MOLECULAR &amp; CYTOGENETICS</a:t>
+            </a:r>
+            <a:endParaRPr lang="en-US" sz="1100" dirty="0"/>
+          </a:p>
+        </p:txBody>
+      </p:sp>
+      <p:sp>
+        <p:nvSpPr>
+          <p:cNvPr id="3" name="Text 1"/>
+          <p:cNvSpPr/>
+          <p:nvPr/>
+        </p:nvSpPr>
+        <p:spPr>
+          <a:xfrm>
+            <a:off x="566928" y="676656"/>
+            <a:ext cx="10972800" cy="749808"/>
+          </a:xfrm>
+          <a:prstGeom prst="rect">
+            <a:avLst/>
+          </a:prstGeom>
+          <a:noFill/>
+          <a:ln/>
+        </p:spPr>
+        <p:txBody>
+          <a:bodyPr wrap="square" lIns="0" tIns="0" rIns="0" bIns="0" rtlCol="0" anchor="ctr"/>
+          <a:lstStyle/>
+          <a:p>
+            <a:pPr indent="0" marL="0">
+              <a:buNone/>
+            </a:pPr>
+            <a:r>
+              <a:rPr lang="en-US" sz="3000" b="1" dirty="0">
+                <a:solidFill>
+                  <a:srgbClr val="FFFFFF"/>
+                </a:solidFill>
+                <a:latin typeface="Calibri" pitchFamily="34" charset="0"/>
+                <a:ea typeface="Calibri" pitchFamily="34" charset="-122"/>
+                <a:cs typeface="Calibri" pitchFamily="34" charset="-120"/>
+              </a:rPr>
+              <a:t>Key Take-Home Points</a:t>
+            </a:r>
+            <a:endParaRPr lang="en-US" sz="3000" dirty="0"/>
+          </a:p>
+        </p:txBody>
+      </p:sp>
+      <p:sp>
+        <p:nvSpPr>
+          <p:cNvPr id="4" name="Shape 2"/>
+          <p:cNvSpPr/>
+          <p:nvPr/>
+        </p:nvSpPr>
+        <p:spPr>
+          <a:xfrm>
+            <a:off x="566928" y="1517904"/>
+            <a:ext cx="11057839" cy="841248"/>
+          </a:xfrm>
+          <a:prstGeom prst="roundRect">
+            <a:avLst>
+              <a:gd name="adj" fmla="val 7609"/>
+            </a:avLst>
+          </a:prstGeom>
+          <a:solidFill>
+            <a:srgbClr val="143651"/>
+          </a:solidFill>
+          <a:ln/>
+        </p:spPr>
+      </p:sp>
+      <p:sp>
+        <p:nvSpPr>
+          <p:cNvPr id="5" name="Shape 3"/>
+          <p:cNvSpPr/>
+          <p:nvPr/>
+        </p:nvSpPr>
+        <p:spPr>
+          <a:xfrm>
+            <a:off x="749808" y="1755648"/>
+            <a:ext cx="365760" cy="365760"/>
+          </a:xfrm>
+          <a:prstGeom prst="ellipse">
+            <a:avLst/>
+          </a:prstGeom>
+          <a:solidFill>
+            <a:srgbClr val="00838F"/>
+          </a:solidFill>
+          <a:ln/>
+          <a:effectLst>
+            <a:outerShdw sx="100000" sy="100000" kx="0" ky="0" algn="bl" rotWithShape="0" blurRad="88900" dist="25400" dir="5400000">
+              <a:srgbClr val="22303C">
+                <a:alpha val="12000"/>
+              </a:srgbClr>
+            </a:outerShdw>
+          </a:effectLst>
+        </p:spPr>
+      </p:sp>
+      <p:sp>
+        <p:nvSpPr>
+          <p:cNvPr id="6" name="Text 4"/>
+          <p:cNvSpPr/>
+          <p:nvPr/>
+        </p:nvSpPr>
+        <p:spPr>
+          <a:xfrm>
+            <a:off x="749808" y="1755648"/>
+            <a:ext cx="365760" cy="365760"/>
+          </a:xfrm>
+          <a:prstGeom prst="rect">
+            <a:avLst/>
+          </a:prstGeom>
+          <a:noFill/>
+          <a:ln/>
+        </p:spPr>
+        <p:txBody>
+          <a:bodyPr wrap="square" lIns="0" tIns="0" rIns="0" bIns="0" rtlCol="0" anchor="ctr"/>
+          <a:lstStyle/>
+          <a:p>
+            <a:pPr algn="ctr" indent="0" marL="0">
+              <a:buNone/>
+            </a:pPr>
+            <a:r>
+              <a:rPr lang="en-US" sz="1500" b="1" dirty="0">
+                <a:solidFill>
+                  <a:srgbClr val="FFFFFF"/>
+                </a:solidFill>
+                <a:latin typeface="Calibri" pitchFamily="34" charset="0"/>
+                <a:ea typeface="Calibri" pitchFamily="34" charset="-122"/>
+                <a:cs typeface="Calibri" pitchFamily="34" charset="-120"/>
+              </a:rPr>
+              <a:t>1</a:t>
+            </a:r>
+            <a:endParaRPr lang="en-US" sz="1500" dirty="0"/>
+          </a:p>
+        </p:txBody>
+      </p:sp>
+      <p:sp>
+        <p:nvSpPr>
+          <p:cNvPr id="7" name="Text 5"/>
+          <p:cNvSpPr/>
+          <p:nvPr/>
+        </p:nvSpPr>
+        <p:spPr>
+          <a:xfrm>
+            <a:off x="1280160" y="1517904"/>
+            <a:ext cx="10143439" cy="841248"/>
+          </a:xfrm>
+          <a:prstGeom prst="rect">
+            <a:avLst/>
+          </a:prstGeom>
+          <a:noFill/>
+          <a:ln/>
+        </p:spPr>
+        <p:txBody>
+          <a:bodyPr wrap="square" lIns="0" tIns="0" rIns="0" bIns="0" rtlCol="0" anchor="ctr"/>
+          <a:lstStyle/>
+          <a:p>
+            <a:pPr algn="l" indent="0" marL="0">
+              <a:buNone/>
+            </a:pPr>
+            <a:r>
+              <a:rPr lang="en-US" sz="1350" dirty="0">
+                <a:solidFill>
+                  <a:srgbClr val="E7EEF4"/>
+                </a:solidFill>
+                <a:latin typeface="Calibri" pitchFamily="34" charset="0"/>
+                <a:ea typeface="Calibri" pitchFamily="34" charset="-122"/>
+                <a:cs typeface="Calibri" pitchFamily="34" charset="-120"/>
+              </a:rPr>
+              <a:t>Germline variants use ACMG/AMP five tiers; somatic variants use AMP/ASCO/CAP actionability tiers — keep the frameworks distinct.</a:t>
+            </a:r>
+            <a:endParaRPr lang="en-US" sz="1350" dirty="0"/>
+          </a:p>
+        </p:txBody>
+      </p:sp>
+      <p:sp>
+        <p:nvSpPr>
+          <p:cNvPr id="8" name="Shape 6"/>
+          <p:cNvSpPr/>
+          <p:nvPr/>
+        </p:nvSpPr>
+        <p:spPr>
+          <a:xfrm>
+            <a:off x="566928" y="2505456"/>
+            <a:ext cx="11057839" cy="841248"/>
+          </a:xfrm>
+          <a:prstGeom prst="roundRect">
+            <a:avLst>
+              <a:gd name="adj" fmla="val 7609"/>
+            </a:avLst>
+          </a:prstGeom>
+          <a:solidFill>
+            <a:srgbClr val="143651"/>
+          </a:solidFill>
+          <a:ln/>
+        </p:spPr>
+      </p:sp>
+      <p:sp>
+        <p:nvSpPr>
+          <p:cNvPr id="9" name="Shape 7"/>
+          <p:cNvSpPr/>
+          <p:nvPr/>
+        </p:nvSpPr>
+        <p:spPr>
+          <a:xfrm>
+            <a:off x="749808" y="2743200"/>
+            <a:ext cx="365760" cy="365760"/>
+          </a:xfrm>
+          <a:prstGeom prst="ellipse">
+            <a:avLst/>
+          </a:prstGeom>
+          <a:solidFill>
+            <a:srgbClr val="00838F"/>
+          </a:solidFill>
+          <a:ln/>
+          <a:effectLst>
+            <a:outerShdw sx="100000" sy="100000" kx="0" ky="0" algn="bl" rotWithShape="0" blurRad="88900" dist="25400" dir="5400000">
+              <a:srgbClr val="22303C">
+                <a:alpha val="12000"/>
+              </a:srgbClr>
+            </a:outerShdw>
+          </a:effectLst>
+        </p:spPr>
+      </p:sp>
+      <p:sp>
+        <p:nvSpPr>
+          <p:cNvPr id="10" name="Text 8"/>
+          <p:cNvSpPr/>
+          <p:nvPr/>
+        </p:nvSpPr>
+        <p:spPr>
+          <a:xfrm>
+            <a:off x="749808" y="2743200"/>
+            <a:ext cx="365760" cy="365760"/>
+          </a:xfrm>
+          <a:prstGeom prst="rect">
+            <a:avLst/>
+          </a:prstGeom>
+          <a:noFill/>
+          <a:ln/>
+        </p:spPr>
+        <p:txBody>
+          <a:bodyPr wrap="square" lIns="0" tIns="0" rIns="0" bIns="0" rtlCol="0" anchor="ctr"/>
+          <a:lstStyle/>
+          <a:p>
+            <a:pPr algn="ctr" indent="0" marL="0">
+              <a:buNone/>
+            </a:pPr>
+            <a:r>
+              <a:rPr lang="en-US" sz="1500" b="1" dirty="0">
+                <a:solidFill>
+                  <a:srgbClr val="FFFFFF"/>
+                </a:solidFill>
+                <a:latin typeface="Calibri" pitchFamily="34" charset="0"/>
+                <a:ea typeface="Calibri" pitchFamily="34" charset="-122"/>
+                <a:cs typeface="Calibri" pitchFamily="34" charset="-120"/>
+              </a:rPr>
+              <a:t>2</a:t>
+            </a:r>
+            <a:endParaRPr lang="en-US" sz="1500" dirty="0"/>
+          </a:p>
+        </p:txBody>
+      </p:sp>
+      <p:sp>
+        <p:nvSpPr>
+          <p:cNvPr id="11" name="Text 9"/>
+          <p:cNvSpPr/>
+          <p:nvPr/>
+        </p:nvSpPr>
+        <p:spPr>
+          <a:xfrm>
+            <a:off x="1280160" y="2505456"/>
+            <a:ext cx="10143439" cy="841248"/>
+          </a:xfrm>
+          <a:prstGeom prst="rect">
+            <a:avLst/>
+          </a:prstGeom>
+          <a:noFill/>
+          <a:ln/>
+        </p:spPr>
+        <p:txBody>
+          <a:bodyPr wrap="square" lIns="0" tIns="0" rIns="0" bIns="0" rtlCol="0" anchor="ctr"/>
+          <a:lstStyle/>
+          <a:p>
+            <a:pPr algn="l" indent="0" marL="0">
+              <a:buNone/>
+            </a:pPr>
+            <a:r>
+              <a:rPr lang="en-US" sz="1350" dirty="0">
+                <a:solidFill>
+                  <a:srgbClr val="E7EEF4"/>
+                </a:solidFill>
+                <a:latin typeface="Calibri" pitchFamily="34" charset="0"/>
+                <a:ea typeface="Calibri" pitchFamily="34" charset="-122"/>
+                <a:cs typeface="Calibri" pitchFamily="34" charset="-120"/>
+              </a:rPr>
+              <a:t>Combine population, computational (supporting only), functional, and segregation evidence per the framework’s rules.</a:t>
+            </a:r>
+            <a:endParaRPr lang="en-US" sz="1350" dirty="0"/>
+          </a:p>
+        </p:txBody>
+      </p:sp>
+      <p:sp>
+        <p:nvSpPr>
+          <p:cNvPr id="12" name="Shape 10"/>
+          <p:cNvSpPr/>
+          <p:nvPr/>
+        </p:nvSpPr>
+        <p:spPr>
+          <a:xfrm>
+            <a:off x="566928" y="3493008"/>
+            <a:ext cx="11057839" cy="841248"/>
+          </a:xfrm>
+          <a:prstGeom prst="roundRect">
+            <a:avLst>
+              <a:gd name="adj" fmla="val 7609"/>
+            </a:avLst>
+          </a:prstGeom>
+          <a:solidFill>
+            <a:srgbClr val="143651"/>
+          </a:solidFill>
+          <a:ln/>
+        </p:spPr>
+      </p:sp>
+      <p:sp>
+        <p:nvSpPr>
+          <p:cNvPr id="13" name="Shape 11"/>
+          <p:cNvSpPr/>
+          <p:nvPr/>
+        </p:nvSpPr>
+        <p:spPr>
+          <a:xfrm>
+            <a:off x="749808" y="3730752"/>
+            <a:ext cx="365760" cy="365760"/>
+          </a:xfrm>
+          <a:prstGeom prst="ellipse">
+            <a:avLst/>
+          </a:prstGeom>
+          <a:solidFill>
+            <a:srgbClr val="00838F"/>
+          </a:solidFill>
+          <a:ln/>
+          <a:effectLst>
+            <a:outerShdw sx="100000" sy="100000" kx="0" ky="0" algn="bl" rotWithShape="0" blurRad="88900" dist="25400" dir="5400000">
+              <a:srgbClr val="22303C">
+                <a:alpha val="12000"/>
+              </a:srgbClr>
+            </a:outerShdw>
+          </a:effectLst>
+        </p:spPr>
+      </p:sp>
+      <p:sp>
+        <p:nvSpPr>
+          <p:cNvPr id="14" name="Text 12"/>
+          <p:cNvSpPr/>
+          <p:nvPr/>
+        </p:nvSpPr>
+        <p:spPr>
+          <a:xfrm>
+            <a:off x="749808" y="3730752"/>
+            <a:ext cx="365760" cy="365760"/>
+          </a:xfrm>
+          <a:prstGeom prst="rect">
+            <a:avLst/>
+          </a:prstGeom>
+          <a:noFill/>
+          <a:ln/>
+        </p:spPr>
+        <p:txBody>
+          <a:bodyPr wrap="square" lIns="0" tIns="0" rIns="0" bIns="0" rtlCol="0" anchor="ctr"/>
+          <a:lstStyle/>
+          <a:p>
+            <a:pPr algn="ctr" indent="0" marL="0">
+              <a:buNone/>
+            </a:pPr>
+            <a:r>
+              <a:rPr lang="en-US" sz="1500" b="1" dirty="0">
+                <a:solidFill>
+                  <a:srgbClr val="FFFFFF"/>
+                </a:solidFill>
+                <a:latin typeface="Calibri" pitchFamily="34" charset="0"/>
+                <a:ea typeface="Calibri" pitchFamily="34" charset="-122"/>
+                <a:cs typeface="Calibri" pitchFamily="34" charset="-120"/>
+              </a:rPr>
+              <a:t>3</a:t>
+            </a:r>
+            <a:endParaRPr lang="en-US" sz="1500" dirty="0"/>
+          </a:p>
+        </p:txBody>
+      </p:sp>
+      <p:sp>
+        <p:nvSpPr>
+          <p:cNvPr id="15" name="Text 13"/>
+          <p:cNvSpPr/>
+          <p:nvPr/>
+        </p:nvSpPr>
+        <p:spPr>
+          <a:xfrm>
+            <a:off x="1280160" y="3493008"/>
+            <a:ext cx="10143439" cy="841248"/>
+          </a:xfrm>
+          <a:prstGeom prst="rect">
+            <a:avLst/>
+          </a:prstGeom>
+          <a:noFill/>
+          <a:ln/>
+        </p:spPr>
+        <p:txBody>
+          <a:bodyPr wrap="square" lIns="0" tIns="0" rIns="0" bIns="0" rtlCol="0" anchor="ctr"/>
+          <a:lstStyle/>
+          <a:p>
+            <a:pPr algn="l" indent="0" marL="0">
+              <a:buNone/>
+            </a:pPr>
+            <a:r>
+              <a:rPr lang="en-US" sz="1350" dirty="0">
+                <a:solidFill>
+                  <a:srgbClr val="E7EEF4"/>
+                </a:solidFill>
+                <a:latin typeface="Calibri" pitchFamily="34" charset="0"/>
+                <a:ea typeface="Calibri" pitchFamily="34" charset="-122"/>
+                <a:cs typeface="Calibri" pitchFamily="34" charset="-120"/>
+              </a:rPr>
+              <a:t>Interpret VAF and zygosity in context; a ~50% VAF in a cancer gene may be germline — confirm with normal tissue.</a:t>
+            </a:r>
+            <a:endParaRPr lang="en-US" sz="1350" dirty="0"/>
+          </a:p>
+        </p:txBody>
+      </p:sp>
+      <p:sp>
+        <p:nvSpPr>
+          <p:cNvPr id="16" name="Shape 14"/>
+          <p:cNvSpPr/>
+          <p:nvPr/>
+        </p:nvSpPr>
+        <p:spPr>
+          <a:xfrm>
+            <a:off x="566928" y="4480560"/>
+            <a:ext cx="11057839" cy="841248"/>
+          </a:xfrm>
+          <a:prstGeom prst="roundRect">
+            <a:avLst>
+              <a:gd name="adj" fmla="val 7609"/>
+            </a:avLst>
+          </a:prstGeom>
+          <a:solidFill>
+            <a:srgbClr val="143651"/>
+          </a:solidFill>
+          <a:ln/>
+        </p:spPr>
+      </p:sp>
+      <p:sp>
+        <p:nvSpPr>
+          <p:cNvPr id="17" name="Shape 15"/>
+          <p:cNvSpPr/>
+          <p:nvPr/>
+        </p:nvSpPr>
+        <p:spPr>
+          <a:xfrm>
+            <a:off x="749808" y="4718304"/>
+            <a:ext cx="365760" cy="365760"/>
+          </a:xfrm>
+          <a:prstGeom prst="ellipse">
+            <a:avLst/>
+          </a:prstGeom>
+          <a:solidFill>
+            <a:srgbClr val="00838F"/>
+          </a:solidFill>
+          <a:ln/>
+          <a:effectLst>
+            <a:outerShdw sx="100000" sy="100000" kx="0" ky="0" algn="bl" rotWithShape="0" blurRad="88900" dist="25400" dir="5400000">
+              <a:srgbClr val="22303C">
+                <a:alpha val="12000"/>
+              </a:srgbClr>
+            </a:outerShdw>
+          </a:effectLst>
+        </p:spPr>
+      </p:sp>
+      <p:sp>
+        <p:nvSpPr>
+          <p:cNvPr id="18" name="Text 16"/>
+          <p:cNvSpPr/>
+          <p:nvPr/>
+        </p:nvSpPr>
+        <p:spPr>
+          <a:xfrm>
+            <a:off x="749808" y="4718304"/>
+            <a:ext cx="365760" cy="365760"/>
+          </a:xfrm>
+          <a:prstGeom prst="rect">
+            <a:avLst/>
+          </a:prstGeom>
+          <a:noFill/>
+          <a:ln/>
+        </p:spPr>
+        <p:txBody>
+          <a:bodyPr wrap="square" lIns="0" tIns="0" rIns="0" bIns="0" rtlCol="0" anchor="ctr"/>
+          <a:lstStyle/>
+          <a:p>
+            <a:pPr algn="ctr" indent="0" marL="0">
+              <a:buNone/>
+            </a:pPr>
+            <a:r>
+              <a:rPr lang="en-US" sz="1500" b="1" dirty="0">
+                <a:solidFill>
+                  <a:srgbClr val="FFFFFF"/>
+                </a:solidFill>
+                <a:latin typeface="Calibri" pitchFamily="34" charset="0"/>
+                <a:ea typeface="Calibri" pitchFamily="34" charset="-122"/>
+                <a:cs typeface="Calibri" pitchFamily="34" charset="-120"/>
+              </a:rPr>
+              <a:t>4</a:t>
+            </a:r>
+            <a:endParaRPr lang="en-US" sz="1500" dirty="0"/>
+          </a:p>
+        </p:txBody>
+      </p:sp>
+      <p:sp>
+        <p:nvSpPr>
+          <p:cNvPr id="19" name="Text 17"/>
+          <p:cNvSpPr/>
+          <p:nvPr/>
+        </p:nvSpPr>
+        <p:spPr>
+          <a:xfrm>
+            <a:off x="1280160" y="4480560"/>
+            <a:ext cx="10143439" cy="841248"/>
+          </a:xfrm>
+          <a:prstGeom prst="rect">
+            <a:avLst/>
+          </a:prstGeom>
+          <a:noFill/>
+          <a:ln/>
+        </p:spPr>
+        <p:txBody>
+          <a:bodyPr wrap="square" lIns="0" tIns="0" rIns="0" bIns="0" rtlCol="0" anchor="ctr"/>
+          <a:lstStyle/>
+          <a:p>
+            <a:pPr algn="l" indent="0" marL="0">
+              <a:buNone/>
+            </a:pPr>
+            <a:r>
+              <a:rPr lang="en-US" sz="1350" dirty="0">
+                <a:solidFill>
+                  <a:srgbClr val="E7EEF4"/>
+                </a:solidFill>
+                <a:latin typeface="Calibri" pitchFamily="34" charset="0"/>
+                <a:ea typeface="Calibri" pitchFamily="34" charset="-122"/>
+                <a:cs typeface="Calibri" pitchFamily="34" charset="-120"/>
+              </a:rPr>
+              <a:t>A VUS is not a positive result — do not drive management with it; reassess over time.</a:t>
+            </a:r>
+            <a:endParaRPr lang="en-US" sz="1350" dirty="0"/>
+          </a:p>
+        </p:txBody>
+      </p:sp>
+      <p:sp>
+        <p:nvSpPr>
+          <p:cNvPr id="20" name="Shape 18"/>
+          <p:cNvSpPr/>
+          <p:nvPr/>
+        </p:nvSpPr>
+        <p:spPr>
+          <a:xfrm>
+            <a:off x="566928" y="5468112"/>
+            <a:ext cx="11057839" cy="841248"/>
+          </a:xfrm>
+          <a:prstGeom prst="roundRect">
+            <a:avLst>
+              <a:gd name="adj" fmla="val 7609"/>
+            </a:avLst>
+          </a:prstGeom>
+          <a:solidFill>
+            <a:srgbClr val="143651"/>
+          </a:solidFill>
+          <a:ln/>
+        </p:spPr>
+      </p:sp>
+      <p:sp>
+        <p:nvSpPr>
+          <p:cNvPr id="21" name="Shape 19"/>
+          <p:cNvSpPr/>
+          <p:nvPr/>
+        </p:nvSpPr>
+        <p:spPr>
+          <a:xfrm>
+            <a:off x="749808" y="5705856"/>
+            <a:ext cx="365760" cy="365760"/>
+          </a:xfrm>
+          <a:prstGeom prst="ellipse">
+            <a:avLst/>
+          </a:prstGeom>
+          <a:solidFill>
+            <a:srgbClr val="00838F"/>
+          </a:solidFill>
+          <a:ln/>
+          <a:effectLst>
+            <a:outerShdw sx="100000" sy="100000" kx="0" ky="0" algn="bl" rotWithShape="0" blurRad="88900" dist="25400" dir="5400000">
+              <a:srgbClr val="22303C">
+                <a:alpha val="12000"/>
+              </a:srgbClr>
+            </a:outerShdw>
+          </a:effectLst>
+        </p:spPr>
+      </p:sp>
+      <p:sp>
+        <p:nvSpPr>
+          <p:cNvPr id="22" name="Text 20"/>
+          <p:cNvSpPr/>
+          <p:nvPr/>
+        </p:nvSpPr>
+        <p:spPr>
+          <a:xfrm>
+            <a:off x="749808" y="5705856"/>
+            <a:ext cx="365760" cy="365760"/>
+          </a:xfrm>
+          <a:prstGeom prst="rect">
+            <a:avLst/>
+          </a:prstGeom>
+          <a:noFill/>
+          <a:ln/>
+        </p:spPr>
+        <p:txBody>
+          <a:bodyPr wrap="square" lIns="0" tIns="0" rIns="0" bIns="0" rtlCol="0" anchor="ctr"/>
+          <a:lstStyle/>
+          <a:p>
+            <a:pPr algn="ctr" indent="0" marL="0">
+              <a:buNone/>
+            </a:pPr>
+            <a:r>
+              <a:rPr lang="en-US" sz="1500" b="1" dirty="0">
+                <a:solidFill>
+                  <a:srgbClr val="FFFFFF"/>
+                </a:solidFill>
+                <a:latin typeface="Calibri" pitchFamily="34" charset="0"/>
+                <a:ea typeface="Calibri" pitchFamily="34" charset="-122"/>
+                <a:cs typeface="Calibri" pitchFamily="34" charset="-120"/>
+              </a:rPr>
+              <a:t>5</a:t>
+            </a:r>
+            <a:endParaRPr lang="en-US" sz="1500" dirty="0"/>
+          </a:p>
+        </p:txBody>
+      </p:sp>
+      <p:sp>
+        <p:nvSpPr>
+          <p:cNvPr id="23" name="Text 21"/>
+          <p:cNvSpPr/>
+          <p:nvPr/>
+        </p:nvSpPr>
+        <p:spPr>
+          <a:xfrm>
+            <a:off x="1280160" y="5468112"/>
+            <a:ext cx="10143439" cy="841248"/>
+          </a:xfrm>
+          <a:prstGeom prst="rect">
+            <a:avLst/>
+          </a:prstGeom>
+          <a:noFill/>
+          <a:ln/>
+        </p:spPr>
+        <p:txBody>
+          <a:bodyPr wrap="square" lIns="0" tIns="0" rIns="0" bIns="0" rtlCol="0" anchor="ctr"/>
+          <a:lstStyle/>
+          <a:p>
+            <a:pPr algn="l" indent="0" marL="0">
+              <a:buNone/>
+            </a:pPr>
+            <a:r>
+              <a:rPr lang="en-US" sz="1350" dirty="0">
+                <a:solidFill>
+                  <a:srgbClr val="E7EEF4"/>
+                </a:solidFill>
+                <a:latin typeface="Calibri" pitchFamily="34" charset="0"/>
+                <a:ea typeface="Calibri" pitchFamily="34" charset="-122"/>
+                <a:cs typeface="Calibri" pitchFamily="34" charset="-120"/>
+              </a:rPr>
+              <a:t>Reports should state the variant (HGVS), classification, evidence, recommendations, and limitations clearly.</a:t>
+            </a:r>
+            <a:endParaRPr lang="en-US" sz="1350" dirty="0"/>
+          </a:p>
+        </p:txBody>
+      </p:sp>
+      <p:sp>
+        <p:nvSpPr>
+          <p:cNvPr id="24" name="Text 22"/>
+          <p:cNvSpPr/>
+          <p:nvPr/>
+        </p:nvSpPr>
+        <p:spPr>
+          <a:xfrm>
+            <a:off x="566928" y="6473952"/>
+            <a:ext cx="8229600" cy="274320"/>
+          </a:xfrm>
+          <a:prstGeom prst="rect">
+            <a:avLst/>
+          </a:prstGeom>
+          <a:noFill/>
+          <a:ln/>
+        </p:spPr>
+        <p:txBody>
+          <a:bodyPr wrap="square" lIns="0" tIns="0" rIns="0" bIns="0" rtlCol="0" anchor="ctr"/>
+          <a:lstStyle/>
+          <a:p>
+            <a:pPr indent="0" marL="0">
+              <a:buNone/>
+            </a:pPr>
+            <a:r>
+              <a:rPr lang="en-US" sz="850" dirty="0">
+                <a:solidFill>
+                  <a:srgbClr val="5E7488"/>
+                </a:solidFill>
+                <a:latin typeface="Calibri" pitchFamily="34" charset="0"/>
+                <a:ea typeface="Calibri" pitchFamily="34" charset="-122"/>
+                <a:cs typeface="Calibri" pitchFamily="34" charset="-120"/>
+              </a:rPr>
+              <a:t>Makassed General Hospital  ·  Department of Laboratory Medicine</a:t>
+            </a:r>
+            <a:endParaRPr lang="en-US" sz="850" dirty="0"/>
+          </a:p>
+        </p:txBody>
+      </p:sp>
+      <p:sp>
+        <p:nvSpPr>
+          <p:cNvPr id="25" name="Text 23"/>
+          <p:cNvSpPr/>
+          <p:nvPr/>
+        </p:nvSpPr>
+        <p:spPr>
+          <a:xfrm>
+            <a:off x="11002975" y="6473952"/>
+            <a:ext cx="640080" cy="274320"/>
+          </a:xfrm>
+          <a:prstGeom prst="rect">
+            <a:avLst/>
+          </a:prstGeom>
+          <a:noFill/>
+          <a:ln/>
+        </p:spPr>
+        <p:txBody>
+          <a:bodyPr wrap="square" lIns="0" tIns="0" rIns="0" bIns="0" rtlCol="0" anchor="ctr"/>
+          <a:lstStyle/>
+          <a:p>
+            <a:pPr algn="r" indent="0" marL="0">
+              <a:buNone/>
+            </a:pPr>
+            <a:r>
+              <a:rPr lang="en-US" sz="850" b="1" dirty="0">
+                <a:solidFill>
+                  <a:srgbClr val="00838F"/>
+                </a:solidFill>
+                <a:latin typeface="Calibri" pitchFamily="34" charset="0"/>
+                <a:ea typeface="Calibri" pitchFamily="34" charset="-122"/>
+                <a:cs typeface="Calibri" pitchFamily="34" charset="-120"/>
+              </a:rPr>
+              <a:t>21</a:t>
+            </a:r>
+            <a:endParaRPr lang="en-US" sz="850" dirty="0"/>
+          </a:p>
+        </p:txBody>
+      </p:sp>
+    </p:spTree>
+  </p:cSld>
+  <p:clrMapOvr>
+    <a:masterClrMapping/>
+  </p:clrMapOvr>
+</p:sld>
+</file>
+
+<file path=ppt/slides/slide25.xml><?xml version="1.0" encoding="utf-8"?>
+<p:sld xmlns:a="http://schemas.openxmlformats.org/drawingml/2006/main" xmlns:r="http://schemas.openxmlformats.org/officeDocument/2006/relationships" xmlns:p="http://schemas.openxmlformats.org/presentationml/2006/main">
+  <p:cSld name="Slide 25">
+    <p:bg>
+      <p:bgPr>
+        <a:solidFill>
+          <a:srgbClr val="FFFFFF"/>
+        </a:solidFill>
+      </p:bgPr>
+    </p:bg>
+    <p:spTree>
+      <p:nvGrpSpPr>
+        <p:cNvPr id="1" name=""/>
+        <p:cNvGrpSpPr/>
+        <p:nvPr/>
+      </p:nvGrpSpPr>
+      <p:grpSpPr>
+        <a:xfrm>
+          <a:off x="0" y="0"/>
+          <a:ext cx="0" cy="0"/>
+          <a:chOff x="0" y="0"/>
+          <a:chExt cx="0" cy="0"/>
+        </a:xfrm>
+      </p:grpSpPr>
+      <p:sp>
+        <p:nvSpPr>
+          <p:cNvPr id="2" name="Text 0"/>
+          <p:cNvSpPr/>
+          <p:nvPr/>
+        </p:nvSpPr>
+        <p:spPr>
+          <a:xfrm>
+            <a:off x="566928" y="329184"/>
+            <a:ext cx="10515600" cy="310896"/>
+          </a:xfrm>
+          <a:prstGeom prst="rect">
+            <a:avLst/>
+          </a:prstGeom>
+          <a:noFill/>
+          <a:ln/>
+        </p:spPr>
+        <p:txBody>
+          <a:bodyPr wrap="square" lIns="0" tIns="0" rIns="0" bIns="0" rtlCol="0" anchor="ctr"/>
+          <a:lstStyle/>
+          <a:p>
+            <a:pPr algn="l" indent="0" marL="0">
+              <a:buNone/>
+            </a:pPr>
+            <a:r>
+              <a:rPr lang="en-US" sz="1100" b="1" spc="150" kern="0" dirty="0">
+                <a:solidFill>
+                  <a:srgbClr val="00838F"/>
+                </a:solidFill>
+                <a:latin typeface="Calibri" pitchFamily="34" charset="0"/>
+                <a:ea typeface="Calibri" pitchFamily="34" charset="-122"/>
+                <a:cs typeface="Calibri" pitchFamily="34" charset="-120"/>
+              </a:rPr>
               <a:t>MOLECULAR &amp; CYTOGENETICS   ·   REFERENCES &amp; FURTHER READING</a:t>
             </a:r>
             <a:endParaRPr lang="en-US" sz="1100" dirty="0"/>
@@ -9203,7 +12450,7 @@
                 <a:ea typeface="Calibri" pitchFamily="34" charset="-122"/>
                 <a:cs typeface="Calibri" pitchFamily="34" charset="-120"/>
               </a:rPr>
-              <a:t>1.   Richards S, et al. ACMG/AMP Standards and guidelines for interpretation of sequence variants. Genet Med. 2015.</a:t>
+              <a:t>1.   Richards S, et al. ACMG/AMP standards for sequence variant interpretation. Genet Med. 2015.</a:t>
             </a:r>
             <a:endParaRPr lang="en-US" sz="1150" dirty="0"/>
           </a:p>
@@ -9223,7 +12470,7 @@
                 <a:ea typeface="Calibri" pitchFamily="34" charset="-122"/>
                 <a:cs typeface="Calibri" pitchFamily="34" charset="-120"/>
               </a:rPr>
-              <a:t>2.   Li MM, et al. AMP/ASCO/CAP Standards for interpretation and reporting of somatic variants. J Mol Diagn. 2017.</a:t>
+              <a:t>2.   Li MM, et al. AMP/ASCO/CAP somatic variant interpretation. J Mol Diagn. 2017.</a:t>
             </a:r>
             <a:endParaRPr lang="en-US" sz="1150" dirty="0"/>
           </a:p>
@@ -9243,7 +12490,7 @@
                 <a:ea typeface="Calibri" pitchFamily="34" charset="-122"/>
                 <a:cs typeface="Calibri" pitchFamily="34" charset="-120"/>
               </a:rPr>
-              <a:t>3.   den Dunnen JT, et al. HGVS recommendations for variant nomenclature. Hum Mutat. 2016.</a:t>
+              <a:t>3.   Leonard DGB. Molecular Pathology in Clinical Practice, 2nd ed.</a:t>
             </a:r>
             <a:endParaRPr lang="en-US" sz="1150" dirty="0"/>
           </a:p>
@@ -9263,7 +12510,7 @@
                 <a:ea typeface="Calibri" pitchFamily="34" charset="-122"/>
                 <a:cs typeface="Calibri" pitchFamily="34" charset="-120"/>
               </a:rPr>
-              <a:t>4.   Miller DT, et al. ACMG secondary findings recommendations (current version).</a:t>
+              <a:t>4.   CAP/AMP reporting guidance.</a:t>
             </a:r>
             <a:endParaRPr lang="en-US" sz="1150" dirty="0"/>
           </a:p>
@@ -9369,7 +12616,7 @@
                 <a:ea typeface="Calibri" pitchFamily="34" charset="-122"/>
                 <a:cs typeface="Calibri" pitchFamily="34" charset="-120"/>
               </a:rPr>
-              <a:t>18</a:t>
+              <a:t>22</a:t>
             </a:r>
             <a:endParaRPr lang="en-US" sz="850" dirty="0"/>
           </a:p>
@@ -9613,7 +12860,7 @@
                 <a:ea typeface="Calibri" pitchFamily="34" charset="-122"/>
                 <a:cs typeface="Calibri" pitchFamily="34" charset="-120"/>
               </a:rPr>
-              <a:t>Apply variant tiering and pathogenicity frameworks.</a:t>
+              <a:t>Apply the ACMG/AMP germline classification tiers.</a:t>
             </a:r>
             <a:endParaRPr lang="en-US" sz="1350" dirty="0"/>
           </a:p>
@@ -9747,7 +12994,7 @@
                 <a:ea typeface="Calibri" pitchFamily="34" charset="-122"/>
                 <a:cs typeface="Calibri" pitchFamily="34" charset="-120"/>
               </a:rPr>
-              <a:t>Use standard HGVS nomenclature.</a:t>
+              <a:t>Use the somatic tier system for oncology variants.</a:t>
             </a:r>
             <a:endParaRPr lang="en-US" sz="1350" dirty="0"/>
           </a:p>
@@ -9881,7 +13128,7 @@
                 <a:ea typeface="Calibri" pitchFamily="34" charset="-122"/>
                 <a:cs typeface="Calibri" pitchFamily="34" charset="-120"/>
               </a:rPr>
-              <a:t>Distinguish somatic from germline interpretation.</a:t>
+              <a:t>Weigh population, computational, functional, and segregation evidence.</a:t>
             </a:r>
             <a:endParaRPr lang="en-US" sz="1350" dirty="0"/>
           </a:p>
@@ -10015,7 +13262,7 @@
                 <a:ea typeface="Calibri" pitchFamily="34" charset="-122"/>
                 <a:cs typeface="Calibri" pitchFamily="34" charset="-120"/>
               </a:rPr>
-              <a:t>Write clinically actionable reports.</a:t>
+              <a:t>Interpret a variant-allele fraction in context.</a:t>
             </a:r>
             <a:endParaRPr lang="en-US" sz="1350" dirty="0"/>
           </a:p>
@@ -10149,7 +13396,7 @@
                 <a:ea typeface="Calibri" pitchFamily="34" charset="-122"/>
                 <a:cs typeface="Calibri" pitchFamily="34" charset="-120"/>
               </a:rPr>
-              <a:t>Handle variants of uncertain significance and reanalysis.</a:t>
+              <a:t>Communicate uncertainty (VUS) appropriately.</a:t>
             </a:r>
             <a:endParaRPr lang="en-US" sz="1350" dirty="0"/>
           </a:p>
@@ -10283,7 +13530,7 @@
                 <a:ea typeface="Calibri" pitchFamily="34" charset="-122"/>
                 <a:cs typeface="Calibri" pitchFamily="34" charset="-120"/>
               </a:rPr>
-              <a:t>Recognize incidental/secondary findings.</a:t>
+              <a:t>Construct a clear, actionable molecular report.</a:t>
             </a:r>
             <a:endParaRPr lang="en-US" sz="1350" dirty="0"/>
           </a:p>
@@ -10647,7 +13894,7 @@
                 <a:ea typeface="Calibri" pitchFamily="34" charset="-122"/>
                 <a:cs typeface="Calibri" pitchFamily="34" charset="-120"/>
               </a:rPr>
-              <a:t>   —  germline ACMG, somatic tiers</a:t>
+              <a:t>   —  germline and somatic</a:t>
             </a:r>
             <a:endParaRPr lang="en-US" sz="1400" dirty="0"/>
           </a:p>
@@ -10774,7 +14021,7 @@
                 <a:ea typeface="Calibri" pitchFamily="34" charset="-122"/>
                 <a:cs typeface="Calibri" pitchFamily="34" charset="-120"/>
               </a:rPr>
-              <a:t>Nomenclature</a:t>
+              <a:t>Lines of evidence</a:t>
             </a:r>
             <a:pPr algn="l" indent="0" marL="0">
               <a:buNone/>
@@ -10788,7 +14035,7 @@
                 <a:ea typeface="Calibri" pitchFamily="34" charset="-122"/>
                 <a:cs typeface="Calibri" pitchFamily="34" charset="-120"/>
               </a:rPr>
-              <a:t>   —  HGVS and reference transcripts</a:t>
+              <a:t>   —  population, in-silico, functional</a:t>
             </a:r>
             <a:endParaRPr lang="en-US" sz="1400" dirty="0"/>
           </a:p>
@@ -10922,7 +14169,7 @@
                 <a:ea typeface="Calibri" pitchFamily="34" charset="-122"/>
                 <a:cs typeface="Calibri" pitchFamily="34" charset="-120"/>
               </a:rPr>
-              <a:t>Germline vs somatic</a:t>
+              <a:t>VAF &amp; zygosity</a:t>
             </a:r>
             <a:pPr algn="l" indent="0" marL="0">
               <a:buNone/>
@@ -10936,7 +14183,7 @@
                 <a:ea typeface="Calibri" pitchFamily="34" charset="-122"/>
                 <a:cs typeface="Calibri" pitchFamily="34" charset="-120"/>
               </a:rPr>
-              <a:t>   —  different goals</a:t>
+              <a:t>   —  reading the numbers</a:t>
             </a:r>
             <a:endParaRPr lang="en-US" sz="1400" dirty="0"/>
           </a:p>
@@ -11063,7 +14310,7 @@
                 <a:ea typeface="Calibri" pitchFamily="34" charset="-122"/>
                 <a:cs typeface="Calibri" pitchFamily="34" charset="-120"/>
               </a:rPr>
-              <a:t>Reporting</a:t>
+              <a:t>The report</a:t>
             </a:r>
             <a:pPr algn="l" indent="0" marL="0">
               <a:buNone/>
@@ -11077,7 +14324,7 @@
                 <a:ea typeface="Calibri" pitchFamily="34" charset="-122"/>
                 <a:cs typeface="Calibri" pitchFamily="34" charset="-120"/>
               </a:rPr>
-              <a:t>   —  actionability, VUS, incidental findings</a:t>
+              <a:t>   —  clarity and action</a:t>
             </a:r>
             <a:endParaRPr lang="en-US" sz="1400" dirty="0"/>
           </a:p>
@@ -11211,7 +14458,7 @@
                 <a:ea typeface="Calibri" pitchFamily="34" charset="-122"/>
                 <a:cs typeface="Calibri" pitchFamily="34" charset="-120"/>
               </a:rPr>
-              <a:t>Cases &amp; board</a:t>
+              <a:t>Cases &amp; board review</a:t>
             </a:r>
             <a:endParaRPr lang="en-US" sz="1400" dirty="0"/>
           </a:p>
@@ -11510,7 +14757,7 @@
                 <a:ea typeface="Calibri" pitchFamily="34" charset="-122"/>
                 <a:cs typeface="Calibri" pitchFamily="34" charset="-120"/>
               </a:rPr>
-              <a:t>Classification &amp; Nomenclature</a:t>
+              <a:t>Frameworks &amp; Evidence</a:t>
             </a:r>
             <a:endParaRPr lang="en-US" sz="3800" dirty="0"/>
           </a:p>
@@ -11620,7 +14867,7 @@
                 <a:ea typeface="Calibri" pitchFamily="34" charset="-122"/>
                 <a:cs typeface="Calibri" pitchFamily="34" charset="-120"/>
               </a:rPr>
-              <a:t>Two Frameworks: Germline vs Somatic</a:t>
+              <a:t>Weighing Evidence into a Classification</a:t>
             </a:r>
             <a:endParaRPr lang="en-US" sz="3000" dirty="0"/>
           </a:p>
@@ -11634,12 +14881,12 @@
         </p:nvSpPr>
         <p:spPr>
           <a:xfrm>
-            <a:off x="1066648" y="1481328"/>
-            <a:ext cx="10058400" cy="4160520"/>
+            <a:off x="975208" y="1481328"/>
+            <a:ext cx="10241280" cy="4261104"/>
           </a:xfrm>
           <a:prstGeom prst="roundRect">
             <a:avLst>
-              <a:gd name="adj" fmla="val 1978"/>
+              <a:gd name="adj" fmla="val 1931"/>
             </a:avLst>
           </a:prstGeom>
           <a:solidFill>
@@ -11676,8 +14923,8 @@
         </p:blipFill>
         <p:spPr>
           <a:xfrm>
-            <a:off x="1194664" y="1609344"/>
-            <a:ext cx="9802368" cy="3904488"/>
+            <a:off x="1103224" y="1609344"/>
+            <a:ext cx="9985248" cy="4005072"/>
           </a:xfrm>
           <a:prstGeom prst="rect">
             <a:avLst/>
@@ -11692,7 +14939,7 @@
         </p:nvSpPr>
         <p:spPr>
           <a:xfrm>
-            <a:off x="566928" y="5715000"/>
+            <a:off x="566928" y="5815584"/>
             <a:ext cx="11057839" cy="365760"/>
           </a:xfrm>
           <a:prstGeom prst="rect">
@@ -11717,7 +14964,7 @@
                 <a:ea typeface="Calibri" pitchFamily="34" charset="-122"/>
                 <a:cs typeface="Calibri" pitchFamily="34" charset="-120"/>
               </a:rPr>
-              <a:t>Original schematic. Germline ACMG/AMP classifies pathogenicity (5 classes); somatic AMP/ASCO/CAP tiers reflect clinical actionability.</a:t>
+              <a:t>Original schematic. Multiple evidence lines combine into a five-tier germline classification (and a parallel somatic tier system).</a:t>
             </a:r>
             <a:endParaRPr lang="en-US" sz="1150" dirty="0"/>
           </a:p>
@@ -11933,7 +15180,7 @@
                 <a:ea typeface="Calibri" pitchFamily="34" charset="-122"/>
                 <a:cs typeface="Calibri" pitchFamily="34" charset="-120"/>
               </a:rPr>
-              <a:t>Germline and Somatic Classification</a:t>
+              <a:t>Germline vs Somatic</a:t>
             </a:r>
             <a:endParaRPr lang="en-US" sz="3000" dirty="0"/>
           </a:p>
@@ -12044,7 +15291,7 @@
                 <a:ea typeface="Calibri" pitchFamily="34" charset="-122"/>
                 <a:cs typeface="Calibri" pitchFamily="34" charset="-120"/>
               </a:rPr>
-              <a:t>Five classes: pathogenic, likely pathogenic, VUS, likely benign, benign.</a:t>
+              <a:t>Five tiers: pathogenic, likely pathogenic, VUS, likely benign, benign.</a:t>
             </a:r>
             <a:endParaRPr lang="en-US" sz="1250" dirty="0"/>
           </a:p>
@@ -12065,7 +15312,7 @@
                 <a:ea typeface="Calibri" pitchFamily="34" charset="-122"/>
                 <a:cs typeface="Calibri" pitchFamily="34" charset="-120"/>
               </a:rPr>
-              <a:t>Evidence codes (population frequency, functional data, segregation, computational) are weighted to a class.</a:t>
+              <a:t>Criteria are weighted (very strong → supporting) for and against pathogenicity.</a:t>
             </a:r>
             <a:endParaRPr lang="en-US" sz="1250" dirty="0"/>
           </a:p>
@@ -12086,7 +15333,7 @@
                 <a:ea typeface="Calibri" pitchFamily="34" charset="-122"/>
                 <a:cs typeface="Calibri" pitchFamily="34" charset="-120"/>
               </a:rPr>
-              <a:t>Goal: is this variant disease-causing in this individual/family?</a:t>
+              <a:t>Implications for the patient and family.</a:t>
             </a:r>
             <a:endParaRPr lang="en-US" sz="1250" dirty="0"/>
           </a:p>
@@ -12107,7 +15354,7 @@
                 <a:ea typeface="Calibri" pitchFamily="34" charset="-122"/>
                 <a:cs typeface="Calibri" pitchFamily="34" charset="-120"/>
               </a:rPr>
-              <a:t>Reclassification occurs as evidence accrues.</a:t>
+              <a:t>Requires consent and often counseling.</a:t>
             </a:r>
             <a:endParaRPr lang="en-US" sz="1250" dirty="0"/>
           </a:p>
@@ -12130,7 +15377,7 @@
             </a:avLst>
           </a:prstGeom>
           <a:solidFill>
-            <a:srgbClr val="E0F2F4"/>
+            <a:srgbClr val="DDF0EF"/>
           </a:solidFill>
           <a:ln/>
           <a:effectLst>
@@ -12218,7 +15465,7 @@
                 <a:ea typeface="Calibri" pitchFamily="34" charset="-122"/>
                 <a:cs typeface="Calibri" pitchFamily="34" charset="-120"/>
               </a:rPr>
-              <a:t>Four tiers by clinical significance: I (strong), II (potential), III (unknown), IV (benign).</a:t>
+              <a:t>Tiers by clinical actionability: strong, potential, uncertain, benign/likely benign.</a:t>
             </a:r>
             <a:endParaRPr lang="en-US" sz="1250" dirty="0"/>
           </a:p>
@@ -12239,7 +15486,7 @@
                 <a:ea typeface="Calibri" pitchFamily="34" charset="-122"/>
                 <a:cs typeface="Calibri" pitchFamily="34" charset="-120"/>
               </a:rPr>
-              <a:t>Goal: is this variant clinically ACTIONABLE (therapy, prognosis, diagnosis)?</a:t>
+              <a:t>Focus on therapy, prognosis, and diagnosis.</a:t>
             </a:r>
             <a:endParaRPr lang="en-US" sz="1250" dirty="0"/>
           </a:p>
@@ -12260,7 +15507,7 @@
                 <a:ea typeface="Calibri" pitchFamily="34" charset="-122"/>
                 <a:cs typeface="Calibri" pitchFamily="34" charset="-120"/>
               </a:rPr>
-              <a:t>The same gene variant can be tiered differently by tumor type and context.</a:t>
+              <a:t>Context is tumor type-specific.</a:t>
             </a:r>
             <a:endParaRPr lang="en-US" sz="1250" dirty="0"/>
           </a:p>
@@ -12281,7 +15528,7 @@
                 <a:ea typeface="Calibri" pitchFamily="34" charset="-122"/>
                 <a:cs typeface="Calibri" pitchFamily="34" charset="-120"/>
               </a:rPr>
-              <a:t>Actionability is dynamic as therapies and evidence change.</a:t>
+              <a:t>Distinct from germline interpretation.</a:t>
             </a:r>
             <a:endParaRPr lang="en-US" sz="1250" dirty="0"/>
           </a:p>
@@ -12458,7 +15705,7 @@
                 <a:ea typeface="Calibri" pitchFamily="34" charset="-122"/>
                 <a:cs typeface="Calibri" pitchFamily="34" charset="-120"/>
               </a:rPr>
-              <a:t>MOLECULAR &amp; CYTOGENETICS   ·   NOMENCLATURE</a:t>
+              <a:t>MOLECULAR &amp; CYTOGENETICS   ·   EVIDENCE</a:t>
             </a:r>
             <a:endParaRPr lang="en-US" sz="1100" dirty="0"/>
           </a:p>
@@ -12497,7 +15744,7 @@
                 <a:ea typeface="Calibri" pitchFamily="34" charset="-122"/>
                 <a:cs typeface="Calibri" pitchFamily="34" charset="-120"/>
               </a:rPr>
-              <a:t>HGVS and Reference Transcripts</a:t>
+              <a:t>Lines of Evidence</a:t>
             </a:r>
             <a:endParaRPr lang="en-US" sz="3000" dirty="0"/>
           </a:p>
@@ -12565,7 +15812,7 @@
                 <a:ea typeface="Calibri" pitchFamily="34" charset="-122"/>
                 <a:cs typeface="Calibri" pitchFamily="34" charset="-120"/>
               </a:rPr>
-              <a:t>WHY NOMENCLATURE MATTERS</a:t>
+              <a:t>DATA SOURCES</a:t>
             </a:r>
             <a:endParaRPr lang="en-US" sz="1200" dirty="0"/>
           </a:p>
@@ -12608,7 +15855,7 @@
                 <a:ea typeface="Calibri" pitchFamily="34" charset="-122"/>
                 <a:cs typeface="Calibri" pitchFamily="34" charset="-120"/>
               </a:rPr>
-              <a:t>HGVS describes variants precisely at the DNA (c.), protein (p.), and genomic (g.) levels.</a:t>
+              <a:t>Population frequency (a common variant is unlikely pathogenic).</a:t>
             </a:r>
             <a:endParaRPr lang="en-US" sz="1250" dirty="0"/>
           </a:p>
@@ -12629,7 +15876,7 @@
                 <a:ea typeface="Calibri" pitchFamily="34" charset="-122"/>
                 <a:cs typeface="Calibri" pitchFamily="34" charset="-120"/>
               </a:rPr>
-              <a:t>Always specify the reference transcript and genome build.</a:t>
+              <a:t>Computational/in-silico predictions (supporting evidence only).</a:t>
             </a:r>
             <a:endParaRPr lang="en-US" sz="1250" dirty="0"/>
           </a:p>
@@ -12650,7 +15897,7 @@
                 <a:ea typeface="Calibri" pitchFamily="34" charset="-122"/>
                 <a:cs typeface="Calibri" pitchFamily="34" charset="-120"/>
               </a:rPr>
-              <a:t>Ambiguous nomenclature can cause clinically dangerous misinterpretation.</a:t>
+              <a:t>Functional studies (well-established assays carry weight).</a:t>
             </a:r>
             <a:endParaRPr lang="en-US" sz="1250" dirty="0"/>
           </a:p>
@@ -12671,7 +15918,7 @@
                 <a:ea typeface="Calibri" pitchFamily="34" charset="-122"/>
                 <a:cs typeface="Calibri" pitchFamily="34" charset="-120"/>
               </a:rPr>
-              <a:t>Examples: c.1521_1523delCTT (p.Phe508del) for the canonical CFTR variant.</a:t>
+              <a:t>Segregation and de novo occurrence in families.</a:t>
             </a:r>
             <a:endParaRPr lang="en-US" sz="1250" dirty="0"/>
           </a:p>
@@ -12694,7 +15941,7 @@
             </a:avLst>
           </a:prstGeom>
           <a:solidFill>
-            <a:srgbClr val="E0F2F4"/>
+            <a:srgbClr val="DDF0EF"/>
           </a:solidFill>
           <a:ln/>
           <a:effectLst>
@@ -12739,7 +15986,7 @@
                 <a:ea typeface="Calibri" pitchFamily="34" charset="-122"/>
                 <a:cs typeface="Calibri" pitchFamily="34" charset="-120"/>
               </a:rPr>
-              <a:t>PRACTICAL REPORTING</a:t>
+              <a:t>COMBINING EVIDENCE</a:t>
             </a:r>
             <a:endParaRPr lang="en-US" sz="1200" dirty="0"/>
           </a:p>
@@ -12782,7 +16029,7 @@
                 <a:ea typeface="Calibri" pitchFamily="34" charset="-122"/>
                 <a:cs typeface="Calibri" pitchFamily="34" charset="-120"/>
               </a:rPr>
-              <a:t>Report gene, transcript, c. and p. notation, zygosity, and classification.</a:t>
+              <a:t>Criteria are combined per rules to reach a tier — no single line is usually sufficient.</a:t>
             </a:r>
             <a:endParaRPr lang="en-US" sz="1250" dirty="0"/>
           </a:p>
@@ -12803,7 +16050,7 @@
                 <a:ea typeface="Calibri" pitchFamily="34" charset="-122"/>
                 <a:cs typeface="Calibri" pitchFamily="34" charset="-120"/>
               </a:rPr>
-              <a:t>State the evidence summary and classification rationale.</a:t>
+              <a:t>Conflicting evidence may yield a VUS.</a:t>
             </a:r>
             <a:endParaRPr lang="en-US" sz="1250" dirty="0"/>
           </a:p>
@@ -12824,7 +16071,7 @@
                 <a:ea typeface="Calibri" pitchFamily="34" charset="-122"/>
                 <a:cs typeface="Calibri" pitchFamily="34" charset="-120"/>
               </a:rPr>
-              <a:t>Make the clinical recommendation explicit and bounded.</a:t>
+              <a:t>Use curated databases and disease-specific knowledge.</a:t>
             </a:r>
             <a:endParaRPr lang="en-US" sz="1250" dirty="0"/>
           </a:p>
@@ -12845,7 +16092,7 @@
                 <a:ea typeface="Calibri" pitchFamily="34" charset="-122"/>
                 <a:cs typeface="Calibri" pitchFamily="34" charset="-120"/>
               </a:rPr>
-              <a:t>Use unambiguous, standardized terms throughout.</a:t>
+              <a:t>Reassess as new evidence emerges.</a:t>
             </a:r>
             <a:endParaRPr lang="en-US" sz="1250" dirty="0"/>
           </a:p>
@@ -13144,7 +16391,7 @@
                 <a:ea typeface="Calibri" pitchFamily="34" charset="-122"/>
                 <a:cs typeface="Calibri" pitchFamily="34" charset="-120"/>
               </a:rPr>
-              <a:t>Reporting, VUS &amp; Incidental Findings</a:t>
+              <a:t>Reading Numbers &amp; Reporting</a:t>
             </a:r>
             <a:endParaRPr lang="en-US" sz="3800" dirty="0"/>
           </a:p>

--- a/decks/Molecular_02_Variant-Interpretation-and-Reporting.pptx
+++ b/decks/Molecular_02_Variant-Interpretation-and-Reporting.pptx
@@ -25,9 +25,13 @@
     <p:sldId id="273" r:id="rId19"/>
     <p:sldId id="274" r:id="rId20"/>
     <p:sldId id="275" r:id="rId21"/>
+    <p:sldId id="284" r:id="rId35"/>
     <p:sldId id="276" r:id="rId22"/>
+    <p:sldId id="283" r:id="rId34"/>
     <p:sldId id="277" r:id="rId23"/>
+    <p:sldId id="282" r:id="rId33"/>
     <p:sldId id="278" r:id="rId24"/>
+    <p:sldId id="281" r:id="rId32"/>
     <p:sldId id="279" r:id="rId25"/>
     <p:sldId id="280" r:id="rId26"/>
   </p:sldIdLst>
@@ -3032,6 +3036,10 @@
           </a:solidFill>
           <a:ln/>
         </p:spPr>
+        <p:txBody>
+          <a:bodyPr/>
+          <a:p/>
+        </p:txBody>
       </p:sp>
       <p:sp>
         <p:nvSpPr>
@@ -3054,6 +3062,10 @@
           </a:solidFill>
           <a:ln/>
         </p:spPr>
+        <p:txBody>
+          <a:bodyPr/>
+          <a:p/>
+        </p:txBody>
       </p:sp>
       <p:sp>
         <p:nvSpPr>
@@ -3076,6 +3088,10 @@
           </a:solidFill>
           <a:ln/>
         </p:spPr>
+        <p:txBody>
+          <a:bodyPr/>
+          <a:p/>
+        </p:txBody>
       </p:sp>
       <p:sp>
         <p:nvSpPr>
@@ -3098,6 +3114,10 @@
           </a:solidFill>
           <a:ln/>
         </p:spPr>
+        <p:txBody>
+          <a:bodyPr/>
+          <a:p/>
+        </p:txBody>
       </p:sp>
       <p:sp>
         <p:nvSpPr>
@@ -3514,6 +3534,10 @@
             </a:outerShdw>
           </a:effectLst>
         </p:spPr>
+        <p:txBody>
+          <a:bodyPr/>
+          <a:p/>
+        </p:txBody>
       </p:sp>
       <p:sp>
         <p:nvSpPr>
@@ -3688,6 +3712,10 @@
             </a:outerShdw>
           </a:effectLst>
         </p:spPr>
+        <p:txBody>
+          <a:bodyPr/>
+          <a:p/>
+        </p:txBody>
       </p:sp>
       <p:sp>
         <p:nvSpPr>
@@ -4078,6 +4106,10 @@
             </a:outerShdw>
           </a:effectLst>
         </p:spPr>
+        <p:txBody>
+          <a:bodyPr/>
+          <a:p/>
+        </p:txBody>
       </p:sp>
       <p:sp>
         <p:nvSpPr>
@@ -4252,6 +4284,10 @@
             </a:outerShdw>
           </a:effectLst>
         </p:spPr>
+        <p:txBody>
+          <a:bodyPr/>
+          <a:p/>
+        </p:txBody>
       </p:sp>
       <p:sp>
         <p:nvSpPr>
@@ -6079,6 +6115,10 @@
           </a:solidFill>
           <a:ln/>
         </p:spPr>
+        <p:txBody>
+          <a:bodyPr/>
+          <a:p/>
+        </p:txBody>
       </p:sp>
       <p:sp>
         <p:nvSpPr>
@@ -6101,6 +6141,10 @@
           </a:solidFill>
           <a:ln/>
         </p:spPr>
+        <p:txBody>
+          <a:bodyPr/>
+          <a:p/>
+        </p:txBody>
       </p:sp>
       <p:sp>
         <p:nvSpPr>
@@ -6357,6 +6401,10 @@
             </a:outerShdw>
           </a:effectLst>
         </p:spPr>
+        <p:txBody>
+          <a:bodyPr/>
+          <a:p/>
+        </p:txBody>
       </p:sp>
       <p:sp>
         <p:nvSpPr>
@@ -6467,6 +6515,10 @@
             </a:outerShdw>
           </a:effectLst>
         </p:spPr>
+        <p:txBody>
+          <a:bodyPr/>
+          <a:p/>
+        </p:txBody>
       </p:sp>
       <p:sp>
         <p:nvSpPr>
@@ -6896,6 +6948,10 @@
             </a:outerShdw>
           </a:effectLst>
         </p:spPr>
+        <p:txBody>
+          <a:bodyPr/>
+          <a:p/>
+        </p:txBody>
       </p:sp>
       <p:sp>
         <p:nvSpPr>
@@ -7222,6 +7278,10 @@
             </a:outerShdw>
           </a:effectLst>
         </p:spPr>
+        <p:txBody>
+          <a:bodyPr/>
+          <a:p/>
+        </p:txBody>
       </p:sp>
       <p:sp>
         <p:nvSpPr>
@@ -7332,6 +7392,10 @@
             </a:outerShdw>
           </a:effectLst>
         </p:spPr>
+        <p:txBody>
+          <a:bodyPr/>
+          <a:p/>
+        </p:txBody>
       </p:sp>
       <p:sp>
         <p:nvSpPr>
@@ -7761,6 +7825,10 @@
             </a:outerShdw>
           </a:effectLst>
         </p:spPr>
+        <p:txBody>
+          <a:bodyPr/>
+          <a:p/>
+        </p:txBody>
       </p:sp>
       <p:sp>
         <p:nvSpPr>
@@ -8087,6 +8155,10 @@
             </a:outerShdw>
           </a:effectLst>
         </p:spPr>
+        <p:txBody>
+          <a:bodyPr/>
+          <a:p/>
+        </p:txBody>
       </p:sp>
       <p:sp>
         <p:nvSpPr>
@@ -8197,6 +8269,10 @@
             </a:outerShdw>
           </a:effectLst>
         </p:spPr>
+        <p:txBody>
+          <a:bodyPr/>
+          <a:p/>
+        </p:txBody>
       </p:sp>
       <p:sp>
         <p:nvSpPr>
@@ -8626,6 +8702,10 @@
             </a:outerShdw>
           </a:effectLst>
         </p:spPr>
+        <p:txBody>
+          <a:bodyPr/>
+          <a:p/>
+        </p:txBody>
       </p:sp>
       <p:sp>
         <p:nvSpPr>
@@ -8952,6 +9032,10 @@
             </a:outerShdw>
           </a:effectLst>
         </p:spPr>
+        <p:txBody>
+          <a:bodyPr/>
+          <a:p/>
+        </p:txBody>
       </p:sp>
       <p:sp>
         <p:nvSpPr>
@@ -9059,6 +9143,10 @@
             </a:outerShdw>
           </a:effectLst>
         </p:spPr>
+        <p:txBody>
+          <a:bodyPr/>
+          <a:p/>
+        </p:txBody>
       </p:sp>
       <p:sp>
         <p:nvSpPr>
@@ -9166,6 +9254,10 @@
             </a:outerShdw>
           </a:effectLst>
         </p:spPr>
+        <p:txBody>
+          <a:bodyPr/>
+          <a:p/>
+        </p:txBody>
       </p:sp>
       <p:sp>
         <p:nvSpPr>
@@ -9273,6 +9365,10 @@
             </a:outerShdw>
           </a:effectLst>
         </p:spPr>
+        <p:txBody>
+          <a:bodyPr/>
+          <a:p/>
+        </p:txBody>
       </p:sp>
       <p:sp>
         <p:nvSpPr>
@@ -9685,9 +9781,9 @@
               <a:buNone/>
             </a:pPr>
             <a:r>
-              <a:rPr lang="en-US" sz="1350" b="1" dirty="0">
-                <a:solidFill>
-                  <a:srgbClr val="005A63"/>
+              <a:rPr lang="en-US" sz="1350" b="0" dirty="0">
+                <a:solidFill>
+                  <a:srgbClr val="33444F"/>
                 </a:solidFill>
                 <a:latin typeface="Calibri" pitchFamily="34" charset="0"/>
                 <a:ea typeface="Calibri" pitchFamily="34" charset="-122"/>
@@ -9736,130 +9832,6 @@
               <a:t>E. Reported as negative</a:t>
             </a:r>
             <a:endParaRPr lang="en-US" sz="1350" dirty="0"/>
-          </a:p>
-        </p:txBody>
-      </p:sp>
-      <p:sp>
-        <p:nvSpPr>
-          <p:cNvPr id="6" name="Shape 4"/>
-          <p:cNvSpPr/>
-          <p:nvPr/>
-        </p:nvSpPr>
-        <p:spPr>
-          <a:xfrm>
-            <a:off x="7201632" y="2395728"/>
-            <a:ext cx="4423136" cy="3246120"/>
-          </a:xfrm>
-          <a:prstGeom prst="roundRect">
-            <a:avLst>
-              <a:gd name="adj" fmla="val 2535"/>
-            </a:avLst>
-          </a:prstGeom>
-          <a:solidFill>
-            <a:srgbClr val="E0F2F4"/>
-          </a:solidFill>
-          <a:ln/>
-          <a:effectLst>
-            <a:outerShdw sx="100000" sy="100000" kx="0" ky="0" algn="bl" rotWithShape="0" blurRad="88900" dist="25400" dir="5400000">
-              <a:srgbClr val="22303C">
-                <a:alpha val="12000"/>
-              </a:srgbClr>
-            </a:outerShdw>
-          </a:effectLst>
-        </p:spPr>
-      </p:sp>
-      <p:sp>
-        <p:nvSpPr>
-          <p:cNvPr id="7" name="Text 5"/>
-          <p:cNvSpPr/>
-          <p:nvPr/>
-        </p:nvSpPr>
-        <p:spPr>
-          <a:xfrm>
-            <a:off x="7439376" y="2578608"/>
-            <a:ext cx="3965936" cy="457200"/>
-          </a:xfrm>
-          <a:prstGeom prst="rect">
-            <a:avLst/>
-          </a:prstGeom>
-          <a:noFill/>
-          <a:ln/>
-        </p:spPr>
-        <p:txBody>
-          <a:bodyPr wrap="square" lIns="0" tIns="0" rIns="0" bIns="0" rtlCol="0" anchor="ctr"/>
-          <a:lstStyle/>
-          <a:p>
-            <a:pPr indent="0" marL="0">
-              <a:buNone/>
-            </a:pPr>
-            <a:r>
-              <a:rPr lang="en-US" sz="1500" b="1" dirty="0">
-                <a:solidFill>
-                  <a:srgbClr val="00838F"/>
-                </a:solidFill>
-                <a:latin typeface="Calibri" pitchFamily="34" charset="0"/>
-                <a:ea typeface="Calibri" pitchFamily="34" charset="-122"/>
-                <a:cs typeface="Calibri" pitchFamily="34" charset="-120"/>
-              </a:rPr>
-              <a:t>ANSWER  </a:t>
-            </a:r>
-            <a:pPr indent="0" marL="0">
-              <a:buNone/>
-            </a:pPr>
-            <a:r>
-              <a:rPr lang="en-US" sz="1500" b="1" dirty="0">
-                <a:solidFill>
-                  <a:srgbClr val="1B2A38"/>
-                </a:solidFill>
-                <a:latin typeface="Calibri" pitchFamily="34" charset="0"/>
-                <a:ea typeface="Calibri" pitchFamily="34" charset="-122"/>
-                <a:cs typeface="Calibri" pitchFamily="34" charset="-120"/>
-              </a:rPr>
-              <a:t>C — Not acted on; reassessed</a:t>
-            </a:r>
-            <a:endParaRPr lang="en-US" sz="1500" dirty="0"/>
-          </a:p>
-        </p:txBody>
-      </p:sp>
-      <p:sp>
-        <p:nvSpPr>
-          <p:cNvPr id="8" name="Text 6"/>
-          <p:cNvSpPr/>
-          <p:nvPr/>
-        </p:nvSpPr>
-        <p:spPr>
-          <a:xfrm>
-            <a:off x="7439376" y="3127248"/>
-            <a:ext cx="3947648" cy="2377440"/>
-          </a:xfrm>
-          <a:prstGeom prst="rect">
-            <a:avLst/>
-          </a:prstGeom>
-          <a:noFill/>
-          <a:ln/>
-        </p:spPr>
-        <p:txBody>
-          <a:bodyPr wrap="square" lIns="0" tIns="0" rIns="0" bIns="0" rtlCol="0" anchor="t"/>
-          <a:lstStyle/>
-          <a:p>
-            <a:pPr algn="l" indent="0" marL="0">
-              <a:lnSpc>
-                <a:spcPct val="108000"/>
-              </a:lnSpc>
-              <a:buNone/>
-            </a:pPr>
-            <a:r>
-              <a:rPr lang="en-US" sz="1250" dirty="0">
-                <a:solidFill>
-                  <a:srgbClr val="33444F"/>
-                </a:solidFill>
-                <a:latin typeface="Calibri" pitchFamily="34" charset="0"/>
-                <a:ea typeface="Calibri" pitchFamily="34" charset="-122"/>
-                <a:cs typeface="Calibri" pitchFamily="34" charset="-120"/>
-              </a:rPr>
-              <a:t>VUS means uncertain significance; it should not guide management and may be reclassified as evidence accrues.</a:t>
-            </a:r>
-            <a:endParaRPr lang="en-US" sz="1250" dirty="0"/>
           </a:p>
         </p:txBody>
       </p:sp>
@@ -10169,9 +10141,9 @@
               <a:buNone/>
             </a:pPr>
             <a:r>
-              <a:rPr lang="en-US" sz="1350" b="1" dirty="0">
-                <a:solidFill>
-                  <a:srgbClr val="005A63"/>
+              <a:rPr lang="en-US" sz="1350" b="0" dirty="0">
+                <a:solidFill>
+                  <a:srgbClr val="33444F"/>
                 </a:solidFill>
                 <a:latin typeface="Calibri" pitchFamily="34" charset="0"/>
                 <a:ea typeface="Calibri" pitchFamily="34" charset="-122"/>
@@ -10240,130 +10212,6 @@
               <a:t>E. Sufficient for pathogenic</a:t>
             </a:r>
             <a:endParaRPr lang="en-US" sz="1350" dirty="0"/>
-          </a:p>
-        </p:txBody>
-      </p:sp>
-      <p:sp>
-        <p:nvSpPr>
-          <p:cNvPr id="6" name="Shape 4"/>
-          <p:cNvSpPr/>
-          <p:nvPr/>
-        </p:nvSpPr>
-        <p:spPr>
-          <a:xfrm>
-            <a:off x="7201632" y="2395728"/>
-            <a:ext cx="4423136" cy="3246120"/>
-          </a:xfrm>
-          <a:prstGeom prst="roundRect">
-            <a:avLst>
-              <a:gd name="adj" fmla="val 2535"/>
-            </a:avLst>
-          </a:prstGeom>
-          <a:solidFill>
-            <a:srgbClr val="E0F2F4"/>
-          </a:solidFill>
-          <a:ln/>
-          <a:effectLst>
-            <a:outerShdw sx="100000" sy="100000" kx="0" ky="0" algn="bl" rotWithShape="0" blurRad="88900" dist="25400" dir="5400000">
-              <a:srgbClr val="22303C">
-                <a:alpha val="12000"/>
-              </a:srgbClr>
-            </a:outerShdw>
-          </a:effectLst>
-        </p:spPr>
-      </p:sp>
-      <p:sp>
-        <p:nvSpPr>
-          <p:cNvPr id="7" name="Text 5"/>
-          <p:cNvSpPr/>
-          <p:nvPr/>
-        </p:nvSpPr>
-        <p:spPr>
-          <a:xfrm>
-            <a:off x="7439376" y="2578608"/>
-            <a:ext cx="3965936" cy="457200"/>
-          </a:xfrm>
-          <a:prstGeom prst="rect">
-            <a:avLst/>
-          </a:prstGeom>
-          <a:noFill/>
-          <a:ln/>
-        </p:spPr>
-        <p:txBody>
-          <a:bodyPr wrap="square" lIns="0" tIns="0" rIns="0" bIns="0" rtlCol="0" anchor="ctr"/>
-          <a:lstStyle/>
-          <a:p>
-            <a:pPr indent="0" marL="0">
-              <a:buNone/>
-            </a:pPr>
-            <a:r>
-              <a:rPr lang="en-US" sz="1500" b="1" dirty="0">
-                <a:solidFill>
-                  <a:srgbClr val="00838F"/>
-                </a:solidFill>
-                <a:latin typeface="Calibri" pitchFamily="34" charset="0"/>
-                <a:ea typeface="Calibri" pitchFamily="34" charset="-122"/>
-                <a:cs typeface="Calibri" pitchFamily="34" charset="-120"/>
-              </a:rPr>
-              <a:t>ANSWER  </a:t>
-            </a:r>
-            <a:pPr indent="0" marL="0">
-              <a:buNone/>
-            </a:pPr>
-            <a:r>
-              <a:rPr lang="en-US" sz="1500" b="1" dirty="0">
-                <a:solidFill>
-                  <a:srgbClr val="1B2A38"/>
-                </a:solidFill>
-                <a:latin typeface="Calibri" pitchFamily="34" charset="0"/>
-                <a:ea typeface="Calibri" pitchFamily="34" charset="-122"/>
-                <a:cs typeface="Calibri" pitchFamily="34" charset="-120"/>
-              </a:rPr>
-              <a:t>B — Supporting evidence only</a:t>
-            </a:r>
-            <a:endParaRPr lang="en-US" sz="1500" dirty="0"/>
-          </a:p>
-        </p:txBody>
-      </p:sp>
-      <p:sp>
-        <p:nvSpPr>
-          <p:cNvPr id="8" name="Text 6"/>
-          <p:cNvSpPr/>
-          <p:nvPr/>
-        </p:nvSpPr>
-        <p:spPr>
-          <a:xfrm>
-            <a:off x="7439376" y="3127248"/>
-            <a:ext cx="3947648" cy="2377440"/>
-          </a:xfrm>
-          <a:prstGeom prst="rect">
-            <a:avLst/>
-          </a:prstGeom>
-          <a:noFill/>
-          <a:ln/>
-        </p:spPr>
-        <p:txBody>
-          <a:bodyPr wrap="square" lIns="0" tIns="0" rIns="0" bIns="0" rtlCol="0" anchor="t"/>
-          <a:lstStyle/>
-          <a:p>
-            <a:pPr algn="l" indent="0" marL="0">
-              <a:lnSpc>
-                <a:spcPct val="108000"/>
-              </a:lnSpc>
-              <a:buNone/>
-            </a:pPr>
-            <a:r>
-              <a:rPr lang="en-US" sz="1250" dirty="0">
-                <a:solidFill>
-                  <a:srgbClr val="33444F"/>
-                </a:solidFill>
-                <a:latin typeface="Calibri" pitchFamily="34" charset="0"/>
-                <a:ea typeface="Calibri" pitchFamily="34" charset="-122"/>
-                <a:cs typeface="Calibri" pitchFamily="34" charset="-120"/>
-              </a:rPr>
-              <a:t>Computational predictions provide supporting evidence; they are not standalone proof of pathogenicity.</a:t>
-            </a:r>
-            <a:endParaRPr lang="en-US" sz="1250" dirty="0"/>
           </a:p>
         </p:txBody>
       </p:sp>
@@ -10673,9 +10521,9 @@
               <a:buNone/>
             </a:pPr>
             <a:r>
-              <a:rPr lang="en-US" sz="1350" b="1" dirty="0">
-                <a:solidFill>
-                  <a:srgbClr val="005A63"/>
+              <a:rPr lang="en-US" sz="1350" b="0" dirty="0">
+                <a:solidFill>
+                  <a:srgbClr val="33444F"/>
                 </a:solidFill>
                 <a:latin typeface="Calibri" pitchFamily="34" charset="0"/>
                 <a:ea typeface="Calibri" pitchFamily="34" charset="-122"/>
@@ -10744,130 +10592,6 @@
               <a:t>E. Untestable</a:t>
             </a:r>
             <a:endParaRPr lang="en-US" sz="1350" dirty="0"/>
-          </a:p>
-        </p:txBody>
-      </p:sp>
-      <p:sp>
-        <p:nvSpPr>
-          <p:cNvPr id="6" name="Shape 4"/>
-          <p:cNvSpPr/>
-          <p:nvPr/>
-        </p:nvSpPr>
-        <p:spPr>
-          <a:xfrm>
-            <a:off x="7201632" y="2395728"/>
-            <a:ext cx="4423136" cy="3246120"/>
-          </a:xfrm>
-          <a:prstGeom prst="roundRect">
-            <a:avLst>
-              <a:gd name="adj" fmla="val 2535"/>
-            </a:avLst>
-          </a:prstGeom>
-          <a:solidFill>
-            <a:srgbClr val="E0F2F4"/>
-          </a:solidFill>
-          <a:ln/>
-          <a:effectLst>
-            <a:outerShdw sx="100000" sy="100000" kx="0" ky="0" algn="bl" rotWithShape="0" blurRad="88900" dist="25400" dir="5400000">
-              <a:srgbClr val="22303C">
-                <a:alpha val="12000"/>
-              </a:srgbClr>
-            </a:outerShdw>
-          </a:effectLst>
-        </p:spPr>
-      </p:sp>
-      <p:sp>
-        <p:nvSpPr>
-          <p:cNvPr id="7" name="Text 5"/>
-          <p:cNvSpPr/>
-          <p:nvPr/>
-        </p:nvSpPr>
-        <p:spPr>
-          <a:xfrm>
-            <a:off x="7439376" y="2578608"/>
-            <a:ext cx="3965936" cy="457200"/>
-          </a:xfrm>
-          <a:prstGeom prst="rect">
-            <a:avLst/>
-          </a:prstGeom>
-          <a:noFill/>
-          <a:ln/>
-        </p:spPr>
-        <p:txBody>
-          <a:bodyPr wrap="square" lIns="0" tIns="0" rIns="0" bIns="0" rtlCol="0" anchor="ctr"/>
-          <a:lstStyle/>
-          <a:p>
-            <a:pPr indent="0" marL="0">
-              <a:buNone/>
-            </a:pPr>
-            <a:r>
-              <a:rPr lang="en-US" sz="1500" b="1" dirty="0">
-                <a:solidFill>
-                  <a:srgbClr val="00838F"/>
-                </a:solidFill>
-                <a:latin typeface="Calibri" pitchFamily="34" charset="0"/>
-                <a:ea typeface="Calibri" pitchFamily="34" charset="-122"/>
-                <a:cs typeface="Calibri" pitchFamily="34" charset="-120"/>
-              </a:rPr>
-              <a:t>ANSWER  </a:t>
-            </a:r>
-            <a:pPr indent="0" marL="0">
-              <a:buNone/>
-            </a:pPr>
-            <a:r>
-              <a:rPr lang="en-US" sz="1500" b="1" dirty="0">
-                <a:solidFill>
-                  <a:srgbClr val="1B2A38"/>
-                </a:solidFill>
-                <a:latin typeface="Calibri" pitchFamily="34" charset="0"/>
-                <a:ea typeface="Calibri" pitchFamily="34" charset="-122"/>
-                <a:cs typeface="Calibri" pitchFamily="34" charset="-120"/>
-              </a:rPr>
-              <a:t>B — Likely benign</a:t>
-            </a:r>
-            <a:endParaRPr lang="en-US" sz="1500" dirty="0"/>
-          </a:p>
-        </p:txBody>
-      </p:sp>
-      <p:sp>
-        <p:nvSpPr>
-          <p:cNvPr id="8" name="Text 6"/>
-          <p:cNvSpPr/>
-          <p:nvPr/>
-        </p:nvSpPr>
-        <p:spPr>
-          <a:xfrm>
-            <a:off x="7439376" y="3127248"/>
-            <a:ext cx="3947648" cy="2377440"/>
-          </a:xfrm>
-          <a:prstGeom prst="rect">
-            <a:avLst/>
-          </a:prstGeom>
-          <a:noFill/>
-          <a:ln/>
-        </p:spPr>
-        <p:txBody>
-          <a:bodyPr wrap="square" lIns="0" tIns="0" rIns="0" bIns="0" rtlCol="0" anchor="t"/>
-          <a:lstStyle/>
-          <a:p>
-            <a:pPr algn="l" indent="0" marL="0">
-              <a:lnSpc>
-                <a:spcPct val="108000"/>
-              </a:lnSpc>
-              <a:buNone/>
-            </a:pPr>
-            <a:r>
-              <a:rPr lang="en-US" sz="1250" dirty="0">
-                <a:solidFill>
-                  <a:srgbClr val="33444F"/>
-                </a:solidFill>
-                <a:latin typeface="Calibri" pitchFamily="34" charset="0"/>
-                <a:ea typeface="Calibri" pitchFamily="34" charset="-122"/>
-                <a:cs typeface="Calibri" pitchFamily="34" charset="-120"/>
-              </a:rPr>
-              <a:t>Variants common in the general population are unlikely to cause rare severe disease (stand-alone/strong benign evidence).</a:t>
-            </a:r>
-            <a:endParaRPr lang="en-US" sz="1250" dirty="0"/>
           </a:p>
         </p:txBody>
       </p:sp>
@@ -11177,9 +10901,9 @@
               <a:buNone/>
             </a:pPr>
             <a:r>
-              <a:rPr lang="en-US" sz="1350" b="1" dirty="0">
-                <a:solidFill>
-                  <a:srgbClr val="005A63"/>
+              <a:rPr lang="en-US" sz="1350" b="0" dirty="0">
+                <a:solidFill>
+                  <a:srgbClr val="33444F"/>
                 </a:solidFill>
                 <a:latin typeface="Calibri" pitchFamily="34" charset="0"/>
                 <a:ea typeface="Calibri" pitchFamily="34" charset="-122"/>
@@ -11248,130 +10972,6 @@
               <a:t>E. Repeat tumor testing only</a:t>
             </a:r>
             <a:endParaRPr lang="en-US" sz="1350" dirty="0"/>
-          </a:p>
-        </p:txBody>
-      </p:sp>
-      <p:sp>
-        <p:nvSpPr>
-          <p:cNvPr id="6" name="Shape 4"/>
-          <p:cNvSpPr/>
-          <p:nvPr/>
-        </p:nvSpPr>
-        <p:spPr>
-          <a:xfrm>
-            <a:off x="7201632" y="2395728"/>
-            <a:ext cx="4423136" cy="3246120"/>
-          </a:xfrm>
-          <a:prstGeom prst="roundRect">
-            <a:avLst>
-              <a:gd name="adj" fmla="val 2535"/>
-            </a:avLst>
-          </a:prstGeom>
-          <a:solidFill>
-            <a:srgbClr val="E0F2F4"/>
-          </a:solidFill>
-          <a:ln/>
-          <a:effectLst>
-            <a:outerShdw sx="100000" sy="100000" kx="0" ky="0" algn="bl" rotWithShape="0" blurRad="88900" dist="25400" dir="5400000">
-              <a:srgbClr val="22303C">
-                <a:alpha val="12000"/>
-              </a:srgbClr>
-            </a:outerShdw>
-          </a:effectLst>
-        </p:spPr>
-      </p:sp>
-      <p:sp>
-        <p:nvSpPr>
-          <p:cNvPr id="7" name="Text 5"/>
-          <p:cNvSpPr/>
-          <p:nvPr/>
-        </p:nvSpPr>
-        <p:spPr>
-          <a:xfrm>
-            <a:off x="7439376" y="2578608"/>
-            <a:ext cx="3965936" cy="457200"/>
-          </a:xfrm>
-          <a:prstGeom prst="rect">
-            <a:avLst/>
-          </a:prstGeom>
-          <a:noFill/>
-          <a:ln/>
-        </p:spPr>
-        <p:txBody>
-          <a:bodyPr wrap="square" lIns="0" tIns="0" rIns="0" bIns="0" rtlCol="0" anchor="ctr"/>
-          <a:lstStyle/>
-          <a:p>
-            <a:pPr indent="0" marL="0">
-              <a:buNone/>
-            </a:pPr>
-            <a:r>
-              <a:rPr lang="en-US" sz="1500" b="1" dirty="0">
-                <a:solidFill>
-                  <a:srgbClr val="00838F"/>
-                </a:solidFill>
-                <a:latin typeface="Calibri" pitchFamily="34" charset="0"/>
-                <a:ea typeface="Calibri" pitchFamily="34" charset="-122"/>
-                <a:cs typeface="Calibri" pitchFamily="34" charset="-120"/>
-              </a:rPr>
-              <a:t>ANSWER  </a:t>
-            </a:r>
-            <a:pPr indent="0" marL="0">
-              <a:buNone/>
-            </a:pPr>
-            <a:r>
-              <a:rPr lang="en-US" sz="1500" b="1" dirty="0">
-                <a:solidFill>
-                  <a:srgbClr val="1B2A38"/>
-                </a:solidFill>
-                <a:latin typeface="Calibri" pitchFamily="34" charset="0"/>
-                <a:ea typeface="Calibri" pitchFamily="34" charset="-122"/>
-                <a:cs typeface="Calibri" pitchFamily="34" charset="-120"/>
-              </a:rPr>
-              <a:t>B — Confirm with paired normal</a:t>
-            </a:r>
-            <a:endParaRPr lang="en-US" sz="1500" dirty="0"/>
-          </a:p>
-        </p:txBody>
-      </p:sp>
-      <p:sp>
-        <p:nvSpPr>
-          <p:cNvPr id="8" name="Text 6"/>
-          <p:cNvSpPr/>
-          <p:nvPr/>
-        </p:nvSpPr>
-        <p:spPr>
-          <a:xfrm>
-            <a:off x="7439376" y="3127248"/>
-            <a:ext cx="3947648" cy="2377440"/>
-          </a:xfrm>
-          <a:prstGeom prst="rect">
-            <a:avLst/>
-          </a:prstGeom>
-          <a:noFill/>
-          <a:ln/>
-        </p:spPr>
-        <p:txBody>
-          <a:bodyPr wrap="square" lIns="0" tIns="0" rIns="0" bIns="0" rtlCol="0" anchor="t"/>
-          <a:lstStyle/>
-          <a:p>
-            <a:pPr algn="l" indent="0" marL="0">
-              <a:lnSpc>
-                <a:spcPct val="108000"/>
-              </a:lnSpc>
-              <a:buNone/>
-            </a:pPr>
-            <a:r>
-              <a:rPr lang="en-US" sz="1250" dirty="0">
-                <a:solidFill>
-                  <a:srgbClr val="33444F"/>
-                </a:solidFill>
-                <a:latin typeface="Calibri" pitchFamily="34" charset="0"/>
-                <a:ea typeface="Calibri" pitchFamily="34" charset="-122"/>
-                <a:cs typeface="Calibri" pitchFamily="34" charset="-120"/>
-              </a:rPr>
-              <a:t>A ~50% VAF can reflect a germline variant; confirm in normal tissue with consent and counseling before attributing inherited risk.</a:t>
-            </a:r>
-            <a:endParaRPr lang="en-US" sz="1250" dirty="0"/>
           </a:p>
         </p:txBody>
       </p:sp>
@@ -11612,6 +11212,10 @@
           </a:solidFill>
           <a:ln/>
         </p:spPr>
+        <p:txBody>
+          <a:bodyPr/>
+          <a:p/>
+        </p:txBody>
       </p:sp>
       <p:sp>
         <p:nvSpPr>
@@ -11639,6 +11243,10 @@
             </a:outerShdw>
           </a:effectLst>
         </p:spPr>
+        <p:txBody>
+          <a:bodyPr/>
+          <a:p/>
+        </p:txBody>
       </p:sp>
       <p:sp>
         <p:nvSpPr>
@@ -11739,6 +11347,10 @@
           </a:solidFill>
           <a:ln/>
         </p:spPr>
+        <p:txBody>
+          <a:bodyPr/>
+          <a:p/>
+        </p:txBody>
       </p:sp>
       <p:sp>
         <p:nvSpPr>
@@ -11766,6 +11378,10 @@
             </a:outerShdw>
           </a:effectLst>
         </p:spPr>
+        <p:txBody>
+          <a:bodyPr/>
+          <a:p/>
+        </p:txBody>
       </p:sp>
       <p:sp>
         <p:nvSpPr>
@@ -11866,6 +11482,10 @@
           </a:solidFill>
           <a:ln/>
         </p:spPr>
+        <p:txBody>
+          <a:bodyPr/>
+          <a:p/>
+        </p:txBody>
       </p:sp>
       <p:sp>
         <p:nvSpPr>
@@ -11893,6 +11513,10 @@
             </a:outerShdw>
           </a:effectLst>
         </p:spPr>
+        <p:txBody>
+          <a:bodyPr/>
+          <a:p/>
+        </p:txBody>
       </p:sp>
       <p:sp>
         <p:nvSpPr>
@@ -11993,6 +11617,10 @@
           </a:solidFill>
           <a:ln/>
         </p:spPr>
+        <p:txBody>
+          <a:bodyPr/>
+          <a:p/>
+        </p:txBody>
       </p:sp>
       <p:sp>
         <p:nvSpPr>
@@ -12020,6 +11648,10 @@
             </a:outerShdw>
           </a:effectLst>
         </p:spPr>
+        <p:txBody>
+          <a:bodyPr/>
+          <a:p/>
+        </p:txBody>
       </p:sp>
       <p:sp>
         <p:nvSpPr>
@@ -12120,6 +11752,10 @@
           </a:solidFill>
           <a:ln/>
         </p:spPr>
+        <p:txBody>
+          <a:bodyPr/>
+          <a:p/>
+        </p:txBody>
       </p:sp>
       <p:sp>
         <p:nvSpPr>
@@ -12147,6 +11783,10 @@
             </a:outerShdw>
           </a:effectLst>
         </p:spPr>
+        <p:txBody>
+          <a:bodyPr/>
+          <a:p/>
+        </p:txBody>
       </p:sp>
       <p:sp>
         <p:nvSpPr>
@@ -12630,6 +12270,1982 @@
 </p:sld>
 </file>
 
+<file path=ppt/slides/slide26.xml><?xml version="1.0" encoding="utf-8"?>
+<p:sld xmlns:a="http://schemas.openxmlformats.org/drawingml/2006/main" xmlns:p="http://schemas.openxmlformats.org/presentationml/2006/main" xmlns:r="http://schemas.openxmlformats.org/officeDocument/2006/relationships">
+  <p:cSld>
+    <p:spTree>
+      <p:nvGrpSpPr>
+        <p:cNvPr id="1" name=""/>
+        <p:cNvGrpSpPr/>
+        <p:nvPr/>
+      </p:nvGrpSpPr>
+      <p:grpSpPr/>
+      <p:sp>
+        <p:nvSpPr>
+          <p:cNvPr id="2" name="Text 0"/>
+          <p:cNvSpPr/>
+          <p:nvPr/>
+        </p:nvSpPr>
+        <p:spPr>
+          <a:xfrm>
+            <a:off x="566928" y="329184"/>
+            <a:ext cx="10515600" cy="310896"/>
+          </a:xfrm>
+          <a:prstGeom prst="rect">
+            <a:avLst/>
+          </a:prstGeom>
+          <a:noFill/>
+          <a:ln/>
+        </p:spPr>
+        <p:txBody>
+          <a:bodyPr wrap="square" lIns="0" tIns="0" rIns="0" bIns="0" rtlCol="0" anchor="ctr"/>
+          <a:lstStyle/>
+          <a:p>
+            <a:pPr algn="l" indent="0" marL="0">
+              <a:buNone/>
+            </a:pPr>
+            <a:r>
+              <a:rPr lang="en-US" sz="1100" b="1" spc="150" kern="0" dirty="0">
+                <a:solidFill>
+                  <a:srgbClr val="00838F"/>
+                </a:solidFill>
+                <a:latin typeface="Calibri" pitchFamily="34" charset="0"/>
+                <a:ea typeface="Calibri" pitchFamily="34" charset="-122"/>
+                <a:cs typeface="Calibri" pitchFamily="34" charset="-120"/>
+              </a:rPr>
+              <a:t>MOLECULAR &amp; CYTOGENETICS   ·   BOARD REVIEW  ·  Q4</a:t>
+            </a:r>
+            <a:endParaRPr lang="en-US" sz="1100" dirty="0"/>
+          </a:p>
+        </p:txBody>
+      </p:sp>
+      <p:sp>
+        <p:nvSpPr>
+          <p:cNvPr id="3" name="Text 1"/>
+          <p:cNvSpPr/>
+          <p:nvPr/>
+        </p:nvSpPr>
+        <p:spPr>
+          <a:xfrm>
+            <a:off x="566928" y="713232"/>
+            <a:ext cx="11064240" cy="749808"/>
+          </a:xfrm>
+          <a:prstGeom prst="rect">
+            <a:avLst/>
+          </a:prstGeom>
+          <a:noFill/>
+          <a:ln/>
+        </p:spPr>
+        <p:txBody>
+          <a:bodyPr wrap="square" lIns="0" tIns="0" rIns="0" bIns="0" rtlCol="0" anchor="ctr"/>
+          <a:lstStyle/>
+          <a:p>
+            <a:pPr algn="l" indent="0" marL="0">
+              <a:buNone/>
+            </a:pPr>
+            <a:r>
+              <a:rPr lang="en-US" sz="2600" b="1" dirty="0">
+                <a:solidFill>
+                  <a:srgbClr val="0E3A5F"/>
+                </a:solidFill>
+                <a:latin typeface="Calibri" pitchFamily="34" charset="0"/>
+                <a:ea typeface="Calibri" pitchFamily="34" charset="-122"/>
+                <a:cs typeface="Calibri" pitchFamily="34" charset="-120"/>
+              </a:rPr>
+              <a:t>Board-Style Review</a:t>
+            </a:r>
+            <a:endParaRPr lang="en-US" sz="2600" dirty="0"/>
+          </a:p>
+        </p:txBody>
+      </p:sp>
+      <p:sp>
+        <p:nvSpPr>
+          <p:cNvPr id="4" name="Text 2"/>
+          <p:cNvSpPr/>
+          <p:nvPr/>
+        </p:nvSpPr>
+        <p:spPr>
+          <a:xfrm>
+            <a:off x="566928" y="1417320"/>
+            <a:ext cx="11057839" cy="914400"/>
+          </a:xfrm>
+          <a:prstGeom prst="rect">
+            <a:avLst/>
+          </a:prstGeom>
+          <a:noFill/>
+          <a:ln/>
+        </p:spPr>
+        <p:txBody>
+          <a:bodyPr wrap="square" lIns="0" tIns="0" rIns="0" bIns="0" rtlCol="0" anchor="t"/>
+          <a:lstStyle/>
+          <a:p>
+            <a:pPr algn="l" indent="0" marL="0">
+              <a:lnSpc>
+                <a:spcPct val="105000"/>
+              </a:lnSpc>
+              <a:buNone/>
+            </a:pPr>
+            <a:r>
+              <a:rPr lang="en-US" sz="1450" b="1" dirty="0">
+                <a:solidFill>
+                  <a:srgbClr val="1B2A38"/>
+                </a:solidFill>
+                <a:latin typeface="Calibri" pitchFamily="34" charset="0"/>
+                <a:ea typeface="Calibri" pitchFamily="34" charset="-122"/>
+                <a:cs typeface="Calibri" pitchFamily="34" charset="-120"/>
+              </a:rPr>
+              <a:t>A ~50% VAF for a variant in a cancer-predisposition gene on tumor testing should prompt:</a:t>
+            </a:r>
+            <a:endParaRPr lang="en-US" sz="1450" dirty="0"/>
+          </a:p>
+        </p:txBody>
+      </p:sp>
+      <p:sp>
+        <p:nvSpPr>
+          <p:cNvPr id="5" name="Text 3"/>
+          <p:cNvSpPr/>
+          <p:nvPr/>
+        </p:nvSpPr>
+        <p:spPr>
+          <a:xfrm>
+            <a:off x="658368" y="2395728"/>
+            <a:ext cx="6192390" cy="3017520"/>
+          </a:xfrm>
+          <a:prstGeom prst="rect">
+            <a:avLst/>
+          </a:prstGeom>
+          <a:noFill/>
+          <a:ln/>
+        </p:spPr>
+        <p:txBody>
+          <a:bodyPr wrap="square" lIns="0" tIns="0" rIns="0" bIns="0" rtlCol="0" anchor="t"/>
+          <a:lstStyle/>
+          <a:p>
+            <a:pPr algn="l" indent="0" marL="0">
+              <a:spcAft>
+                <a:spcPts val="600"/>
+              </a:spcAft>
+              <a:buNone/>
+            </a:pPr>
+            <a:r>
+              <a:rPr lang="en-US" sz="1350" dirty="0">
+                <a:solidFill>
+                  <a:srgbClr val="33444F"/>
+                </a:solidFill>
+                <a:latin typeface="Calibri" pitchFamily="34" charset="0"/>
+                <a:ea typeface="Calibri" pitchFamily="34" charset="-122"/>
+                <a:cs typeface="Calibri" pitchFamily="34" charset="-120"/>
+              </a:rPr>
+              <a:t>A. Immediate germline diagnosis</a:t>
+            </a:r>
+            <a:endParaRPr lang="en-US" sz="1350" dirty="0"/>
+          </a:p>
+          <a:p>
+            <a:pPr algn="l" indent="0" marL="0">
+              <a:spcAft>
+                <a:spcPts val="600"/>
+              </a:spcAft>
+              <a:buNone/>
+            </a:pPr>
+            <a:r>
+              <a:rPr lang="en-US" sz="1350" b="1" dirty="0">
+                <a:solidFill>
+                  <a:srgbClr val="005A63"/>
+                </a:solidFill>
+                <a:latin typeface="Calibri" pitchFamily="34" charset="0"/>
+                <a:ea typeface="Calibri" pitchFamily="34" charset="-122"/>
+                <a:cs typeface="Calibri" pitchFamily="34" charset="-120"/>
+              </a:rPr>
+              <a:t>B. Confirmation with a paired normal sample</a:t>
+            </a:r>
+            <a:endParaRPr lang="en-US" sz="1350" dirty="0"/>
+          </a:p>
+          <a:p>
+            <a:pPr algn="l" indent="0" marL="0">
+              <a:spcAft>
+                <a:spcPts val="600"/>
+              </a:spcAft>
+              <a:buNone/>
+            </a:pPr>
+            <a:r>
+              <a:rPr lang="en-US" sz="1350" dirty="0">
+                <a:solidFill>
+                  <a:srgbClr val="33444F"/>
+                </a:solidFill>
+                <a:latin typeface="Calibri" pitchFamily="34" charset="0"/>
+                <a:ea typeface="Calibri" pitchFamily="34" charset="-122"/>
+                <a:cs typeface="Calibri" pitchFamily="34" charset="-120"/>
+              </a:rPr>
+              <a:t>C. No further action</a:t>
+            </a:r>
+            <a:endParaRPr lang="en-US" sz="1350" dirty="0"/>
+          </a:p>
+          <a:p>
+            <a:pPr algn="l" indent="0" marL="0">
+              <a:spcAft>
+                <a:spcPts val="600"/>
+              </a:spcAft>
+              <a:buNone/>
+            </a:pPr>
+            <a:r>
+              <a:rPr lang="en-US" sz="1350" dirty="0">
+                <a:solidFill>
+                  <a:srgbClr val="33444F"/>
+                </a:solidFill>
+                <a:latin typeface="Calibri" pitchFamily="34" charset="0"/>
+                <a:ea typeface="Calibri" pitchFamily="34" charset="-122"/>
+                <a:cs typeface="Calibri" pitchFamily="34" charset="-120"/>
+              </a:rPr>
+              <a:t>D. Reporting as benign</a:t>
+            </a:r>
+            <a:endParaRPr lang="en-US" sz="1350" dirty="0"/>
+          </a:p>
+          <a:p>
+            <a:pPr algn="l" indent="0" marL="0">
+              <a:spcAft>
+                <a:spcPts val="600"/>
+              </a:spcAft>
+              <a:buNone/>
+            </a:pPr>
+            <a:r>
+              <a:rPr lang="en-US" sz="1350" dirty="0">
+                <a:solidFill>
+                  <a:srgbClr val="33444F"/>
+                </a:solidFill>
+                <a:latin typeface="Calibri" pitchFamily="34" charset="0"/>
+                <a:ea typeface="Calibri" pitchFamily="34" charset="-122"/>
+                <a:cs typeface="Calibri" pitchFamily="34" charset="-120"/>
+              </a:rPr>
+              <a:t>E. Repeat tumor testing only</a:t>
+            </a:r>
+            <a:endParaRPr lang="en-US" sz="1350" dirty="0"/>
+          </a:p>
+        </p:txBody>
+      </p:sp>
+      <p:sp>
+        <p:nvSpPr>
+          <p:cNvPr id="6" name="Shape 4"/>
+          <p:cNvSpPr/>
+          <p:nvPr/>
+        </p:nvSpPr>
+        <p:spPr>
+          <a:xfrm>
+            <a:off x="7201632" y="2395728"/>
+            <a:ext cx="4423136" cy="3246120"/>
+          </a:xfrm>
+          <a:prstGeom prst="roundRect">
+            <a:avLst>
+              <a:gd name="adj" fmla="val 2535"/>
+            </a:avLst>
+          </a:prstGeom>
+          <a:solidFill>
+            <a:srgbClr val="E0F2F4"/>
+          </a:solidFill>
+          <a:ln/>
+          <a:effectLst>
+            <a:outerShdw sx="100000" sy="100000" kx="0" ky="0" algn="bl" rotWithShape="0" blurRad="88900" dist="25400" dir="5400000">
+              <a:srgbClr val="22303C">
+                <a:alpha val="12000"/>
+              </a:srgbClr>
+            </a:outerShdw>
+          </a:effectLst>
+        </p:spPr>
+        <p:txBody>
+          <a:bodyPr/>
+          <a:p/>
+        </p:txBody>
+      </p:sp>
+      <p:sp>
+        <p:nvSpPr>
+          <p:cNvPr id="7" name="Text 5"/>
+          <p:cNvSpPr/>
+          <p:nvPr/>
+        </p:nvSpPr>
+        <p:spPr>
+          <a:xfrm>
+            <a:off x="7439376" y="2578608"/>
+            <a:ext cx="3965936" cy="457200"/>
+          </a:xfrm>
+          <a:prstGeom prst="rect">
+            <a:avLst/>
+          </a:prstGeom>
+          <a:noFill/>
+          <a:ln/>
+        </p:spPr>
+        <p:txBody>
+          <a:bodyPr wrap="square" lIns="0" tIns="0" rIns="0" bIns="0" rtlCol="0" anchor="ctr"/>
+          <a:lstStyle/>
+          <a:p>
+            <a:pPr indent="0" marL="0">
+              <a:buNone/>
+            </a:pPr>
+            <a:r>
+              <a:rPr lang="en-US" sz="1500" b="1" dirty="0">
+                <a:solidFill>
+                  <a:srgbClr val="00838F"/>
+                </a:solidFill>
+                <a:latin typeface="Calibri" pitchFamily="34" charset="0"/>
+                <a:ea typeface="Calibri" pitchFamily="34" charset="-122"/>
+                <a:cs typeface="Calibri" pitchFamily="34" charset="-120"/>
+              </a:rPr>
+              <a:t>ANSWER  </a:t>
+            </a:r>
+            <a:pPr indent="0" marL="0">
+              <a:buNone/>
+            </a:pPr>
+            <a:r>
+              <a:rPr lang="en-US" sz="1500" b="1" dirty="0">
+                <a:solidFill>
+                  <a:srgbClr val="1B2A38"/>
+                </a:solidFill>
+                <a:latin typeface="Calibri" pitchFamily="34" charset="0"/>
+                <a:ea typeface="Calibri" pitchFamily="34" charset="-122"/>
+                <a:cs typeface="Calibri" pitchFamily="34" charset="-120"/>
+              </a:rPr>
+              <a:t>B — Confirm with paired normal</a:t>
+            </a:r>
+            <a:endParaRPr lang="en-US" sz="1500" dirty="0"/>
+          </a:p>
+        </p:txBody>
+      </p:sp>
+      <p:sp>
+        <p:nvSpPr>
+          <p:cNvPr id="8" name="Text 6"/>
+          <p:cNvSpPr/>
+          <p:nvPr/>
+        </p:nvSpPr>
+        <p:spPr>
+          <a:xfrm>
+            <a:off x="7439376" y="3127248"/>
+            <a:ext cx="3947648" cy="2377440"/>
+          </a:xfrm>
+          <a:prstGeom prst="rect">
+            <a:avLst/>
+          </a:prstGeom>
+          <a:noFill/>
+          <a:ln/>
+        </p:spPr>
+        <p:txBody>
+          <a:bodyPr wrap="square" lIns="0" tIns="0" rIns="0" bIns="0" rtlCol="0" anchor="t"/>
+          <a:lstStyle/>
+          <a:p>
+            <a:pPr algn="l" indent="0" marL="0">
+              <a:lnSpc>
+                <a:spcPct val="108000"/>
+              </a:lnSpc>
+              <a:buNone/>
+            </a:pPr>
+            <a:r>
+              <a:rPr lang="en-US" sz="1250" dirty="0">
+                <a:solidFill>
+                  <a:srgbClr val="33444F"/>
+                </a:solidFill>
+                <a:latin typeface="Calibri" pitchFamily="34" charset="0"/>
+                <a:ea typeface="Calibri" pitchFamily="34" charset="-122"/>
+                <a:cs typeface="Calibri" pitchFamily="34" charset="-120"/>
+              </a:rPr>
+              <a:t>A ~50% VAF can reflect a germline variant; confirm in normal tissue with consent and counseling before attributing inherited risk.</a:t>
+            </a:r>
+            <a:endParaRPr lang="en-US" sz="1250" dirty="0"/>
+          </a:p>
+        </p:txBody>
+      </p:sp>
+      <p:sp>
+        <p:nvSpPr>
+          <p:cNvPr id="9" name="Text 7"/>
+          <p:cNvSpPr/>
+          <p:nvPr/>
+        </p:nvSpPr>
+        <p:spPr>
+          <a:xfrm>
+            <a:off x="566928" y="6473952"/>
+            <a:ext cx="7772400" cy="274320"/>
+          </a:xfrm>
+          <a:prstGeom prst="rect">
+            <a:avLst/>
+          </a:prstGeom>
+          <a:noFill/>
+          <a:ln/>
+        </p:spPr>
+        <p:txBody>
+          <a:bodyPr wrap="square" lIns="0" tIns="0" rIns="0" bIns="0" rtlCol="0" anchor="ctr"/>
+          <a:lstStyle/>
+          <a:p>
+            <a:pPr algn="l" indent="0" marL="0">
+              <a:buNone/>
+            </a:pPr>
+            <a:r>
+              <a:rPr lang="en-US" sz="850" dirty="0">
+                <a:solidFill>
+                  <a:srgbClr val="9AA8B4"/>
+                </a:solidFill>
+                <a:latin typeface="Calibri" pitchFamily="34" charset="0"/>
+                <a:ea typeface="Calibri" pitchFamily="34" charset="-122"/>
+                <a:cs typeface="Calibri" pitchFamily="34" charset="-120"/>
+              </a:rPr>
+              <a:t>Makassed General Hospital  ·  Department of Laboratory Medicine</a:t>
+            </a:r>
+            <a:endParaRPr lang="en-US" sz="850" dirty="0"/>
+          </a:p>
+        </p:txBody>
+      </p:sp>
+      <p:sp>
+        <p:nvSpPr>
+          <p:cNvPr id="10" name="Text 8"/>
+          <p:cNvSpPr/>
+          <p:nvPr/>
+        </p:nvSpPr>
+        <p:spPr>
+          <a:xfrm>
+            <a:off x="9814255" y="6473952"/>
+            <a:ext cx="1828800" cy="274320"/>
+          </a:xfrm>
+          <a:prstGeom prst="rect">
+            <a:avLst/>
+          </a:prstGeom>
+          <a:noFill/>
+          <a:ln/>
+        </p:spPr>
+        <p:txBody>
+          <a:bodyPr wrap="square" lIns="0" tIns="0" rIns="0" bIns="0" rtlCol="0" anchor="ctr"/>
+          <a:lstStyle/>
+          <a:p>
+            <a:pPr algn="r" indent="0" marL="0">
+              <a:buNone/>
+            </a:pPr>
+            <a:r>
+              <a:rPr lang="en-US" sz="850" dirty="0">
+                <a:solidFill>
+                  <a:srgbClr val="9AA8B4"/>
+                </a:solidFill>
+                <a:latin typeface="Calibri" pitchFamily="34" charset="0"/>
+                <a:ea typeface="Calibri" pitchFamily="34" charset="-122"/>
+                <a:cs typeface="Calibri" pitchFamily="34" charset="-120"/>
+              </a:rPr>
+              <a:t>CP Lecture Series</a:t>
+            </a:r>
+            <a:pPr algn="r" indent="0" marL="0">
+              <a:buNone/>
+            </a:pPr>
+            <a:r>
+              <a:rPr lang="en-US" sz="850" dirty="0">
+                <a:solidFill>
+                  <a:srgbClr val="DCE4EC"/>
+                </a:solidFill>
+                <a:latin typeface="Calibri" pitchFamily="34" charset="0"/>
+                <a:ea typeface="Calibri" pitchFamily="34" charset="-122"/>
+                <a:cs typeface="Calibri" pitchFamily="34" charset="-120"/>
+              </a:rPr>
+              <a:t>   ·   </a:t>
+            </a:r>
+            <a:pPr algn="r" indent="0" marL="0">
+              <a:buNone/>
+            </a:pPr>
+            <a:r>
+              <a:rPr lang="en-US" sz="850" b="1" dirty="0">
+                <a:solidFill>
+                  <a:srgbClr val="00838F"/>
+                </a:solidFill>
+                <a:latin typeface="Calibri" pitchFamily="34" charset="0"/>
+                <a:ea typeface="Calibri" pitchFamily="34" charset="-122"/>
+                <a:cs typeface="Calibri" pitchFamily="34" charset="-120"/>
+              </a:rPr>
+              <a:t>20</a:t>
+            </a:r>
+            <a:endParaRPr lang="en-US" sz="850" dirty="0"/>
+          </a:p>
+        </p:txBody>
+      </p:sp>
+    </p:spTree>
+  </p:cSld>
+  <p:clrMapOvr>
+    <a:masterClrMapping/>
+  </p:clrMapOvr>
+</p:sld>
+</file>
+
+<file path=ppt/slides/slide27.xml><?xml version="1.0" encoding="utf-8"?>
+<p:sld xmlns:a="http://schemas.openxmlformats.org/drawingml/2006/main" xmlns:p="http://schemas.openxmlformats.org/presentationml/2006/main" xmlns:r="http://schemas.openxmlformats.org/officeDocument/2006/relationships">
+  <p:cSld>
+    <p:spTree>
+      <p:nvGrpSpPr>
+        <p:cNvPr id="1" name=""/>
+        <p:cNvGrpSpPr/>
+        <p:nvPr/>
+      </p:nvGrpSpPr>
+      <p:grpSpPr/>
+      <p:sp>
+        <p:nvSpPr>
+          <p:cNvPr id="2" name="Text 0"/>
+          <p:cNvSpPr/>
+          <p:nvPr/>
+        </p:nvSpPr>
+        <p:spPr>
+          <a:xfrm>
+            <a:off x="566928" y="329184"/>
+            <a:ext cx="10515600" cy="310896"/>
+          </a:xfrm>
+          <a:prstGeom prst="rect">
+            <a:avLst/>
+          </a:prstGeom>
+          <a:noFill/>
+          <a:ln/>
+        </p:spPr>
+        <p:txBody>
+          <a:bodyPr wrap="square" lIns="0" tIns="0" rIns="0" bIns="0" rtlCol="0" anchor="ctr"/>
+          <a:lstStyle/>
+          <a:p>
+            <a:pPr algn="l" indent="0" marL="0">
+              <a:buNone/>
+            </a:pPr>
+            <a:r>
+              <a:rPr lang="en-US" sz="1100" b="1" spc="150" kern="0" dirty="0">
+                <a:solidFill>
+                  <a:srgbClr val="00838F"/>
+                </a:solidFill>
+                <a:latin typeface="Calibri" pitchFamily="34" charset="0"/>
+                <a:ea typeface="Calibri" pitchFamily="34" charset="-122"/>
+                <a:cs typeface="Calibri" pitchFamily="34" charset="-120"/>
+              </a:rPr>
+              <a:t>MOLECULAR &amp; CYTOGENETICS   ·   BOARD REVIEW  ·  Q3</a:t>
+            </a:r>
+            <a:endParaRPr lang="en-US" sz="1100" dirty="0"/>
+          </a:p>
+        </p:txBody>
+      </p:sp>
+      <p:sp>
+        <p:nvSpPr>
+          <p:cNvPr id="3" name="Text 1"/>
+          <p:cNvSpPr/>
+          <p:nvPr/>
+        </p:nvSpPr>
+        <p:spPr>
+          <a:xfrm>
+            <a:off x="566928" y="713232"/>
+            <a:ext cx="11064240" cy="749808"/>
+          </a:xfrm>
+          <a:prstGeom prst="rect">
+            <a:avLst/>
+          </a:prstGeom>
+          <a:noFill/>
+          <a:ln/>
+        </p:spPr>
+        <p:txBody>
+          <a:bodyPr wrap="square" lIns="0" tIns="0" rIns="0" bIns="0" rtlCol="0" anchor="ctr"/>
+          <a:lstStyle/>
+          <a:p>
+            <a:pPr algn="l" indent="0" marL="0">
+              <a:buNone/>
+            </a:pPr>
+            <a:r>
+              <a:rPr lang="en-US" sz="2600" b="1" dirty="0">
+                <a:solidFill>
+                  <a:srgbClr val="0E3A5F"/>
+                </a:solidFill>
+                <a:latin typeface="Calibri" pitchFamily="34" charset="0"/>
+                <a:ea typeface="Calibri" pitchFamily="34" charset="-122"/>
+                <a:cs typeface="Calibri" pitchFamily="34" charset="-120"/>
+              </a:rPr>
+              <a:t>Board-Style Review</a:t>
+            </a:r>
+            <a:endParaRPr lang="en-US" sz="2600" dirty="0"/>
+          </a:p>
+        </p:txBody>
+      </p:sp>
+      <p:sp>
+        <p:nvSpPr>
+          <p:cNvPr id="4" name="Text 2"/>
+          <p:cNvSpPr/>
+          <p:nvPr/>
+        </p:nvSpPr>
+        <p:spPr>
+          <a:xfrm>
+            <a:off x="566928" y="1417320"/>
+            <a:ext cx="11057839" cy="914400"/>
+          </a:xfrm>
+          <a:prstGeom prst="rect">
+            <a:avLst/>
+          </a:prstGeom>
+          <a:noFill/>
+          <a:ln/>
+        </p:spPr>
+        <p:txBody>
+          <a:bodyPr wrap="square" lIns="0" tIns="0" rIns="0" bIns="0" rtlCol="0" anchor="t"/>
+          <a:lstStyle/>
+          <a:p>
+            <a:pPr algn="l" indent="0" marL="0">
+              <a:lnSpc>
+                <a:spcPct val="105000"/>
+              </a:lnSpc>
+              <a:buNone/>
+            </a:pPr>
+            <a:r>
+              <a:rPr lang="en-US" sz="1450" b="1" dirty="0">
+                <a:solidFill>
+                  <a:srgbClr val="1B2A38"/>
+                </a:solidFill>
+                <a:latin typeface="Calibri" pitchFamily="34" charset="0"/>
+                <a:ea typeface="Calibri" pitchFamily="34" charset="-122"/>
+                <a:cs typeface="Calibri" pitchFamily="34" charset="-120"/>
+              </a:rPr>
+              <a:t>A high population frequency for a variant argues that it is:</a:t>
+            </a:r>
+            <a:endParaRPr lang="en-US" sz="1450" dirty="0"/>
+          </a:p>
+        </p:txBody>
+      </p:sp>
+      <p:sp>
+        <p:nvSpPr>
+          <p:cNvPr id="5" name="Text 3"/>
+          <p:cNvSpPr/>
+          <p:nvPr/>
+        </p:nvSpPr>
+        <p:spPr>
+          <a:xfrm>
+            <a:off x="658368" y="2395728"/>
+            <a:ext cx="6192390" cy="3017520"/>
+          </a:xfrm>
+          <a:prstGeom prst="rect">
+            <a:avLst/>
+          </a:prstGeom>
+          <a:noFill/>
+          <a:ln/>
+        </p:spPr>
+        <p:txBody>
+          <a:bodyPr wrap="square" lIns="0" tIns="0" rIns="0" bIns="0" rtlCol="0" anchor="t"/>
+          <a:lstStyle/>
+          <a:p>
+            <a:pPr algn="l" indent="0" marL="0">
+              <a:spcAft>
+                <a:spcPts val="600"/>
+              </a:spcAft>
+              <a:buNone/>
+            </a:pPr>
+            <a:r>
+              <a:rPr lang="en-US" sz="1350" dirty="0">
+                <a:solidFill>
+                  <a:srgbClr val="33444F"/>
+                </a:solidFill>
+                <a:latin typeface="Calibri" pitchFamily="34" charset="0"/>
+                <a:ea typeface="Calibri" pitchFamily="34" charset="-122"/>
+                <a:cs typeface="Calibri" pitchFamily="34" charset="-120"/>
+              </a:rPr>
+              <a:t>A. Likely pathogenic</a:t>
+            </a:r>
+            <a:endParaRPr lang="en-US" sz="1350" dirty="0"/>
+          </a:p>
+          <a:p>
+            <a:pPr algn="l" indent="0" marL="0">
+              <a:spcAft>
+                <a:spcPts val="600"/>
+              </a:spcAft>
+              <a:buNone/>
+            </a:pPr>
+            <a:r>
+              <a:rPr lang="en-US" sz="1350" b="1" dirty="0">
+                <a:solidFill>
+                  <a:srgbClr val="005A63"/>
+                </a:solidFill>
+                <a:latin typeface="Calibri" pitchFamily="34" charset="0"/>
+                <a:ea typeface="Calibri" pitchFamily="34" charset="-122"/>
+                <a:cs typeface="Calibri" pitchFamily="34" charset="-120"/>
+              </a:rPr>
+              <a:t>B. Likely benign</a:t>
+            </a:r>
+            <a:endParaRPr lang="en-US" sz="1350" dirty="0"/>
+          </a:p>
+          <a:p>
+            <a:pPr algn="l" indent="0" marL="0">
+              <a:spcAft>
+                <a:spcPts val="600"/>
+              </a:spcAft>
+              <a:buNone/>
+            </a:pPr>
+            <a:r>
+              <a:rPr lang="en-US" sz="1350" dirty="0">
+                <a:solidFill>
+                  <a:srgbClr val="33444F"/>
+                </a:solidFill>
+                <a:latin typeface="Calibri" pitchFamily="34" charset="0"/>
+                <a:ea typeface="Calibri" pitchFamily="34" charset="-122"/>
+                <a:cs typeface="Calibri" pitchFamily="34" charset="-120"/>
+              </a:rPr>
+              <a:t>C. A VUS by default</a:t>
+            </a:r>
+            <a:endParaRPr lang="en-US" sz="1350" dirty="0"/>
+          </a:p>
+          <a:p>
+            <a:pPr algn="l" indent="0" marL="0">
+              <a:spcAft>
+                <a:spcPts val="600"/>
+              </a:spcAft>
+              <a:buNone/>
+            </a:pPr>
+            <a:r>
+              <a:rPr lang="en-US" sz="1350" dirty="0">
+                <a:solidFill>
+                  <a:srgbClr val="33444F"/>
+                </a:solidFill>
+                <a:latin typeface="Calibri" pitchFamily="34" charset="0"/>
+                <a:ea typeface="Calibri" pitchFamily="34" charset="-122"/>
+                <a:cs typeface="Calibri" pitchFamily="34" charset="-120"/>
+              </a:rPr>
+              <a:t>D. Somatic</a:t>
+            </a:r>
+            <a:endParaRPr lang="en-US" sz="1350" dirty="0"/>
+          </a:p>
+          <a:p>
+            <a:pPr algn="l" indent="0" marL="0">
+              <a:spcAft>
+                <a:spcPts val="600"/>
+              </a:spcAft>
+              <a:buNone/>
+            </a:pPr>
+            <a:r>
+              <a:rPr lang="en-US" sz="1350" dirty="0">
+                <a:solidFill>
+                  <a:srgbClr val="33444F"/>
+                </a:solidFill>
+                <a:latin typeface="Calibri" pitchFamily="34" charset="0"/>
+                <a:ea typeface="Calibri" pitchFamily="34" charset="-122"/>
+                <a:cs typeface="Calibri" pitchFamily="34" charset="-120"/>
+              </a:rPr>
+              <a:t>E. Untestable</a:t>
+            </a:r>
+            <a:endParaRPr lang="en-US" sz="1350" dirty="0"/>
+          </a:p>
+        </p:txBody>
+      </p:sp>
+      <p:sp>
+        <p:nvSpPr>
+          <p:cNvPr id="6" name="Shape 4"/>
+          <p:cNvSpPr/>
+          <p:nvPr/>
+        </p:nvSpPr>
+        <p:spPr>
+          <a:xfrm>
+            <a:off x="7201632" y="2395728"/>
+            <a:ext cx="4423136" cy="3246120"/>
+          </a:xfrm>
+          <a:prstGeom prst="roundRect">
+            <a:avLst>
+              <a:gd name="adj" fmla="val 2535"/>
+            </a:avLst>
+          </a:prstGeom>
+          <a:solidFill>
+            <a:srgbClr val="E0F2F4"/>
+          </a:solidFill>
+          <a:ln/>
+          <a:effectLst>
+            <a:outerShdw sx="100000" sy="100000" kx="0" ky="0" algn="bl" rotWithShape="0" blurRad="88900" dist="25400" dir="5400000">
+              <a:srgbClr val="22303C">
+                <a:alpha val="12000"/>
+              </a:srgbClr>
+            </a:outerShdw>
+          </a:effectLst>
+        </p:spPr>
+        <p:txBody>
+          <a:bodyPr/>
+          <a:p/>
+        </p:txBody>
+      </p:sp>
+      <p:sp>
+        <p:nvSpPr>
+          <p:cNvPr id="7" name="Text 5"/>
+          <p:cNvSpPr/>
+          <p:nvPr/>
+        </p:nvSpPr>
+        <p:spPr>
+          <a:xfrm>
+            <a:off x="7439376" y="2578608"/>
+            <a:ext cx="3965936" cy="457200"/>
+          </a:xfrm>
+          <a:prstGeom prst="rect">
+            <a:avLst/>
+          </a:prstGeom>
+          <a:noFill/>
+          <a:ln/>
+        </p:spPr>
+        <p:txBody>
+          <a:bodyPr wrap="square" lIns="0" tIns="0" rIns="0" bIns="0" rtlCol="0" anchor="ctr"/>
+          <a:lstStyle/>
+          <a:p>
+            <a:pPr indent="0" marL="0">
+              <a:buNone/>
+            </a:pPr>
+            <a:r>
+              <a:rPr lang="en-US" sz="1500" b="1" dirty="0">
+                <a:solidFill>
+                  <a:srgbClr val="00838F"/>
+                </a:solidFill>
+                <a:latin typeface="Calibri" pitchFamily="34" charset="0"/>
+                <a:ea typeface="Calibri" pitchFamily="34" charset="-122"/>
+                <a:cs typeface="Calibri" pitchFamily="34" charset="-120"/>
+              </a:rPr>
+              <a:t>ANSWER  </a:t>
+            </a:r>
+            <a:pPr indent="0" marL="0">
+              <a:buNone/>
+            </a:pPr>
+            <a:r>
+              <a:rPr lang="en-US" sz="1500" b="1" dirty="0">
+                <a:solidFill>
+                  <a:srgbClr val="1B2A38"/>
+                </a:solidFill>
+                <a:latin typeface="Calibri" pitchFamily="34" charset="0"/>
+                <a:ea typeface="Calibri" pitchFamily="34" charset="-122"/>
+                <a:cs typeface="Calibri" pitchFamily="34" charset="-120"/>
+              </a:rPr>
+              <a:t>B — Likely benign</a:t>
+            </a:r>
+            <a:endParaRPr lang="en-US" sz="1500" dirty="0"/>
+          </a:p>
+        </p:txBody>
+      </p:sp>
+      <p:sp>
+        <p:nvSpPr>
+          <p:cNvPr id="8" name="Text 6"/>
+          <p:cNvSpPr/>
+          <p:nvPr/>
+        </p:nvSpPr>
+        <p:spPr>
+          <a:xfrm>
+            <a:off x="7439376" y="3127248"/>
+            <a:ext cx="3947648" cy="2377440"/>
+          </a:xfrm>
+          <a:prstGeom prst="rect">
+            <a:avLst/>
+          </a:prstGeom>
+          <a:noFill/>
+          <a:ln/>
+        </p:spPr>
+        <p:txBody>
+          <a:bodyPr wrap="square" lIns="0" tIns="0" rIns="0" bIns="0" rtlCol="0" anchor="t"/>
+          <a:lstStyle/>
+          <a:p>
+            <a:pPr algn="l" indent="0" marL="0">
+              <a:lnSpc>
+                <a:spcPct val="108000"/>
+              </a:lnSpc>
+              <a:buNone/>
+            </a:pPr>
+            <a:r>
+              <a:rPr lang="en-US" sz="1250" dirty="0">
+                <a:solidFill>
+                  <a:srgbClr val="33444F"/>
+                </a:solidFill>
+                <a:latin typeface="Calibri" pitchFamily="34" charset="0"/>
+                <a:ea typeface="Calibri" pitchFamily="34" charset="-122"/>
+                <a:cs typeface="Calibri" pitchFamily="34" charset="-120"/>
+              </a:rPr>
+              <a:t>Variants common in the general population are unlikely to cause rare severe disease (stand-alone/strong benign evidence).</a:t>
+            </a:r>
+            <a:endParaRPr lang="en-US" sz="1250" dirty="0"/>
+          </a:p>
+        </p:txBody>
+      </p:sp>
+      <p:sp>
+        <p:nvSpPr>
+          <p:cNvPr id="9" name="Text 7"/>
+          <p:cNvSpPr/>
+          <p:nvPr/>
+        </p:nvSpPr>
+        <p:spPr>
+          <a:xfrm>
+            <a:off x="566928" y="6473952"/>
+            <a:ext cx="7772400" cy="274320"/>
+          </a:xfrm>
+          <a:prstGeom prst="rect">
+            <a:avLst/>
+          </a:prstGeom>
+          <a:noFill/>
+          <a:ln/>
+        </p:spPr>
+        <p:txBody>
+          <a:bodyPr wrap="square" lIns="0" tIns="0" rIns="0" bIns="0" rtlCol="0" anchor="ctr"/>
+          <a:lstStyle/>
+          <a:p>
+            <a:pPr algn="l" indent="0" marL="0">
+              <a:buNone/>
+            </a:pPr>
+            <a:r>
+              <a:rPr lang="en-US" sz="850" dirty="0">
+                <a:solidFill>
+                  <a:srgbClr val="9AA8B4"/>
+                </a:solidFill>
+                <a:latin typeface="Calibri" pitchFamily="34" charset="0"/>
+                <a:ea typeface="Calibri" pitchFamily="34" charset="-122"/>
+                <a:cs typeface="Calibri" pitchFamily="34" charset="-120"/>
+              </a:rPr>
+              <a:t>Makassed General Hospital  ·  Department of Laboratory Medicine</a:t>
+            </a:r>
+            <a:endParaRPr lang="en-US" sz="850" dirty="0"/>
+          </a:p>
+        </p:txBody>
+      </p:sp>
+      <p:sp>
+        <p:nvSpPr>
+          <p:cNvPr id="10" name="Text 8"/>
+          <p:cNvSpPr/>
+          <p:nvPr/>
+        </p:nvSpPr>
+        <p:spPr>
+          <a:xfrm>
+            <a:off x="9814255" y="6473952"/>
+            <a:ext cx="1828800" cy="274320"/>
+          </a:xfrm>
+          <a:prstGeom prst="rect">
+            <a:avLst/>
+          </a:prstGeom>
+          <a:noFill/>
+          <a:ln/>
+        </p:spPr>
+        <p:txBody>
+          <a:bodyPr wrap="square" lIns="0" tIns="0" rIns="0" bIns="0" rtlCol="0" anchor="ctr"/>
+          <a:lstStyle/>
+          <a:p>
+            <a:pPr algn="r" indent="0" marL="0">
+              <a:buNone/>
+            </a:pPr>
+            <a:r>
+              <a:rPr lang="en-US" sz="850" dirty="0">
+                <a:solidFill>
+                  <a:srgbClr val="9AA8B4"/>
+                </a:solidFill>
+                <a:latin typeface="Calibri" pitchFamily="34" charset="0"/>
+                <a:ea typeface="Calibri" pitchFamily="34" charset="-122"/>
+                <a:cs typeface="Calibri" pitchFamily="34" charset="-120"/>
+              </a:rPr>
+              <a:t>CP Lecture Series</a:t>
+            </a:r>
+            <a:pPr algn="r" indent="0" marL="0">
+              <a:buNone/>
+            </a:pPr>
+            <a:r>
+              <a:rPr lang="en-US" sz="850" dirty="0">
+                <a:solidFill>
+                  <a:srgbClr val="DCE4EC"/>
+                </a:solidFill>
+                <a:latin typeface="Calibri" pitchFamily="34" charset="0"/>
+                <a:ea typeface="Calibri" pitchFamily="34" charset="-122"/>
+                <a:cs typeface="Calibri" pitchFamily="34" charset="-120"/>
+              </a:rPr>
+              <a:t>   ·   </a:t>
+            </a:r>
+            <a:pPr algn="r" indent="0" marL="0">
+              <a:buNone/>
+            </a:pPr>
+            <a:r>
+              <a:rPr lang="en-US" sz="850" b="1" dirty="0">
+                <a:solidFill>
+                  <a:srgbClr val="00838F"/>
+                </a:solidFill>
+                <a:latin typeface="Calibri" pitchFamily="34" charset="0"/>
+                <a:ea typeface="Calibri" pitchFamily="34" charset="-122"/>
+                <a:cs typeface="Calibri" pitchFamily="34" charset="-120"/>
+              </a:rPr>
+              <a:t>19</a:t>
+            </a:r>
+            <a:endParaRPr lang="en-US" sz="850" dirty="0"/>
+          </a:p>
+        </p:txBody>
+      </p:sp>
+    </p:spTree>
+  </p:cSld>
+  <p:clrMapOvr>
+    <a:masterClrMapping/>
+  </p:clrMapOvr>
+</p:sld>
+</file>
+
+<file path=ppt/slides/slide28.xml><?xml version="1.0" encoding="utf-8"?>
+<p:sld xmlns:a="http://schemas.openxmlformats.org/drawingml/2006/main" xmlns:p="http://schemas.openxmlformats.org/presentationml/2006/main" xmlns:r="http://schemas.openxmlformats.org/officeDocument/2006/relationships">
+  <p:cSld>
+    <p:spTree>
+      <p:nvGrpSpPr>
+        <p:cNvPr id="1" name=""/>
+        <p:cNvGrpSpPr/>
+        <p:nvPr/>
+      </p:nvGrpSpPr>
+      <p:grpSpPr/>
+      <p:sp>
+        <p:nvSpPr>
+          <p:cNvPr id="2" name="Text 0"/>
+          <p:cNvSpPr/>
+          <p:nvPr/>
+        </p:nvSpPr>
+        <p:spPr>
+          <a:xfrm>
+            <a:off x="566928" y="329184"/>
+            <a:ext cx="10515600" cy="310896"/>
+          </a:xfrm>
+          <a:prstGeom prst="rect">
+            <a:avLst/>
+          </a:prstGeom>
+          <a:noFill/>
+          <a:ln/>
+        </p:spPr>
+        <p:txBody>
+          <a:bodyPr wrap="square" lIns="0" tIns="0" rIns="0" bIns="0" rtlCol="0" anchor="ctr"/>
+          <a:lstStyle/>
+          <a:p>
+            <a:pPr algn="l" indent="0" marL="0">
+              <a:buNone/>
+            </a:pPr>
+            <a:r>
+              <a:rPr lang="en-US" sz="1100" b="1" spc="150" kern="0" dirty="0">
+                <a:solidFill>
+                  <a:srgbClr val="00838F"/>
+                </a:solidFill>
+                <a:latin typeface="Calibri" pitchFamily="34" charset="0"/>
+                <a:ea typeface="Calibri" pitchFamily="34" charset="-122"/>
+                <a:cs typeface="Calibri" pitchFamily="34" charset="-120"/>
+              </a:rPr>
+              <a:t>MOLECULAR &amp; CYTOGENETICS   ·   BOARD REVIEW  ·  Q2</a:t>
+            </a:r>
+            <a:endParaRPr lang="en-US" sz="1100" dirty="0"/>
+          </a:p>
+        </p:txBody>
+      </p:sp>
+      <p:sp>
+        <p:nvSpPr>
+          <p:cNvPr id="3" name="Text 1"/>
+          <p:cNvSpPr/>
+          <p:nvPr/>
+        </p:nvSpPr>
+        <p:spPr>
+          <a:xfrm>
+            <a:off x="566928" y="713232"/>
+            <a:ext cx="11064240" cy="749808"/>
+          </a:xfrm>
+          <a:prstGeom prst="rect">
+            <a:avLst/>
+          </a:prstGeom>
+          <a:noFill/>
+          <a:ln/>
+        </p:spPr>
+        <p:txBody>
+          <a:bodyPr wrap="square" lIns="0" tIns="0" rIns="0" bIns="0" rtlCol="0" anchor="ctr"/>
+          <a:lstStyle/>
+          <a:p>
+            <a:pPr algn="l" indent="0" marL="0">
+              <a:buNone/>
+            </a:pPr>
+            <a:r>
+              <a:rPr lang="en-US" sz="2600" b="1" dirty="0">
+                <a:solidFill>
+                  <a:srgbClr val="0E3A5F"/>
+                </a:solidFill>
+                <a:latin typeface="Calibri" pitchFamily="34" charset="0"/>
+                <a:ea typeface="Calibri" pitchFamily="34" charset="-122"/>
+                <a:cs typeface="Calibri" pitchFamily="34" charset="-120"/>
+              </a:rPr>
+              <a:t>Board-Style Review</a:t>
+            </a:r>
+            <a:endParaRPr lang="en-US" sz="2600" dirty="0"/>
+          </a:p>
+        </p:txBody>
+      </p:sp>
+      <p:sp>
+        <p:nvSpPr>
+          <p:cNvPr id="4" name="Text 2"/>
+          <p:cNvSpPr/>
+          <p:nvPr/>
+        </p:nvSpPr>
+        <p:spPr>
+          <a:xfrm>
+            <a:off x="566928" y="1417320"/>
+            <a:ext cx="11057839" cy="914400"/>
+          </a:xfrm>
+          <a:prstGeom prst="rect">
+            <a:avLst/>
+          </a:prstGeom>
+          <a:noFill/>
+          <a:ln/>
+        </p:spPr>
+        <p:txBody>
+          <a:bodyPr wrap="square" lIns="0" tIns="0" rIns="0" bIns="0" rtlCol="0" anchor="t"/>
+          <a:lstStyle/>
+          <a:p>
+            <a:pPr algn="l" indent="0" marL="0">
+              <a:lnSpc>
+                <a:spcPct val="105000"/>
+              </a:lnSpc>
+              <a:buNone/>
+            </a:pPr>
+            <a:r>
+              <a:rPr lang="en-US" sz="1450" b="1" dirty="0">
+                <a:solidFill>
+                  <a:srgbClr val="1B2A38"/>
+                </a:solidFill>
+                <a:latin typeface="Calibri" pitchFamily="34" charset="0"/>
+                <a:ea typeface="Calibri" pitchFamily="34" charset="-122"/>
+                <a:cs typeface="Calibri" pitchFamily="34" charset="-120"/>
+              </a:rPr>
+              <a:t>In-silico (computational) prediction evidence is generally considered:</a:t>
+            </a:r>
+            <a:endParaRPr lang="en-US" sz="1450" dirty="0"/>
+          </a:p>
+        </p:txBody>
+      </p:sp>
+      <p:sp>
+        <p:nvSpPr>
+          <p:cNvPr id="5" name="Text 3"/>
+          <p:cNvSpPr/>
+          <p:nvPr/>
+        </p:nvSpPr>
+        <p:spPr>
+          <a:xfrm>
+            <a:off x="658368" y="2395728"/>
+            <a:ext cx="6192390" cy="3017520"/>
+          </a:xfrm>
+          <a:prstGeom prst="rect">
+            <a:avLst/>
+          </a:prstGeom>
+          <a:noFill/>
+          <a:ln/>
+        </p:spPr>
+        <p:txBody>
+          <a:bodyPr wrap="square" lIns="0" tIns="0" rIns="0" bIns="0" rtlCol="0" anchor="t"/>
+          <a:lstStyle/>
+          <a:p>
+            <a:pPr algn="l" indent="0" marL="0">
+              <a:spcAft>
+                <a:spcPts val="600"/>
+              </a:spcAft>
+              <a:buNone/>
+            </a:pPr>
+            <a:r>
+              <a:rPr lang="en-US" sz="1350" dirty="0">
+                <a:solidFill>
+                  <a:srgbClr val="33444F"/>
+                </a:solidFill>
+                <a:latin typeface="Calibri" pitchFamily="34" charset="0"/>
+                <a:ea typeface="Calibri" pitchFamily="34" charset="-122"/>
+                <a:cs typeface="Calibri" pitchFamily="34" charset="-120"/>
+              </a:rPr>
+              <a:t>A. Definitive on its own</a:t>
+            </a:r>
+            <a:endParaRPr lang="en-US" sz="1350" dirty="0"/>
+          </a:p>
+          <a:p>
+            <a:pPr algn="l" indent="0" marL="0">
+              <a:spcAft>
+                <a:spcPts val="600"/>
+              </a:spcAft>
+              <a:buNone/>
+            </a:pPr>
+            <a:r>
+              <a:rPr lang="en-US" sz="1350" b="1" dirty="0">
+                <a:solidFill>
+                  <a:srgbClr val="005A63"/>
+                </a:solidFill>
+                <a:latin typeface="Calibri" pitchFamily="34" charset="0"/>
+                <a:ea typeface="Calibri" pitchFamily="34" charset="-122"/>
+                <a:cs typeface="Calibri" pitchFamily="34" charset="-120"/>
+              </a:rPr>
+              <a:t>B. Supporting evidence only</a:t>
+            </a:r>
+            <a:endParaRPr lang="en-US" sz="1350" dirty="0"/>
+          </a:p>
+          <a:p>
+            <a:pPr algn="l" indent="0" marL="0">
+              <a:spcAft>
+                <a:spcPts val="600"/>
+              </a:spcAft>
+              <a:buNone/>
+            </a:pPr>
+            <a:r>
+              <a:rPr lang="en-US" sz="1350" dirty="0">
+                <a:solidFill>
+                  <a:srgbClr val="33444F"/>
+                </a:solidFill>
+                <a:latin typeface="Calibri" pitchFamily="34" charset="0"/>
+                <a:ea typeface="Calibri" pitchFamily="34" charset="-122"/>
+                <a:cs typeface="Calibri" pitchFamily="34" charset="-120"/>
+              </a:rPr>
+              <a:t>C. Stronger than functional data</a:t>
+            </a:r>
+            <a:endParaRPr lang="en-US" sz="1350" dirty="0"/>
+          </a:p>
+          <a:p>
+            <a:pPr algn="l" indent="0" marL="0">
+              <a:spcAft>
+                <a:spcPts val="600"/>
+              </a:spcAft>
+              <a:buNone/>
+            </a:pPr>
+            <a:r>
+              <a:rPr lang="en-US" sz="1350" dirty="0">
+                <a:solidFill>
+                  <a:srgbClr val="33444F"/>
+                </a:solidFill>
+                <a:latin typeface="Calibri" pitchFamily="34" charset="0"/>
+                <a:ea typeface="Calibri" pitchFamily="34" charset="-122"/>
+                <a:cs typeface="Calibri" pitchFamily="34" charset="-120"/>
+              </a:rPr>
+              <a:t>D. Irrelevant</a:t>
+            </a:r>
+            <a:endParaRPr lang="en-US" sz="1350" dirty="0"/>
+          </a:p>
+          <a:p>
+            <a:pPr algn="l" indent="0" marL="0">
+              <a:spcAft>
+                <a:spcPts val="600"/>
+              </a:spcAft>
+              <a:buNone/>
+            </a:pPr>
+            <a:r>
+              <a:rPr lang="en-US" sz="1350" dirty="0">
+                <a:solidFill>
+                  <a:srgbClr val="33444F"/>
+                </a:solidFill>
+                <a:latin typeface="Calibri" pitchFamily="34" charset="0"/>
+                <a:ea typeface="Calibri" pitchFamily="34" charset="-122"/>
+                <a:cs typeface="Calibri" pitchFamily="34" charset="-120"/>
+              </a:rPr>
+              <a:t>E. Sufficient for pathogenic</a:t>
+            </a:r>
+            <a:endParaRPr lang="en-US" sz="1350" dirty="0"/>
+          </a:p>
+        </p:txBody>
+      </p:sp>
+      <p:sp>
+        <p:nvSpPr>
+          <p:cNvPr id="6" name="Shape 4"/>
+          <p:cNvSpPr/>
+          <p:nvPr/>
+        </p:nvSpPr>
+        <p:spPr>
+          <a:xfrm>
+            <a:off x="7201632" y="2395728"/>
+            <a:ext cx="4423136" cy="3246120"/>
+          </a:xfrm>
+          <a:prstGeom prst="roundRect">
+            <a:avLst>
+              <a:gd name="adj" fmla="val 2535"/>
+            </a:avLst>
+          </a:prstGeom>
+          <a:solidFill>
+            <a:srgbClr val="E0F2F4"/>
+          </a:solidFill>
+          <a:ln/>
+          <a:effectLst>
+            <a:outerShdw sx="100000" sy="100000" kx="0" ky="0" algn="bl" rotWithShape="0" blurRad="88900" dist="25400" dir="5400000">
+              <a:srgbClr val="22303C">
+                <a:alpha val="12000"/>
+              </a:srgbClr>
+            </a:outerShdw>
+          </a:effectLst>
+        </p:spPr>
+        <p:txBody>
+          <a:bodyPr/>
+          <a:p/>
+        </p:txBody>
+      </p:sp>
+      <p:sp>
+        <p:nvSpPr>
+          <p:cNvPr id="7" name="Text 5"/>
+          <p:cNvSpPr/>
+          <p:nvPr/>
+        </p:nvSpPr>
+        <p:spPr>
+          <a:xfrm>
+            <a:off x="7439376" y="2578608"/>
+            <a:ext cx="3965936" cy="457200"/>
+          </a:xfrm>
+          <a:prstGeom prst="rect">
+            <a:avLst/>
+          </a:prstGeom>
+          <a:noFill/>
+          <a:ln/>
+        </p:spPr>
+        <p:txBody>
+          <a:bodyPr wrap="square" lIns="0" tIns="0" rIns="0" bIns="0" rtlCol="0" anchor="ctr"/>
+          <a:lstStyle/>
+          <a:p>
+            <a:pPr indent="0" marL="0">
+              <a:buNone/>
+            </a:pPr>
+            <a:r>
+              <a:rPr lang="en-US" sz="1500" b="1" dirty="0">
+                <a:solidFill>
+                  <a:srgbClr val="00838F"/>
+                </a:solidFill>
+                <a:latin typeface="Calibri" pitchFamily="34" charset="0"/>
+                <a:ea typeface="Calibri" pitchFamily="34" charset="-122"/>
+                <a:cs typeface="Calibri" pitchFamily="34" charset="-120"/>
+              </a:rPr>
+              <a:t>ANSWER  </a:t>
+            </a:r>
+            <a:pPr indent="0" marL="0">
+              <a:buNone/>
+            </a:pPr>
+            <a:r>
+              <a:rPr lang="en-US" sz="1500" b="1" dirty="0">
+                <a:solidFill>
+                  <a:srgbClr val="1B2A38"/>
+                </a:solidFill>
+                <a:latin typeface="Calibri" pitchFamily="34" charset="0"/>
+                <a:ea typeface="Calibri" pitchFamily="34" charset="-122"/>
+                <a:cs typeface="Calibri" pitchFamily="34" charset="-120"/>
+              </a:rPr>
+              <a:t>B — Supporting evidence only</a:t>
+            </a:r>
+            <a:endParaRPr lang="en-US" sz="1500" dirty="0"/>
+          </a:p>
+        </p:txBody>
+      </p:sp>
+      <p:sp>
+        <p:nvSpPr>
+          <p:cNvPr id="8" name="Text 6"/>
+          <p:cNvSpPr/>
+          <p:nvPr/>
+        </p:nvSpPr>
+        <p:spPr>
+          <a:xfrm>
+            <a:off x="7439376" y="3127248"/>
+            <a:ext cx="3947648" cy="2377440"/>
+          </a:xfrm>
+          <a:prstGeom prst="rect">
+            <a:avLst/>
+          </a:prstGeom>
+          <a:noFill/>
+          <a:ln/>
+        </p:spPr>
+        <p:txBody>
+          <a:bodyPr wrap="square" lIns="0" tIns="0" rIns="0" bIns="0" rtlCol="0" anchor="t"/>
+          <a:lstStyle/>
+          <a:p>
+            <a:pPr algn="l" indent="0" marL="0">
+              <a:lnSpc>
+                <a:spcPct val="108000"/>
+              </a:lnSpc>
+              <a:buNone/>
+            </a:pPr>
+            <a:r>
+              <a:rPr lang="en-US" sz="1250" dirty="0">
+                <a:solidFill>
+                  <a:srgbClr val="33444F"/>
+                </a:solidFill>
+                <a:latin typeface="Calibri" pitchFamily="34" charset="0"/>
+                <a:ea typeface="Calibri" pitchFamily="34" charset="-122"/>
+                <a:cs typeface="Calibri" pitchFamily="34" charset="-120"/>
+              </a:rPr>
+              <a:t>Computational predictions provide supporting evidence; they are not standalone proof of pathogenicity.</a:t>
+            </a:r>
+            <a:endParaRPr lang="en-US" sz="1250" dirty="0"/>
+          </a:p>
+        </p:txBody>
+      </p:sp>
+      <p:sp>
+        <p:nvSpPr>
+          <p:cNvPr id="9" name="Text 7"/>
+          <p:cNvSpPr/>
+          <p:nvPr/>
+        </p:nvSpPr>
+        <p:spPr>
+          <a:xfrm>
+            <a:off x="566928" y="6473952"/>
+            <a:ext cx="7772400" cy="274320"/>
+          </a:xfrm>
+          <a:prstGeom prst="rect">
+            <a:avLst/>
+          </a:prstGeom>
+          <a:noFill/>
+          <a:ln/>
+        </p:spPr>
+        <p:txBody>
+          <a:bodyPr wrap="square" lIns="0" tIns="0" rIns="0" bIns="0" rtlCol="0" anchor="ctr"/>
+          <a:lstStyle/>
+          <a:p>
+            <a:pPr algn="l" indent="0" marL="0">
+              <a:buNone/>
+            </a:pPr>
+            <a:r>
+              <a:rPr lang="en-US" sz="850" dirty="0">
+                <a:solidFill>
+                  <a:srgbClr val="9AA8B4"/>
+                </a:solidFill>
+                <a:latin typeface="Calibri" pitchFamily="34" charset="0"/>
+                <a:ea typeface="Calibri" pitchFamily="34" charset="-122"/>
+                <a:cs typeface="Calibri" pitchFamily="34" charset="-120"/>
+              </a:rPr>
+              <a:t>Makassed General Hospital  ·  Department of Laboratory Medicine</a:t>
+            </a:r>
+            <a:endParaRPr lang="en-US" sz="850" dirty="0"/>
+          </a:p>
+        </p:txBody>
+      </p:sp>
+      <p:sp>
+        <p:nvSpPr>
+          <p:cNvPr id="10" name="Text 8"/>
+          <p:cNvSpPr/>
+          <p:nvPr/>
+        </p:nvSpPr>
+        <p:spPr>
+          <a:xfrm>
+            <a:off x="9814255" y="6473952"/>
+            <a:ext cx="1828800" cy="274320"/>
+          </a:xfrm>
+          <a:prstGeom prst="rect">
+            <a:avLst/>
+          </a:prstGeom>
+          <a:noFill/>
+          <a:ln/>
+        </p:spPr>
+        <p:txBody>
+          <a:bodyPr wrap="square" lIns="0" tIns="0" rIns="0" bIns="0" rtlCol="0" anchor="ctr"/>
+          <a:lstStyle/>
+          <a:p>
+            <a:pPr algn="r" indent="0" marL="0">
+              <a:buNone/>
+            </a:pPr>
+            <a:r>
+              <a:rPr lang="en-US" sz="850" dirty="0">
+                <a:solidFill>
+                  <a:srgbClr val="9AA8B4"/>
+                </a:solidFill>
+                <a:latin typeface="Calibri" pitchFamily="34" charset="0"/>
+                <a:ea typeface="Calibri" pitchFamily="34" charset="-122"/>
+                <a:cs typeface="Calibri" pitchFamily="34" charset="-120"/>
+              </a:rPr>
+              <a:t>CP Lecture Series</a:t>
+            </a:r>
+            <a:pPr algn="r" indent="0" marL="0">
+              <a:buNone/>
+            </a:pPr>
+            <a:r>
+              <a:rPr lang="en-US" sz="850" dirty="0">
+                <a:solidFill>
+                  <a:srgbClr val="DCE4EC"/>
+                </a:solidFill>
+                <a:latin typeface="Calibri" pitchFamily="34" charset="0"/>
+                <a:ea typeface="Calibri" pitchFamily="34" charset="-122"/>
+                <a:cs typeface="Calibri" pitchFamily="34" charset="-120"/>
+              </a:rPr>
+              <a:t>   ·   </a:t>
+            </a:r>
+            <a:pPr algn="r" indent="0" marL="0">
+              <a:buNone/>
+            </a:pPr>
+            <a:r>
+              <a:rPr lang="en-US" sz="850" b="1" dirty="0">
+                <a:solidFill>
+                  <a:srgbClr val="00838F"/>
+                </a:solidFill>
+                <a:latin typeface="Calibri" pitchFamily="34" charset="0"/>
+                <a:ea typeface="Calibri" pitchFamily="34" charset="-122"/>
+                <a:cs typeface="Calibri" pitchFamily="34" charset="-120"/>
+              </a:rPr>
+              <a:t>18</a:t>
+            </a:r>
+            <a:endParaRPr lang="en-US" sz="850" dirty="0"/>
+          </a:p>
+        </p:txBody>
+      </p:sp>
+    </p:spTree>
+  </p:cSld>
+  <p:clrMapOvr>
+    <a:masterClrMapping/>
+  </p:clrMapOvr>
+</p:sld>
+</file>
+
+<file path=ppt/slides/slide29.xml><?xml version="1.0" encoding="utf-8"?>
+<p:sld xmlns:a="http://schemas.openxmlformats.org/drawingml/2006/main" xmlns:p="http://schemas.openxmlformats.org/presentationml/2006/main" xmlns:r="http://schemas.openxmlformats.org/officeDocument/2006/relationships">
+  <p:cSld>
+    <p:spTree>
+      <p:nvGrpSpPr>
+        <p:cNvPr id="1" name=""/>
+        <p:cNvGrpSpPr/>
+        <p:nvPr/>
+      </p:nvGrpSpPr>
+      <p:grpSpPr/>
+      <p:sp>
+        <p:nvSpPr>
+          <p:cNvPr id="2" name="Text 0"/>
+          <p:cNvSpPr/>
+          <p:nvPr/>
+        </p:nvSpPr>
+        <p:spPr>
+          <a:xfrm>
+            <a:off x="566928" y="329184"/>
+            <a:ext cx="10515600" cy="310896"/>
+          </a:xfrm>
+          <a:prstGeom prst="rect">
+            <a:avLst/>
+          </a:prstGeom>
+          <a:noFill/>
+          <a:ln/>
+        </p:spPr>
+        <p:txBody>
+          <a:bodyPr wrap="square" lIns="0" tIns="0" rIns="0" bIns="0" rtlCol="0" anchor="ctr"/>
+          <a:lstStyle/>
+          <a:p>
+            <a:pPr algn="l" indent="0" marL="0">
+              <a:buNone/>
+            </a:pPr>
+            <a:r>
+              <a:rPr lang="en-US" sz="1100" b="1" spc="150" kern="0" dirty="0">
+                <a:solidFill>
+                  <a:srgbClr val="00838F"/>
+                </a:solidFill>
+                <a:latin typeface="Calibri" pitchFamily="34" charset="0"/>
+                <a:ea typeface="Calibri" pitchFamily="34" charset="-122"/>
+                <a:cs typeface="Calibri" pitchFamily="34" charset="-120"/>
+              </a:rPr>
+              <a:t>MOLECULAR &amp; CYTOGENETICS   ·   BOARD REVIEW  ·  Q1</a:t>
+            </a:r>
+            <a:endParaRPr lang="en-US" sz="1100" dirty="0"/>
+          </a:p>
+        </p:txBody>
+      </p:sp>
+      <p:sp>
+        <p:nvSpPr>
+          <p:cNvPr id="3" name="Text 1"/>
+          <p:cNvSpPr/>
+          <p:nvPr/>
+        </p:nvSpPr>
+        <p:spPr>
+          <a:xfrm>
+            <a:off x="566928" y="713232"/>
+            <a:ext cx="11064240" cy="749808"/>
+          </a:xfrm>
+          <a:prstGeom prst="rect">
+            <a:avLst/>
+          </a:prstGeom>
+          <a:noFill/>
+          <a:ln/>
+        </p:spPr>
+        <p:txBody>
+          <a:bodyPr wrap="square" lIns="0" tIns="0" rIns="0" bIns="0" rtlCol="0" anchor="ctr"/>
+          <a:lstStyle/>
+          <a:p>
+            <a:pPr algn="l" indent="0" marL="0">
+              <a:buNone/>
+            </a:pPr>
+            <a:r>
+              <a:rPr lang="en-US" sz="2600" b="1" dirty="0">
+                <a:solidFill>
+                  <a:srgbClr val="0E3A5F"/>
+                </a:solidFill>
+                <a:latin typeface="Calibri" pitchFamily="34" charset="0"/>
+                <a:ea typeface="Calibri" pitchFamily="34" charset="-122"/>
+                <a:cs typeface="Calibri" pitchFamily="34" charset="-120"/>
+              </a:rPr>
+              <a:t>Board-Style Review</a:t>
+            </a:r>
+            <a:endParaRPr lang="en-US" sz="2600" dirty="0"/>
+          </a:p>
+        </p:txBody>
+      </p:sp>
+      <p:sp>
+        <p:nvSpPr>
+          <p:cNvPr id="4" name="Text 2"/>
+          <p:cNvSpPr/>
+          <p:nvPr/>
+        </p:nvSpPr>
+        <p:spPr>
+          <a:xfrm>
+            <a:off x="566928" y="1417320"/>
+            <a:ext cx="11057839" cy="914400"/>
+          </a:xfrm>
+          <a:prstGeom prst="rect">
+            <a:avLst/>
+          </a:prstGeom>
+          <a:noFill/>
+          <a:ln/>
+        </p:spPr>
+        <p:txBody>
+          <a:bodyPr wrap="square" lIns="0" tIns="0" rIns="0" bIns="0" rtlCol="0" anchor="t"/>
+          <a:lstStyle/>
+          <a:p>
+            <a:pPr algn="l" indent="0" marL="0">
+              <a:lnSpc>
+                <a:spcPct val="105000"/>
+              </a:lnSpc>
+              <a:buNone/>
+            </a:pPr>
+            <a:r>
+              <a:rPr lang="en-US" sz="1450" b="1" dirty="0">
+                <a:solidFill>
+                  <a:srgbClr val="1B2A38"/>
+                </a:solidFill>
+                <a:latin typeface="Calibri" pitchFamily="34" charset="0"/>
+                <a:ea typeface="Calibri" pitchFamily="34" charset="-122"/>
+                <a:cs typeface="Calibri" pitchFamily="34" charset="-120"/>
+              </a:rPr>
+              <a:t>A variant classified as VUS should be:</a:t>
+            </a:r>
+            <a:endParaRPr lang="en-US" sz="1450" dirty="0"/>
+          </a:p>
+        </p:txBody>
+      </p:sp>
+      <p:sp>
+        <p:nvSpPr>
+          <p:cNvPr id="5" name="Text 3"/>
+          <p:cNvSpPr/>
+          <p:nvPr/>
+        </p:nvSpPr>
+        <p:spPr>
+          <a:xfrm>
+            <a:off x="658368" y="2395728"/>
+            <a:ext cx="6192390" cy="3017520"/>
+          </a:xfrm>
+          <a:prstGeom prst="rect">
+            <a:avLst/>
+          </a:prstGeom>
+          <a:noFill/>
+          <a:ln/>
+        </p:spPr>
+        <p:txBody>
+          <a:bodyPr wrap="square" lIns="0" tIns="0" rIns="0" bIns="0" rtlCol="0" anchor="t"/>
+          <a:lstStyle/>
+          <a:p>
+            <a:pPr algn="l" indent="0" marL="0">
+              <a:spcAft>
+                <a:spcPts val="600"/>
+              </a:spcAft>
+              <a:buNone/>
+            </a:pPr>
+            <a:r>
+              <a:rPr lang="en-US" sz="1350" dirty="0">
+                <a:solidFill>
+                  <a:srgbClr val="33444F"/>
+                </a:solidFill>
+                <a:latin typeface="Calibri" pitchFamily="34" charset="0"/>
+                <a:ea typeface="Calibri" pitchFamily="34" charset="-122"/>
+                <a:cs typeface="Calibri" pitchFamily="34" charset="-120"/>
+              </a:rPr>
+              <a:t>A. Treated as pathogenic</a:t>
+            </a:r>
+            <a:endParaRPr lang="en-US" sz="1350" dirty="0"/>
+          </a:p>
+          <a:p>
+            <a:pPr algn="l" indent="0" marL="0">
+              <a:spcAft>
+                <a:spcPts val="600"/>
+              </a:spcAft>
+              <a:buNone/>
+            </a:pPr>
+            <a:r>
+              <a:rPr lang="en-US" sz="1350" dirty="0">
+                <a:solidFill>
+                  <a:srgbClr val="33444F"/>
+                </a:solidFill>
+                <a:latin typeface="Calibri" pitchFamily="34" charset="0"/>
+                <a:ea typeface="Calibri" pitchFamily="34" charset="-122"/>
+                <a:cs typeface="Calibri" pitchFamily="34" charset="-120"/>
+              </a:rPr>
+              <a:t>B. Treated as benign</a:t>
+            </a:r>
+            <a:endParaRPr lang="en-US" sz="1350" dirty="0"/>
+          </a:p>
+          <a:p>
+            <a:pPr algn="l" indent="0" marL="0">
+              <a:spcAft>
+                <a:spcPts val="600"/>
+              </a:spcAft>
+              <a:buNone/>
+            </a:pPr>
+            <a:r>
+              <a:rPr lang="en-US" sz="1350" b="1" dirty="0">
+                <a:solidFill>
+                  <a:srgbClr val="005A63"/>
+                </a:solidFill>
+                <a:latin typeface="Calibri" pitchFamily="34" charset="0"/>
+                <a:ea typeface="Calibri" pitchFamily="34" charset="-122"/>
+                <a:cs typeface="Calibri" pitchFamily="34" charset="-120"/>
+              </a:rPr>
+              <a:t>C. Not used to drive clinical action; reassessed over time</a:t>
+            </a:r>
+            <a:endParaRPr lang="en-US" sz="1350" dirty="0"/>
+          </a:p>
+          <a:p>
+            <a:pPr algn="l" indent="0" marL="0">
+              <a:spcAft>
+                <a:spcPts val="600"/>
+              </a:spcAft>
+              <a:buNone/>
+            </a:pPr>
+            <a:r>
+              <a:rPr lang="en-US" sz="1350" dirty="0">
+                <a:solidFill>
+                  <a:srgbClr val="33444F"/>
+                </a:solidFill>
+                <a:latin typeface="Calibri" pitchFamily="34" charset="0"/>
+                <a:ea typeface="Calibri" pitchFamily="34" charset="-122"/>
+                <a:cs typeface="Calibri" pitchFamily="34" charset="-120"/>
+              </a:rPr>
+              <a:t>D. Ignored entirely</a:t>
+            </a:r>
+            <a:endParaRPr lang="en-US" sz="1350" dirty="0"/>
+          </a:p>
+          <a:p>
+            <a:pPr algn="l" indent="0" marL="0">
+              <a:spcAft>
+                <a:spcPts val="600"/>
+              </a:spcAft>
+              <a:buNone/>
+            </a:pPr>
+            <a:r>
+              <a:rPr lang="en-US" sz="1350" dirty="0">
+                <a:solidFill>
+                  <a:srgbClr val="33444F"/>
+                </a:solidFill>
+                <a:latin typeface="Calibri" pitchFamily="34" charset="0"/>
+                <a:ea typeface="Calibri" pitchFamily="34" charset="-122"/>
+                <a:cs typeface="Calibri" pitchFamily="34" charset="-120"/>
+              </a:rPr>
+              <a:t>E. Reported as negative</a:t>
+            </a:r>
+            <a:endParaRPr lang="en-US" sz="1350" dirty="0"/>
+          </a:p>
+        </p:txBody>
+      </p:sp>
+      <p:sp>
+        <p:nvSpPr>
+          <p:cNvPr id="6" name="Shape 4"/>
+          <p:cNvSpPr/>
+          <p:nvPr/>
+        </p:nvSpPr>
+        <p:spPr>
+          <a:xfrm>
+            <a:off x="7201632" y="2395728"/>
+            <a:ext cx="4423136" cy="3246120"/>
+          </a:xfrm>
+          <a:prstGeom prst="roundRect">
+            <a:avLst>
+              <a:gd name="adj" fmla="val 2535"/>
+            </a:avLst>
+          </a:prstGeom>
+          <a:solidFill>
+            <a:srgbClr val="E0F2F4"/>
+          </a:solidFill>
+          <a:ln/>
+          <a:effectLst>
+            <a:outerShdw sx="100000" sy="100000" kx="0" ky="0" algn="bl" rotWithShape="0" blurRad="88900" dist="25400" dir="5400000">
+              <a:srgbClr val="22303C">
+                <a:alpha val="12000"/>
+              </a:srgbClr>
+            </a:outerShdw>
+          </a:effectLst>
+        </p:spPr>
+        <p:txBody>
+          <a:bodyPr/>
+          <a:p/>
+        </p:txBody>
+      </p:sp>
+      <p:sp>
+        <p:nvSpPr>
+          <p:cNvPr id="7" name="Text 5"/>
+          <p:cNvSpPr/>
+          <p:nvPr/>
+        </p:nvSpPr>
+        <p:spPr>
+          <a:xfrm>
+            <a:off x="7439376" y="2578608"/>
+            <a:ext cx="3965936" cy="457200"/>
+          </a:xfrm>
+          <a:prstGeom prst="rect">
+            <a:avLst/>
+          </a:prstGeom>
+          <a:noFill/>
+          <a:ln/>
+        </p:spPr>
+        <p:txBody>
+          <a:bodyPr wrap="square" lIns="0" tIns="0" rIns="0" bIns="0" rtlCol="0" anchor="ctr"/>
+          <a:lstStyle/>
+          <a:p>
+            <a:pPr indent="0" marL="0">
+              <a:buNone/>
+            </a:pPr>
+            <a:r>
+              <a:rPr lang="en-US" sz="1500" b="1" dirty="0">
+                <a:solidFill>
+                  <a:srgbClr val="00838F"/>
+                </a:solidFill>
+                <a:latin typeface="Calibri" pitchFamily="34" charset="0"/>
+                <a:ea typeface="Calibri" pitchFamily="34" charset="-122"/>
+                <a:cs typeface="Calibri" pitchFamily="34" charset="-120"/>
+              </a:rPr>
+              <a:t>ANSWER  </a:t>
+            </a:r>
+            <a:pPr indent="0" marL="0">
+              <a:buNone/>
+            </a:pPr>
+            <a:r>
+              <a:rPr lang="en-US" sz="1500" b="1" dirty="0">
+                <a:solidFill>
+                  <a:srgbClr val="1B2A38"/>
+                </a:solidFill>
+                <a:latin typeface="Calibri" pitchFamily="34" charset="0"/>
+                <a:ea typeface="Calibri" pitchFamily="34" charset="-122"/>
+                <a:cs typeface="Calibri" pitchFamily="34" charset="-120"/>
+              </a:rPr>
+              <a:t>C — Not acted on; reassessed</a:t>
+            </a:r>
+            <a:endParaRPr lang="en-US" sz="1500" dirty="0"/>
+          </a:p>
+        </p:txBody>
+      </p:sp>
+      <p:sp>
+        <p:nvSpPr>
+          <p:cNvPr id="8" name="Text 6"/>
+          <p:cNvSpPr/>
+          <p:nvPr/>
+        </p:nvSpPr>
+        <p:spPr>
+          <a:xfrm>
+            <a:off x="7439376" y="3127248"/>
+            <a:ext cx="3947648" cy="2377440"/>
+          </a:xfrm>
+          <a:prstGeom prst="rect">
+            <a:avLst/>
+          </a:prstGeom>
+          <a:noFill/>
+          <a:ln/>
+        </p:spPr>
+        <p:txBody>
+          <a:bodyPr wrap="square" lIns="0" tIns="0" rIns="0" bIns="0" rtlCol="0" anchor="t"/>
+          <a:lstStyle/>
+          <a:p>
+            <a:pPr algn="l" indent="0" marL="0">
+              <a:lnSpc>
+                <a:spcPct val="108000"/>
+              </a:lnSpc>
+              <a:buNone/>
+            </a:pPr>
+            <a:r>
+              <a:rPr lang="en-US" sz="1250" dirty="0">
+                <a:solidFill>
+                  <a:srgbClr val="33444F"/>
+                </a:solidFill>
+                <a:latin typeface="Calibri" pitchFamily="34" charset="0"/>
+                <a:ea typeface="Calibri" pitchFamily="34" charset="-122"/>
+                <a:cs typeface="Calibri" pitchFamily="34" charset="-120"/>
+              </a:rPr>
+              <a:t>VUS means uncertain significance; it should not guide management and may be reclassified as evidence accrues.</a:t>
+            </a:r>
+            <a:endParaRPr lang="en-US" sz="1250" dirty="0"/>
+          </a:p>
+        </p:txBody>
+      </p:sp>
+      <p:sp>
+        <p:nvSpPr>
+          <p:cNvPr id="9" name="Text 7"/>
+          <p:cNvSpPr/>
+          <p:nvPr/>
+        </p:nvSpPr>
+        <p:spPr>
+          <a:xfrm>
+            <a:off x="566928" y="6473952"/>
+            <a:ext cx="7772400" cy="274320"/>
+          </a:xfrm>
+          <a:prstGeom prst="rect">
+            <a:avLst/>
+          </a:prstGeom>
+          <a:noFill/>
+          <a:ln/>
+        </p:spPr>
+        <p:txBody>
+          <a:bodyPr wrap="square" lIns="0" tIns="0" rIns="0" bIns="0" rtlCol="0" anchor="ctr"/>
+          <a:lstStyle/>
+          <a:p>
+            <a:pPr algn="l" indent="0" marL="0">
+              <a:buNone/>
+            </a:pPr>
+            <a:r>
+              <a:rPr lang="en-US" sz="850" dirty="0">
+                <a:solidFill>
+                  <a:srgbClr val="9AA8B4"/>
+                </a:solidFill>
+                <a:latin typeface="Calibri" pitchFamily="34" charset="0"/>
+                <a:ea typeface="Calibri" pitchFamily="34" charset="-122"/>
+                <a:cs typeface="Calibri" pitchFamily="34" charset="-120"/>
+              </a:rPr>
+              <a:t>Makassed General Hospital  ·  Department of Laboratory Medicine</a:t>
+            </a:r>
+            <a:endParaRPr lang="en-US" sz="850" dirty="0"/>
+          </a:p>
+        </p:txBody>
+      </p:sp>
+      <p:sp>
+        <p:nvSpPr>
+          <p:cNvPr id="10" name="Text 8"/>
+          <p:cNvSpPr/>
+          <p:nvPr/>
+        </p:nvSpPr>
+        <p:spPr>
+          <a:xfrm>
+            <a:off x="9814255" y="6473952"/>
+            <a:ext cx="1828800" cy="274320"/>
+          </a:xfrm>
+          <a:prstGeom prst="rect">
+            <a:avLst/>
+          </a:prstGeom>
+          <a:noFill/>
+          <a:ln/>
+        </p:spPr>
+        <p:txBody>
+          <a:bodyPr wrap="square" lIns="0" tIns="0" rIns="0" bIns="0" rtlCol="0" anchor="ctr"/>
+          <a:lstStyle/>
+          <a:p>
+            <a:pPr algn="r" indent="0" marL="0">
+              <a:buNone/>
+            </a:pPr>
+            <a:r>
+              <a:rPr lang="en-US" sz="850" dirty="0">
+                <a:solidFill>
+                  <a:srgbClr val="9AA8B4"/>
+                </a:solidFill>
+                <a:latin typeface="Calibri" pitchFamily="34" charset="0"/>
+                <a:ea typeface="Calibri" pitchFamily="34" charset="-122"/>
+                <a:cs typeface="Calibri" pitchFamily="34" charset="-120"/>
+              </a:rPr>
+              <a:t>CP Lecture Series</a:t>
+            </a:r>
+            <a:pPr algn="r" indent="0" marL="0">
+              <a:buNone/>
+            </a:pPr>
+            <a:r>
+              <a:rPr lang="en-US" sz="850" dirty="0">
+                <a:solidFill>
+                  <a:srgbClr val="DCE4EC"/>
+                </a:solidFill>
+                <a:latin typeface="Calibri" pitchFamily="34" charset="0"/>
+                <a:ea typeface="Calibri" pitchFamily="34" charset="-122"/>
+                <a:cs typeface="Calibri" pitchFamily="34" charset="-120"/>
+              </a:rPr>
+              <a:t>   ·   </a:t>
+            </a:r>
+            <a:pPr algn="r" indent="0" marL="0">
+              <a:buNone/>
+            </a:pPr>
+            <a:r>
+              <a:rPr lang="en-US" sz="850" b="1" dirty="0">
+                <a:solidFill>
+                  <a:srgbClr val="00838F"/>
+                </a:solidFill>
+                <a:latin typeface="Calibri" pitchFamily="34" charset="0"/>
+                <a:ea typeface="Calibri" pitchFamily="34" charset="-122"/>
+                <a:cs typeface="Calibri" pitchFamily="34" charset="-120"/>
+              </a:rPr>
+              <a:t>17</a:t>
+            </a:r>
+            <a:endParaRPr lang="en-US" sz="850" dirty="0"/>
+          </a:p>
+        </p:txBody>
+      </p:sp>
+    </p:spTree>
+  </p:cSld>
+  <p:clrMapOvr>
+    <a:masterClrMapping/>
+  </p:clrMapOvr>
+</p:sld>
+</file>
+
 <file path=ppt/slides/slide3.xml><?xml version="1.0" encoding="utf-8"?>
 <p:sld xmlns:a="http://schemas.openxmlformats.org/drawingml/2006/main" xmlns:r="http://schemas.openxmlformats.org/officeDocument/2006/relationships" xmlns:p="http://schemas.openxmlformats.org/presentationml/2006/main">
   <p:cSld name="Slide 3">
@@ -12760,6 +14376,10 @@
             </a:outerShdw>
           </a:effectLst>
         </p:spPr>
+        <p:txBody>
+          <a:bodyPr/>
+          <a:p/>
+        </p:txBody>
       </p:sp>
       <p:sp>
         <p:nvSpPr>
@@ -12787,6 +14407,10 @@
             </a:outerShdw>
           </a:effectLst>
         </p:spPr>
+        <p:txBody>
+          <a:bodyPr/>
+          <a:p/>
+        </p:txBody>
       </p:sp>
       <p:sp>
         <p:nvSpPr>
@@ -12894,6 +14518,10 @@
             </a:outerShdw>
           </a:effectLst>
         </p:spPr>
+        <p:txBody>
+          <a:bodyPr/>
+          <a:p/>
+        </p:txBody>
       </p:sp>
       <p:sp>
         <p:nvSpPr>
@@ -12921,6 +14549,10 @@
             </a:outerShdw>
           </a:effectLst>
         </p:spPr>
+        <p:txBody>
+          <a:bodyPr/>
+          <a:p/>
+        </p:txBody>
       </p:sp>
       <p:sp>
         <p:nvSpPr>
@@ -13028,6 +14660,10 @@
             </a:outerShdw>
           </a:effectLst>
         </p:spPr>
+        <p:txBody>
+          <a:bodyPr/>
+          <a:p/>
+        </p:txBody>
       </p:sp>
       <p:sp>
         <p:nvSpPr>
@@ -13055,6 +14691,10 @@
             </a:outerShdw>
           </a:effectLst>
         </p:spPr>
+        <p:txBody>
+          <a:bodyPr/>
+          <a:p/>
+        </p:txBody>
       </p:sp>
       <p:sp>
         <p:nvSpPr>
@@ -13162,6 +14802,10 @@
             </a:outerShdw>
           </a:effectLst>
         </p:spPr>
+        <p:txBody>
+          <a:bodyPr/>
+          <a:p/>
+        </p:txBody>
       </p:sp>
       <p:sp>
         <p:nvSpPr>
@@ -13189,6 +14833,10 @@
             </a:outerShdw>
           </a:effectLst>
         </p:spPr>
+        <p:txBody>
+          <a:bodyPr/>
+          <a:p/>
+        </p:txBody>
       </p:sp>
       <p:sp>
         <p:nvSpPr>
@@ -13296,6 +14944,10 @@
             </a:outerShdw>
           </a:effectLst>
         </p:spPr>
+        <p:txBody>
+          <a:bodyPr/>
+          <a:p/>
+        </p:txBody>
       </p:sp>
       <p:sp>
         <p:nvSpPr>
@@ -13323,6 +14975,10 @@
             </a:outerShdw>
           </a:effectLst>
         </p:spPr>
+        <p:txBody>
+          <a:bodyPr/>
+          <a:p/>
+        </p:txBody>
       </p:sp>
       <p:sp>
         <p:nvSpPr>
@@ -13430,6 +15086,10 @@
             </a:outerShdw>
           </a:effectLst>
         </p:spPr>
+        <p:txBody>
+          <a:bodyPr/>
+          <a:p/>
+        </p:txBody>
       </p:sp>
       <p:sp>
         <p:nvSpPr>
@@ -13457,6 +15117,10 @@
             </a:outerShdw>
           </a:effectLst>
         </p:spPr>
+        <p:txBody>
+          <a:bodyPr/>
+          <a:p/>
+        </p:txBody>
       </p:sp>
       <p:sp>
         <p:nvSpPr>
@@ -13780,6 +15444,10 @@
             </a:outerShdw>
           </a:effectLst>
         </p:spPr>
+        <p:txBody>
+          <a:bodyPr/>
+          <a:p/>
+        </p:txBody>
       </p:sp>
       <p:sp>
         <p:nvSpPr>
@@ -13807,6 +15475,10 @@
             </a:outerShdw>
           </a:effectLst>
         </p:spPr>
+        <p:txBody>
+          <a:bodyPr/>
+          <a:p/>
+        </p:txBody>
       </p:sp>
       <p:sp>
         <p:nvSpPr>
@@ -13921,6 +15593,10 @@
           </a:solidFill>
           <a:ln/>
         </p:spPr>
+        <p:txBody>
+          <a:bodyPr/>
+          <a:p/>
+        </p:txBody>
       </p:sp>
       <p:sp>
         <p:nvSpPr>
@@ -13948,6 +15624,10 @@
             </a:outerShdw>
           </a:effectLst>
         </p:spPr>
+        <p:txBody>
+          <a:bodyPr/>
+          <a:p/>
+        </p:txBody>
       </p:sp>
       <p:sp>
         <p:nvSpPr>
@@ -14069,6 +15749,10 @@
             </a:outerShdw>
           </a:effectLst>
         </p:spPr>
+        <p:txBody>
+          <a:bodyPr/>
+          <a:p/>
+        </p:txBody>
       </p:sp>
       <p:sp>
         <p:nvSpPr>
@@ -14096,6 +15780,10 @@
             </a:outerShdw>
           </a:effectLst>
         </p:spPr>
+        <p:txBody>
+          <a:bodyPr/>
+          <a:p/>
+        </p:txBody>
       </p:sp>
       <p:sp>
         <p:nvSpPr>
@@ -14210,6 +15898,10 @@
           </a:solidFill>
           <a:ln/>
         </p:spPr>
+        <p:txBody>
+          <a:bodyPr/>
+          <a:p/>
+        </p:txBody>
       </p:sp>
       <p:sp>
         <p:nvSpPr>
@@ -14237,6 +15929,10 @@
             </a:outerShdw>
           </a:effectLst>
         </p:spPr>
+        <p:txBody>
+          <a:bodyPr/>
+          <a:p/>
+        </p:txBody>
       </p:sp>
       <p:sp>
         <p:nvSpPr>
@@ -14358,6 +16054,10 @@
             </a:outerShdw>
           </a:effectLst>
         </p:spPr>
+        <p:txBody>
+          <a:bodyPr/>
+          <a:p/>
+        </p:txBody>
       </p:sp>
       <p:sp>
         <p:nvSpPr>
@@ -14385,6 +16085,10 @@
             </a:outerShdw>
           </a:effectLst>
         </p:spPr>
+        <p:txBody>
+          <a:bodyPr/>
+          <a:p/>
+        </p:txBody>
       </p:sp>
       <p:sp>
         <p:nvSpPr>
@@ -14623,6 +16327,10 @@
           </a:solidFill>
           <a:ln/>
         </p:spPr>
+        <p:txBody>
+          <a:bodyPr/>
+          <a:p/>
+        </p:txBody>
       </p:sp>
       <p:sp>
         <p:nvSpPr>
@@ -14645,6 +16353,10 @@
           </a:solidFill>
           <a:ln/>
         </p:spPr>
+        <p:txBody>
+          <a:bodyPr/>
+          <a:p/>
+        </p:txBody>
       </p:sp>
       <p:sp>
         <p:nvSpPr>
@@ -14906,6 +16618,10 @@
             </a:outerShdw>
           </a:effectLst>
         </p:spPr>
+        <p:txBody>
+          <a:bodyPr/>
+          <a:p/>
+        </p:txBody>
       </p:sp>
       <p:pic>
         <p:nvPicPr>
@@ -15214,6 +16930,10 @@
             </a:outerShdw>
           </a:effectLst>
         </p:spPr>
+        <p:txBody>
+          <a:bodyPr/>
+          <a:p/>
+        </p:txBody>
       </p:sp>
       <p:sp>
         <p:nvSpPr>
@@ -15388,6 +17108,10 @@
             </a:outerShdw>
           </a:effectLst>
         </p:spPr>
+        <p:txBody>
+          <a:bodyPr/>
+          <a:p/>
+        </p:txBody>
       </p:sp>
       <p:sp>
         <p:nvSpPr>
@@ -15778,6 +17502,10 @@
             </a:outerShdw>
           </a:effectLst>
         </p:spPr>
+        <p:txBody>
+          <a:bodyPr/>
+          <a:p/>
+        </p:txBody>
       </p:sp>
       <p:sp>
         <p:nvSpPr>
@@ -15952,6 +17680,10 @@
             </a:outerShdw>
           </a:effectLst>
         </p:spPr>
+        <p:txBody>
+          <a:bodyPr/>
+          <a:p/>
+        </p:txBody>
       </p:sp>
       <p:sp>
         <p:nvSpPr>
@@ -16257,6 +17989,10 @@
           </a:solidFill>
           <a:ln/>
         </p:spPr>
+        <p:txBody>
+          <a:bodyPr/>
+          <a:p/>
+        </p:txBody>
       </p:sp>
       <p:sp>
         <p:nvSpPr>
@@ -16279,6 +18015,10 @@
           </a:solidFill>
           <a:ln/>
         </p:spPr>
+        <p:txBody>
+          <a:bodyPr/>
+          <a:p/>
+        </p:txBody>
       </p:sp>
       <p:sp>
         <p:nvSpPr>
